--- a/Materjalid/Day3 M Visuaalid Andmelugu/3-paev-andmetarkus-esitlus.pptx
+++ b/Materjalid/Day3 M Visuaalid Andmelugu/3-paev-andmetarkus-esitlus.pptx
@@ -5,10 +5,10 @@
     <p:sldMasterId id="2147483648" r:id="rId4"/>
   </p:sldMasterIdLst>
   <p:notesMasterIdLst>
-    <p:notesMasterId r:id="rId28"/>
+    <p:notesMasterId r:id="rId31"/>
   </p:notesMasterIdLst>
   <p:handoutMasterIdLst>
-    <p:handoutMasterId r:id="rId29"/>
+    <p:handoutMasterId r:id="rId32"/>
   </p:handoutMasterIdLst>
   <p:sldIdLst>
     <p:sldId id="417" r:id="rId5"/>
@@ -29,30 +29,33 @@
     <p:sldId id="484" r:id="rId20"/>
     <p:sldId id="635" r:id="rId21"/>
     <p:sldId id="588" r:id="rId22"/>
-    <p:sldId id="460" r:id="rId23"/>
-    <p:sldId id="461" r:id="rId24"/>
-    <p:sldId id="581" r:id="rId25"/>
-    <p:sldId id="503" r:id="rId26"/>
-    <p:sldId id="642" r:id="rId27"/>
+    <p:sldId id="666" r:id="rId23"/>
+    <p:sldId id="667" r:id="rId24"/>
+    <p:sldId id="668" r:id="rId25"/>
+    <p:sldId id="460" r:id="rId26"/>
+    <p:sldId id="461" r:id="rId27"/>
+    <p:sldId id="581" r:id="rId28"/>
+    <p:sldId id="503" r:id="rId29"/>
+    <p:sldId id="642" r:id="rId30"/>
   </p:sldIdLst>
   <p:sldSz cx="12192000" cy="6858000"/>
   <p:notesSz cx="6858000" cy="9144000"/>
   <p:embeddedFontLst>
     <p:embeddedFont>
       <p:font typeface="Inter" panose="020B0604020202020204" charset="0"/>
-      <p:regular r:id="rId30"/>
-      <p:bold r:id="rId31"/>
-      <p:italic r:id="rId32"/>
-      <p:boldItalic r:id="rId33"/>
+      <p:regular r:id="rId33"/>
+      <p:bold r:id="rId34"/>
+      <p:italic r:id="rId35"/>
+      <p:boldItalic r:id="rId36"/>
     </p:embeddedFont>
     <p:embeddedFont>
       <p:font typeface="Inter Bold" panose="020B0604020202020204" charset="0"/>
-      <p:bold r:id="rId34"/>
+      <p:bold r:id="rId37"/>
     </p:embeddedFont>
     <p:embeddedFont>
       <p:font typeface="Poppins SemiBold" panose="00000700000000000000" pitchFamily="2" charset="-70"/>
-      <p:bold r:id="rId35"/>
-      <p:boldItalic r:id="rId36"/>
+      <p:bold r:id="rId38"/>
+      <p:boldItalic r:id="rId39"/>
     </p:embeddedFont>
   </p:embeddedFontLst>
   <p:defaultTextStyle>
@@ -476,7 +479,7 @@
           <a:p>
             <a:fld id="{F9D2AD6E-DEDD-49A0-A4BE-7A081A9112DA}" type="datetimeFigureOut">
               <a:rPr lang="en-US" smtClean="0"/>
-              <a:t>8/27/2026</a:t>
+              <a:t>9/1/2026</a:t>
             </a:fld>
             <a:endParaRPr lang="en-US"/>
           </a:p>
@@ -652,7 +655,7 @@
           </a:lstStyle>
           <a:p>
             <a:fld id="{2AF9C1A6-4321-41FA-B001-4140F0E2457F}" type="datetimeFigureOut">
-              <a:t>27.08.2026</a:t>
+              <a:t>01.09.2026</a:t>
             </a:fld>
             <a:endParaRPr lang="en-US"/>
           </a:p>
@@ -1354,7 +1357,7 @@
           <a:p>
             <a:fld id="{46699514-027B-49BD-8B49-5054CA40ECF4}" type="slidenum">
               <a:rPr lang="en-US"/>
-              <a:t>22</a:t>
+              <a:t>25</a:t>
             </a:fld>
             <a:endParaRPr lang="en-US"/>
           </a:p>
@@ -1438,7 +1441,7 @@
           <a:p>
             <a:fld id="{46699514-027B-49BD-8B49-5054CA40ECF4}" type="slidenum">
               <a:rPr lang="en-GB" smtClean="0"/>
-              <a:t>23</a:t>
+              <a:t>26</a:t>
             </a:fld>
             <a:endParaRPr lang="en-GB"/>
           </a:p>
@@ -12584,7 +12587,7 @@
           <a:p>
             <a:fld id="{DE840A40-73C8-4048-8140-49F5D65BB431}" type="datetimeFigureOut">
               <a:rPr lang="et-EE" smtClean="0"/>
-              <a:t>27.08.2026</a:t>
+              <a:t>01.09.2026</a:t>
             </a:fld>
             <a:endParaRPr lang="et-EE"/>
           </a:p>
@@ -27305,13 +27308,7 @@
   <p:cSld>
     <p:spTree>
       <p:nvGrpSpPr>
-        <p:cNvPr id="1" name="">
-          <a:extLst>
-            <a:ext uri="{FF2B5EF4-FFF2-40B4-BE49-F238E27FC236}">
-              <a16:creationId xmlns:a16="http://schemas.microsoft.com/office/drawing/2014/main" id="{B9E73FD9-D77E-162D-7041-13E961378FC5}"/>
-            </a:ext>
-          </a:extLst>
-        </p:cNvPr>
+        <p:cNvPr id="1" name=""/>
         <p:cNvGrpSpPr/>
         <p:nvPr/>
       </p:nvGrpSpPr>
@@ -27328,7 +27325,7 @@
           <p:cNvPr id="2" name="Title 1">
             <a:extLst>
               <a:ext uri="{FF2B5EF4-FFF2-40B4-BE49-F238E27FC236}">
-                <a16:creationId xmlns:a16="http://schemas.microsoft.com/office/drawing/2014/main" id="{EB05699D-1274-F976-3263-C742CC93904D}"/>
+                <a16:creationId xmlns:a16="http://schemas.microsoft.com/office/drawing/2014/main" id="{34200C85-88E6-D982-59D1-DFBAC8A3E627}"/>
               </a:ext>
             </a:extLst>
           </p:cNvPr>
@@ -27345,22 +27342,9 @@
           <a:lstStyle/>
           <a:p>
             <a:r>
-              <a:rPr lang="en-US"/>
-              <a:t>Power BI Desktop – </a:t>
-            </a:r>
-            <a:r>
-              <a:rPr lang="en-US" err="1"/>
-              <a:t>vormistame</a:t>
-            </a:r>
-            <a:r>
-              <a:rPr lang="en-US"/>
-              <a:t> </a:t>
-            </a:r>
-            <a:r>
-              <a:rPr lang="en-US" err="1"/>
-              <a:t>raporti</a:t>
-            </a:r>
-            <a:endParaRPr lang="en-US"/>
+              <a:rPr lang="et-EE" dirty="0"/>
+              <a:t>Millistele küsimustele vastust otsid?</a:t>
+            </a:r>
           </a:p>
         </p:txBody>
       </p:sp>
@@ -27369,7 +27353,7 @@
           <p:cNvPr id="3" name="Content Placeholder 2">
             <a:extLst>
               <a:ext uri="{FF2B5EF4-FFF2-40B4-BE49-F238E27FC236}">
-                <a16:creationId xmlns:a16="http://schemas.microsoft.com/office/drawing/2014/main" id="{E00E1846-2AEC-E6FD-1A12-9E9DD48102E2}"/>
+                <a16:creationId xmlns:a16="http://schemas.microsoft.com/office/drawing/2014/main" id="{272C4812-3AC1-5277-F013-28F80EBC2F26}"/>
               </a:ext>
             </a:extLst>
           </p:cNvPr>
@@ -27385,351 +27369,101 @@
           <a:bodyPr/>
           <a:lstStyle/>
           <a:p>
-            <a:pPr>
-              <a:lnSpc>
-                <a:spcPct val="150000"/>
-              </a:lnSpc>
+            <a:pPr marL="0" indent="0">
+              <a:buNone/>
             </a:pPr>
             <a:r>
-              <a:rPr lang="en-US" sz="2400" dirty="0" err="1">
-                <a:solidFill>
-                  <a:srgbClr val="000000"/>
-                </a:solidFill>
-                <a:ea typeface="Inter"/>
-              </a:rPr>
-              <a:t>Värvid</a:t>
-            </a:r>
-            <a:r>
-              <a:rPr lang="en-US" sz="2400" dirty="0">
-                <a:solidFill>
-                  <a:srgbClr val="000000"/>
-                </a:solidFill>
-                <a:ea typeface="Inter"/>
-              </a:rPr>
-              <a:t> - võimalik </a:t>
-            </a:r>
-            <a:r>
-              <a:rPr lang="en-US" sz="2400" dirty="0" err="1">
-                <a:solidFill>
-                  <a:srgbClr val="000000"/>
-                </a:solidFill>
-                <a:ea typeface="Inter"/>
-              </a:rPr>
-              <a:t>valida</a:t>
-            </a:r>
-            <a:r>
-              <a:rPr lang="en-US" sz="2400" dirty="0">
-                <a:solidFill>
-                  <a:srgbClr val="000000"/>
-                </a:solidFill>
-                <a:ea typeface="Inter"/>
-              </a:rPr>
-              <a:t> View --&gt; Themes</a:t>
-            </a:r>
-          </a:p>
-          <a:p>
-            <a:pPr lvl="1">
-              <a:lnSpc>
-                <a:spcPct val="150000"/>
-              </a:lnSpc>
-              <a:buFont typeface="Courier New" panose="020B0502030000000004" pitchFamily="34" charset="0"/>
-              <a:buChar char="o"/>
-            </a:pPr>
-            <a:r>
-              <a:rPr lang="en-US" sz="2000" dirty="0" err="1">
-                <a:solidFill>
-                  <a:srgbClr val="000000"/>
-                </a:solidFill>
-                <a:ea typeface="Inter"/>
-              </a:rPr>
-              <a:t>Tihti</a:t>
-            </a:r>
-            <a:r>
-              <a:rPr lang="en-US" sz="2000" dirty="0">
-                <a:solidFill>
-                  <a:srgbClr val="000000"/>
-                </a:solidFill>
-                <a:ea typeface="Inter"/>
-              </a:rPr>
-              <a:t> </a:t>
-            </a:r>
-            <a:r>
-              <a:rPr lang="en-US" sz="2000" dirty="0" err="1">
-                <a:solidFill>
-                  <a:srgbClr val="000000"/>
-                </a:solidFill>
-                <a:ea typeface="Inter"/>
-              </a:rPr>
-              <a:t>firmadel</a:t>
-            </a:r>
-            <a:r>
-              <a:rPr lang="en-US" sz="2000" dirty="0">
-                <a:solidFill>
-                  <a:srgbClr val="000000"/>
-                </a:solidFill>
-                <a:ea typeface="Inter"/>
-              </a:rPr>
-              <a:t> </a:t>
-            </a:r>
-            <a:r>
-              <a:rPr lang="en-US" sz="2000" dirty="0" err="1">
-                <a:solidFill>
-                  <a:srgbClr val="000000"/>
-                </a:solidFill>
-                <a:ea typeface="Inter"/>
-              </a:rPr>
-              <a:t>enda</a:t>
-            </a:r>
-            <a:r>
-              <a:rPr lang="en-US" sz="2000" dirty="0">
-                <a:solidFill>
-                  <a:srgbClr val="000000"/>
-                </a:solidFill>
-                <a:ea typeface="Inter"/>
-              </a:rPr>
-              <a:t> </a:t>
-            </a:r>
-            <a:r>
-              <a:rPr lang="en-US" sz="2000" dirty="0" err="1">
-                <a:solidFill>
-                  <a:srgbClr val="000000"/>
-                </a:solidFill>
-                <a:ea typeface="Inter"/>
-              </a:rPr>
-              <a:t>fondid</a:t>
-            </a:r>
-            <a:r>
-              <a:rPr lang="en-US" sz="2000" dirty="0">
-                <a:solidFill>
-                  <a:srgbClr val="000000"/>
-                </a:solidFill>
-                <a:ea typeface="Inter"/>
-              </a:rPr>
-              <a:t> ja </a:t>
-            </a:r>
-            <a:r>
-              <a:rPr lang="en-US" sz="2000" dirty="0" err="1">
-                <a:solidFill>
-                  <a:srgbClr val="000000"/>
-                </a:solidFill>
-                <a:ea typeface="Inter"/>
-              </a:rPr>
-              <a:t>värvid</a:t>
-            </a:r>
-            <a:r>
-              <a:rPr lang="en-US" sz="2000" dirty="0">
-                <a:solidFill>
-                  <a:srgbClr val="000000"/>
-                </a:solidFill>
-                <a:ea typeface="Inter"/>
-              </a:rPr>
-              <a:t>, siis </a:t>
-            </a:r>
-            <a:r>
-              <a:rPr lang="en-US" sz="2000" dirty="0" err="1">
-                <a:solidFill>
-                  <a:srgbClr val="000000"/>
-                </a:solidFill>
-                <a:ea typeface="Inter"/>
-              </a:rPr>
-              <a:t>saab</a:t>
-            </a:r>
-            <a:r>
-              <a:rPr lang="en-US" sz="2000" dirty="0">
-                <a:solidFill>
-                  <a:srgbClr val="000000"/>
-                </a:solidFill>
-                <a:ea typeface="Inter"/>
-              </a:rPr>
-              <a:t> </a:t>
-            </a:r>
-            <a:r>
-              <a:rPr lang="en-US" sz="2000" dirty="0" err="1">
-                <a:solidFill>
-                  <a:srgbClr val="000000"/>
-                </a:solidFill>
-                <a:ea typeface="Inter"/>
-              </a:rPr>
-              <a:t>seadistada</a:t>
-            </a:r>
-            <a:r>
-              <a:rPr lang="en-US" sz="2000" dirty="0">
-                <a:solidFill>
-                  <a:srgbClr val="000000"/>
-                </a:solidFill>
-                <a:ea typeface="Inter"/>
-              </a:rPr>
-              <a:t> Custom Theme</a:t>
-            </a:r>
-          </a:p>
-          <a:p>
-            <a:pPr>
-              <a:lnSpc>
-                <a:spcPct val="150000"/>
-              </a:lnSpc>
-              <a:buClr>
-                <a:srgbClr val="121212"/>
-              </a:buClr>
-            </a:pPr>
-            <a:r>
-              <a:rPr lang="en-US" sz="2400" dirty="0" err="1">
-                <a:solidFill>
-                  <a:srgbClr val="000000"/>
-                </a:solidFill>
-                <a:ea typeface="Inter"/>
-              </a:rPr>
-              <a:t>Visuaalid</a:t>
-            </a:r>
-            <a:r>
-              <a:rPr lang="en-US" sz="2400" dirty="0">
-                <a:solidFill>
-                  <a:srgbClr val="000000"/>
-                </a:solidFill>
-                <a:ea typeface="Inter"/>
-              </a:rPr>
-              <a:t> </a:t>
-            </a:r>
-            <a:r>
-              <a:rPr lang="en-US" sz="2400" dirty="0" err="1">
-                <a:solidFill>
-                  <a:srgbClr val="000000"/>
-                </a:solidFill>
-                <a:ea typeface="Inter"/>
-              </a:rPr>
-              <a:t>joondada</a:t>
-            </a:r>
-            <a:endParaRPr lang="en-US" sz="2400" dirty="0">
-              <a:solidFill>
-                <a:srgbClr val="000000"/>
-              </a:solidFill>
-              <a:ea typeface="Inter"/>
-            </a:endParaRPr>
-          </a:p>
-          <a:p>
-            <a:pPr>
-              <a:lnSpc>
-                <a:spcPct val="150000"/>
-              </a:lnSpc>
-              <a:buClr>
-                <a:srgbClr val="121212"/>
-              </a:buClr>
-            </a:pPr>
-            <a:r>
-              <a:rPr lang="en-US" sz="2400" dirty="0" err="1">
-                <a:solidFill>
-                  <a:srgbClr val="000000"/>
-                </a:solidFill>
-                <a:ea typeface="Inter"/>
-              </a:rPr>
-              <a:t>Visuaalid</a:t>
-            </a:r>
-            <a:r>
-              <a:rPr lang="en-US" sz="2400" dirty="0">
-                <a:solidFill>
-                  <a:srgbClr val="000000"/>
-                </a:solidFill>
-                <a:ea typeface="Inter"/>
-              </a:rPr>
-              <a:t> üle vaadata – kas on ainult </a:t>
-            </a:r>
-            <a:r>
-              <a:rPr lang="en-US" sz="2400" dirty="0" err="1">
-                <a:solidFill>
-                  <a:srgbClr val="000000"/>
-                </a:solidFill>
-                <a:ea typeface="Inter"/>
-              </a:rPr>
-              <a:t>vajalikud</a:t>
-            </a:r>
-            <a:r>
-              <a:rPr lang="en-US" sz="2400" dirty="0">
-                <a:solidFill>
-                  <a:srgbClr val="000000"/>
-                </a:solidFill>
-                <a:ea typeface="Inter"/>
-              </a:rPr>
-              <a:t> </a:t>
-            </a:r>
-            <a:r>
-              <a:rPr lang="en-US" sz="2400" dirty="0" err="1">
-                <a:solidFill>
-                  <a:srgbClr val="000000"/>
-                </a:solidFill>
-                <a:ea typeface="Inter"/>
-              </a:rPr>
-              <a:t>elemendid</a:t>
-            </a:r>
-            <a:r>
-              <a:rPr lang="en-US" sz="2400" dirty="0">
-                <a:solidFill>
-                  <a:srgbClr val="000000"/>
-                </a:solidFill>
-                <a:ea typeface="Inter"/>
-              </a:rPr>
-              <a:t>?</a:t>
-            </a:r>
-          </a:p>
-          <a:p>
-            <a:pPr>
-              <a:lnSpc>
-                <a:spcPct val="150000"/>
-              </a:lnSpc>
-              <a:buClr>
-                <a:srgbClr val="121212"/>
-              </a:buClr>
-            </a:pPr>
-            <a:r>
-              <a:rPr lang="en-US" sz="2400" dirty="0" err="1">
-                <a:solidFill>
-                  <a:srgbClr val="000000"/>
-                </a:solidFill>
-                <a:ea typeface="Inter"/>
-              </a:rPr>
-              <a:t>Pealkirjad</a:t>
-            </a:r>
-            <a:r>
-              <a:rPr lang="en-US" sz="2400" dirty="0">
-                <a:solidFill>
-                  <a:srgbClr val="000000"/>
-                </a:solidFill>
-                <a:ea typeface="Inter"/>
-              </a:rPr>
-              <a:t> üle vaadata</a:t>
+              <a:rPr lang="et-EE" sz="2000" b="1" dirty="0"/>
+              <a:t>● Regioonide ja müüjate lõikes:</a:t>
             </a:r>
           </a:p>
           <a:p>
             <a:pPr marL="0" indent="0">
-              <a:lnSpc>
-                <a:spcPct val="150000"/>
-              </a:lnSpc>
               <a:buNone/>
             </a:pPr>
-            <a:endParaRPr lang="en-US" sz="2400" dirty="0">
-              <a:solidFill>
-                <a:srgbClr val="000000"/>
-              </a:solidFill>
-              <a:ea typeface="Inter"/>
-            </a:endParaRPr>
+            <a:r>
+              <a:rPr lang="et-EE" dirty="0"/>
+              <a:t>○ Millised regioonid toovad kõige suurema kogukasumi ja millised töötavad kahjumiga</a:t>
+            </a:r>
           </a:p>
           <a:p>
-            <a:pPr>
-              <a:lnSpc>
-                <a:spcPct val="150000"/>
-              </a:lnSpc>
+            <a:pPr marL="0" indent="0">
+              <a:buNone/>
             </a:pPr>
-            <a:endParaRPr lang="en-US" sz="2400" dirty="0">
-              <a:solidFill>
-                <a:srgbClr val="000000"/>
-              </a:solidFill>
-              <a:ea typeface="Inter"/>
-            </a:endParaRPr>
+            <a:r>
+              <a:rPr lang="et-EE" dirty="0"/>
+              <a:t>või nulli piiril?</a:t>
+            </a:r>
+          </a:p>
+          <a:p>
+            <a:pPr marL="0" indent="0">
+              <a:buNone/>
+            </a:pPr>
+            <a:r>
+              <a:rPr lang="et-EE" dirty="0"/>
+              <a:t>○ Kas mõni müüja (Salesperson) teeb suurt käivet ainult tänu sellele, et jagab liiga</a:t>
+            </a:r>
+          </a:p>
+          <a:p>
+            <a:pPr marL="0" indent="0">
+              <a:buNone/>
+            </a:pPr>
+            <a:r>
+              <a:rPr lang="et-EE" dirty="0"/>
+              <a:t>kergekäeliselt allahindlusi?</a:t>
+            </a:r>
+          </a:p>
+          <a:p>
+            <a:pPr marL="0" indent="0">
+              <a:buNone/>
+            </a:pPr>
+            <a:r>
+              <a:rPr lang="et-EE" sz="2000" b="1" dirty="0"/>
+              <a:t>● Toodete ja marginaali lõikes:</a:t>
+            </a:r>
+          </a:p>
+          <a:p>
+            <a:pPr marL="0" indent="0">
+              <a:buNone/>
+            </a:pPr>
+            <a:r>
+              <a:rPr lang="et-EE" dirty="0"/>
+              <a:t>○ Millised tootekategooriad on meie "rahamasinad" (kõrge marginaal ja suur maht) ja</a:t>
+            </a:r>
+          </a:p>
+          <a:p>
+            <a:pPr marL="0" indent="0">
+              <a:buNone/>
+            </a:pPr>
+            <a:r>
+              <a:rPr lang="et-EE" dirty="0"/>
+              <a:t>millised võtavad lihtsalt ruumi?</a:t>
+            </a:r>
+          </a:p>
+          <a:p>
+            <a:pPr marL="0" indent="0">
+              <a:buNone/>
+            </a:pPr>
+            <a:r>
+              <a:rPr lang="et-EE" dirty="0"/>
+              <a:t>○ Kas meie allahindluse (Discount) strateegia kasvatab reaalset müügimahtu</a:t>
+            </a:r>
+          </a:p>
+          <a:p>
+            <a:pPr marL="0" indent="0">
+              <a:buNone/>
+            </a:pPr>
+            <a:r>
+              <a:rPr lang="et-EE" dirty="0"/>
+              <a:t>(Quantity) või sööb lihtsalt kasumit?</a:t>
+            </a:r>
           </a:p>
         </p:txBody>
       </p:sp>
     </p:spTree>
     <p:extLst>
       <p:ext uri="{BB962C8B-B14F-4D97-AF65-F5344CB8AC3E}">
-        <p14:creationId xmlns:p14="http://schemas.microsoft.com/office/powerpoint/2010/main" val="128759722"/>
+        <p14:creationId xmlns:p14="http://schemas.microsoft.com/office/powerpoint/2010/main" val="2985737251"/>
       </p:ext>
     </p:extLst>
   </p:cSld>
@@ -28709,6 +28443,832 @@
   <p:cSld>
     <p:spTree>
       <p:nvGrpSpPr>
+        <p:cNvPr id="1" name=""/>
+        <p:cNvGrpSpPr/>
+        <p:nvPr/>
+      </p:nvGrpSpPr>
+      <p:grpSpPr>
+        <a:xfrm>
+          <a:off x="0" y="0"/>
+          <a:ext cx="0" cy="0"/>
+          <a:chOff x="0" y="0"/>
+          <a:chExt cx="0" cy="0"/>
+        </a:xfrm>
+      </p:grpSpPr>
+      <p:sp>
+        <p:nvSpPr>
+          <p:cNvPr id="2" name="Title 1">
+            <a:extLst>
+              <a:ext uri="{FF2B5EF4-FFF2-40B4-BE49-F238E27FC236}">
+                <a16:creationId xmlns:a16="http://schemas.microsoft.com/office/drawing/2014/main" id="{60F6DEFC-16F3-98E6-00F6-ADDFE4A8EFB3}"/>
+              </a:ext>
+            </a:extLst>
+          </p:cNvPr>
+          <p:cNvSpPr>
+            <a:spLocks noGrp="1"/>
+          </p:cNvSpPr>
+          <p:nvPr>
+            <p:ph type="ctrTitle"/>
+          </p:nvPr>
+        </p:nvSpPr>
+        <p:spPr/>
+        <p:txBody>
+          <a:bodyPr/>
+          <a:lstStyle/>
+          <a:p>
+            <a:r>
+              <a:rPr lang="et-EE" dirty="0"/>
+              <a:t>Stsenaarium 1: HÄSTI</a:t>
+            </a:r>
+            <a:br>
+              <a:rPr lang="et-EE" dirty="0"/>
+            </a:br>
+            <a:endParaRPr lang="et-EE" dirty="0"/>
+          </a:p>
+        </p:txBody>
+      </p:sp>
+      <p:sp>
+        <p:nvSpPr>
+          <p:cNvPr id="3" name="Content Placeholder 2">
+            <a:extLst>
+              <a:ext uri="{FF2B5EF4-FFF2-40B4-BE49-F238E27FC236}">
+                <a16:creationId xmlns:a16="http://schemas.microsoft.com/office/drawing/2014/main" id="{AEBB50B6-247F-9AE8-B30C-7A1A6BDBA0DE}"/>
+              </a:ext>
+            </a:extLst>
+          </p:cNvPr>
+          <p:cNvSpPr>
+            <a:spLocks noGrp="1"/>
+          </p:cNvSpPr>
+          <p:nvPr>
+            <p:ph sz="quarter" idx="10"/>
+          </p:nvPr>
+        </p:nvSpPr>
+        <p:spPr/>
+        <p:txBody>
+          <a:bodyPr/>
+          <a:lstStyle/>
+          <a:p>
+            <a:pPr marL="0" indent="0">
+              <a:buNone/>
+            </a:pPr>
+            <a:r>
+              <a:rPr lang="et-EE" dirty="0"/>
+              <a:t>(Seda näed raportist siis, kui äril läheb suurepäraselt)</a:t>
+            </a:r>
+          </a:p>
+          <a:p>
+            <a:pPr marL="0" indent="0">
+              <a:buNone/>
+            </a:pPr>
+            <a:r>
+              <a:rPr lang="et-EE" dirty="0"/>
+              <a:t>● Kuvand visuaalidel: Graafikud liiguvad stabiilselt ülespoole, kasumimarginaali protsent</a:t>
+            </a:r>
+          </a:p>
+          <a:p>
+            <a:pPr marL="0" indent="0">
+              <a:buNone/>
+            </a:pPr>
+            <a:r>
+              <a:rPr lang="et-EE" dirty="0"/>
+              <a:t>(Kasumi_Marginaal_%) on kõrge ja ühtlane kõigis regioonides.</a:t>
+            </a:r>
+          </a:p>
+          <a:p>
+            <a:pPr marL="0" indent="0">
+              <a:buNone/>
+            </a:pPr>
+            <a:r>
+              <a:rPr lang="et-EE" dirty="0"/>
+              <a:t>● Andmete kirjeldus:</a:t>
+            </a:r>
+          </a:p>
+          <a:p>
+            <a:pPr marL="0" indent="0">
+              <a:buNone/>
+            </a:pPr>
+            <a:r>
+              <a:rPr lang="et-EE" dirty="0"/>
+              <a:t>○ Müügitulu (Tegelik_Tulu) ja kogukasum (Kogukasum) kasvavad käikäes.</a:t>
+            </a:r>
+          </a:p>
+          <a:p>
+            <a:pPr marL="0" indent="0">
+              <a:buNone/>
+            </a:pPr>
+            <a:r>
+              <a:rPr lang="et-EE" dirty="0"/>
+              <a:t>○ Müüjad müüvad tooteid peaaegu täishinnaga – allahindluse veerg (Discount) on</a:t>
+            </a:r>
+          </a:p>
+          <a:p>
+            <a:pPr marL="0" indent="0">
+              <a:buNone/>
+            </a:pPr>
+            <a:r>
+              <a:rPr lang="et-EE" dirty="0"/>
+              <a:t>enamasti nullis või väga madal (näiteks 0–5%).</a:t>
+            </a:r>
+          </a:p>
+          <a:p>
+            <a:pPr marL="0" indent="0">
+              <a:buNone/>
+            </a:pPr>
+            <a:r>
+              <a:rPr lang="et-EE" dirty="0"/>
+              <a:t>○ Kõige suurema müügimahuga (Quantity) on kõrge marginaaliga tootekategooriad.</a:t>
+            </a:r>
+          </a:p>
+          <a:p>
+            <a:pPr marL="0" indent="0">
+              <a:buNone/>
+            </a:pPr>
+            <a:r>
+              <a:rPr lang="et-EE" dirty="0"/>
+              <a:t>○ Kui mõnes regioonis tehaksegi allahindlust, siis mahuandmed näitavad, et see pani</a:t>
+            </a:r>
+          </a:p>
+          <a:p>
+            <a:pPr marL="0" indent="0">
+              <a:buNone/>
+            </a:pPr>
+            <a:r>
+              <a:rPr lang="et-EE" dirty="0"/>
+              <a:t>kliendid koheselt kordades rohkem ostma, ehk allahindlus õigustas ennast täielikult.</a:t>
+            </a:r>
+          </a:p>
+        </p:txBody>
+      </p:sp>
+    </p:spTree>
+    <p:extLst>
+      <p:ext uri="{BB962C8B-B14F-4D97-AF65-F5344CB8AC3E}">
+        <p14:creationId xmlns:p14="http://schemas.microsoft.com/office/powerpoint/2010/main" val="4245993941"/>
+      </p:ext>
+    </p:extLst>
+  </p:cSld>
+  <p:clrMapOvr>
+    <a:masterClrMapping/>
+  </p:clrMapOvr>
+</p:sld>
+</file>
+
+<file path=ppt/slides/slide21.xml><?xml version="1.0" encoding="utf-8"?>
+<p:sld xmlns:a="http://schemas.openxmlformats.org/drawingml/2006/main" xmlns:r="http://schemas.openxmlformats.org/officeDocument/2006/relationships" xmlns:p="http://schemas.openxmlformats.org/presentationml/2006/main">
+  <p:cSld>
+    <p:spTree>
+      <p:nvGrpSpPr>
+        <p:cNvPr id="1" name=""/>
+        <p:cNvGrpSpPr/>
+        <p:nvPr/>
+      </p:nvGrpSpPr>
+      <p:grpSpPr>
+        <a:xfrm>
+          <a:off x="0" y="0"/>
+          <a:ext cx="0" cy="0"/>
+          <a:chOff x="0" y="0"/>
+          <a:chExt cx="0" cy="0"/>
+        </a:xfrm>
+      </p:grpSpPr>
+      <p:sp>
+        <p:nvSpPr>
+          <p:cNvPr id="2" name="Title 1">
+            <a:extLst>
+              <a:ext uri="{FF2B5EF4-FFF2-40B4-BE49-F238E27FC236}">
+                <a16:creationId xmlns:a16="http://schemas.microsoft.com/office/drawing/2014/main" id="{C417726B-27D5-3C7F-A7BF-9D82BA40F078}"/>
+              </a:ext>
+            </a:extLst>
+          </p:cNvPr>
+          <p:cNvSpPr>
+            <a:spLocks noGrp="1"/>
+          </p:cNvSpPr>
+          <p:nvPr>
+            <p:ph type="ctrTitle"/>
+          </p:nvPr>
+        </p:nvSpPr>
+        <p:spPr/>
+        <p:txBody>
+          <a:bodyPr/>
+          <a:lstStyle/>
+          <a:p>
+            <a:r>
+              <a:rPr lang="et-EE" dirty="0"/>
+              <a:t>⚠️ Stsenaarium 2: HALVASTI</a:t>
+            </a:r>
+            <a:br>
+              <a:rPr lang="et-EE" dirty="0"/>
+            </a:br>
+            <a:endParaRPr lang="et-EE" dirty="0"/>
+          </a:p>
+        </p:txBody>
+      </p:sp>
+      <p:sp>
+        <p:nvSpPr>
+          <p:cNvPr id="3" name="Content Placeholder 2">
+            <a:extLst>
+              <a:ext uri="{FF2B5EF4-FFF2-40B4-BE49-F238E27FC236}">
+                <a16:creationId xmlns:a16="http://schemas.microsoft.com/office/drawing/2014/main" id="{E58FC515-F523-45CA-C377-D1C69DECF340}"/>
+              </a:ext>
+            </a:extLst>
+          </p:cNvPr>
+          <p:cNvSpPr>
+            <a:spLocks noGrp="1"/>
+          </p:cNvSpPr>
+          <p:nvPr>
+            <p:ph sz="quarter" idx="10"/>
+          </p:nvPr>
+        </p:nvSpPr>
+        <p:spPr/>
+        <p:txBody>
+          <a:bodyPr/>
+          <a:lstStyle/>
+          <a:p>
+            <a:pPr marL="0" indent="0">
+              <a:buNone/>
+            </a:pPr>
+            <a:r>
+              <a:rPr lang="et-EE" dirty="0"/>
+              <a:t>(See on ohumärk, mis nõuab kiiret sekkumist)</a:t>
+            </a:r>
+          </a:p>
+          <a:p>
+            <a:pPr marL="0" indent="0">
+              <a:buNone/>
+            </a:pPr>
+            <a:r>
+              <a:rPr lang="et-EE" dirty="0"/>
+              <a:t>● Kuvand visuaalidel: Käive võib näida suur, kuid kasumi joon koonerdab allapoole või on</a:t>
+            </a:r>
+          </a:p>
+          <a:p>
+            <a:pPr marL="0" indent="0">
+              <a:buNone/>
+            </a:pPr>
+            <a:r>
+              <a:rPr lang="et-EE" dirty="0"/>
+              <a:t>suunaga miinusesse. Marginaali protsent kukub kolinal.</a:t>
+            </a:r>
+          </a:p>
+          <a:p>
+            <a:pPr marL="0" indent="0">
+              <a:buNone/>
+            </a:pPr>
+            <a:r>
+              <a:rPr lang="et-EE" dirty="0"/>
+              <a:t>● Andmete kirjeldus:</a:t>
+            </a:r>
+          </a:p>
+          <a:p>
+            <a:pPr marL="0" indent="0">
+              <a:buNone/>
+            </a:pPr>
+            <a:r>
+              <a:rPr lang="et-EE" dirty="0"/>
+              <a:t>○ Käive (Tegelik_Tulu) on küll suur, aga kogukasum (Kogukasum) on olematu või</a:t>
+            </a:r>
+          </a:p>
+          <a:p>
+            <a:pPr marL="0" indent="0">
+              <a:buNone/>
+            </a:pPr>
+            <a:r>
+              <a:rPr lang="et-EE" dirty="0"/>
+              <a:t>negatiivne. See tähendab, et tegeletakse "tühja tööga".</a:t>
+            </a:r>
+          </a:p>
+          <a:p>
+            <a:pPr marL="0" indent="0">
+              <a:buNone/>
+            </a:pPr>
+            <a:r>
+              <a:rPr lang="et-EE" dirty="0"/>
+              <a:t>○ Müüjad kuritarvitavad allahindlusi. Andmetest on näha, et tehinguid tehakse</a:t>
+            </a:r>
+          </a:p>
+          <a:p>
+            <a:pPr marL="0" indent="0">
+              <a:buNone/>
+            </a:pPr>
+            <a:r>
+              <a:rPr lang="et-EE" dirty="0"/>
+              <a:t>peamiselt siis, kui Discount on määratud maksimumi peale (nt 30–50%). Ilma</a:t>
+            </a:r>
+          </a:p>
+          <a:p>
+            <a:pPr marL="0" indent="0">
+              <a:buNone/>
+            </a:pPr>
+            <a:r>
+              <a:rPr lang="et-EE" dirty="0"/>
+              <a:t>allahindluseta ei osteta midgasi.</a:t>
+            </a:r>
+          </a:p>
+          <a:p>
+            <a:pPr marL="0" indent="0">
+              <a:buNone/>
+            </a:pPr>
+            <a:r>
+              <a:rPr lang="et-EE" dirty="0"/>
+              <a:t>○ Kõige rohkem müüakse tooteid, mille kulu (Cost Price) on peaaegu võrdne</a:t>
+            </a:r>
+          </a:p>
+          <a:p>
+            <a:pPr marL="0" indent="0">
+              <a:buNone/>
+            </a:pPr>
+            <a:r>
+              <a:rPr lang="et-EE" dirty="0"/>
+              <a:t>müügihinnaga (UnitPrice), ehk madala marginaaliga kaupa. Kõrge marginaaliga</a:t>
+            </a:r>
+          </a:p>
+          <a:p>
+            <a:pPr marL="0" indent="0">
+              <a:buNone/>
+            </a:pPr>
+            <a:r>
+              <a:rPr lang="et-EE" dirty="0"/>
+              <a:t>tooted seisavad laos.</a:t>
+            </a:r>
+          </a:p>
+          <a:p>
+            <a:pPr marL="0" indent="0">
+              <a:buNone/>
+            </a:pPr>
+            <a:r>
+              <a:rPr lang="et-EE" dirty="0"/>
+              <a:t>○ Mõni konkreetne regioon toodab stabiilselt miinust, sest sealsed logistikakulud või</a:t>
+            </a:r>
+          </a:p>
+          <a:p>
+            <a:pPr marL="0" indent="0">
+              <a:buNone/>
+            </a:pPr>
+            <a:r>
+              <a:rPr lang="et-EE" dirty="0"/>
+              <a:t>müüjate poolt tehtud madalad hinnad ei kata toote omahinda.</a:t>
+            </a:r>
+          </a:p>
+          <a:p>
+            <a:endParaRPr lang="et-EE" dirty="0"/>
+          </a:p>
+        </p:txBody>
+      </p:sp>
+    </p:spTree>
+    <p:extLst>
+      <p:ext uri="{BB962C8B-B14F-4D97-AF65-F5344CB8AC3E}">
+        <p14:creationId xmlns:p14="http://schemas.microsoft.com/office/powerpoint/2010/main" val="1862002742"/>
+      </p:ext>
+    </p:extLst>
+  </p:cSld>
+  <p:clrMapOvr>
+    <a:masterClrMapping/>
+  </p:clrMapOvr>
+</p:sld>
+</file>
+
+<file path=ppt/slides/slide22.xml><?xml version="1.0" encoding="utf-8"?>
+<p:sld xmlns:a="http://schemas.openxmlformats.org/drawingml/2006/main" xmlns:r="http://schemas.openxmlformats.org/officeDocument/2006/relationships" xmlns:p="http://schemas.openxmlformats.org/presentationml/2006/main">
+  <p:cSld>
+    <p:spTree>
+      <p:nvGrpSpPr>
+        <p:cNvPr id="1" name="">
+          <a:extLst>
+            <a:ext uri="{FF2B5EF4-FFF2-40B4-BE49-F238E27FC236}">
+              <a16:creationId xmlns:a16="http://schemas.microsoft.com/office/drawing/2014/main" id="{B9E73FD9-D77E-162D-7041-13E961378FC5}"/>
+            </a:ext>
+          </a:extLst>
+        </p:cNvPr>
+        <p:cNvGrpSpPr/>
+        <p:nvPr/>
+      </p:nvGrpSpPr>
+      <p:grpSpPr>
+        <a:xfrm>
+          <a:off x="0" y="0"/>
+          <a:ext cx="0" cy="0"/>
+          <a:chOff x="0" y="0"/>
+          <a:chExt cx="0" cy="0"/>
+        </a:xfrm>
+      </p:grpSpPr>
+      <p:sp>
+        <p:nvSpPr>
+          <p:cNvPr id="2" name="Title 1">
+            <a:extLst>
+              <a:ext uri="{FF2B5EF4-FFF2-40B4-BE49-F238E27FC236}">
+                <a16:creationId xmlns:a16="http://schemas.microsoft.com/office/drawing/2014/main" id="{EB05699D-1274-F976-3263-C742CC93904D}"/>
+              </a:ext>
+            </a:extLst>
+          </p:cNvPr>
+          <p:cNvSpPr>
+            <a:spLocks noGrp="1"/>
+          </p:cNvSpPr>
+          <p:nvPr>
+            <p:ph type="ctrTitle"/>
+          </p:nvPr>
+        </p:nvSpPr>
+        <p:spPr/>
+        <p:txBody>
+          <a:bodyPr/>
+          <a:lstStyle/>
+          <a:p>
+            <a:r>
+              <a:rPr lang="en-US"/>
+              <a:t>Power BI Desktop – </a:t>
+            </a:r>
+            <a:r>
+              <a:rPr lang="en-US" err="1"/>
+              <a:t>vormistame</a:t>
+            </a:r>
+            <a:r>
+              <a:rPr lang="en-US"/>
+              <a:t> </a:t>
+            </a:r>
+            <a:r>
+              <a:rPr lang="en-US" err="1"/>
+              <a:t>raporti</a:t>
+            </a:r>
+            <a:endParaRPr lang="en-US"/>
+          </a:p>
+        </p:txBody>
+      </p:sp>
+      <p:sp>
+        <p:nvSpPr>
+          <p:cNvPr id="3" name="Content Placeholder 2">
+            <a:extLst>
+              <a:ext uri="{FF2B5EF4-FFF2-40B4-BE49-F238E27FC236}">
+                <a16:creationId xmlns:a16="http://schemas.microsoft.com/office/drawing/2014/main" id="{E00E1846-2AEC-E6FD-1A12-9E9DD48102E2}"/>
+              </a:ext>
+            </a:extLst>
+          </p:cNvPr>
+          <p:cNvSpPr>
+            <a:spLocks noGrp="1"/>
+          </p:cNvSpPr>
+          <p:nvPr>
+            <p:ph sz="quarter" idx="10"/>
+          </p:nvPr>
+        </p:nvSpPr>
+        <p:spPr/>
+        <p:txBody>
+          <a:bodyPr/>
+          <a:lstStyle/>
+          <a:p>
+            <a:pPr>
+              <a:lnSpc>
+                <a:spcPct val="150000"/>
+              </a:lnSpc>
+            </a:pPr>
+            <a:r>
+              <a:rPr lang="en-US" sz="2400" dirty="0" err="1">
+                <a:solidFill>
+                  <a:srgbClr val="000000"/>
+                </a:solidFill>
+                <a:ea typeface="Inter"/>
+              </a:rPr>
+              <a:t>Värvid</a:t>
+            </a:r>
+            <a:r>
+              <a:rPr lang="en-US" sz="2400" dirty="0">
+                <a:solidFill>
+                  <a:srgbClr val="000000"/>
+                </a:solidFill>
+                <a:ea typeface="Inter"/>
+              </a:rPr>
+              <a:t> - võimalik </a:t>
+            </a:r>
+            <a:r>
+              <a:rPr lang="en-US" sz="2400" dirty="0" err="1">
+                <a:solidFill>
+                  <a:srgbClr val="000000"/>
+                </a:solidFill>
+                <a:ea typeface="Inter"/>
+              </a:rPr>
+              <a:t>valida</a:t>
+            </a:r>
+            <a:r>
+              <a:rPr lang="en-US" sz="2400" dirty="0">
+                <a:solidFill>
+                  <a:srgbClr val="000000"/>
+                </a:solidFill>
+                <a:ea typeface="Inter"/>
+              </a:rPr>
+              <a:t> View --&gt; Themes</a:t>
+            </a:r>
+          </a:p>
+          <a:p>
+            <a:pPr lvl="1">
+              <a:lnSpc>
+                <a:spcPct val="150000"/>
+              </a:lnSpc>
+              <a:buFont typeface="Courier New" panose="020B0502030000000004" pitchFamily="34" charset="0"/>
+              <a:buChar char="o"/>
+            </a:pPr>
+            <a:r>
+              <a:rPr lang="en-US" sz="2000" dirty="0" err="1">
+                <a:solidFill>
+                  <a:srgbClr val="000000"/>
+                </a:solidFill>
+                <a:ea typeface="Inter"/>
+              </a:rPr>
+              <a:t>Tihti</a:t>
+            </a:r>
+            <a:r>
+              <a:rPr lang="en-US" sz="2000" dirty="0">
+                <a:solidFill>
+                  <a:srgbClr val="000000"/>
+                </a:solidFill>
+                <a:ea typeface="Inter"/>
+              </a:rPr>
+              <a:t> </a:t>
+            </a:r>
+            <a:r>
+              <a:rPr lang="en-US" sz="2000" dirty="0" err="1">
+                <a:solidFill>
+                  <a:srgbClr val="000000"/>
+                </a:solidFill>
+                <a:ea typeface="Inter"/>
+              </a:rPr>
+              <a:t>firmadel</a:t>
+            </a:r>
+            <a:r>
+              <a:rPr lang="en-US" sz="2000" dirty="0">
+                <a:solidFill>
+                  <a:srgbClr val="000000"/>
+                </a:solidFill>
+                <a:ea typeface="Inter"/>
+              </a:rPr>
+              <a:t> </a:t>
+            </a:r>
+            <a:r>
+              <a:rPr lang="en-US" sz="2000" dirty="0" err="1">
+                <a:solidFill>
+                  <a:srgbClr val="000000"/>
+                </a:solidFill>
+                <a:ea typeface="Inter"/>
+              </a:rPr>
+              <a:t>enda</a:t>
+            </a:r>
+            <a:r>
+              <a:rPr lang="en-US" sz="2000" dirty="0">
+                <a:solidFill>
+                  <a:srgbClr val="000000"/>
+                </a:solidFill>
+                <a:ea typeface="Inter"/>
+              </a:rPr>
+              <a:t> </a:t>
+            </a:r>
+            <a:r>
+              <a:rPr lang="en-US" sz="2000" dirty="0" err="1">
+                <a:solidFill>
+                  <a:srgbClr val="000000"/>
+                </a:solidFill>
+                <a:ea typeface="Inter"/>
+              </a:rPr>
+              <a:t>fondid</a:t>
+            </a:r>
+            <a:r>
+              <a:rPr lang="en-US" sz="2000" dirty="0">
+                <a:solidFill>
+                  <a:srgbClr val="000000"/>
+                </a:solidFill>
+                <a:ea typeface="Inter"/>
+              </a:rPr>
+              <a:t> ja </a:t>
+            </a:r>
+            <a:r>
+              <a:rPr lang="en-US" sz="2000" dirty="0" err="1">
+                <a:solidFill>
+                  <a:srgbClr val="000000"/>
+                </a:solidFill>
+                <a:ea typeface="Inter"/>
+              </a:rPr>
+              <a:t>värvid</a:t>
+            </a:r>
+            <a:r>
+              <a:rPr lang="en-US" sz="2000" dirty="0">
+                <a:solidFill>
+                  <a:srgbClr val="000000"/>
+                </a:solidFill>
+                <a:ea typeface="Inter"/>
+              </a:rPr>
+              <a:t>, siis </a:t>
+            </a:r>
+            <a:r>
+              <a:rPr lang="en-US" sz="2000" dirty="0" err="1">
+                <a:solidFill>
+                  <a:srgbClr val="000000"/>
+                </a:solidFill>
+                <a:ea typeface="Inter"/>
+              </a:rPr>
+              <a:t>saab</a:t>
+            </a:r>
+            <a:r>
+              <a:rPr lang="en-US" sz="2000" dirty="0">
+                <a:solidFill>
+                  <a:srgbClr val="000000"/>
+                </a:solidFill>
+                <a:ea typeface="Inter"/>
+              </a:rPr>
+              <a:t> </a:t>
+            </a:r>
+            <a:r>
+              <a:rPr lang="en-US" sz="2000" dirty="0" err="1">
+                <a:solidFill>
+                  <a:srgbClr val="000000"/>
+                </a:solidFill>
+                <a:ea typeface="Inter"/>
+              </a:rPr>
+              <a:t>seadistada</a:t>
+            </a:r>
+            <a:r>
+              <a:rPr lang="en-US" sz="2000" dirty="0">
+                <a:solidFill>
+                  <a:srgbClr val="000000"/>
+                </a:solidFill>
+                <a:ea typeface="Inter"/>
+              </a:rPr>
+              <a:t> Custom Theme</a:t>
+            </a:r>
+          </a:p>
+          <a:p>
+            <a:pPr>
+              <a:lnSpc>
+                <a:spcPct val="150000"/>
+              </a:lnSpc>
+              <a:buClr>
+                <a:srgbClr val="121212"/>
+              </a:buClr>
+            </a:pPr>
+            <a:r>
+              <a:rPr lang="en-US" sz="2400" dirty="0" err="1">
+                <a:solidFill>
+                  <a:srgbClr val="000000"/>
+                </a:solidFill>
+                <a:ea typeface="Inter"/>
+              </a:rPr>
+              <a:t>Visuaalid</a:t>
+            </a:r>
+            <a:r>
+              <a:rPr lang="en-US" sz="2400" dirty="0">
+                <a:solidFill>
+                  <a:srgbClr val="000000"/>
+                </a:solidFill>
+                <a:ea typeface="Inter"/>
+              </a:rPr>
+              <a:t> </a:t>
+            </a:r>
+            <a:r>
+              <a:rPr lang="en-US" sz="2400" dirty="0" err="1">
+                <a:solidFill>
+                  <a:srgbClr val="000000"/>
+                </a:solidFill>
+                <a:ea typeface="Inter"/>
+              </a:rPr>
+              <a:t>joondada</a:t>
+            </a:r>
+            <a:endParaRPr lang="en-US" sz="2400" dirty="0">
+              <a:solidFill>
+                <a:srgbClr val="000000"/>
+              </a:solidFill>
+              <a:ea typeface="Inter"/>
+            </a:endParaRPr>
+          </a:p>
+          <a:p>
+            <a:pPr>
+              <a:lnSpc>
+                <a:spcPct val="150000"/>
+              </a:lnSpc>
+              <a:buClr>
+                <a:srgbClr val="121212"/>
+              </a:buClr>
+            </a:pPr>
+            <a:r>
+              <a:rPr lang="en-US" sz="2400" dirty="0" err="1">
+                <a:solidFill>
+                  <a:srgbClr val="000000"/>
+                </a:solidFill>
+                <a:ea typeface="Inter"/>
+              </a:rPr>
+              <a:t>Visuaalid</a:t>
+            </a:r>
+            <a:r>
+              <a:rPr lang="en-US" sz="2400" dirty="0">
+                <a:solidFill>
+                  <a:srgbClr val="000000"/>
+                </a:solidFill>
+                <a:ea typeface="Inter"/>
+              </a:rPr>
+              <a:t> üle vaadata – kas on ainult </a:t>
+            </a:r>
+            <a:r>
+              <a:rPr lang="en-US" sz="2400" dirty="0" err="1">
+                <a:solidFill>
+                  <a:srgbClr val="000000"/>
+                </a:solidFill>
+                <a:ea typeface="Inter"/>
+              </a:rPr>
+              <a:t>vajalikud</a:t>
+            </a:r>
+            <a:r>
+              <a:rPr lang="en-US" sz="2400" dirty="0">
+                <a:solidFill>
+                  <a:srgbClr val="000000"/>
+                </a:solidFill>
+                <a:ea typeface="Inter"/>
+              </a:rPr>
+              <a:t> </a:t>
+            </a:r>
+            <a:r>
+              <a:rPr lang="en-US" sz="2400" dirty="0" err="1">
+                <a:solidFill>
+                  <a:srgbClr val="000000"/>
+                </a:solidFill>
+                <a:ea typeface="Inter"/>
+              </a:rPr>
+              <a:t>elemendid</a:t>
+            </a:r>
+            <a:r>
+              <a:rPr lang="en-US" sz="2400" dirty="0">
+                <a:solidFill>
+                  <a:srgbClr val="000000"/>
+                </a:solidFill>
+                <a:ea typeface="Inter"/>
+              </a:rPr>
+              <a:t>?</a:t>
+            </a:r>
+          </a:p>
+          <a:p>
+            <a:pPr>
+              <a:lnSpc>
+                <a:spcPct val="150000"/>
+              </a:lnSpc>
+              <a:buClr>
+                <a:srgbClr val="121212"/>
+              </a:buClr>
+            </a:pPr>
+            <a:r>
+              <a:rPr lang="en-US" sz="2400" dirty="0" err="1">
+                <a:solidFill>
+                  <a:srgbClr val="000000"/>
+                </a:solidFill>
+                <a:ea typeface="Inter"/>
+              </a:rPr>
+              <a:t>Pealkirjad</a:t>
+            </a:r>
+            <a:r>
+              <a:rPr lang="en-US" sz="2400" dirty="0">
+                <a:solidFill>
+                  <a:srgbClr val="000000"/>
+                </a:solidFill>
+                <a:ea typeface="Inter"/>
+              </a:rPr>
+              <a:t> üle vaadata</a:t>
+            </a:r>
+          </a:p>
+          <a:p>
+            <a:pPr marL="0" indent="0">
+              <a:lnSpc>
+                <a:spcPct val="150000"/>
+              </a:lnSpc>
+              <a:buNone/>
+            </a:pPr>
+            <a:endParaRPr lang="en-US" sz="2400" dirty="0">
+              <a:solidFill>
+                <a:srgbClr val="000000"/>
+              </a:solidFill>
+              <a:ea typeface="Inter"/>
+            </a:endParaRPr>
+          </a:p>
+          <a:p>
+            <a:pPr>
+              <a:lnSpc>
+                <a:spcPct val="150000"/>
+              </a:lnSpc>
+            </a:pPr>
+            <a:endParaRPr lang="en-US" sz="2400" dirty="0">
+              <a:solidFill>
+                <a:srgbClr val="000000"/>
+              </a:solidFill>
+              <a:ea typeface="Inter"/>
+            </a:endParaRPr>
+          </a:p>
+        </p:txBody>
+      </p:sp>
+    </p:spTree>
+    <p:extLst>
+      <p:ext uri="{BB962C8B-B14F-4D97-AF65-F5344CB8AC3E}">
+        <p14:creationId xmlns:p14="http://schemas.microsoft.com/office/powerpoint/2010/main" val="128759722"/>
+      </p:ext>
+    </p:extLst>
+  </p:cSld>
+  <p:clrMapOvr>
+    <a:masterClrMapping/>
+  </p:clrMapOvr>
+</p:sld>
+</file>
+
+<file path=ppt/slides/slide23.xml><?xml version="1.0" encoding="utf-8"?>
+<p:sld xmlns:a="http://schemas.openxmlformats.org/drawingml/2006/main" xmlns:r="http://schemas.openxmlformats.org/officeDocument/2006/relationships" xmlns:p="http://schemas.openxmlformats.org/presentationml/2006/main">
+  <p:cSld>
+    <p:spTree>
+      <p:nvGrpSpPr>
         <p:cNvPr id="1" name="">
           <a:extLst>
             <a:ext uri="{FF2B5EF4-FFF2-40B4-BE49-F238E27FC236}">
@@ -29217,7 +29777,7 @@
 </p:sld>
 </file>
 
-<file path=ppt/slides/slide21.xml><?xml version="1.0" encoding="utf-8"?>
+<file path=ppt/slides/slide24.xml><?xml version="1.0" encoding="utf-8"?>
 <p:sld xmlns:a="http://schemas.openxmlformats.org/drawingml/2006/main" xmlns:r="http://schemas.openxmlformats.org/officeDocument/2006/relationships" xmlns:p="http://schemas.openxmlformats.org/presentationml/2006/main">
   <p:cSld>
     <p:spTree>
@@ -29330,7 +29890,7 @@
 </p:sld>
 </file>
 
-<file path=ppt/slides/slide22.xml><?xml version="1.0" encoding="utf-8"?>
+<file path=ppt/slides/slide25.xml><?xml version="1.0" encoding="utf-8"?>
 <p:sld xmlns:a="http://schemas.openxmlformats.org/drawingml/2006/main" xmlns:r="http://schemas.openxmlformats.org/officeDocument/2006/relationships" xmlns:p="http://schemas.openxmlformats.org/presentationml/2006/main">
   <p:cSld>
     <p:spTree>
@@ -29910,7 +30470,7 @@
 </p:sld>
 </file>
 
-<file path=ppt/slides/slide23.xml><?xml version="1.0" encoding="utf-8"?>
+<file path=ppt/slides/slide26.xml><?xml version="1.0" encoding="utf-8"?>
 <p:sld xmlns:a="http://schemas.openxmlformats.org/drawingml/2006/main" xmlns:r="http://schemas.openxmlformats.org/officeDocument/2006/relationships" xmlns:p="http://schemas.openxmlformats.org/presentationml/2006/main">
   <p:cSld>
     <p:spTree>
@@ -33469,12 +34029,6 @@
 </file>
 
 <file path=customXml/item1.xml><?xml version="1.0" encoding="utf-8"?>
-<p:properties xmlns:p="http://schemas.microsoft.com/office/2006/metadata/properties" xmlns:xsi="http://www.w3.org/2001/XMLSchema-instance" xmlns:pc="http://schemas.microsoft.com/office/infopath/2007/PartnerControls">
-  <documentManagement/>
-</p:properties>
-</file>
-
-<file path=customXml/item2.xml><?xml version="1.0" encoding="utf-8"?>
 <ct:contentTypeSchema xmlns:ct="http://schemas.microsoft.com/office/2006/metadata/contentType" xmlns:ma="http://schemas.microsoft.com/office/2006/metadata/properties/metaAttributes" ct:_="" ma:_="" ma:contentTypeName="Document" ma:contentTypeID="0x010100C4D27B8FA8976546BCD79313C588588D" ma:contentTypeVersion="8" ma:contentTypeDescription="Create a new document." ma:contentTypeScope="" ma:versionID="a112c56f6fe148a79025c76584832af0">
   <xsd:schema xmlns:xsd="http://www.w3.org/2001/XMLSchema" xmlns:xs="http://www.w3.org/2001/XMLSchema" xmlns:p="http://schemas.microsoft.com/office/2006/metadata/properties" xmlns:ns2="a1a2d923-8fea-42f1-bd41-9cdfff65694e" targetNamespace="http://schemas.microsoft.com/office/2006/metadata/properties" ma:root="true" ma:fieldsID="97c8655d467eaa9470a714421e7268c0" ns2:_="">
     <xsd:import namespace="a1a2d923-8fea-42f1-bd41-9cdfff65694e"/>
@@ -33642,7 +34196,7 @@
 </ct:contentTypeSchema>
 </file>
 
-<file path=customXml/item3.xml><?xml version="1.0" encoding="utf-8"?>
+<file path=customXml/item2.xml><?xml version="1.0" encoding="utf-8"?>
 <?mso-contentType ?>
 <FormTemplates xmlns="http://schemas.microsoft.com/sharepoint/v3/contenttype/forms">
   <Display>DocumentLibraryForm</Display>
@@ -33651,16 +34205,13 @@
 </FormTemplates>
 </file>
 
-<file path=customXml/itemProps1.xml><?xml version="1.0" encoding="utf-8"?>
-<ds:datastoreItem xmlns:ds="http://schemas.openxmlformats.org/officeDocument/2006/customXml" ds:itemID="{5BDF4908-A52A-47DD-A794-6E02D71942FC}">
-  <ds:schemaRefs>
-    <ds:schemaRef ds:uri="http://schemas.microsoft.com/office/2006/metadata/properties"/>
-    <ds:schemaRef ds:uri="http://schemas.microsoft.com/office/infopath/2007/PartnerControls"/>
-  </ds:schemaRefs>
-</ds:datastoreItem>
+<file path=customXml/item3.xml><?xml version="1.0" encoding="utf-8"?>
+<p:properties xmlns:p="http://schemas.microsoft.com/office/2006/metadata/properties" xmlns:xsi="http://www.w3.org/2001/XMLSchema-instance" xmlns:pc="http://schemas.microsoft.com/office/infopath/2007/PartnerControls">
+  <documentManagement/>
+</p:properties>
 </file>
 
-<file path=customXml/itemProps2.xml><?xml version="1.0" encoding="utf-8"?>
+<file path=customXml/itemProps1.xml><?xml version="1.0" encoding="utf-8"?>
 <ds:datastoreItem xmlns:ds="http://schemas.openxmlformats.org/officeDocument/2006/customXml" ds:itemID="{9CF4F972-2392-44D0-AA45-41AC4FDC4A59}">
   <ds:schemaRefs>
     <ds:schemaRef ds:uri="a1a2d923-8fea-42f1-bd41-9cdfff65694e"/>
@@ -33678,10 +34229,19 @@
 </ds:datastoreItem>
 </file>
 
-<file path=customXml/itemProps3.xml><?xml version="1.0" encoding="utf-8"?>
+<file path=customXml/itemProps2.xml><?xml version="1.0" encoding="utf-8"?>
 <ds:datastoreItem xmlns:ds="http://schemas.openxmlformats.org/officeDocument/2006/customXml" ds:itemID="{9DC439CA-6F1C-4005-ACA6-A52E04DEE0A7}">
   <ds:schemaRefs>
     <ds:schemaRef ds:uri="http://schemas.microsoft.com/sharepoint/v3/contenttype/forms"/>
   </ds:schemaRefs>
 </ds:datastoreItem>
+</file>
+
+<file path=customXml/itemProps3.xml><?xml version="1.0" encoding="utf-8"?>
+<ds:datastoreItem xmlns:ds="http://schemas.openxmlformats.org/officeDocument/2006/customXml" ds:itemID="{5BDF4908-A52A-47DD-A794-6E02D71942FC}">
+  <ds:schemaRefs>
+    <ds:schemaRef ds:uri="http://schemas.microsoft.com/office/2006/metadata/properties"/>
+    <ds:schemaRef ds:uri="http://schemas.microsoft.com/office/infopath/2007/PartnerControls"/>
+  </ds:schemaRefs>
+</ds:datastoreItem>
 </file>
--- a/Materjalid/Day3 M Visuaalid Andmelugu/3-paev-andmetarkus-esitlus.pptx
+++ b/Materjalid/Day3 M Visuaalid Andmelugu/3-paev-andmetarkus-esitlus.pptx
@@ -5,10 +5,10 @@
     <p:sldMasterId id="2147483648" r:id="rId4"/>
   </p:sldMasterIdLst>
   <p:notesMasterIdLst>
-    <p:notesMasterId r:id="rId31"/>
+    <p:notesMasterId r:id="rId46"/>
   </p:notesMasterIdLst>
   <p:handoutMasterIdLst>
-    <p:handoutMasterId r:id="rId32"/>
+    <p:handoutMasterId r:id="rId47"/>
   </p:handoutMasterIdLst>
   <p:sldIdLst>
     <p:sldId id="417" r:id="rId5"/>
@@ -28,34 +28,49 @@
     <p:sldId id="640" r:id="rId19"/>
     <p:sldId id="484" r:id="rId20"/>
     <p:sldId id="635" r:id="rId21"/>
-    <p:sldId id="588" r:id="rId22"/>
-    <p:sldId id="666" r:id="rId23"/>
-    <p:sldId id="667" r:id="rId24"/>
-    <p:sldId id="668" r:id="rId25"/>
-    <p:sldId id="460" r:id="rId26"/>
-    <p:sldId id="461" r:id="rId27"/>
-    <p:sldId id="581" r:id="rId28"/>
-    <p:sldId id="503" r:id="rId29"/>
-    <p:sldId id="642" r:id="rId30"/>
+    <p:sldId id="256" r:id="rId22"/>
+    <p:sldId id="257" r:id="rId23"/>
+    <p:sldId id="258" r:id="rId24"/>
+    <p:sldId id="259" r:id="rId25"/>
+    <p:sldId id="260" r:id="rId26"/>
+    <p:sldId id="261" r:id="rId27"/>
+    <p:sldId id="268" r:id="rId28"/>
+    <p:sldId id="269" r:id="rId29"/>
+    <p:sldId id="270" r:id="rId30"/>
+    <p:sldId id="267" r:id="rId31"/>
+    <p:sldId id="265" r:id="rId32"/>
+    <p:sldId id="271" r:id="rId33"/>
+    <p:sldId id="272" r:id="rId34"/>
+    <p:sldId id="273" r:id="rId35"/>
+    <p:sldId id="274" r:id="rId36"/>
+    <p:sldId id="588" r:id="rId37"/>
+    <p:sldId id="666" r:id="rId38"/>
+    <p:sldId id="667" r:id="rId39"/>
+    <p:sldId id="668" r:id="rId40"/>
+    <p:sldId id="460" r:id="rId41"/>
+    <p:sldId id="461" r:id="rId42"/>
+    <p:sldId id="581" r:id="rId43"/>
+    <p:sldId id="503" r:id="rId44"/>
+    <p:sldId id="642" r:id="rId45"/>
   </p:sldIdLst>
   <p:sldSz cx="12192000" cy="6858000"/>
   <p:notesSz cx="6858000" cy="9144000"/>
   <p:embeddedFontLst>
     <p:embeddedFont>
       <p:font typeface="Inter" panose="020B0604020202020204" charset="0"/>
-      <p:regular r:id="rId33"/>
-      <p:bold r:id="rId34"/>
-      <p:italic r:id="rId35"/>
-      <p:boldItalic r:id="rId36"/>
+      <p:regular r:id="rId48"/>
+      <p:bold r:id="rId49"/>
+      <p:italic r:id="rId50"/>
+      <p:boldItalic r:id="rId51"/>
     </p:embeddedFont>
     <p:embeddedFont>
       <p:font typeface="Inter Bold" panose="020B0604020202020204" charset="0"/>
-      <p:bold r:id="rId37"/>
+      <p:bold r:id="rId52"/>
     </p:embeddedFont>
     <p:embeddedFont>
       <p:font typeface="Poppins SemiBold" panose="00000700000000000000" pitchFamily="2" charset="-70"/>
-      <p:bold r:id="rId38"/>
-      <p:boldItalic r:id="rId39"/>
+      <p:bold r:id="rId53"/>
+      <p:boldItalic r:id="rId54"/>
     </p:embeddedFont>
   </p:embeddedFontLst>
   <p:defaultTextStyle>
@@ -1270,7 +1285,7 @@
           <a:p>
             <a:fld id="{46699514-027B-49BD-8B49-5054CA40ECF4}" type="slidenum">
               <a:rPr lang="en-US"/>
-              <a:t>18</a:t>
+              <a:t>33</a:t>
             </a:fld>
             <a:endParaRPr lang="en-US"/>
           </a:p>
@@ -1357,7 +1372,7 @@
           <a:p>
             <a:fld id="{46699514-027B-49BD-8B49-5054CA40ECF4}" type="slidenum">
               <a:rPr lang="en-US"/>
-              <a:t>25</a:t>
+              <a:t>40</a:t>
             </a:fld>
             <a:endParaRPr lang="en-US"/>
           </a:p>
@@ -1441,7 +1456,7 @@
           <a:p>
             <a:fld id="{46699514-027B-49BD-8B49-5054CA40ECF4}" type="slidenum">
               <a:rPr lang="en-GB" smtClean="0"/>
-              <a:t>26</a:t>
+              <a:t>41</a:t>
             </a:fld>
             <a:endParaRPr lang="en-GB"/>
           </a:p>
@@ -12660,6 +12675,305 @@
 </p:sldLayout>
 </file>
 
+<file path=ppt/slideLayouts/slideLayout19.xml><?xml version="1.0" encoding="utf-8"?>
+<p:sldLayout xmlns:a="http://schemas.openxmlformats.org/drawingml/2006/main" xmlns:r="http://schemas.openxmlformats.org/officeDocument/2006/relationships" xmlns:p="http://schemas.openxmlformats.org/presentationml/2006/main" showMasterSp="0" type="title">
+  <p:cSld name="Title Slide">
+    <p:spTree>
+      <p:nvGrpSpPr>
+        <p:cNvPr id="1" name=""/>
+        <p:cNvGrpSpPr/>
+        <p:nvPr/>
+      </p:nvGrpSpPr>
+      <p:grpSpPr>
+        <a:xfrm>
+          <a:off x="0" y="0"/>
+          <a:ext cx="0" cy="0"/>
+          <a:chOff x="0" y="0"/>
+          <a:chExt cx="0" cy="0"/>
+        </a:xfrm>
+      </p:grpSpPr>
+      <p:sp>
+        <p:nvSpPr>
+          <p:cNvPr id="7" name="Rectangle 6"/>
+          <p:cNvSpPr/>
+          <p:nvPr/>
+        </p:nvSpPr>
+        <p:spPr>
+          <a:xfrm>
+            <a:off x="0" y="761999"/>
+            <a:ext cx="9141619" cy="5334001"/>
+          </a:xfrm>
+          <a:prstGeom prst="rect">
+            <a:avLst/>
+          </a:prstGeom>
+          <a:solidFill>
+            <a:schemeClr val="accent1"/>
+          </a:solidFill>
+          <a:ln>
+            <a:noFill/>
+          </a:ln>
+        </p:spPr>
+        <p:style>
+          <a:lnRef idx="2">
+            <a:schemeClr val="accent1">
+              <a:shade val="50000"/>
+            </a:schemeClr>
+          </a:lnRef>
+          <a:fillRef idx="1">
+            <a:schemeClr val="accent1"/>
+          </a:fillRef>
+          <a:effectRef idx="0">
+            <a:schemeClr val="accent1"/>
+          </a:effectRef>
+          <a:fontRef idx="minor">
+            <a:schemeClr val="lt1"/>
+          </a:fontRef>
+        </p:style>
+        <p:txBody>
+          <a:bodyPr/>
+          <a:lstStyle/>
+          <a:p>
+            <a:endParaRPr lang="et-EE"/>
+          </a:p>
+        </p:txBody>
+      </p:sp>
+      <p:sp>
+        <p:nvSpPr>
+          <p:cNvPr id="8" name="Rectangle 7"/>
+          <p:cNvSpPr/>
+          <p:nvPr/>
+        </p:nvSpPr>
+        <p:spPr>
+          <a:xfrm>
+            <a:off x="9270263" y="761999"/>
+            <a:ext cx="2925318" cy="5334001"/>
+          </a:xfrm>
+          <a:prstGeom prst="rect">
+            <a:avLst/>
+          </a:prstGeom>
+          <a:solidFill>
+            <a:srgbClr val="C8C8C8">
+              <a:alpha val="49804"/>
+            </a:srgbClr>
+          </a:solidFill>
+          <a:ln>
+            <a:noFill/>
+          </a:ln>
+        </p:spPr>
+        <p:style>
+          <a:lnRef idx="2">
+            <a:schemeClr val="accent1">
+              <a:shade val="50000"/>
+            </a:schemeClr>
+          </a:lnRef>
+          <a:fillRef idx="1">
+            <a:schemeClr val="accent1"/>
+          </a:fillRef>
+          <a:effectRef idx="0">
+            <a:schemeClr val="accent1"/>
+          </a:effectRef>
+          <a:fontRef idx="minor">
+            <a:schemeClr val="lt1"/>
+          </a:fontRef>
+        </p:style>
+        <p:txBody>
+          <a:bodyPr/>
+          <a:lstStyle/>
+          <a:p>
+            <a:endParaRPr lang="et-EE"/>
+          </a:p>
+        </p:txBody>
+      </p:sp>
+      <p:sp>
+        <p:nvSpPr>
+          <p:cNvPr id="2" name="Title 1"/>
+          <p:cNvSpPr>
+            <a:spLocks noGrp="1"/>
+          </p:cNvSpPr>
+          <p:nvPr>
+            <p:ph type="ctrTitle"/>
+          </p:nvPr>
+        </p:nvSpPr>
+        <p:spPr>
+          <a:xfrm>
+            <a:off x="1069848" y="1298448"/>
+            <a:ext cx="7315200" cy="3255264"/>
+          </a:xfrm>
+        </p:spPr>
+        <p:txBody>
+          <a:bodyPr anchor="b">
+            <a:normAutofit/>
+          </a:bodyPr>
+          <a:lstStyle>
+            <a:lvl1pPr algn="l">
+              <a:defRPr sz="5900" spc="-100" baseline="0">
+                <a:solidFill>
+                  <a:srgbClr val="FFFFFF"/>
+                </a:solidFill>
+              </a:defRPr>
+            </a:lvl1pPr>
+          </a:lstStyle>
+          <a:p>
+            <a:r>
+              <a:rPr lang="en-US"/>
+              <a:t>Click to edit Master title style</a:t>
+            </a:r>
+            <a:endParaRPr lang="en-US" dirty="0"/>
+          </a:p>
+        </p:txBody>
+      </p:sp>
+      <p:sp>
+        <p:nvSpPr>
+          <p:cNvPr id="3" name="Subtitle 2"/>
+          <p:cNvSpPr>
+            <a:spLocks noGrp="1"/>
+          </p:cNvSpPr>
+          <p:nvPr>
+            <p:ph type="subTitle" idx="1"/>
+          </p:nvPr>
+        </p:nvSpPr>
+        <p:spPr>
+          <a:xfrm>
+            <a:off x="1100015" y="4670246"/>
+            <a:ext cx="7315200" cy="914400"/>
+          </a:xfrm>
+        </p:spPr>
+        <p:txBody>
+          <a:bodyPr anchor="t">
+            <a:normAutofit/>
+          </a:bodyPr>
+          <a:lstStyle>
+            <a:lvl1pPr marL="0" indent="0" algn="l">
+              <a:buNone/>
+              <a:defRPr sz="2200" cap="none" spc="0" baseline="0">
+                <a:solidFill>
+                  <a:schemeClr val="accent1">
+                    <a:lumMod val="20000"/>
+                    <a:lumOff val="80000"/>
+                  </a:schemeClr>
+                </a:solidFill>
+              </a:defRPr>
+            </a:lvl1pPr>
+            <a:lvl2pPr marL="457200" indent="0" algn="ctr">
+              <a:buNone/>
+              <a:defRPr sz="2200"/>
+            </a:lvl2pPr>
+            <a:lvl3pPr marL="914400" indent="0" algn="ctr">
+              <a:buNone/>
+              <a:defRPr sz="2200"/>
+            </a:lvl3pPr>
+            <a:lvl4pPr marL="1371600" indent="0" algn="ctr">
+              <a:buNone/>
+              <a:defRPr sz="2000"/>
+            </a:lvl4pPr>
+            <a:lvl5pPr marL="1828800" indent="0" algn="ctr">
+              <a:buNone/>
+              <a:defRPr sz="2000"/>
+            </a:lvl5pPr>
+            <a:lvl6pPr marL="2286000" indent="0" algn="ctr">
+              <a:buNone/>
+              <a:defRPr sz="2000"/>
+            </a:lvl6pPr>
+            <a:lvl7pPr marL="2743200" indent="0" algn="ctr">
+              <a:buNone/>
+              <a:defRPr sz="2000"/>
+            </a:lvl7pPr>
+            <a:lvl8pPr marL="3200400" indent="0" algn="ctr">
+              <a:buNone/>
+              <a:defRPr sz="2000"/>
+            </a:lvl8pPr>
+            <a:lvl9pPr marL="3657600" indent="0" algn="ctr">
+              <a:buNone/>
+              <a:defRPr sz="2000"/>
+            </a:lvl9pPr>
+          </a:lstStyle>
+          <a:p>
+            <a:r>
+              <a:rPr lang="en-US"/>
+              <a:t>Click to edit Master subtitle style</a:t>
+            </a:r>
+            <a:endParaRPr lang="en-US" dirty="0"/>
+          </a:p>
+        </p:txBody>
+      </p:sp>
+      <p:sp>
+        <p:nvSpPr>
+          <p:cNvPr id="4" name="Date Placeholder 3"/>
+          <p:cNvSpPr>
+            <a:spLocks noGrp="1"/>
+          </p:cNvSpPr>
+          <p:nvPr>
+            <p:ph type="dt" sz="half" idx="10"/>
+          </p:nvPr>
+        </p:nvSpPr>
+        <p:spPr/>
+        <p:txBody>
+          <a:bodyPr/>
+          <a:lstStyle/>
+          <a:p>
+            <a:fld id="{0351B17E-BCCC-43D6-AB44-9C55EEECE1D8}" type="datetimeFigureOut">
+              <a:rPr lang="en-GB" smtClean="0"/>
+              <a:t>01/09/2026</a:t>
+            </a:fld>
+            <a:endParaRPr lang="en-GB"/>
+          </a:p>
+        </p:txBody>
+      </p:sp>
+      <p:sp>
+        <p:nvSpPr>
+          <p:cNvPr id="5" name="Footer Placeholder 4"/>
+          <p:cNvSpPr>
+            <a:spLocks noGrp="1"/>
+          </p:cNvSpPr>
+          <p:nvPr>
+            <p:ph type="ftr" sz="quarter" idx="11"/>
+          </p:nvPr>
+        </p:nvSpPr>
+        <p:spPr/>
+        <p:txBody>
+          <a:bodyPr/>
+          <a:lstStyle/>
+          <a:p>
+            <a:endParaRPr lang="en-GB"/>
+          </a:p>
+        </p:txBody>
+      </p:sp>
+      <p:sp>
+        <p:nvSpPr>
+          <p:cNvPr id="6" name="Slide Number Placeholder 5"/>
+          <p:cNvSpPr>
+            <a:spLocks noGrp="1"/>
+          </p:cNvSpPr>
+          <p:nvPr>
+            <p:ph type="sldNum" sz="quarter" idx="12"/>
+          </p:nvPr>
+        </p:nvSpPr>
+        <p:spPr/>
+        <p:txBody>
+          <a:bodyPr/>
+          <a:lstStyle/>
+          <a:p>
+            <a:fld id="{B425A396-ED87-4914-AAB3-B5C318C6CF67}" type="slidenum">
+              <a:rPr lang="en-GB" smtClean="0"/>
+              <a:t>‹#›</a:t>
+            </a:fld>
+            <a:endParaRPr lang="en-GB"/>
+          </a:p>
+        </p:txBody>
+      </p:sp>
+    </p:spTree>
+    <p:extLst>
+      <p:ext uri="{BB962C8B-B14F-4D97-AF65-F5344CB8AC3E}">
+        <p14:creationId xmlns:p14="http://schemas.microsoft.com/office/powerpoint/2010/main" val="207144771"/>
+      </p:ext>
+    </p:extLst>
+  </p:cSld>
+  <p:clrMapOvr>
+    <a:masterClrMapping/>
+  </p:clrMapOvr>
+</p:sldLayout>
+</file>
+
 <file path=ppt/slideLayouts/slideLayout2.xml><?xml version="1.0" encoding="utf-8"?>
 <p:sldLayout xmlns:a="http://schemas.openxmlformats.org/drawingml/2006/main" xmlns:r="http://schemas.openxmlformats.org/officeDocument/2006/relationships" xmlns:p="http://schemas.openxmlformats.org/presentationml/2006/main" preserve="1" userDrawn="1">
   <p:cSld name="Title_Large_Dark">
@@ -23915,6 +24229,7 @@
     <p:sldLayoutId id="2147483668" r:id="rId16"/>
     <p:sldLayoutId id="2147483655" r:id="rId17"/>
     <p:sldLayoutId id="2147483677" r:id="rId18"/>
+    <p:sldLayoutId id="2147483678" r:id="rId19"/>
   </p:sldLayoutIdLst>
   <p:txStyles>
     <p:titleStyle>
@@ -26998,13 +27313,7 @@
   <p:cSld>
     <p:spTree>
       <p:nvGrpSpPr>
-        <p:cNvPr id="1" name="">
-          <a:extLst>
-            <a:ext uri="{FF2B5EF4-FFF2-40B4-BE49-F238E27FC236}">
-              <a16:creationId xmlns:a16="http://schemas.microsoft.com/office/drawing/2014/main" id="{6BCD841B-1620-7F64-AABF-17AC8BEADE23}"/>
-            </a:ext>
-          </a:extLst>
-        </p:cNvPr>
+        <p:cNvPr id="1" name=""/>
         <p:cNvGrpSpPr/>
         <p:nvPr/>
       </p:nvGrpSpPr>
@@ -27021,7 +27330,7 @@
           <p:cNvPr id="2" name="Title 1">
             <a:extLst>
               <a:ext uri="{FF2B5EF4-FFF2-40B4-BE49-F238E27FC236}">
-                <a16:creationId xmlns:a16="http://schemas.microsoft.com/office/drawing/2014/main" id="{4EBF5146-E745-CD30-E5D4-2398C96FDCFD}"/>
+                <a16:creationId xmlns:a16="http://schemas.microsoft.com/office/drawing/2014/main" id="{8F6E0539-5FA6-1138-40E1-09530DFAF628}"/>
               </a:ext>
             </a:extLst>
           </p:cNvPr>
@@ -27038,35 +27347,30 @@
           <a:lstStyle/>
           <a:p>
             <a:r>
-              <a:rPr lang="en-US" err="1"/>
-              <a:t>Müükide</a:t>
-            </a:r>
-            <a:r>
-              <a:rPr lang="en-US"/>
-              <a:t> </a:t>
-            </a:r>
-            <a:r>
-              <a:rPr lang="en-US" err="1"/>
-              <a:t>ülevaade</a:t>
-            </a:r>
-            <a:r>
-              <a:rPr lang="en-US"/>
-              <a:t> </a:t>
-            </a:r>
-            <a:r>
-              <a:rPr lang="en-US" err="1"/>
-              <a:t>müügitiimile</a:t>
-            </a:r>
-            <a:endParaRPr lang="en-US"/>
+              <a:rPr lang="en-GB" dirty="0" err="1"/>
+              <a:t>Visualiseerimine</a:t>
+            </a:r>
+            <a:r>
+              <a:rPr lang="en-GB" dirty="0"/>
+              <a:t> </a:t>
+            </a:r>
+            <a:r>
+              <a:rPr lang="en-GB" dirty="0" err="1"/>
+              <a:t>päev</a:t>
+            </a:r>
+            <a:r>
+              <a:rPr lang="en-GB" dirty="0"/>
+              <a:t> 3</a:t>
+            </a:r>
           </a:p>
         </p:txBody>
       </p:sp>
       <p:sp>
         <p:nvSpPr>
-          <p:cNvPr id="3" name="Content Placeholder 2">
+          <p:cNvPr id="3" name="Subtitle 2">
             <a:extLst>
               <a:ext uri="{FF2B5EF4-FFF2-40B4-BE49-F238E27FC236}">
-                <a16:creationId xmlns:a16="http://schemas.microsoft.com/office/drawing/2014/main" id="{21904B09-5239-995B-53EC-8B8446BCCFC9}"/>
+                <a16:creationId xmlns:a16="http://schemas.microsoft.com/office/drawing/2014/main" id="{BDE42FD4-8B43-DD26-754C-0828B634DFA9}"/>
               </a:ext>
             </a:extLst>
           </p:cNvPr>
@@ -27074,7 +27378,7 @@
             <a:spLocks noGrp="1"/>
           </p:cNvSpPr>
           <p:nvPr>
-            <p:ph sz="quarter" idx="10"/>
+            <p:ph type="subTitle" idx="1"/>
           </p:nvPr>
         </p:nvSpPr>
         <p:spPr/>
@@ -27082,218 +27386,14 @@
           <a:bodyPr/>
           <a:lstStyle/>
           <a:p>
-            <a:pPr>
-              <a:lnSpc>
-                <a:spcPct val="150000"/>
-              </a:lnSpc>
-            </a:pPr>
-            <a:r>
-              <a:rPr lang="en-US" sz="2400" err="1">
-                <a:solidFill>
-                  <a:srgbClr val="000000"/>
-                </a:solidFill>
-                <a:ea typeface="+mn-lt"/>
-                <a:cs typeface="+mn-lt"/>
-              </a:rPr>
-              <a:t>Kuidas</a:t>
-            </a:r>
-            <a:r>
-              <a:rPr lang="en-US" sz="2400">
-                <a:solidFill>
-                  <a:srgbClr val="000000"/>
-                </a:solidFill>
-                <a:ea typeface="+mn-lt"/>
-                <a:cs typeface="+mn-lt"/>
-              </a:rPr>
-              <a:t> </a:t>
-            </a:r>
-            <a:r>
-              <a:rPr lang="en-US" sz="2400" err="1">
-                <a:solidFill>
-                  <a:srgbClr val="000000"/>
-                </a:solidFill>
-                <a:ea typeface="+mn-lt"/>
-                <a:cs typeface="+mn-lt"/>
-              </a:rPr>
-              <a:t>edeneb</a:t>
-            </a:r>
-            <a:r>
-              <a:rPr lang="en-US" sz="2400">
-                <a:solidFill>
-                  <a:srgbClr val="000000"/>
-                </a:solidFill>
-                <a:ea typeface="+mn-lt"/>
-                <a:cs typeface="+mn-lt"/>
-              </a:rPr>
-              <a:t> </a:t>
-            </a:r>
-            <a:r>
-              <a:rPr lang="en-US" sz="2400" err="1">
-                <a:solidFill>
-                  <a:srgbClr val="000000"/>
-                </a:solidFill>
-                <a:ea typeface="+mn-lt"/>
-                <a:cs typeface="+mn-lt"/>
-              </a:rPr>
-              <a:t>käesoleval</a:t>
-            </a:r>
-            <a:r>
-              <a:rPr lang="en-US" sz="2400">
-                <a:solidFill>
-                  <a:srgbClr val="000000"/>
-                </a:solidFill>
-                <a:ea typeface="+mn-lt"/>
-                <a:cs typeface="+mn-lt"/>
-              </a:rPr>
-              <a:t> </a:t>
-            </a:r>
-            <a:r>
-              <a:rPr lang="en-US" sz="2400" err="1">
-                <a:solidFill>
-                  <a:srgbClr val="000000"/>
-                </a:solidFill>
-                <a:ea typeface="+mn-lt"/>
-                <a:cs typeface="+mn-lt"/>
-              </a:rPr>
-              <a:t>kuul</a:t>
-            </a:r>
-            <a:r>
-              <a:rPr lang="en-US" sz="2400">
-                <a:solidFill>
-                  <a:srgbClr val="000000"/>
-                </a:solidFill>
-                <a:ea typeface="+mn-lt"/>
-                <a:cs typeface="+mn-lt"/>
-              </a:rPr>
-              <a:t> </a:t>
-            </a:r>
-            <a:r>
-              <a:rPr lang="en-US" sz="2400" err="1">
-                <a:solidFill>
-                  <a:srgbClr val="000000"/>
-                </a:solidFill>
-                <a:ea typeface="+mn-lt"/>
-                <a:cs typeface="+mn-lt"/>
-              </a:rPr>
-              <a:t>eelarve</a:t>
-            </a:r>
-            <a:r>
-              <a:rPr lang="en-US" sz="2400">
-                <a:solidFill>
-                  <a:srgbClr val="000000"/>
-                </a:solidFill>
-                <a:ea typeface="+mn-lt"/>
-                <a:cs typeface="+mn-lt"/>
-              </a:rPr>
-              <a:t> </a:t>
-            </a:r>
-            <a:r>
-              <a:rPr lang="en-US" sz="2400" err="1">
-                <a:solidFill>
-                  <a:srgbClr val="000000"/>
-                </a:solidFill>
-                <a:ea typeface="+mn-lt"/>
-                <a:cs typeface="+mn-lt"/>
-              </a:rPr>
-              <a:t>täitmine</a:t>
-            </a:r>
-            <a:r>
-              <a:rPr lang="en-US" sz="2400">
-                <a:solidFill>
-                  <a:srgbClr val="000000"/>
-                </a:solidFill>
-                <a:ea typeface="+mn-lt"/>
-                <a:cs typeface="+mn-lt"/>
-              </a:rPr>
-              <a:t> </a:t>
-            </a:r>
-            <a:r>
-              <a:rPr lang="en-US" sz="2400" err="1">
-                <a:solidFill>
-                  <a:srgbClr val="000000"/>
-                </a:solidFill>
-                <a:ea typeface="+mn-lt"/>
-                <a:cs typeface="+mn-lt"/>
-              </a:rPr>
-              <a:t>müügiesindajate</a:t>
-            </a:r>
-            <a:r>
-              <a:rPr lang="en-US" sz="2400">
-                <a:solidFill>
-                  <a:srgbClr val="000000"/>
-                </a:solidFill>
-                <a:ea typeface="+mn-lt"/>
-                <a:cs typeface="+mn-lt"/>
-              </a:rPr>
-              <a:t> </a:t>
-            </a:r>
-            <a:r>
-              <a:rPr lang="en-US" sz="2400" err="1">
-                <a:solidFill>
-                  <a:srgbClr val="000000"/>
-                </a:solidFill>
-                <a:ea typeface="+mn-lt"/>
-                <a:cs typeface="+mn-lt"/>
-              </a:rPr>
-              <a:t>kaupa</a:t>
-            </a:r>
-            <a:r>
-              <a:rPr lang="en-US" sz="2400">
-                <a:solidFill>
-                  <a:srgbClr val="000000"/>
-                </a:solidFill>
-                <a:ea typeface="+mn-lt"/>
-                <a:cs typeface="+mn-lt"/>
-              </a:rPr>
-              <a:t>?</a:t>
-            </a:r>
-          </a:p>
-          <a:p>
-            <a:pPr>
-              <a:lnSpc>
-                <a:spcPct val="150000"/>
-              </a:lnSpc>
-            </a:pPr>
-            <a:endParaRPr lang="en-US" sz="2400">
-              <a:solidFill>
-                <a:srgbClr val="000000"/>
-              </a:solidFill>
-              <a:ea typeface="Inter"/>
-            </a:endParaRPr>
-          </a:p>
-          <a:p>
-            <a:pPr marL="0" indent="0">
-              <a:lnSpc>
-                <a:spcPct val="150000"/>
-              </a:lnSpc>
-              <a:buNone/>
-            </a:pPr>
-            <a:endParaRPr lang="en-US" sz="2400">
-              <a:solidFill>
-                <a:srgbClr val="000000"/>
-              </a:solidFill>
-              <a:ea typeface="Inter"/>
-            </a:endParaRPr>
-          </a:p>
-          <a:p>
-            <a:pPr>
-              <a:lnSpc>
-                <a:spcPct val="150000"/>
-              </a:lnSpc>
-            </a:pPr>
-            <a:endParaRPr lang="en-US" sz="2400">
-              <a:solidFill>
-                <a:srgbClr val="000000"/>
-              </a:solidFill>
-              <a:ea typeface="Inter"/>
-            </a:endParaRPr>
+            <a:endParaRPr lang="en-GB"/>
           </a:p>
         </p:txBody>
       </p:sp>
     </p:spTree>
     <p:extLst>
       <p:ext uri="{BB962C8B-B14F-4D97-AF65-F5344CB8AC3E}">
-        <p14:creationId xmlns:p14="http://schemas.microsoft.com/office/powerpoint/2010/main" val="2130150789"/>
+        <p14:creationId xmlns:p14="http://schemas.microsoft.com/office/powerpoint/2010/main" val="1210315300"/>
       </p:ext>
     </p:extLst>
   </p:cSld>
@@ -27325,7 +27425,7 @@
           <p:cNvPr id="2" name="Title 1">
             <a:extLst>
               <a:ext uri="{FF2B5EF4-FFF2-40B4-BE49-F238E27FC236}">
-                <a16:creationId xmlns:a16="http://schemas.microsoft.com/office/drawing/2014/main" id="{34200C85-88E6-D982-59D1-DFBAC8A3E627}"/>
+                <a16:creationId xmlns:a16="http://schemas.microsoft.com/office/drawing/2014/main" id="{C662FC0F-87E5-A764-25BE-2AE9AD903E3C}"/>
               </a:ext>
             </a:extLst>
           </p:cNvPr>
@@ -27342,9 +27442,46 @@
           <a:lstStyle/>
           <a:p>
             <a:r>
-              <a:rPr lang="et-EE" dirty="0"/>
-              <a:t>Millistele küsimustele vastust otsid?</a:t>
-            </a:r>
+              <a:rPr lang="en-GB" dirty="0"/>
+              <a:t>"</a:t>
+            </a:r>
+            <a:r>
+              <a:rPr lang="en-GB" dirty="0" err="1"/>
+              <a:t>ilusaks</a:t>
+            </a:r>
+            <a:r>
+              <a:rPr lang="en-GB" dirty="0"/>
+              <a:t> </a:t>
+            </a:r>
+            <a:r>
+              <a:rPr lang="en-GB" dirty="0" err="1"/>
+              <a:t>tegemine</a:t>
+            </a:r>
+            <a:r>
+              <a:rPr lang="en-GB" dirty="0"/>
+              <a:t>“ </a:t>
+            </a:r>
+            <a:r>
+              <a:rPr lang="en-GB" dirty="0" err="1"/>
+              <a:t>ja</a:t>
+            </a:r>
+            <a:r>
+              <a:rPr lang="en-GB" dirty="0"/>
+              <a:t> </a:t>
+            </a:r>
+            <a:r>
+              <a:rPr lang="en-GB" dirty="0" err="1"/>
+              <a:t>loetavuse</a:t>
+            </a:r>
+            <a:r>
+              <a:rPr lang="en-GB" dirty="0"/>
+              <a:t> </a:t>
+            </a:r>
+            <a:r>
+              <a:rPr lang="en-GB" dirty="0" err="1"/>
+              <a:t>parandamine</a:t>
+            </a:r>
+            <a:endParaRPr lang="en-GB" dirty="0"/>
           </a:p>
         </p:txBody>
       </p:sp>
@@ -27353,7 +27490,7 @@
           <p:cNvPr id="3" name="Content Placeholder 2">
             <a:extLst>
               <a:ext uri="{FF2B5EF4-FFF2-40B4-BE49-F238E27FC236}">
-                <a16:creationId xmlns:a16="http://schemas.microsoft.com/office/drawing/2014/main" id="{272C4812-3AC1-5277-F013-28F80EBC2F26}"/>
+                <a16:creationId xmlns:a16="http://schemas.microsoft.com/office/drawing/2014/main" id="{5D5A1EDC-AFDA-5B89-D444-B15F54AEF90E}"/>
               </a:ext>
             </a:extLst>
           </p:cNvPr>
@@ -27369,93 +27506,335 @@
           <a:bodyPr/>
           <a:lstStyle/>
           <a:p>
-            <a:pPr marL="0" indent="0">
-              <a:buNone/>
-            </a:pPr>
-            <a:r>
-              <a:rPr lang="et-EE" sz="2000" b="1" dirty="0"/>
-              <a:t>● Regioonide ja müüjate lõikes:</a:t>
+            <a:r>
+              <a:rPr lang="en-GB" dirty="0" err="1"/>
+              <a:t>Andmete</a:t>
+            </a:r>
+            <a:r>
+              <a:rPr lang="en-GB" dirty="0"/>
+              <a:t> </a:t>
+            </a:r>
+            <a:r>
+              <a:rPr lang="en-GB" dirty="0" err="1"/>
+              <a:t>visualiseerimine</a:t>
+            </a:r>
+            <a:r>
+              <a:rPr lang="en-GB" dirty="0"/>
+              <a:t> </a:t>
+            </a:r>
+            <a:r>
+              <a:rPr lang="en-GB" dirty="0" err="1"/>
+              <a:t>ei</a:t>
+            </a:r>
+            <a:r>
+              <a:rPr lang="en-GB" dirty="0"/>
+              <a:t> ole </a:t>
+            </a:r>
+            <a:r>
+              <a:rPr lang="en-GB" dirty="0" err="1"/>
+              <a:t>graafikute</a:t>
+            </a:r>
+            <a:r>
+              <a:rPr lang="en-GB" dirty="0"/>
+              <a:t> "</a:t>
+            </a:r>
+            <a:r>
+              <a:rPr lang="en-GB" dirty="0" err="1"/>
+              <a:t>ilusaks</a:t>
+            </a:r>
+            <a:r>
+              <a:rPr lang="en-GB" dirty="0"/>
+              <a:t> </a:t>
+            </a:r>
+            <a:r>
+              <a:rPr lang="en-GB" dirty="0" err="1"/>
+              <a:t>tegemine</a:t>
+            </a:r>
+            <a:r>
+              <a:rPr lang="en-GB" dirty="0"/>
+              <a:t>". See on </a:t>
+            </a:r>
+            <a:r>
+              <a:rPr lang="en-GB" b="1" dirty="0" err="1"/>
+              <a:t>kognitiivse</a:t>
+            </a:r>
+            <a:r>
+              <a:rPr lang="en-GB" b="1" dirty="0"/>
+              <a:t> </a:t>
+            </a:r>
+            <a:r>
+              <a:rPr lang="en-GB" b="1" dirty="0" err="1"/>
+              <a:t>koormuse</a:t>
+            </a:r>
+            <a:r>
+              <a:rPr lang="en-GB" b="1" dirty="0"/>
+              <a:t> </a:t>
+            </a:r>
+            <a:r>
+              <a:rPr lang="en-GB" b="1" dirty="0" err="1"/>
+              <a:t>vähendamine</a:t>
+            </a:r>
+            <a:r>
+              <a:rPr lang="en-GB" dirty="0"/>
+              <a:t>. Kui </a:t>
+            </a:r>
+            <a:r>
+              <a:rPr lang="en-GB" dirty="0" err="1"/>
+              <a:t>juhtkond</a:t>
+            </a:r>
+            <a:r>
+              <a:rPr lang="en-GB" dirty="0"/>
+              <a:t> </a:t>
+            </a:r>
+            <a:r>
+              <a:rPr lang="en-GB" dirty="0" err="1"/>
+              <a:t>või</a:t>
+            </a:r>
+            <a:r>
+              <a:rPr lang="en-GB" dirty="0"/>
+              <a:t> </a:t>
+            </a:r>
+            <a:r>
+              <a:rPr lang="en-GB" dirty="0" err="1"/>
+              <a:t>analüütik</a:t>
+            </a:r>
+            <a:r>
+              <a:rPr lang="en-GB" dirty="0"/>
+              <a:t> </a:t>
+            </a:r>
+            <a:r>
+              <a:rPr lang="en-GB" dirty="0" err="1"/>
+              <a:t>vaatab</a:t>
+            </a:r>
+            <a:r>
+              <a:rPr lang="en-GB" dirty="0"/>
+              <a:t> </a:t>
+            </a:r>
+            <a:r>
+              <a:rPr lang="en-GB" dirty="0" err="1"/>
+              <a:t>raportit</a:t>
+            </a:r>
+            <a:r>
+              <a:rPr lang="en-GB" dirty="0"/>
+              <a:t>, </a:t>
+            </a:r>
+            <a:r>
+              <a:rPr lang="en-GB" dirty="0" err="1"/>
+              <a:t>kulutab</a:t>
+            </a:r>
+            <a:r>
+              <a:rPr lang="en-GB" dirty="0"/>
+              <a:t> </a:t>
+            </a:r>
+            <a:r>
+              <a:rPr lang="en-GB" dirty="0" err="1"/>
+              <a:t>tema</a:t>
+            </a:r>
+            <a:r>
+              <a:rPr lang="en-GB" dirty="0"/>
+              <a:t> </a:t>
+            </a:r>
+            <a:r>
+              <a:rPr lang="en-GB" dirty="0" err="1"/>
+              <a:t>aju</a:t>
+            </a:r>
+            <a:r>
+              <a:rPr lang="en-GB" dirty="0"/>
+              <a:t> </a:t>
+            </a:r>
+            <a:r>
+              <a:rPr lang="en-GB" dirty="0" err="1"/>
+              <a:t>energiat</a:t>
+            </a:r>
+            <a:r>
+              <a:rPr lang="en-GB" dirty="0"/>
+              <a:t> info </a:t>
+            </a:r>
+            <a:r>
+              <a:rPr lang="en-GB" dirty="0" err="1"/>
+              <a:t>dešifreerimiseks</a:t>
+            </a:r>
+            <a:r>
+              <a:rPr lang="en-GB" dirty="0"/>
+              <a:t>. </a:t>
             </a:r>
           </a:p>
           <a:p>
-            <a:pPr marL="0" indent="0">
-              <a:buNone/>
-            </a:pPr>
-            <a:r>
-              <a:rPr lang="et-EE" dirty="0"/>
-              <a:t>○ Millised regioonid toovad kõige suurema kogukasumi ja millised töötavad kahjumiga</a:t>
-            </a:r>
-          </a:p>
-          <a:p>
-            <a:pPr marL="0" indent="0">
-              <a:buNone/>
-            </a:pPr>
-            <a:r>
-              <a:rPr lang="et-EE" dirty="0"/>
-              <a:t>või nulli piiril?</a:t>
-            </a:r>
-          </a:p>
-          <a:p>
-            <a:pPr marL="0" indent="0">
-              <a:buNone/>
-            </a:pPr>
-            <a:r>
-              <a:rPr lang="et-EE" dirty="0"/>
-              <a:t>○ Kas mõni müüja (Salesperson) teeb suurt käivet ainult tänu sellele, et jagab liiga</a:t>
-            </a:r>
-          </a:p>
-          <a:p>
-            <a:pPr marL="0" indent="0">
-              <a:buNone/>
-            </a:pPr>
-            <a:r>
-              <a:rPr lang="et-EE" dirty="0"/>
-              <a:t>kergekäeliselt allahindlusi?</a:t>
-            </a:r>
-          </a:p>
-          <a:p>
-            <a:pPr marL="0" indent="0">
-              <a:buNone/>
-            </a:pPr>
-            <a:r>
-              <a:rPr lang="et-EE" sz="2000" b="1" dirty="0"/>
-              <a:t>● Toodete ja marginaali lõikes:</a:t>
-            </a:r>
-          </a:p>
-          <a:p>
-            <a:pPr marL="0" indent="0">
-              <a:buNone/>
-            </a:pPr>
-            <a:r>
-              <a:rPr lang="et-EE" dirty="0"/>
-              <a:t>○ Millised tootekategooriad on meie "rahamasinad" (kõrge marginaal ja suur maht) ja</a:t>
-            </a:r>
-          </a:p>
-          <a:p>
-            <a:pPr marL="0" indent="0">
-              <a:buNone/>
-            </a:pPr>
-            <a:r>
-              <a:rPr lang="et-EE" dirty="0"/>
-              <a:t>millised võtavad lihtsalt ruumi?</a:t>
-            </a:r>
-          </a:p>
-          <a:p>
-            <a:pPr marL="0" indent="0">
-              <a:buNone/>
-            </a:pPr>
-            <a:r>
-              <a:rPr lang="et-EE" dirty="0"/>
-              <a:t>○ Kas meie allahindluse (Discount) strateegia kasvatab reaalset müügimahtu</a:t>
-            </a:r>
-          </a:p>
-          <a:p>
-            <a:pPr marL="0" indent="0">
-              <a:buNone/>
-            </a:pPr>
-            <a:r>
-              <a:rPr lang="et-EE" dirty="0"/>
-              <a:t>(Quantity) või sööb lihtsalt kasumit?</a:t>
+            <a:r>
+              <a:rPr lang="en-GB" dirty="0" err="1"/>
+              <a:t>Meie</a:t>
+            </a:r>
+            <a:r>
+              <a:rPr lang="en-GB" dirty="0"/>
+              <a:t> </a:t>
+            </a:r>
+            <a:r>
+              <a:rPr lang="en-GB" dirty="0" err="1"/>
+              <a:t>eesmärk</a:t>
+            </a:r>
+            <a:r>
+              <a:rPr lang="en-GB" dirty="0"/>
+              <a:t> </a:t>
+            </a:r>
+            <a:r>
+              <a:rPr lang="en-GB" dirty="0" err="1"/>
+              <a:t>aruande</a:t>
+            </a:r>
+            <a:r>
+              <a:rPr lang="en-GB" dirty="0"/>
+              <a:t> </a:t>
+            </a:r>
+            <a:r>
+              <a:rPr lang="en-GB" dirty="0" err="1"/>
+              <a:t>disainerina</a:t>
+            </a:r>
+            <a:r>
+              <a:rPr lang="en-GB" dirty="0"/>
+              <a:t> on </a:t>
+            </a:r>
+            <a:r>
+              <a:rPr lang="en-GB" dirty="0" err="1"/>
+              <a:t>teha</a:t>
+            </a:r>
+            <a:r>
+              <a:rPr lang="en-GB" dirty="0"/>
+              <a:t> </a:t>
+            </a:r>
+            <a:r>
+              <a:rPr lang="en-GB" dirty="0" err="1"/>
+              <a:t>infost</a:t>
+            </a:r>
+            <a:r>
+              <a:rPr lang="en-GB" dirty="0"/>
+              <a:t> </a:t>
+            </a:r>
+            <a:r>
+              <a:rPr lang="en-GB" dirty="0" err="1"/>
+              <a:t>arusaamine</a:t>
+            </a:r>
+            <a:r>
+              <a:rPr lang="en-GB" dirty="0"/>
+              <a:t> </a:t>
+            </a:r>
+            <a:r>
+              <a:rPr lang="en-GB" dirty="0" err="1"/>
+              <a:t>nii</a:t>
+            </a:r>
+            <a:r>
+              <a:rPr lang="en-GB" dirty="0"/>
+              <a:t> </a:t>
+            </a:r>
+            <a:r>
+              <a:rPr lang="en-GB" dirty="0" err="1"/>
+              <a:t>kiireks</a:t>
+            </a:r>
+            <a:r>
+              <a:rPr lang="en-GB" dirty="0"/>
+              <a:t> </a:t>
+            </a:r>
+            <a:r>
+              <a:rPr lang="en-GB" dirty="0" err="1"/>
+              <a:t>ja</a:t>
+            </a:r>
+            <a:r>
+              <a:rPr lang="en-GB" dirty="0"/>
+              <a:t> </a:t>
+            </a:r>
+            <a:r>
+              <a:rPr lang="en-GB" dirty="0" err="1"/>
+              <a:t>vaevatuks</a:t>
+            </a:r>
+            <a:r>
+              <a:rPr lang="en-GB" dirty="0"/>
+              <a:t>, et </a:t>
+            </a:r>
+            <a:r>
+              <a:rPr lang="en-GB" dirty="0" err="1"/>
+              <a:t>otsustaja</a:t>
+            </a:r>
+            <a:r>
+              <a:rPr lang="en-GB" dirty="0"/>
+              <a:t> </a:t>
+            </a:r>
+            <a:r>
+              <a:rPr lang="en-GB" dirty="0" err="1"/>
+              <a:t>saab</a:t>
+            </a:r>
+            <a:r>
+              <a:rPr lang="en-GB" dirty="0"/>
+              <a:t> </a:t>
+            </a:r>
+            <a:r>
+              <a:rPr lang="en-GB" dirty="0" err="1"/>
+              <a:t>kogu</a:t>
+            </a:r>
+            <a:r>
+              <a:rPr lang="en-GB" dirty="0"/>
+              <a:t> </a:t>
+            </a:r>
+            <a:r>
+              <a:rPr lang="en-GB" dirty="0" err="1"/>
+              <a:t>oma</a:t>
+            </a:r>
+            <a:r>
+              <a:rPr lang="en-GB" dirty="0"/>
+              <a:t> </a:t>
+            </a:r>
+            <a:r>
+              <a:rPr lang="en-GB" dirty="0" err="1"/>
+              <a:t>kognitiivse</a:t>
+            </a:r>
+            <a:r>
+              <a:rPr lang="en-GB" dirty="0"/>
+              <a:t> </a:t>
+            </a:r>
+            <a:r>
+              <a:rPr lang="en-GB" dirty="0" err="1"/>
+              <a:t>ressursi</a:t>
+            </a:r>
+            <a:r>
+              <a:rPr lang="en-GB" dirty="0"/>
+              <a:t> </a:t>
+            </a:r>
+            <a:r>
+              <a:rPr lang="en-GB" dirty="0" err="1"/>
+              <a:t>suunata</a:t>
+            </a:r>
+            <a:r>
+              <a:rPr lang="en-GB" dirty="0"/>
+              <a:t> </a:t>
+            </a:r>
+            <a:r>
+              <a:rPr lang="en-GB" b="1" dirty="0" err="1"/>
+              <a:t>otsustamisele</a:t>
+            </a:r>
+            <a:r>
+              <a:rPr lang="en-GB" dirty="0"/>
+              <a:t>, </a:t>
+            </a:r>
+            <a:r>
+              <a:rPr lang="en-GB" dirty="0" err="1"/>
+              <a:t>mitte</a:t>
+            </a:r>
+            <a:r>
+              <a:rPr lang="en-GB" dirty="0"/>
+              <a:t> </a:t>
+            </a:r>
+            <a:r>
+              <a:rPr lang="en-GB" dirty="0" err="1"/>
+              <a:t>numbrite</a:t>
+            </a:r>
+            <a:r>
+              <a:rPr lang="en-GB" dirty="0"/>
+              <a:t> </a:t>
+            </a:r>
+            <a:r>
+              <a:rPr lang="en-GB" dirty="0" err="1"/>
+              <a:t>tagaajamisele</a:t>
+            </a:r>
+            <a:r>
+              <a:rPr lang="en-GB" dirty="0"/>
+              <a:t>.</a:t>
             </a:r>
           </a:p>
         </p:txBody>
@@ -27463,7 +27842,7 @@
     </p:spTree>
     <p:extLst>
       <p:ext uri="{BB962C8B-B14F-4D97-AF65-F5344CB8AC3E}">
-        <p14:creationId xmlns:p14="http://schemas.microsoft.com/office/powerpoint/2010/main" val="2985737251"/>
+        <p14:creationId xmlns:p14="http://schemas.microsoft.com/office/powerpoint/2010/main" val="3578883938"/>
       </p:ext>
     </p:extLst>
   </p:cSld>
@@ -28460,6 +28839,6897 @@
           <p:cNvPr id="2" name="Title 1">
             <a:extLst>
               <a:ext uri="{FF2B5EF4-FFF2-40B4-BE49-F238E27FC236}">
+                <a16:creationId xmlns:a16="http://schemas.microsoft.com/office/drawing/2014/main" id="{2BCB98CE-E357-1ACA-5323-056E1152FDBF}"/>
+              </a:ext>
+            </a:extLst>
+          </p:cNvPr>
+          <p:cNvSpPr>
+            <a:spLocks noGrp="1"/>
+          </p:cNvSpPr>
+          <p:nvPr>
+            <p:ph type="ctrTitle"/>
+          </p:nvPr>
+        </p:nvSpPr>
+        <p:spPr/>
+        <p:txBody>
+          <a:bodyPr>
+            <a:normAutofit/>
+          </a:bodyPr>
+          <a:lstStyle/>
+          <a:p>
+            <a:r>
+              <a:rPr lang="en-GB" dirty="0"/>
+              <a:t>Power BI-s </a:t>
+            </a:r>
+            <a:r>
+              <a:rPr lang="en-GB" dirty="0" err="1"/>
+              <a:t>kasutame</a:t>
+            </a:r>
+            <a:r>
+              <a:rPr lang="en-GB" dirty="0"/>
+              <a:t> </a:t>
+            </a:r>
+            <a:r>
+              <a:rPr lang="en-GB" dirty="0" err="1"/>
+              <a:t>kolme</a:t>
+            </a:r>
+            <a:r>
+              <a:rPr lang="en-GB" dirty="0"/>
+              <a:t> </a:t>
+            </a:r>
+            <a:r>
+              <a:rPr lang="en-GB" dirty="0" err="1"/>
+              <a:t>põhilist</a:t>
+            </a:r>
+            <a:r>
+              <a:rPr lang="en-GB" dirty="0"/>
+              <a:t> Gestalt-</a:t>
+            </a:r>
+            <a:r>
+              <a:rPr lang="en-GB" dirty="0" err="1"/>
+              <a:t>printsiipi</a:t>
+            </a:r>
+            <a:br>
+              <a:rPr lang="en-GB" dirty="0"/>
+            </a:br>
+            <a:endParaRPr lang="en-GB" dirty="0"/>
+          </a:p>
+        </p:txBody>
+      </p:sp>
+      <p:sp>
+        <p:nvSpPr>
+          <p:cNvPr id="3" name="Content Placeholder 2">
+            <a:extLst>
+              <a:ext uri="{FF2B5EF4-FFF2-40B4-BE49-F238E27FC236}">
+                <a16:creationId xmlns:a16="http://schemas.microsoft.com/office/drawing/2014/main" id="{73B4891B-3DC6-D14C-FE24-76C1BCDF005A}"/>
+              </a:ext>
+            </a:extLst>
+          </p:cNvPr>
+          <p:cNvSpPr>
+            <a:spLocks noGrp="1"/>
+          </p:cNvSpPr>
+          <p:nvPr>
+            <p:ph sz="quarter" idx="10"/>
+          </p:nvPr>
+        </p:nvSpPr>
+        <p:spPr/>
+        <p:txBody>
+          <a:bodyPr>
+            <a:normAutofit fontScale="85000" lnSpcReduction="20000"/>
+          </a:bodyPr>
+          <a:lstStyle/>
+          <a:p>
+            <a:r>
+              <a:rPr lang="en-GB" b="1" dirty="0"/>
+              <a:t>1 </a:t>
+            </a:r>
+            <a:r>
+              <a:rPr lang="en-GB" b="1" dirty="0" err="1"/>
+              <a:t>Läheduse</a:t>
+            </a:r>
+            <a:r>
+              <a:rPr lang="en-GB" b="1" dirty="0"/>
+              <a:t> </a:t>
+            </a:r>
+            <a:r>
+              <a:rPr lang="en-GB" b="1" dirty="0" err="1"/>
+              <a:t>seadus</a:t>
+            </a:r>
+            <a:endParaRPr lang="en-GB" b="1" dirty="0"/>
+          </a:p>
+          <a:p>
+            <a:r>
+              <a:rPr lang="en-GB" b="1" dirty="0" err="1"/>
+              <a:t>Teooria</a:t>
+            </a:r>
+            <a:r>
+              <a:rPr lang="en-GB" b="1" dirty="0"/>
+              <a:t>:</a:t>
+            </a:r>
+            <a:r>
+              <a:rPr lang="en-GB" dirty="0"/>
+              <a:t> </a:t>
+            </a:r>
+            <a:r>
+              <a:rPr lang="en-GB" dirty="0" err="1"/>
+              <a:t>Objektid</a:t>
+            </a:r>
+            <a:r>
+              <a:rPr lang="en-GB" dirty="0"/>
+              <a:t>, mis </a:t>
+            </a:r>
+            <a:r>
+              <a:rPr lang="en-GB" dirty="0" err="1"/>
+              <a:t>asuvad</a:t>
+            </a:r>
+            <a:r>
+              <a:rPr lang="en-GB" dirty="0"/>
+              <a:t> </a:t>
+            </a:r>
+            <a:r>
+              <a:rPr lang="en-GB" dirty="0" err="1"/>
+              <a:t>ruumiliselt</a:t>
+            </a:r>
+            <a:r>
+              <a:rPr lang="en-GB" dirty="0"/>
+              <a:t> </a:t>
+            </a:r>
+            <a:r>
+              <a:rPr lang="en-GB" dirty="0" err="1"/>
+              <a:t>üksteisele</a:t>
+            </a:r>
+            <a:r>
+              <a:rPr lang="en-GB" dirty="0"/>
+              <a:t> </a:t>
+            </a:r>
+            <a:r>
+              <a:rPr lang="en-GB" dirty="0" err="1"/>
+              <a:t>lähedal</a:t>
+            </a:r>
+            <a:r>
+              <a:rPr lang="en-GB" dirty="0"/>
+              <a:t>, </a:t>
+            </a:r>
+            <a:r>
+              <a:rPr lang="en-GB" dirty="0" err="1"/>
+              <a:t>tajutakse</a:t>
+            </a:r>
+            <a:r>
+              <a:rPr lang="en-GB" dirty="0"/>
+              <a:t> </a:t>
+            </a:r>
+            <a:r>
+              <a:rPr lang="en-GB" dirty="0" err="1"/>
+              <a:t>kuuluvalt</a:t>
+            </a:r>
+            <a:r>
+              <a:rPr lang="en-GB" dirty="0"/>
+              <a:t> </a:t>
+            </a:r>
+            <a:r>
+              <a:rPr lang="en-GB" dirty="0" err="1"/>
+              <a:t>ühte</a:t>
+            </a:r>
+            <a:r>
+              <a:rPr lang="en-GB" dirty="0"/>
+              <a:t> </a:t>
+            </a:r>
+            <a:r>
+              <a:rPr lang="en-GB" dirty="0" err="1"/>
+              <a:t>gruppi</a:t>
+            </a:r>
+            <a:r>
+              <a:rPr lang="en-GB" dirty="0"/>
+              <a:t>.</a:t>
+            </a:r>
+          </a:p>
+          <a:p>
+            <a:pPr lvl="1"/>
+            <a:r>
+              <a:rPr lang="en-GB" b="1" dirty="0" err="1"/>
+              <a:t>Mõju</a:t>
+            </a:r>
+            <a:r>
+              <a:rPr lang="en-GB" b="1" dirty="0"/>
+              <a:t> Power BI-s:</a:t>
+            </a:r>
+            <a:r>
+              <a:rPr lang="en-GB" dirty="0"/>
+              <a:t> Kui Sul on </a:t>
+            </a:r>
+            <a:r>
+              <a:rPr lang="en-GB" dirty="0" err="1"/>
+              <a:t>kolm</a:t>
+            </a:r>
+            <a:r>
+              <a:rPr lang="en-GB" dirty="0"/>
+              <a:t> KPI </a:t>
+            </a:r>
+            <a:r>
+              <a:rPr lang="en-GB" dirty="0" err="1"/>
+              <a:t>kaarti</a:t>
+            </a:r>
+            <a:r>
+              <a:rPr lang="en-GB" dirty="0"/>
+              <a:t> (</a:t>
+            </a:r>
+            <a:r>
+              <a:rPr lang="en-GB" i="1" dirty="0" err="1"/>
+              <a:t>Müük</a:t>
+            </a:r>
+            <a:r>
+              <a:rPr lang="en-GB" dirty="0"/>
+              <a:t>, </a:t>
+            </a:r>
+            <a:r>
+              <a:rPr lang="en-GB" i="1" dirty="0" err="1"/>
+              <a:t>Kasum</a:t>
+            </a:r>
+            <a:r>
+              <a:rPr lang="en-GB" dirty="0"/>
+              <a:t>, </a:t>
+            </a:r>
+            <a:r>
+              <a:rPr lang="en-GB" i="1" dirty="0" err="1"/>
+              <a:t>Marginaal</a:t>
+            </a:r>
+            <a:r>
+              <a:rPr lang="en-GB" dirty="0"/>
+              <a:t>) </a:t>
+            </a:r>
+            <a:r>
+              <a:rPr lang="en-GB" dirty="0" err="1"/>
+              <a:t>ja</a:t>
+            </a:r>
+            <a:r>
+              <a:rPr lang="en-GB" dirty="0"/>
+              <a:t> </a:t>
+            </a:r>
+            <a:r>
+              <a:rPr lang="en-GB" dirty="0" err="1"/>
+              <a:t>kaks</a:t>
+            </a:r>
+            <a:r>
+              <a:rPr lang="en-GB" dirty="0"/>
+              <a:t> </a:t>
+            </a:r>
+            <a:r>
+              <a:rPr lang="en-GB" dirty="0" err="1"/>
+              <a:t>filtrit</a:t>
+            </a:r>
+            <a:r>
+              <a:rPr lang="en-GB" dirty="0"/>
+              <a:t> (</a:t>
+            </a:r>
+            <a:r>
+              <a:rPr lang="en-GB" i="1" dirty="0"/>
+              <a:t>Aasta</a:t>
+            </a:r>
+            <a:r>
+              <a:rPr lang="en-GB" dirty="0"/>
+              <a:t>, </a:t>
+            </a:r>
+            <a:r>
+              <a:rPr lang="en-GB" i="1" dirty="0" err="1"/>
+              <a:t>Regioon</a:t>
+            </a:r>
+            <a:r>
+              <a:rPr lang="en-GB" dirty="0"/>
+              <a:t>), </a:t>
+            </a:r>
+            <a:r>
+              <a:rPr lang="en-GB" dirty="0" err="1"/>
+              <a:t>siis</a:t>
+            </a:r>
+            <a:r>
+              <a:rPr lang="en-GB" dirty="0"/>
+              <a:t> </a:t>
+            </a:r>
+            <a:r>
+              <a:rPr lang="en-GB" dirty="0" err="1"/>
+              <a:t>paiguta</a:t>
+            </a:r>
+            <a:r>
+              <a:rPr lang="en-GB" dirty="0"/>
+              <a:t> KPI </a:t>
+            </a:r>
+            <a:r>
+              <a:rPr lang="en-GB" dirty="0" err="1"/>
+              <a:t>kaardid</a:t>
+            </a:r>
+            <a:r>
+              <a:rPr lang="en-GB" dirty="0"/>
+              <a:t> </a:t>
+            </a:r>
+            <a:r>
+              <a:rPr lang="en-GB" dirty="0" err="1"/>
+              <a:t>tihedalt</a:t>
+            </a:r>
+            <a:r>
+              <a:rPr lang="en-GB" dirty="0"/>
+              <a:t> </a:t>
+            </a:r>
+            <a:r>
+              <a:rPr lang="en-GB" dirty="0" err="1"/>
+              <a:t>üksteise</a:t>
+            </a:r>
+            <a:r>
+              <a:rPr lang="en-GB" dirty="0"/>
+              <a:t> </a:t>
+            </a:r>
+            <a:r>
+              <a:rPr lang="en-GB" dirty="0" err="1"/>
+              <a:t>kõrvale</a:t>
+            </a:r>
+            <a:r>
+              <a:rPr lang="en-GB" dirty="0"/>
+              <a:t> </a:t>
+            </a:r>
+            <a:r>
+              <a:rPr lang="en-GB" dirty="0" err="1"/>
+              <a:t>ja</a:t>
+            </a:r>
+            <a:r>
+              <a:rPr lang="en-GB" dirty="0"/>
+              <a:t> </a:t>
+            </a:r>
+            <a:r>
+              <a:rPr lang="en-GB" dirty="0" err="1"/>
+              <a:t>jäta</a:t>
+            </a:r>
+            <a:r>
+              <a:rPr lang="en-GB" dirty="0"/>
+              <a:t> </a:t>
+            </a:r>
+            <a:r>
+              <a:rPr lang="en-GB" dirty="0" err="1"/>
+              <a:t>filtrite</a:t>
+            </a:r>
+            <a:r>
+              <a:rPr lang="en-GB" dirty="0"/>
+              <a:t> </a:t>
+            </a:r>
+            <a:r>
+              <a:rPr lang="en-GB" dirty="0" err="1"/>
+              <a:t>vahele</a:t>
+            </a:r>
+            <a:r>
+              <a:rPr lang="en-GB" dirty="0"/>
+              <a:t> </a:t>
+            </a:r>
+            <a:r>
+              <a:rPr lang="en-GB" dirty="0" err="1"/>
+              <a:t>suurem</a:t>
+            </a:r>
+            <a:r>
+              <a:rPr lang="en-GB" dirty="0"/>
+              <a:t> </a:t>
+            </a:r>
+            <a:r>
+              <a:rPr lang="en-GB" dirty="0" err="1"/>
+              <a:t>tühimik</a:t>
+            </a:r>
+            <a:r>
+              <a:rPr lang="en-GB" dirty="0"/>
+              <a:t> (</a:t>
+            </a:r>
+            <a:r>
+              <a:rPr lang="en-GB" dirty="0" err="1"/>
+              <a:t>valge</a:t>
+            </a:r>
+            <a:r>
+              <a:rPr lang="en-GB" dirty="0"/>
+              <a:t> </a:t>
+            </a:r>
+            <a:r>
+              <a:rPr lang="en-GB" dirty="0" err="1"/>
+              <a:t>ruum</a:t>
+            </a:r>
+            <a:r>
+              <a:rPr lang="en-GB" dirty="0"/>
+              <a:t> </a:t>
+            </a:r>
+            <a:r>
+              <a:rPr lang="en-GB" dirty="0" err="1"/>
+              <a:t>ehk</a:t>
+            </a:r>
+            <a:r>
+              <a:rPr lang="en-GB" dirty="0"/>
+              <a:t> </a:t>
+            </a:r>
+            <a:r>
+              <a:rPr lang="en-GB" i="1" dirty="0"/>
+              <a:t>whitespace</a:t>
+            </a:r>
+            <a:r>
+              <a:rPr lang="en-GB" dirty="0"/>
+              <a:t>).</a:t>
+            </a:r>
+          </a:p>
+          <a:p>
+            <a:pPr lvl="1"/>
+            <a:r>
+              <a:rPr lang="en-GB" b="1" dirty="0"/>
+              <a:t>Viga, </a:t>
+            </a:r>
+            <a:r>
+              <a:rPr lang="en-GB" b="1" dirty="0" err="1"/>
+              <a:t>mida</a:t>
+            </a:r>
+            <a:r>
+              <a:rPr lang="en-GB" b="1" dirty="0"/>
+              <a:t> </a:t>
+            </a:r>
+            <a:r>
+              <a:rPr lang="en-GB" b="1" dirty="0" err="1"/>
+              <a:t>vältida</a:t>
+            </a:r>
+            <a:r>
+              <a:rPr lang="en-GB" b="1" dirty="0"/>
+              <a:t>:</a:t>
+            </a:r>
+            <a:r>
+              <a:rPr lang="en-GB" dirty="0"/>
+              <a:t> </a:t>
+            </a:r>
+            <a:r>
+              <a:rPr lang="en-GB" dirty="0" err="1"/>
+              <a:t>Graafikute</a:t>
+            </a:r>
+            <a:r>
+              <a:rPr lang="en-GB" dirty="0"/>
+              <a:t> </a:t>
+            </a:r>
+            <a:r>
+              <a:rPr lang="en-GB" dirty="0" err="1"/>
+              <a:t>pillutamine</a:t>
+            </a:r>
+            <a:r>
+              <a:rPr lang="en-GB" dirty="0"/>
+              <a:t> </a:t>
+            </a:r>
+            <a:r>
+              <a:rPr lang="en-GB" dirty="0" err="1"/>
+              <a:t>üle</a:t>
+            </a:r>
+            <a:r>
+              <a:rPr lang="en-GB" dirty="0"/>
+              <a:t> </a:t>
+            </a:r>
+            <a:r>
+              <a:rPr lang="en-GB" dirty="0" err="1"/>
+              <a:t>ekraani</a:t>
+            </a:r>
+            <a:r>
+              <a:rPr lang="en-GB" dirty="0"/>
+              <a:t> </a:t>
+            </a:r>
+            <a:r>
+              <a:rPr lang="en-GB" dirty="0" err="1"/>
+              <a:t>võrdsete</a:t>
+            </a:r>
+            <a:r>
+              <a:rPr lang="en-GB" dirty="0"/>
+              <a:t> </a:t>
+            </a:r>
+            <a:r>
+              <a:rPr lang="en-GB" dirty="0" err="1"/>
+              <a:t>vahedega</a:t>
+            </a:r>
+            <a:r>
+              <a:rPr lang="en-GB" dirty="0"/>
+              <a:t>. Kui </a:t>
+            </a:r>
+            <a:r>
+              <a:rPr lang="en-GB" dirty="0" err="1"/>
+              <a:t>kõikide</a:t>
+            </a:r>
+            <a:r>
+              <a:rPr lang="en-GB" dirty="0"/>
+              <a:t> </a:t>
+            </a:r>
+            <a:r>
+              <a:rPr lang="en-GB" dirty="0" err="1"/>
+              <a:t>elementide</a:t>
+            </a:r>
+            <a:r>
+              <a:rPr lang="en-GB" dirty="0"/>
+              <a:t> </a:t>
+            </a:r>
+            <a:r>
+              <a:rPr lang="en-GB" dirty="0" err="1"/>
+              <a:t>vahel</a:t>
+            </a:r>
+            <a:r>
+              <a:rPr lang="en-GB" dirty="0"/>
+              <a:t> on </a:t>
+            </a:r>
+            <a:r>
+              <a:rPr lang="en-GB" dirty="0" err="1"/>
+              <a:t>sama</a:t>
+            </a:r>
+            <a:r>
+              <a:rPr lang="en-GB" dirty="0"/>
+              <a:t> </a:t>
+            </a:r>
+            <a:r>
+              <a:rPr lang="en-GB" dirty="0" err="1"/>
+              <a:t>palju</a:t>
+            </a:r>
+            <a:r>
+              <a:rPr lang="en-GB" dirty="0"/>
+              <a:t> </a:t>
+            </a:r>
+            <a:r>
+              <a:rPr lang="en-GB" dirty="0" err="1"/>
+              <a:t>ruumi</a:t>
+            </a:r>
+            <a:r>
+              <a:rPr lang="en-GB" dirty="0"/>
+              <a:t>, </a:t>
+            </a:r>
+            <a:r>
+              <a:rPr lang="en-GB" dirty="0" err="1"/>
+              <a:t>ei</a:t>
+            </a:r>
+            <a:r>
+              <a:rPr lang="en-GB" dirty="0"/>
+              <a:t> </a:t>
+            </a:r>
+            <a:r>
+              <a:rPr lang="en-GB" dirty="0" err="1"/>
+              <a:t>oska</a:t>
+            </a:r>
+            <a:r>
+              <a:rPr lang="en-GB" dirty="0"/>
+              <a:t> </a:t>
+            </a:r>
+            <a:r>
+              <a:rPr lang="en-GB" dirty="0" err="1"/>
+              <a:t>aju</a:t>
+            </a:r>
+            <a:r>
+              <a:rPr lang="en-GB" dirty="0"/>
+              <a:t> </a:t>
+            </a:r>
+            <a:r>
+              <a:rPr lang="en-GB" dirty="0" err="1"/>
+              <a:t>luua</a:t>
+            </a:r>
+            <a:r>
+              <a:rPr lang="en-GB" dirty="0"/>
+              <a:t> </a:t>
+            </a:r>
+            <a:r>
+              <a:rPr lang="en-GB" dirty="0" err="1"/>
+              <a:t>seoseid</a:t>
+            </a:r>
+            <a:r>
+              <a:rPr lang="en-GB" dirty="0"/>
+              <a:t>.</a:t>
+            </a:r>
+          </a:p>
+          <a:p>
+            <a:endParaRPr lang="en-GB" dirty="0"/>
+          </a:p>
+        </p:txBody>
+      </p:sp>
+    </p:spTree>
+    <p:extLst>
+      <p:ext uri="{BB962C8B-B14F-4D97-AF65-F5344CB8AC3E}">
+        <p14:creationId xmlns:p14="http://schemas.microsoft.com/office/powerpoint/2010/main" val="1159359109"/>
+      </p:ext>
+    </p:extLst>
+  </p:cSld>
+  <p:clrMapOvr>
+    <a:masterClrMapping/>
+  </p:clrMapOvr>
+</p:sld>
+</file>
+
+<file path=ppt/slides/slide21.xml><?xml version="1.0" encoding="utf-8"?>
+<p:sld xmlns:a="http://schemas.openxmlformats.org/drawingml/2006/main" xmlns:r="http://schemas.openxmlformats.org/officeDocument/2006/relationships" xmlns:p="http://schemas.openxmlformats.org/presentationml/2006/main">
+  <p:cSld>
+    <p:spTree>
+      <p:nvGrpSpPr>
+        <p:cNvPr id="1" name=""/>
+        <p:cNvGrpSpPr/>
+        <p:nvPr/>
+      </p:nvGrpSpPr>
+      <p:grpSpPr>
+        <a:xfrm>
+          <a:off x="0" y="0"/>
+          <a:ext cx="0" cy="0"/>
+          <a:chOff x="0" y="0"/>
+          <a:chExt cx="0" cy="0"/>
+        </a:xfrm>
+      </p:grpSpPr>
+      <p:sp>
+        <p:nvSpPr>
+          <p:cNvPr id="2" name="Title 1">
+            <a:extLst>
+              <a:ext uri="{FF2B5EF4-FFF2-40B4-BE49-F238E27FC236}">
+                <a16:creationId xmlns:a16="http://schemas.microsoft.com/office/drawing/2014/main" id="{215DF56F-DB3E-2797-A817-3708A0DE1A71}"/>
+              </a:ext>
+            </a:extLst>
+          </p:cNvPr>
+          <p:cNvSpPr>
+            <a:spLocks noGrp="1"/>
+          </p:cNvSpPr>
+          <p:nvPr>
+            <p:ph type="ctrTitle"/>
+          </p:nvPr>
+        </p:nvSpPr>
+        <p:spPr/>
+        <p:txBody>
+          <a:bodyPr/>
+          <a:lstStyle/>
+          <a:p>
+            <a:r>
+              <a:rPr lang="en-GB" dirty="0"/>
+              <a:t>Power BI-s </a:t>
+            </a:r>
+            <a:r>
+              <a:rPr lang="en-GB" dirty="0" err="1"/>
+              <a:t>kasutame</a:t>
+            </a:r>
+            <a:r>
+              <a:rPr lang="en-GB" dirty="0"/>
+              <a:t> </a:t>
+            </a:r>
+            <a:r>
+              <a:rPr lang="en-GB" dirty="0" err="1"/>
+              <a:t>kolme</a:t>
+            </a:r>
+            <a:r>
+              <a:rPr lang="en-GB" dirty="0"/>
+              <a:t> </a:t>
+            </a:r>
+            <a:r>
+              <a:rPr lang="en-GB" dirty="0" err="1"/>
+              <a:t>põhilist</a:t>
+            </a:r>
+            <a:r>
+              <a:rPr lang="en-GB" dirty="0"/>
+              <a:t> Gestalt-</a:t>
+            </a:r>
+            <a:r>
+              <a:rPr lang="en-GB" dirty="0" err="1"/>
+              <a:t>printsiipi</a:t>
+            </a:r>
+            <a:br>
+              <a:rPr lang="en-GB" dirty="0"/>
+            </a:br>
+            <a:endParaRPr lang="en-GB" dirty="0"/>
+          </a:p>
+        </p:txBody>
+      </p:sp>
+      <p:sp>
+        <p:nvSpPr>
+          <p:cNvPr id="3" name="Content Placeholder 2">
+            <a:extLst>
+              <a:ext uri="{FF2B5EF4-FFF2-40B4-BE49-F238E27FC236}">
+                <a16:creationId xmlns:a16="http://schemas.microsoft.com/office/drawing/2014/main" id="{AC098AEB-5B82-1C16-1D0A-20B5D776C22B}"/>
+              </a:ext>
+            </a:extLst>
+          </p:cNvPr>
+          <p:cNvSpPr>
+            <a:spLocks noGrp="1"/>
+          </p:cNvSpPr>
+          <p:nvPr>
+            <p:ph sz="quarter" idx="10"/>
+          </p:nvPr>
+        </p:nvSpPr>
+        <p:spPr/>
+        <p:txBody>
+          <a:bodyPr>
+            <a:normAutofit fontScale="77500" lnSpcReduction="20000"/>
+          </a:bodyPr>
+          <a:lstStyle/>
+          <a:p>
+            <a:pPr lvl="0"/>
+            <a:r>
+              <a:rPr lang="en-GB" b="1" dirty="0"/>
+              <a:t>2 </a:t>
+            </a:r>
+            <a:r>
+              <a:rPr lang="en-GB" b="1" dirty="0" err="1"/>
+              <a:t>Sarnasuse</a:t>
+            </a:r>
+            <a:r>
+              <a:rPr lang="en-GB" b="1" dirty="0"/>
+              <a:t> </a:t>
+            </a:r>
+            <a:r>
+              <a:rPr lang="en-GB" b="1" dirty="0" err="1"/>
+              <a:t>seadus</a:t>
+            </a:r>
+            <a:endParaRPr lang="en-GB" b="1" dirty="0"/>
+          </a:p>
+          <a:p>
+            <a:pPr lvl="1"/>
+            <a:r>
+              <a:rPr lang="en-GB" b="1" dirty="0" err="1"/>
+              <a:t>Teooria</a:t>
+            </a:r>
+            <a:r>
+              <a:rPr lang="en-GB" b="1" dirty="0"/>
+              <a:t>:</a:t>
+            </a:r>
+            <a:r>
+              <a:rPr lang="en-GB" dirty="0"/>
+              <a:t> </a:t>
+            </a:r>
+            <a:r>
+              <a:rPr lang="en-GB" dirty="0" err="1"/>
+              <a:t>Objektid</a:t>
+            </a:r>
+            <a:r>
+              <a:rPr lang="en-GB" dirty="0"/>
+              <a:t>, mis </a:t>
+            </a:r>
+            <a:r>
+              <a:rPr lang="en-GB" dirty="0" err="1"/>
+              <a:t>näevad</a:t>
+            </a:r>
+            <a:r>
+              <a:rPr lang="en-GB" dirty="0"/>
+              <a:t> </a:t>
+            </a:r>
+            <a:r>
+              <a:rPr lang="en-GB" dirty="0" err="1"/>
+              <a:t>välja</a:t>
+            </a:r>
+            <a:r>
+              <a:rPr lang="en-GB" dirty="0"/>
+              <a:t> </a:t>
+            </a:r>
+            <a:r>
+              <a:rPr lang="en-GB" dirty="0" err="1"/>
+              <a:t>sarnased</a:t>
+            </a:r>
+            <a:r>
+              <a:rPr lang="en-GB" dirty="0"/>
+              <a:t> (</a:t>
+            </a:r>
+            <a:r>
+              <a:rPr lang="en-GB" dirty="0" err="1"/>
+              <a:t>sama</a:t>
+            </a:r>
+            <a:r>
+              <a:rPr lang="en-GB" dirty="0"/>
+              <a:t> </a:t>
+            </a:r>
+            <a:r>
+              <a:rPr lang="en-GB" dirty="0" err="1"/>
+              <a:t>värv</a:t>
+            </a:r>
+            <a:r>
+              <a:rPr lang="en-GB" dirty="0"/>
+              <a:t>, </a:t>
+            </a:r>
+            <a:r>
+              <a:rPr lang="en-GB" dirty="0" err="1"/>
+              <a:t>kuju</a:t>
+            </a:r>
+            <a:r>
+              <a:rPr lang="en-GB" dirty="0"/>
+              <a:t>, </a:t>
+            </a:r>
+            <a:r>
+              <a:rPr lang="en-GB" dirty="0" err="1"/>
+              <a:t>suurus</a:t>
+            </a:r>
+            <a:r>
+              <a:rPr lang="en-GB" dirty="0"/>
+              <a:t> </a:t>
+            </a:r>
+            <a:r>
+              <a:rPr lang="en-GB" dirty="0" err="1"/>
+              <a:t>või</a:t>
+            </a:r>
+            <a:r>
+              <a:rPr lang="en-GB" dirty="0"/>
+              <a:t> font), </a:t>
+            </a:r>
+            <a:r>
+              <a:rPr lang="en-GB" dirty="0" err="1"/>
+              <a:t>tajutakse</a:t>
+            </a:r>
+            <a:r>
+              <a:rPr lang="en-GB" dirty="0"/>
+              <a:t> </a:t>
+            </a:r>
+            <a:r>
+              <a:rPr lang="en-GB" dirty="0" err="1"/>
+              <a:t>täitvat</a:t>
+            </a:r>
+            <a:r>
+              <a:rPr lang="en-GB" dirty="0"/>
+              <a:t> </a:t>
+            </a:r>
+            <a:r>
+              <a:rPr lang="en-GB" dirty="0" err="1"/>
+              <a:t>sama</a:t>
+            </a:r>
+            <a:r>
+              <a:rPr lang="en-GB" dirty="0"/>
+              <a:t> </a:t>
+            </a:r>
+            <a:r>
+              <a:rPr lang="en-GB" dirty="0" err="1"/>
+              <a:t>funktsiooni</a:t>
+            </a:r>
+            <a:r>
+              <a:rPr lang="en-GB" dirty="0"/>
+              <a:t> </a:t>
+            </a:r>
+            <a:r>
+              <a:rPr lang="en-GB" dirty="0" err="1"/>
+              <a:t>või</a:t>
+            </a:r>
+            <a:r>
+              <a:rPr lang="en-GB" dirty="0"/>
+              <a:t> </a:t>
+            </a:r>
+            <a:r>
+              <a:rPr lang="en-GB" dirty="0" err="1"/>
+              <a:t>omavat</a:t>
+            </a:r>
+            <a:r>
+              <a:rPr lang="en-GB" dirty="0"/>
+              <a:t> </a:t>
+            </a:r>
+            <a:r>
+              <a:rPr lang="en-GB" dirty="0" err="1"/>
+              <a:t>sama</a:t>
+            </a:r>
+            <a:r>
+              <a:rPr lang="en-GB" dirty="0"/>
+              <a:t> </a:t>
+            </a:r>
+            <a:r>
+              <a:rPr lang="en-GB" dirty="0" err="1"/>
+              <a:t>tähendust</a:t>
+            </a:r>
+            <a:r>
+              <a:rPr lang="en-GB" dirty="0"/>
+              <a:t>.</a:t>
+            </a:r>
+          </a:p>
+          <a:p>
+            <a:pPr lvl="1"/>
+            <a:r>
+              <a:rPr lang="en-GB" b="1" dirty="0" err="1"/>
+              <a:t>Mõju</a:t>
+            </a:r>
+            <a:r>
+              <a:rPr lang="en-GB" b="1" dirty="0"/>
+              <a:t> Power BI-s:</a:t>
+            </a:r>
+            <a:r>
+              <a:rPr lang="en-GB" dirty="0"/>
+              <a:t> </a:t>
+            </a:r>
+            <a:r>
+              <a:rPr lang="en-GB" dirty="0" err="1"/>
+              <a:t>Kasuta</a:t>
+            </a:r>
+            <a:r>
+              <a:rPr lang="en-GB" dirty="0"/>
+              <a:t> </a:t>
+            </a:r>
+            <a:r>
+              <a:rPr lang="en-GB" dirty="0" err="1"/>
+              <a:t>funktsionaalset</a:t>
+            </a:r>
+            <a:r>
+              <a:rPr lang="en-GB" dirty="0"/>
+              <a:t> </a:t>
+            </a:r>
+            <a:r>
+              <a:rPr lang="en-GB" dirty="0" err="1"/>
+              <a:t>järjepidevust</a:t>
+            </a:r>
+            <a:r>
+              <a:rPr lang="en-GB" dirty="0"/>
+              <a:t>. Kui </a:t>
+            </a:r>
+            <a:r>
+              <a:rPr lang="en-GB" dirty="0" err="1"/>
+              <a:t>üks</a:t>
+            </a:r>
+            <a:r>
+              <a:rPr lang="en-GB" dirty="0"/>
+              <a:t> filter (Slicer) on </a:t>
+            </a:r>
+            <a:r>
+              <a:rPr lang="en-GB" dirty="0" err="1"/>
+              <a:t>disainitud</a:t>
+            </a:r>
+            <a:r>
+              <a:rPr lang="en-GB" dirty="0"/>
+              <a:t> </a:t>
+            </a:r>
+            <a:r>
+              <a:rPr lang="en-GB" dirty="0" err="1"/>
+              <a:t>ristkülikukujulise</a:t>
+            </a:r>
+            <a:r>
+              <a:rPr lang="en-GB" dirty="0"/>
+              <a:t> </a:t>
+            </a:r>
+            <a:r>
+              <a:rPr lang="en-GB" dirty="0" err="1"/>
+              <a:t>nupuna</a:t>
+            </a:r>
+            <a:r>
+              <a:rPr lang="en-GB" dirty="0"/>
+              <a:t>, </a:t>
+            </a:r>
+            <a:r>
+              <a:rPr lang="en-GB" dirty="0" err="1"/>
+              <a:t>peavad</a:t>
+            </a:r>
+            <a:r>
+              <a:rPr lang="en-GB" dirty="0"/>
+              <a:t> ka </a:t>
+            </a:r>
+            <a:r>
+              <a:rPr lang="en-GB" dirty="0" err="1"/>
+              <a:t>kõik</a:t>
+            </a:r>
+            <a:r>
+              <a:rPr lang="en-GB" dirty="0"/>
+              <a:t> </a:t>
+            </a:r>
+            <a:r>
+              <a:rPr lang="en-GB" dirty="0" err="1"/>
+              <a:t>teised</a:t>
+            </a:r>
+            <a:r>
+              <a:rPr lang="en-GB" dirty="0"/>
+              <a:t> </a:t>
+            </a:r>
+            <a:r>
+              <a:rPr lang="en-GB" dirty="0" err="1"/>
+              <a:t>filtrid</a:t>
+            </a:r>
+            <a:r>
+              <a:rPr lang="en-GB" dirty="0"/>
+              <a:t> </a:t>
+            </a:r>
+            <a:r>
+              <a:rPr lang="en-GB" dirty="0" err="1"/>
+              <a:t>olema</a:t>
+            </a:r>
+            <a:r>
+              <a:rPr lang="en-GB" dirty="0"/>
+              <a:t> </a:t>
+            </a:r>
+            <a:r>
+              <a:rPr lang="en-GB" dirty="0" err="1"/>
+              <a:t>samasugused</a:t>
+            </a:r>
+            <a:r>
+              <a:rPr lang="en-GB" dirty="0"/>
+              <a:t>. Kui </a:t>
+            </a:r>
+            <a:r>
+              <a:rPr lang="en-GB" dirty="0" err="1"/>
+              <a:t>kasutad</a:t>
+            </a:r>
+            <a:r>
+              <a:rPr lang="en-GB" dirty="0"/>
+              <a:t> </a:t>
+            </a:r>
+            <a:r>
+              <a:rPr lang="en-GB" dirty="0" err="1"/>
+              <a:t>regiooni</a:t>
+            </a:r>
+            <a:r>
+              <a:rPr lang="en-GB" dirty="0"/>
+              <a:t> </a:t>
+            </a:r>
+            <a:r>
+              <a:rPr lang="en-GB" dirty="0" err="1"/>
+              <a:t>andmete</a:t>
+            </a:r>
+            <a:r>
+              <a:rPr lang="en-GB" dirty="0"/>
+              <a:t> </a:t>
+            </a:r>
+            <a:r>
+              <a:rPr lang="en-GB" dirty="0" err="1"/>
+              <a:t>tähistamiseks</a:t>
+            </a:r>
+            <a:r>
+              <a:rPr lang="en-GB" dirty="0"/>
+              <a:t> </a:t>
+            </a:r>
+            <a:r>
+              <a:rPr lang="en-GB" dirty="0" err="1"/>
+              <a:t>tumesiniseid</a:t>
+            </a:r>
+            <a:r>
+              <a:rPr lang="en-GB" dirty="0"/>
+              <a:t> </a:t>
+            </a:r>
+            <a:r>
+              <a:rPr lang="en-GB" dirty="0" err="1"/>
+              <a:t>tulpi</a:t>
+            </a:r>
+            <a:r>
+              <a:rPr lang="en-GB" dirty="0"/>
+              <a:t> </a:t>
+            </a:r>
+            <a:r>
+              <a:rPr lang="en-GB" dirty="0" err="1"/>
+              <a:t>ühel</a:t>
+            </a:r>
+            <a:r>
+              <a:rPr lang="en-GB" dirty="0"/>
+              <a:t> </a:t>
+            </a:r>
+            <a:r>
+              <a:rPr lang="en-GB" dirty="0" err="1"/>
+              <a:t>graafikul</a:t>
+            </a:r>
+            <a:r>
+              <a:rPr lang="en-GB" dirty="0"/>
+              <a:t>, </a:t>
+            </a:r>
+            <a:r>
+              <a:rPr lang="en-GB" dirty="0" err="1"/>
+              <a:t>peab</a:t>
+            </a:r>
+            <a:r>
+              <a:rPr lang="en-GB" dirty="0"/>
+              <a:t> </a:t>
+            </a:r>
+            <a:r>
+              <a:rPr lang="en-GB" dirty="0" err="1"/>
+              <a:t>sama</a:t>
+            </a:r>
+            <a:r>
+              <a:rPr lang="en-GB" dirty="0"/>
+              <a:t> </a:t>
+            </a:r>
+            <a:r>
+              <a:rPr lang="en-GB" dirty="0" err="1"/>
+              <a:t>regioon</a:t>
+            </a:r>
+            <a:r>
+              <a:rPr lang="en-GB" dirty="0"/>
+              <a:t> </a:t>
+            </a:r>
+            <a:r>
+              <a:rPr lang="en-GB" dirty="0" err="1"/>
+              <a:t>olema</a:t>
+            </a:r>
+            <a:r>
+              <a:rPr lang="en-GB" dirty="0"/>
+              <a:t> </a:t>
+            </a:r>
+            <a:r>
+              <a:rPr lang="en-GB" dirty="0" err="1"/>
+              <a:t>tumesinine</a:t>
+            </a:r>
+            <a:r>
+              <a:rPr lang="en-GB" dirty="0"/>
+              <a:t> </a:t>
+            </a:r>
+            <a:r>
+              <a:rPr lang="en-GB" i="1" dirty="0" err="1"/>
+              <a:t>kõikidel</a:t>
+            </a:r>
+            <a:r>
+              <a:rPr lang="en-GB" dirty="0"/>
+              <a:t> </a:t>
+            </a:r>
+            <a:r>
+              <a:rPr lang="en-GB" dirty="0" err="1"/>
+              <a:t>selle</a:t>
+            </a:r>
+            <a:r>
+              <a:rPr lang="en-GB" dirty="0"/>
+              <a:t> </a:t>
+            </a:r>
+            <a:r>
+              <a:rPr lang="en-GB" dirty="0" err="1"/>
+              <a:t>lehe</a:t>
+            </a:r>
+            <a:r>
+              <a:rPr lang="en-GB" dirty="0"/>
+              <a:t> </a:t>
+            </a:r>
+            <a:r>
+              <a:rPr lang="en-GB" dirty="0" err="1"/>
+              <a:t>graafikutel</a:t>
+            </a:r>
+            <a:r>
+              <a:rPr lang="en-GB" dirty="0"/>
+              <a:t>.</a:t>
+            </a:r>
+          </a:p>
+          <a:p>
+            <a:pPr lvl="1"/>
+            <a:r>
+              <a:rPr lang="en-GB" b="1" dirty="0"/>
+              <a:t>Viga, </a:t>
+            </a:r>
+            <a:r>
+              <a:rPr lang="en-GB" b="1" dirty="0" err="1"/>
+              <a:t>mida</a:t>
+            </a:r>
+            <a:r>
+              <a:rPr lang="en-GB" b="1" dirty="0"/>
+              <a:t> </a:t>
+            </a:r>
+            <a:r>
+              <a:rPr lang="en-GB" b="1" dirty="0" err="1"/>
+              <a:t>vältida</a:t>
+            </a:r>
+            <a:r>
+              <a:rPr lang="en-GB" b="1" dirty="0"/>
+              <a:t>:</a:t>
+            </a:r>
+            <a:r>
+              <a:rPr lang="en-GB" dirty="0"/>
+              <a:t> </a:t>
+            </a:r>
+            <a:r>
+              <a:rPr lang="en-GB" dirty="0" err="1"/>
+              <a:t>Värvide</a:t>
+            </a:r>
+            <a:r>
+              <a:rPr lang="en-GB" dirty="0"/>
+              <a:t> </a:t>
+            </a:r>
+            <a:r>
+              <a:rPr lang="en-GB" dirty="0" err="1"/>
+              <a:t>muutmine</a:t>
+            </a:r>
+            <a:r>
+              <a:rPr lang="en-GB" dirty="0"/>
+              <a:t> </a:t>
+            </a:r>
+            <a:r>
+              <a:rPr lang="en-GB" dirty="0" err="1"/>
+              <a:t>graafikult</a:t>
+            </a:r>
+            <a:r>
+              <a:rPr lang="en-GB" dirty="0"/>
+              <a:t> </a:t>
+            </a:r>
+            <a:r>
+              <a:rPr lang="en-GB" dirty="0" err="1"/>
+              <a:t>graafikule</a:t>
+            </a:r>
+            <a:r>
+              <a:rPr lang="en-GB" dirty="0"/>
+              <a:t>. Kui </a:t>
+            </a:r>
+            <a:r>
+              <a:rPr lang="en-GB" dirty="0" err="1"/>
+              <a:t>esimesel</a:t>
+            </a:r>
+            <a:r>
+              <a:rPr lang="en-GB" dirty="0"/>
+              <a:t> </a:t>
+            </a:r>
+            <a:r>
+              <a:rPr lang="en-GB" dirty="0" err="1"/>
+              <a:t>graafikul</a:t>
+            </a:r>
+            <a:r>
+              <a:rPr lang="en-GB" dirty="0"/>
+              <a:t> on VanArsdel </a:t>
+            </a:r>
+            <a:r>
+              <a:rPr lang="en-GB" dirty="0" err="1"/>
+              <a:t>sinine</a:t>
+            </a:r>
+            <a:r>
+              <a:rPr lang="en-GB" dirty="0"/>
+              <a:t> </a:t>
+            </a:r>
+            <a:r>
+              <a:rPr lang="en-GB" dirty="0" err="1"/>
+              <a:t>ja</a:t>
+            </a:r>
+            <a:r>
+              <a:rPr lang="en-GB" dirty="0"/>
+              <a:t> </a:t>
+            </a:r>
+            <a:r>
+              <a:rPr lang="en-GB" dirty="0" err="1"/>
+              <a:t>teisel</a:t>
+            </a:r>
+            <a:r>
+              <a:rPr lang="en-GB" dirty="0"/>
+              <a:t> </a:t>
+            </a:r>
+            <a:r>
+              <a:rPr lang="en-GB" dirty="0" err="1"/>
+              <a:t>roheline</a:t>
+            </a:r>
+            <a:r>
+              <a:rPr lang="en-GB" dirty="0"/>
+              <a:t>, </a:t>
+            </a:r>
+            <a:r>
+              <a:rPr lang="en-GB" dirty="0" err="1"/>
+              <a:t>kulutab</a:t>
+            </a:r>
+            <a:r>
+              <a:rPr lang="en-GB" dirty="0"/>
+              <a:t> </a:t>
+            </a:r>
+            <a:r>
+              <a:rPr lang="en-GB" dirty="0" err="1"/>
+              <a:t>kasutaja</a:t>
+            </a:r>
+            <a:r>
+              <a:rPr lang="en-GB" dirty="0"/>
+              <a:t> </a:t>
+            </a:r>
+            <a:r>
+              <a:rPr lang="en-GB" dirty="0" err="1"/>
+              <a:t>aju</a:t>
+            </a:r>
+            <a:r>
+              <a:rPr lang="en-GB" dirty="0"/>
+              <a:t> </a:t>
+            </a:r>
+            <a:r>
+              <a:rPr lang="en-GB" dirty="0" err="1"/>
+              <a:t>aega</a:t>
+            </a:r>
+            <a:r>
+              <a:rPr lang="en-GB" dirty="0"/>
+              <a:t> </a:t>
+            </a:r>
+            <a:r>
+              <a:rPr lang="en-GB" dirty="0" err="1"/>
+              <a:t>ümberharjumisele</a:t>
+            </a:r>
+            <a:r>
+              <a:rPr lang="en-GB" dirty="0"/>
+              <a:t>.</a:t>
+            </a:r>
+          </a:p>
+          <a:p>
+            <a:endParaRPr lang="en-GB" dirty="0"/>
+          </a:p>
+        </p:txBody>
+      </p:sp>
+    </p:spTree>
+    <p:extLst>
+      <p:ext uri="{BB962C8B-B14F-4D97-AF65-F5344CB8AC3E}">
+        <p14:creationId xmlns:p14="http://schemas.microsoft.com/office/powerpoint/2010/main" val="3169728120"/>
+      </p:ext>
+    </p:extLst>
+  </p:cSld>
+  <p:clrMapOvr>
+    <a:masterClrMapping/>
+  </p:clrMapOvr>
+</p:sld>
+</file>
+
+<file path=ppt/slides/slide22.xml><?xml version="1.0" encoding="utf-8"?>
+<p:sld xmlns:a="http://schemas.openxmlformats.org/drawingml/2006/main" xmlns:r="http://schemas.openxmlformats.org/officeDocument/2006/relationships" xmlns:p="http://schemas.openxmlformats.org/presentationml/2006/main">
+  <p:cSld>
+    <p:spTree>
+      <p:nvGrpSpPr>
+        <p:cNvPr id="1" name=""/>
+        <p:cNvGrpSpPr/>
+        <p:nvPr/>
+      </p:nvGrpSpPr>
+      <p:grpSpPr>
+        <a:xfrm>
+          <a:off x="0" y="0"/>
+          <a:ext cx="0" cy="0"/>
+          <a:chOff x="0" y="0"/>
+          <a:chExt cx="0" cy="0"/>
+        </a:xfrm>
+      </p:grpSpPr>
+      <p:sp>
+        <p:nvSpPr>
+          <p:cNvPr id="2" name="Title 1">
+            <a:extLst>
+              <a:ext uri="{FF2B5EF4-FFF2-40B4-BE49-F238E27FC236}">
+                <a16:creationId xmlns:a16="http://schemas.microsoft.com/office/drawing/2014/main" id="{EB25FEE9-EFA6-CA17-18B9-D98F96AE8CD1}"/>
+              </a:ext>
+            </a:extLst>
+          </p:cNvPr>
+          <p:cNvSpPr>
+            <a:spLocks noGrp="1"/>
+          </p:cNvSpPr>
+          <p:nvPr>
+            <p:ph type="ctrTitle"/>
+          </p:nvPr>
+        </p:nvSpPr>
+        <p:spPr/>
+        <p:txBody>
+          <a:bodyPr/>
+          <a:lstStyle/>
+          <a:p>
+            <a:r>
+              <a:rPr lang="en-GB" dirty="0"/>
+              <a:t>Power BI-s </a:t>
+            </a:r>
+            <a:r>
+              <a:rPr lang="en-GB" dirty="0" err="1"/>
+              <a:t>kasutame</a:t>
+            </a:r>
+            <a:r>
+              <a:rPr lang="en-GB" dirty="0"/>
+              <a:t> </a:t>
+            </a:r>
+            <a:r>
+              <a:rPr lang="en-GB" dirty="0" err="1"/>
+              <a:t>kolme</a:t>
+            </a:r>
+            <a:r>
+              <a:rPr lang="en-GB" dirty="0"/>
+              <a:t> </a:t>
+            </a:r>
+            <a:r>
+              <a:rPr lang="en-GB" dirty="0" err="1"/>
+              <a:t>põhilist</a:t>
+            </a:r>
+            <a:r>
+              <a:rPr lang="en-GB" dirty="0"/>
+              <a:t> Gestalt-</a:t>
+            </a:r>
+            <a:r>
+              <a:rPr lang="en-GB" dirty="0" err="1"/>
+              <a:t>printsiipi</a:t>
+            </a:r>
+            <a:endParaRPr lang="en-GB" dirty="0"/>
+          </a:p>
+        </p:txBody>
+      </p:sp>
+      <p:sp>
+        <p:nvSpPr>
+          <p:cNvPr id="3" name="Content Placeholder 2">
+            <a:extLst>
+              <a:ext uri="{FF2B5EF4-FFF2-40B4-BE49-F238E27FC236}">
+                <a16:creationId xmlns:a16="http://schemas.microsoft.com/office/drawing/2014/main" id="{4522A53B-AA69-4488-E6B9-6FD4FD766D5F}"/>
+              </a:ext>
+            </a:extLst>
+          </p:cNvPr>
+          <p:cNvSpPr>
+            <a:spLocks noGrp="1"/>
+          </p:cNvSpPr>
+          <p:nvPr>
+            <p:ph sz="quarter" idx="10"/>
+          </p:nvPr>
+        </p:nvSpPr>
+        <p:spPr/>
+        <p:txBody>
+          <a:bodyPr/>
+          <a:lstStyle/>
+          <a:p>
+            <a:pPr lvl="0"/>
+            <a:r>
+              <a:rPr lang="en-GB" b="1" dirty="0"/>
+              <a:t>3 </a:t>
+            </a:r>
+            <a:r>
+              <a:rPr lang="en-GB" b="1" dirty="0" err="1"/>
+              <a:t>Joondatuse</a:t>
+            </a:r>
+            <a:r>
+              <a:rPr lang="en-GB" b="1" dirty="0"/>
+              <a:t> </a:t>
+            </a:r>
+            <a:r>
+              <a:rPr lang="en-GB" b="1" dirty="0" err="1"/>
+              <a:t>seadus</a:t>
+            </a:r>
+            <a:endParaRPr lang="en-GB" b="1" dirty="0"/>
+          </a:p>
+          <a:p>
+            <a:pPr lvl="1"/>
+            <a:r>
+              <a:rPr lang="en-GB" b="1" dirty="0" err="1"/>
+              <a:t>Teooria</a:t>
+            </a:r>
+            <a:r>
+              <a:rPr lang="en-GB" b="1" dirty="0"/>
+              <a:t>:</a:t>
+            </a:r>
+            <a:r>
+              <a:rPr lang="en-GB" dirty="0"/>
+              <a:t> </a:t>
+            </a:r>
+            <a:r>
+              <a:rPr lang="en-GB" dirty="0" err="1"/>
+              <a:t>Inimsilm</a:t>
+            </a:r>
+            <a:r>
+              <a:rPr lang="en-GB" dirty="0"/>
+              <a:t> </a:t>
+            </a:r>
+            <a:r>
+              <a:rPr lang="en-GB" dirty="0" err="1"/>
+              <a:t>otsib</a:t>
+            </a:r>
+            <a:r>
+              <a:rPr lang="en-GB" dirty="0"/>
+              <a:t> </a:t>
+            </a:r>
+            <a:r>
+              <a:rPr lang="en-GB" dirty="0" err="1"/>
+              <a:t>instinktiivselt</a:t>
+            </a:r>
+            <a:r>
+              <a:rPr lang="en-GB" dirty="0"/>
+              <a:t> </a:t>
+            </a:r>
+            <a:r>
+              <a:rPr lang="en-GB" dirty="0" err="1"/>
+              <a:t>jooni</a:t>
+            </a:r>
+            <a:r>
+              <a:rPr lang="en-GB" dirty="0"/>
+              <a:t> </a:t>
+            </a:r>
+            <a:r>
+              <a:rPr lang="en-GB" dirty="0" err="1"/>
+              <a:t>ja</a:t>
+            </a:r>
+            <a:r>
+              <a:rPr lang="en-GB" dirty="0"/>
+              <a:t> </a:t>
+            </a:r>
+            <a:r>
+              <a:rPr lang="en-GB" dirty="0" err="1"/>
+              <a:t>seoseid</a:t>
+            </a:r>
+            <a:r>
+              <a:rPr lang="en-GB" dirty="0"/>
+              <a:t>. </a:t>
+            </a:r>
+            <a:r>
+              <a:rPr lang="en-GB" dirty="0" err="1"/>
+              <a:t>Sirgjooneliselt</a:t>
+            </a:r>
+            <a:r>
+              <a:rPr lang="en-GB" dirty="0"/>
+              <a:t> </a:t>
+            </a:r>
+            <a:r>
+              <a:rPr lang="en-GB" dirty="0" err="1"/>
+              <a:t>joondatud</a:t>
+            </a:r>
+            <a:r>
+              <a:rPr lang="en-GB" dirty="0"/>
+              <a:t> </a:t>
+            </a:r>
+            <a:r>
+              <a:rPr lang="en-GB" dirty="0" err="1"/>
+              <a:t>elemendid</a:t>
+            </a:r>
+            <a:r>
+              <a:rPr lang="en-GB" dirty="0"/>
+              <a:t> </a:t>
+            </a:r>
+            <a:r>
+              <a:rPr lang="en-GB" dirty="0" err="1"/>
+              <a:t>mõjuvad</a:t>
+            </a:r>
+            <a:r>
+              <a:rPr lang="en-GB" dirty="0"/>
+              <a:t> </a:t>
+            </a:r>
+            <a:r>
+              <a:rPr lang="en-GB" dirty="0" err="1"/>
+              <a:t>usaldusväärselt</a:t>
+            </a:r>
+            <a:r>
+              <a:rPr lang="en-GB" dirty="0"/>
+              <a:t>, </a:t>
+            </a:r>
+            <a:r>
+              <a:rPr lang="en-GB" dirty="0" err="1"/>
+              <a:t>puhtalt</a:t>
+            </a:r>
+            <a:r>
+              <a:rPr lang="en-GB" dirty="0"/>
+              <a:t> </a:t>
+            </a:r>
+            <a:r>
+              <a:rPr lang="en-GB" dirty="0" err="1"/>
+              <a:t>ja</a:t>
+            </a:r>
+            <a:r>
+              <a:rPr lang="en-GB" dirty="0"/>
+              <a:t> </a:t>
+            </a:r>
+            <a:r>
+              <a:rPr lang="en-GB" dirty="0" err="1"/>
+              <a:t>organiseeritult</a:t>
+            </a:r>
+            <a:r>
+              <a:rPr lang="en-GB" dirty="0"/>
+              <a:t>.</a:t>
+            </a:r>
+          </a:p>
+          <a:p>
+            <a:pPr lvl="1"/>
+            <a:r>
+              <a:rPr lang="en-GB" b="1" dirty="0" err="1"/>
+              <a:t>Mõju</a:t>
+            </a:r>
+            <a:r>
+              <a:rPr lang="en-GB" b="1" dirty="0"/>
+              <a:t> Power BI-s:</a:t>
+            </a:r>
+            <a:r>
+              <a:rPr lang="en-GB" dirty="0"/>
+              <a:t> </a:t>
+            </a:r>
+            <a:r>
+              <a:rPr lang="en-GB" dirty="0" err="1"/>
+              <a:t>Kõik</a:t>
+            </a:r>
+            <a:r>
+              <a:rPr lang="en-GB" dirty="0"/>
+              <a:t> </a:t>
+            </a:r>
+            <a:r>
+              <a:rPr lang="en-GB" dirty="0" err="1"/>
+              <a:t>visuaalide</a:t>
+            </a:r>
+            <a:r>
+              <a:rPr lang="en-GB" dirty="0"/>
+              <a:t> </a:t>
+            </a:r>
+            <a:r>
+              <a:rPr lang="en-GB" dirty="0" err="1"/>
+              <a:t>servad</a:t>
+            </a:r>
+            <a:r>
+              <a:rPr lang="en-GB" dirty="0"/>
+              <a:t> </a:t>
+            </a:r>
+            <a:r>
+              <a:rPr lang="en-GB" dirty="0" err="1"/>
+              <a:t>peavad</a:t>
+            </a:r>
+            <a:r>
+              <a:rPr lang="en-GB" dirty="0"/>
+              <a:t> </a:t>
+            </a:r>
+            <a:r>
+              <a:rPr lang="en-GB" dirty="0" err="1"/>
+              <a:t>olema</a:t>
+            </a:r>
+            <a:r>
+              <a:rPr lang="en-GB" dirty="0"/>
+              <a:t> </a:t>
+            </a:r>
+            <a:r>
+              <a:rPr lang="en-GB" dirty="0" err="1"/>
+              <a:t>täpselt</a:t>
+            </a:r>
+            <a:r>
+              <a:rPr lang="en-GB" dirty="0"/>
+              <a:t> </a:t>
+            </a:r>
+            <a:r>
+              <a:rPr lang="en-GB" dirty="0" err="1"/>
+              <a:t>joondatud</a:t>
+            </a:r>
+            <a:r>
+              <a:rPr lang="en-GB" dirty="0"/>
+              <a:t>. Power BI-s </a:t>
+            </a:r>
+            <a:r>
+              <a:rPr lang="en-GB" dirty="0" err="1"/>
+              <a:t>aitab</a:t>
+            </a:r>
+            <a:r>
+              <a:rPr lang="en-GB" dirty="0"/>
+              <a:t> </a:t>
+            </a:r>
+            <a:r>
+              <a:rPr lang="en-GB" dirty="0" err="1"/>
+              <a:t>seda</a:t>
+            </a:r>
+            <a:r>
+              <a:rPr lang="en-GB" dirty="0"/>
+              <a:t> </a:t>
+            </a:r>
+            <a:r>
+              <a:rPr lang="en-GB" dirty="0" err="1"/>
+              <a:t>teha</a:t>
+            </a:r>
+            <a:r>
+              <a:rPr lang="en-GB" dirty="0"/>
+              <a:t> </a:t>
+            </a:r>
+            <a:r>
+              <a:rPr lang="en-GB" dirty="0" err="1"/>
+              <a:t>tööriist</a:t>
+            </a:r>
+            <a:r>
+              <a:rPr lang="en-GB" dirty="0"/>
+              <a:t> </a:t>
+            </a:r>
+            <a:r>
+              <a:rPr lang="en-GB" i="1" dirty="0"/>
+              <a:t>Format -&gt; Align</a:t>
+            </a:r>
+            <a:r>
+              <a:rPr lang="en-GB" dirty="0"/>
+              <a:t> (Left, Right, Top, Bottom). Kui KPI </a:t>
+            </a:r>
+            <a:r>
+              <a:rPr lang="en-GB" dirty="0" err="1"/>
+              <a:t>kaartide</a:t>
+            </a:r>
+            <a:r>
+              <a:rPr lang="en-GB" dirty="0"/>
+              <a:t> </a:t>
+            </a:r>
+            <a:r>
+              <a:rPr lang="en-GB" dirty="0" err="1"/>
+              <a:t>ülaservad</a:t>
+            </a:r>
+            <a:r>
+              <a:rPr lang="en-GB" dirty="0"/>
+              <a:t> on </a:t>
+            </a:r>
+            <a:r>
+              <a:rPr lang="en-GB" dirty="0" err="1"/>
+              <a:t>nihkes</a:t>
+            </a:r>
+            <a:r>
+              <a:rPr lang="en-GB" dirty="0"/>
+              <a:t> </a:t>
+            </a:r>
+            <a:r>
+              <a:rPr lang="en-GB" dirty="0" err="1"/>
+              <a:t>kasvõi</a:t>
+            </a:r>
+            <a:r>
+              <a:rPr lang="en-GB" dirty="0"/>
+              <a:t> 3 </a:t>
+            </a:r>
+            <a:r>
+              <a:rPr lang="en-GB" dirty="0" err="1"/>
+              <a:t>pikslit</a:t>
+            </a:r>
+            <a:r>
+              <a:rPr lang="en-GB" dirty="0"/>
+              <a:t>, </a:t>
+            </a:r>
+            <a:r>
+              <a:rPr lang="en-GB" dirty="0" err="1"/>
+              <a:t>tajub</a:t>
+            </a:r>
+            <a:r>
+              <a:rPr lang="en-GB" dirty="0"/>
+              <a:t> </a:t>
+            </a:r>
+            <a:r>
+              <a:rPr lang="en-GB" dirty="0" err="1"/>
+              <a:t>kasutaja</a:t>
+            </a:r>
+            <a:r>
+              <a:rPr lang="en-GB" dirty="0"/>
+              <a:t> </a:t>
+            </a:r>
+            <a:r>
+              <a:rPr lang="en-GB" dirty="0" err="1"/>
+              <a:t>raportit</a:t>
+            </a:r>
+            <a:r>
+              <a:rPr lang="en-GB" dirty="0"/>
+              <a:t> </a:t>
+            </a:r>
+            <a:r>
+              <a:rPr lang="en-GB" dirty="0" err="1"/>
+              <a:t>lohaka</a:t>
+            </a:r>
+            <a:r>
+              <a:rPr lang="en-GB" dirty="0"/>
+              <a:t> </a:t>
+            </a:r>
+            <a:r>
+              <a:rPr lang="en-GB" dirty="0" err="1"/>
+              <a:t>ja</a:t>
+            </a:r>
+            <a:r>
+              <a:rPr lang="en-GB" dirty="0"/>
+              <a:t> </a:t>
+            </a:r>
+            <a:r>
+              <a:rPr lang="en-GB" dirty="0" err="1"/>
+              <a:t>ebaprofessionaalsena</a:t>
+            </a:r>
+            <a:r>
+              <a:rPr lang="en-GB" dirty="0"/>
+              <a:t> (</a:t>
+            </a:r>
+            <a:r>
+              <a:rPr lang="en-GB" dirty="0" err="1"/>
+              <a:t>isegi</a:t>
+            </a:r>
+            <a:r>
+              <a:rPr lang="en-GB" dirty="0"/>
+              <a:t> </a:t>
+            </a:r>
+            <a:r>
+              <a:rPr lang="en-GB" dirty="0" err="1"/>
+              <a:t>kui</a:t>
+            </a:r>
+            <a:r>
+              <a:rPr lang="en-GB" dirty="0"/>
+              <a:t> </a:t>
+            </a:r>
+            <a:r>
+              <a:rPr lang="en-GB" dirty="0" err="1"/>
+              <a:t>andmed</a:t>
+            </a:r>
+            <a:r>
+              <a:rPr lang="en-GB" dirty="0"/>
+              <a:t> on </a:t>
+            </a:r>
+            <a:r>
+              <a:rPr lang="en-GB" dirty="0" err="1"/>
+              <a:t>õiged</a:t>
+            </a:r>
+            <a:r>
+              <a:rPr lang="en-GB" dirty="0"/>
+              <a:t>).</a:t>
+            </a:r>
+          </a:p>
+          <a:p>
+            <a:endParaRPr lang="en-GB" dirty="0"/>
+          </a:p>
+        </p:txBody>
+      </p:sp>
+    </p:spTree>
+    <p:extLst>
+      <p:ext uri="{BB962C8B-B14F-4D97-AF65-F5344CB8AC3E}">
+        <p14:creationId xmlns:p14="http://schemas.microsoft.com/office/powerpoint/2010/main" val="3537095062"/>
+      </p:ext>
+    </p:extLst>
+  </p:cSld>
+  <p:clrMapOvr>
+    <a:masterClrMapping/>
+  </p:clrMapOvr>
+</p:sld>
+</file>
+
+<file path=ppt/slides/slide23.xml><?xml version="1.0" encoding="utf-8"?>
+<p:sld xmlns:a="http://schemas.openxmlformats.org/drawingml/2006/main" xmlns:r="http://schemas.openxmlformats.org/officeDocument/2006/relationships" xmlns:p="http://schemas.openxmlformats.org/presentationml/2006/main">
+  <p:cSld>
+    <p:spTree>
+      <p:nvGrpSpPr>
+        <p:cNvPr id="1" name=""/>
+        <p:cNvGrpSpPr/>
+        <p:nvPr/>
+      </p:nvGrpSpPr>
+      <p:grpSpPr>
+        <a:xfrm>
+          <a:off x="0" y="0"/>
+          <a:ext cx="0" cy="0"/>
+          <a:chOff x="0" y="0"/>
+          <a:chExt cx="0" cy="0"/>
+        </a:xfrm>
+      </p:grpSpPr>
+      <p:sp>
+        <p:nvSpPr>
+          <p:cNvPr id="2" name="Title 1">
+            <a:extLst>
+              <a:ext uri="{FF2B5EF4-FFF2-40B4-BE49-F238E27FC236}">
+                <a16:creationId xmlns:a16="http://schemas.microsoft.com/office/drawing/2014/main" id="{2CF679B9-4D69-453A-C79D-05C8B5A46C6D}"/>
+              </a:ext>
+            </a:extLst>
+          </p:cNvPr>
+          <p:cNvSpPr>
+            <a:spLocks noGrp="1"/>
+          </p:cNvSpPr>
+          <p:nvPr>
+            <p:ph type="ctrTitle"/>
+          </p:nvPr>
+        </p:nvSpPr>
+        <p:spPr/>
+        <p:txBody>
+          <a:bodyPr/>
+          <a:lstStyle/>
+          <a:p>
+            <a:r>
+              <a:rPr lang="en-GB" dirty="0"/>
+              <a:t>Power BI-s </a:t>
+            </a:r>
+            <a:r>
+              <a:rPr lang="en-GB" dirty="0" err="1"/>
+              <a:t>kasutame</a:t>
+            </a:r>
+            <a:r>
+              <a:rPr lang="en-GB" dirty="0"/>
+              <a:t> </a:t>
+            </a:r>
+            <a:r>
+              <a:rPr lang="en-GB" dirty="0" err="1"/>
+              <a:t>kolme</a:t>
+            </a:r>
+            <a:r>
+              <a:rPr lang="en-GB" dirty="0"/>
+              <a:t> </a:t>
+            </a:r>
+            <a:r>
+              <a:rPr lang="en-GB" dirty="0" err="1"/>
+              <a:t>põhilist</a:t>
+            </a:r>
+            <a:r>
+              <a:rPr lang="en-GB" dirty="0"/>
+              <a:t> Gestalt-</a:t>
+            </a:r>
+            <a:r>
+              <a:rPr lang="en-GB" dirty="0" err="1"/>
+              <a:t>printsiipi</a:t>
+            </a:r>
+            <a:br>
+              <a:rPr lang="en-GB" dirty="0"/>
+            </a:br>
+            <a:endParaRPr lang="en-GB" dirty="0"/>
+          </a:p>
+        </p:txBody>
+      </p:sp>
+      <p:sp>
+        <p:nvSpPr>
+          <p:cNvPr id="3" name="Content Placeholder 2">
+            <a:extLst>
+              <a:ext uri="{FF2B5EF4-FFF2-40B4-BE49-F238E27FC236}">
+                <a16:creationId xmlns:a16="http://schemas.microsoft.com/office/drawing/2014/main" id="{E61AC225-DD43-995D-E839-357E821065F6}"/>
+              </a:ext>
+            </a:extLst>
+          </p:cNvPr>
+          <p:cNvSpPr>
+            <a:spLocks noGrp="1"/>
+          </p:cNvSpPr>
+          <p:nvPr>
+            <p:ph sz="quarter" idx="10"/>
+          </p:nvPr>
+        </p:nvSpPr>
+        <p:spPr/>
+        <p:txBody>
+          <a:bodyPr>
+            <a:normAutofit fontScale="47500" lnSpcReduction="20000"/>
+          </a:bodyPr>
+          <a:lstStyle/>
+          <a:p>
+            <a:pPr marL="0" indent="0">
+              <a:lnSpc>
+                <a:spcPct val="170000"/>
+              </a:lnSpc>
+              <a:buNone/>
+            </a:pPr>
+            <a:r>
+              <a:rPr lang="en-GB" sz="1600" b="1" dirty="0"/>
+              <a:t>4 </a:t>
+            </a:r>
+            <a:r>
+              <a:rPr lang="en-GB" sz="1600" b="1" dirty="0" err="1"/>
+              <a:t>Värvipsühholoogia</a:t>
+            </a:r>
+            <a:r>
+              <a:rPr lang="en-GB" sz="1600" b="1" dirty="0"/>
+              <a:t> </a:t>
+            </a:r>
+            <a:r>
+              <a:rPr lang="en-GB" sz="1600" b="1" dirty="0" err="1"/>
+              <a:t>ja</a:t>
+            </a:r>
+            <a:r>
+              <a:rPr lang="en-GB" sz="1600" b="1" dirty="0"/>
+              <a:t> "60-30-10" </a:t>
+            </a:r>
+            <a:r>
+              <a:rPr lang="en-GB" sz="1600" b="1" dirty="0" err="1"/>
+              <a:t>reegel</a:t>
+            </a:r>
+            <a:endParaRPr lang="en-GB" sz="1600" b="1" dirty="0"/>
+          </a:p>
+          <a:p>
+            <a:pPr lvl="1">
+              <a:lnSpc>
+                <a:spcPct val="170000"/>
+              </a:lnSpc>
+            </a:pPr>
+            <a:r>
+              <a:rPr lang="en-GB" sz="1600" dirty="0"/>
+              <a:t>Värv on </a:t>
+            </a:r>
+            <a:r>
+              <a:rPr lang="en-GB" sz="1600" dirty="0" err="1"/>
+              <a:t>andmete</a:t>
+            </a:r>
+            <a:r>
+              <a:rPr lang="en-GB" sz="1600" dirty="0"/>
+              <a:t> </a:t>
+            </a:r>
+            <a:r>
+              <a:rPr lang="en-GB" sz="1600" dirty="0" err="1"/>
+              <a:t>visualiseerimises</a:t>
+            </a:r>
+            <a:r>
+              <a:rPr lang="en-GB" sz="1600" dirty="0"/>
+              <a:t> </a:t>
+            </a:r>
+            <a:r>
+              <a:rPr lang="en-GB" sz="1600" dirty="0" err="1"/>
+              <a:t>kõige</a:t>
+            </a:r>
+            <a:r>
+              <a:rPr lang="en-GB" sz="1600" dirty="0"/>
+              <a:t> </a:t>
+            </a:r>
+            <a:r>
+              <a:rPr lang="en-GB" sz="1600" dirty="0" err="1"/>
+              <a:t>võimsam</a:t>
+            </a:r>
+            <a:r>
+              <a:rPr lang="en-GB" sz="1600" dirty="0"/>
+              <a:t> </a:t>
+            </a:r>
+            <a:r>
+              <a:rPr lang="en-GB" sz="1600" dirty="0" err="1"/>
+              <a:t>relv</a:t>
+            </a:r>
+            <a:r>
+              <a:rPr lang="en-GB" sz="1600" dirty="0"/>
+              <a:t>, </a:t>
+            </a:r>
+            <a:r>
+              <a:rPr lang="en-GB" sz="1600" dirty="0" err="1"/>
+              <a:t>kuid</a:t>
+            </a:r>
+            <a:r>
+              <a:rPr lang="en-GB" sz="1600" dirty="0"/>
+              <a:t> </a:t>
+            </a:r>
+            <a:r>
+              <a:rPr lang="en-GB" sz="1600" dirty="0" err="1"/>
+              <a:t>seda</a:t>
+            </a:r>
+            <a:r>
+              <a:rPr lang="en-GB" sz="1600" dirty="0"/>
+              <a:t> </a:t>
+            </a:r>
+            <a:r>
+              <a:rPr lang="en-GB" sz="1600" dirty="0" err="1"/>
+              <a:t>kuritarvitatakse</a:t>
+            </a:r>
+            <a:r>
+              <a:rPr lang="en-GB" sz="1600" dirty="0"/>
+              <a:t> </a:t>
+            </a:r>
+            <a:r>
+              <a:rPr lang="en-GB" sz="1600" dirty="0" err="1"/>
+              <a:t>kõige</a:t>
+            </a:r>
+            <a:r>
+              <a:rPr lang="en-GB" sz="1600" dirty="0"/>
+              <a:t> </a:t>
+            </a:r>
+            <a:r>
+              <a:rPr lang="en-GB" sz="1600" dirty="0" err="1"/>
+              <a:t>sagedamini</a:t>
+            </a:r>
+            <a:r>
+              <a:rPr lang="en-GB" sz="1600" dirty="0"/>
+              <a:t>. </a:t>
+            </a:r>
+            <a:r>
+              <a:rPr lang="en-GB" sz="1600" dirty="0" err="1"/>
+              <a:t>Liiga</a:t>
+            </a:r>
+            <a:r>
+              <a:rPr lang="en-GB" sz="1600" dirty="0"/>
+              <a:t> </a:t>
+            </a:r>
+            <a:r>
+              <a:rPr lang="en-GB" sz="1600" dirty="0" err="1"/>
+              <a:t>palju</a:t>
+            </a:r>
+            <a:r>
+              <a:rPr lang="en-GB" sz="1600" dirty="0"/>
+              <a:t> </a:t>
+            </a:r>
+            <a:r>
+              <a:rPr lang="en-GB" sz="1600" dirty="0" err="1"/>
+              <a:t>värve</a:t>
+            </a:r>
+            <a:r>
+              <a:rPr lang="en-GB" sz="1600" dirty="0"/>
+              <a:t> </a:t>
+            </a:r>
+            <a:r>
+              <a:rPr lang="en-GB" sz="1600" dirty="0" err="1"/>
+              <a:t>tekitab</a:t>
+            </a:r>
+            <a:r>
+              <a:rPr lang="en-GB" sz="1600" dirty="0"/>
+              <a:t> </a:t>
+            </a:r>
+            <a:r>
+              <a:rPr lang="en-GB" sz="1600" dirty="0" err="1"/>
+              <a:t>visuaalset</a:t>
+            </a:r>
+            <a:r>
+              <a:rPr lang="en-GB" sz="1600" dirty="0"/>
+              <a:t> </a:t>
+            </a:r>
+            <a:r>
+              <a:rPr lang="en-GB" sz="1600" dirty="0" err="1"/>
+              <a:t>müra</a:t>
+            </a:r>
+            <a:r>
+              <a:rPr lang="en-GB" sz="1600" dirty="0"/>
+              <a:t> </a:t>
+            </a:r>
+            <a:r>
+              <a:rPr lang="en-GB" sz="1600" dirty="0" err="1"/>
+              <a:t>ja</a:t>
+            </a:r>
+            <a:r>
+              <a:rPr lang="en-GB" sz="1600" dirty="0"/>
+              <a:t> </a:t>
+            </a:r>
+            <a:r>
+              <a:rPr lang="en-GB" sz="1600" dirty="0" err="1"/>
+              <a:t>aju</a:t>
+            </a:r>
+            <a:r>
+              <a:rPr lang="en-GB" sz="1600" dirty="0"/>
+              <a:t> </a:t>
+            </a:r>
+            <a:r>
+              <a:rPr lang="en-GB" sz="1600" dirty="0" err="1"/>
+              <a:t>lülitub</a:t>
+            </a:r>
+            <a:r>
+              <a:rPr lang="en-GB" sz="1600" dirty="0"/>
+              <a:t> </a:t>
+            </a:r>
+            <a:r>
+              <a:rPr lang="en-GB" sz="1600" dirty="0" err="1"/>
+              <a:t>välja</a:t>
+            </a:r>
+            <a:r>
+              <a:rPr lang="en-GB" sz="1600" dirty="0"/>
+              <a:t>.</a:t>
+            </a:r>
+          </a:p>
+          <a:p>
+            <a:pPr marL="0" indent="0">
+              <a:lnSpc>
+                <a:spcPct val="170000"/>
+              </a:lnSpc>
+              <a:buNone/>
+            </a:pPr>
+            <a:r>
+              <a:rPr lang="en-GB" sz="1600" b="1" dirty="0" err="1"/>
+              <a:t>Reegel</a:t>
+            </a:r>
+            <a:r>
+              <a:rPr lang="en-GB" sz="1600" b="1" dirty="0"/>
+              <a:t>: </a:t>
+            </a:r>
+            <a:r>
+              <a:rPr lang="en-GB" sz="1600" b="1" dirty="0" err="1"/>
+              <a:t>Ära</a:t>
+            </a:r>
+            <a:r>
+              <a:rPr lang="en-GB" sz="1600" b="1" dirty="0"/>
+              <a:t> </a:t>
+            </a:r>
+            <a:r>
+              <a:rPr lang="en-GB" sz="1600" b="1" dirty="0" err="1"/>
+              <a:t>kasuta</a:t>
+            </a:r>
+            <a:r>
+              <a:rPr lang="en-GB" sz="1600" b="1" dirty="0"/>
+              <a:t> </a:t>
+            </a:r>
+            <a:r>
+              <a:rPr lang="en-GB" sz="1600" b="1" dirty="0" err="1"/>
+              <a:t>üle</a:t>
+            </a:r>
+            <a:r>
+              <a:rPr lang="en-GB" sz="1600" b="1" dirty="0"/>
+              <a:t> 3 </a:t>
+            </a:r>
+            <a:r>
+              <a:rPr lang="en-GB" sz="1600" b="1" dirty="0" err="1"/>
+              <a:t>põhivärvi</a:t>
+            </a:r>
+            <a:endParaRPr lang="en-GB" sz="1600" b="1" dirty="0"/>
+          </a:p>
+          <a:p>
+            <a:pPr lvl="1">
+              <a:lnSpc>
+                <a:spcPct val="170000"/>
+              </a:lnSpc>
+            </a:pPr>
+            <a:r>
+              <a:rPr lang="en-GB" sz="1600" b="1" dirty="0"/>
+              <a:t>60% </a:t>
+            </a:r>
+            <a:r>
+              <a:rPr lang="en-GB" sz="1600" b="1" dirty="0" err="1"/>
+              <a:t>Domineeriv</a:t>
+            </a:r>
+            <a:r>
+              <a:rPr lang="en-GB" sz="1600" b="1" dirty="0"/>
+              <a:t> </a:t>
+            </a:r>
+            <a:r>
+              <a:rPr lang="en-GB" sz="1600" b="1" dirty="0" err="1"/>
+              <a:t>taustajõud</a:t>
+            </a:r>
+            <a:r>
+              <a:rPr lang="en-GB" sz="1600" b="1" dirty="0"/>
+              <a:t> </a:t>
+            </a:r>
+            <a:r>
+              <a:rPr lang="en-GB" sz="1600" dirty="0"/>
+              <a:t>(Hall/Valge): </a:t>
+            </a:r>
+            <a:r>
+              <a:rPr lang="en-GB" sz="1600" dirty="0" err="1"/>
+              <a:t>Raporti</a:t>
+            </a:r>
+            <a:r>
+              <a:rPr lang="en-GB" sz="1600" dirty="0"/>
+              <a:t> </a:t>
+            </a:r>
+            <a:r>
+              <a:rPr lang="en-GB" sz="1600" dirty="0" err="1"/>
+              <a:t>taust</a:t>
+            </a:r>
+            <a:r>
+              <a:rPr lang="en-GB" sz="1600" dirty="0"/>
+              <a:t>, </a:t>
+            </a:r>
+            <a:r>
+              <a:rPr lang="en-GB" sz="1600" dirty="0" err="1"/>
+              <a:t>graafikute</a:t>
+            </a:r>
+            <a:r>
+              <a:rPr lang="en-GB" sz="1600" dirty="0"/>
+              <a:t> </a:t>
+            </a:r>
+            <a:r>
+              <a:rPr lang="en-GB" sz="1600" dirty="0" err="1"/>
+              <a:t>taustad</a:t>
+            </a:r>
+            <a:r>
+              <a:rPr lang="en-GB" sz="1600" dirty="0"/>
+              <a:t>, </a:t>
+            </a:r>
+            <a:r>
+              <a:rPr lang="en-GB" sz="1600" dirty="0" err="1"/>
+              <a:t>teljed</a:t>
+            </a:r>
+            <a:r>
+              <a:rPr lang="en-GB" sz="1600" dirty="0"/>
+              <a:t> </a:t>
+            </a:r>
+            <a:r>
+              <a:rPr lang="en-GB" sz="1600" dirty="0" err="1"/>
+              <a:t>ja</a:t>
+            </a:r>
+            <a:r>
+              <a:rPr lang="en-GB" sz="1600" dirty="0"/>
+              <a:t> </a:t>
+            </a:r>
+            <a:r>
+              <a:rPr lang="en-GB" sz="1600" dirty="0" err="1"/>
+              <a:t>tekstid</a:t>
+            </a:r>
+            <a:r>
+              <a:rPr lang="en-GB" sz="1600" dirty="0"/>
+              <a:t> </a:t>
+            </a:r>
+            <a:r>
+              <a:rPr lang="en-GB" sz="1600" dirty="0" err="1"/>
+              <a:t>peaksid</a:t>
+            </a:r>
+            <a:r>
+              <a:rPr lang="en-GB" sz="1600" dirty="0"/>
+              <a:t> </a:t>
+            </a:r>
+            <a:r>
+              <a:rPr lang="en-GB" sz="1600" dirty="0" err="1"/>
+              <a:t>olema</a:t>
+            </a:r>
+            <a:r>
+              <a:rPr lang="en-GB" sz="1600" dirty="0"/>
+              <a:t> </a:t>
+            </a:r>
+            <a:r>
+              <a:rPr lang="en-GB" sz="1600" dirty="0" err="1"/>
+              <a:t>neutraalsed</a:t>
+            </a:r>
+            <a:r>
+              <a:rPr lang="en-GB" sz="1600" dirty="0"/>
+              <a:t> (</a:t>
+            </a:r>
+            <a:r>
+              <a:rPr lang="en-GB" sz="1600" dirty="0" err="1"/>
+              <a:t>erinevad</a:t>
+            </a:r>
+            <a:r>
+              <a:rPr lang="en-GB" sz="1600" dirty="0"/>
+              <a:t> halli </a:t>
+            </a:r>
+            <a:r>
+              <a:rPr lang="en-GB" sz="1600" dirty="0" err="1"/>
+              <a:t>varjundid</a:t>
+            </a:r>
+            <a:r>
+              <a:rPr lang="en-GB" sz="1600" dirty="0"/>
+              <a:t> </a:t>
+            </a:r>
+            <a:r>
+              <a:rPr lang="en-GB" sz="1600" dirty="0" err="1"/>
+              <a:t>või</a:t>
+            </a:r>
+            <a:r>
+              <a:rPr lang="en-GB" sz="1600" dirty="0"/>
+              <a:t> </a:t>
+            </a:r>
+            <a:r>
+              <a:rPr lang="en-GB" sz="1600" dirty="0" err="1"/>
+              <a:t>valge</a:t>
+            </a:r>
+            <a:r>
+              <a:rPr lang="en-GB" sz="1600" dirty="0"/>
+              <a:t>). Hall </a:t>
+            </a:r>
+            <a:r>
+              <a:rPr lang="en-GB" sz="1600" dirty="0" err="1"/>
+              <a:t>ei</a:t>
+            </a:r>
+            <a:r>
+              <a:rPr lang="en-GB" sz="1600" dirty="0"/>
+              <a:t> </a:t>
+            </a:r>
+            <a:r>
+              <a:rPr lang="en-GB" sz="1600" dirty="0" err="1"/>
+              <a:t>karju</a:t>
+            </a:r>
+            <a:r>
+              <a:rPr lang="en-GB" sz="1600" dirty="0"/>
+              <a:t> </a:t>
+            </a:r>
+            <a:r>
+              <a:rPr lang="en-GB" sz="1600" dirty="0" err="1"/>
+              <a:t>tähelepanu</a:t>
+            </a:r>
+            <a:r>
+              <a:rPr lang="en-GB" sz="1600" dirty="0"/>
+              <a:t> </a:t>
+            </a:r>
+            <a:r>
+              <a:rPr lang="en-GB" sz="1600" dirty="0" err="1"/>
+              <a:t>järele</a:t>
+            </a:r>
+            <a:r>
+              <a:rPr lang="en-GB" sz="1600" dirty="0"/>
+              <a:t>, see </a:t>
+            </a:r>
+            <a:r>
+              <a:rPr lang="en-GB" sz="1600" dirty="0" err="1"/>
+              <a:t>loob</a:t>
+            </a:r>
+            <a:r>
+              <a:rPr lang="en-GB" sz="1600" dirty="0"/>
+              <a:t> </a:t>
+            </a:r>
+            <a:r>
+              <a:rPr lang="en-GB" sz="1600" dirty="0" err="1"/>
+              <a:t>lõuendi</a:t>
+            </a:r>
+            <a:r>
+              <a:rPr lang="en-GB" sz="1600" dirty="0"/>
+              <a:t>.</a:t>
+            </a:r>
+          </a:p>
+          <a:p>
+            <a:pPr lvl="1">
+              <a:lnSpc>
+                <a:spcPct val="170000"/>
+              </a:lnSpc>
+            </a:pPr>
+            <a:r>
+              <a:rPr lang="en-GB" sz="1600" b="1" dirty="0"/>
+              <a:t>30% </a:t>
+            </a:r>
+            <a:r>
+              <a:rPr lang="en-GB" sz="1600" b="1" dirty="0" err="1"/>
+              <a:t>Struktuurivärv</a:t>
+            </a:r>
+            <a:r>
+              <a:rPr lang="en-GB" sz="1600" b="1" dirty="0"/>
+              <a:t> (</a:t>
+            </a:r>
+            <a:r>
+              <a:rPr lang="en-GB" sz="1600" b="1" dirty="0" err="1"/>
+              <a:t>Brändivärv</a:t>
+            </a:r>
+            <a:r>
+              <a:rPr lang="en-GB" sz="1600" b="1" dirty="0"/>
+              <a:t>): </a:t>
+            </a:r>
+            <a:r>
+              <a:rPr lang="en-GB" sz="1600" dirty="0"/>
+              <a:t>Sinu </a:t>
+            </a:r>
+            <a:r>
+              <a:rPr lang="en-GB" sz="1600" dirty="0" err="1"/>
+              <a:t>või</a:t>
+            </a:r>
+            <a:r>
+              <a:rPr lang="en-GB" sz="1600" dirty="0"/>
+              <a:t> </a:t>
+            </a:r>
+            <a:r>
+              <a:rPr lang="en-GB" sz="1600" dirty="0" err="1"/>
+              <a:t>kliendi</a:t>
+            </a:r>
+            <a:r>
+              <a:rPr lang="en-GB" sz="1600" dirty="0"/>
+              <a:t> </a:t>
+            </a:r>
+            <a:r>
+              <a:rPr lang="en-GB" sz="1600" dirty="0" err="1"/>
+              <a:t>ettevõtte</a:t>
+            </a:r>
+            <a:r>
+              <a:rPr lang="en-GB" sz="1600" dirty="0"/>
+              <a:t> </a:t>
+            </a:r>
+            <a:r>
+              <a:rPr lang="en-GB" sz="1600" dirty="0" err="1"/>
+              <a:t>põhivärv</a:t>
+            </a:r>
+            <a:r>
+              <a:rPr lang="en-GB" sz="1600" dirty="0"/>
+              <a:t>. Seda </a:t>
+            </a:r>
+            <a:r>
+              <a:rPr lang="en-GB" sz="1600" dirty="0" err="1"/>
+              <a:t>kasutatakse</a:t>
+            </a:r>
+            <a:r>
+              <a:rPr lang="en-GB" sz="1600" dirty="0"/>
+              <a:t> </a:t>
+            </a:r>
+            <a:r>
+              <a:rPr lang="en-GB" sz="1600" dirty="0" err="1"/>
+              <a:t>tavaliste</a:t>
+            </a:r>
+            <a:r>
+              <a:rPr lang="en-GB" sz="1600" dirty="0"/>
+              <a:t> </a:t>
+            </a:r>
+            <a:r>
+              <a:rPr lang="en-GB" sz="1600" dirty="0" err="1"/>
+              <a:t>andmete</a:t>
+            </a:r>
+            <a:r>
+              <a:rPr lang="en-GB" sz="1600" dirty="0"/>
+              <a:t>, </a:t>
+            </a:r>
+            <a:r>
+              <a:rPr lang="en-GB" sz="1600" dirty="0" err="1"/>
+              <a:t>tiitliribade</a:t>
+            </a:r>
+            <a:r>
+              <a:rPr lang="en-GB" sz="1600" dirty="0"/>
+              <a:t> </a:t>
+            </a:r>
+            <a:r>
+              <a:rPr lang="en-GB" sz="1600" dirty="0" err="1"/>
+              <a:t>või</a:t>
+            </a:r>
+            <a:r>
+              <a:rPr lang="en-GB" sz="1600" dirty="0"/>
+              <a:t> </a:t>
+            </a:r>
+            <a:r>
+              <a:rPr lang="en-GB" sz="1600" dirty="0" err="1"/>
+              <a:t>vaikimisi</a:t>
+            </a:r>
+            <a:r>
+              <a:rPr lang="en-GB" sz="1600" dirty="0"/>
+              <a:t> </a:t>
+            </a:r>
+            <a:r>
+              <a:rPr lang="en-GB" sz="1600" dirty="0" err="1"/>
+              <a:t>tulpade</a:t>
+            </a:r>
+            <a:r>
+              <a:rPr lang="en-GB" sz="1600" dirty="0"/>
+              <a:t> </a:t>
+            </a:r>
+            <a:r>
+              <a:rPr lang="en-GB" sz="1600" dirty="0" err="1"/>
+              <a:t>kuvamiseks</a:t>
+            </a:r>
+            <a:r>
+              <a:rPr lang="en-GB" sz="1600" dirty="0"/>
+              <a:t>.</a:t>
+            </a:r>
+          </a:p>
+          <a:p>
+            <a:pPr lvl="1">
+              <a:lnSpc>
+                <a:spcPct val="170000"/>
+              </a:lnSpc>
+            </a:pPr>
+            <a:r>
+              <a:rPr lang="en-GB" sz="1600" b="1" dirty="0"/>
+              <a:t>10% </a:t>
+            </a:r>
+            <a:r>
+              <a:rPr lang="en-GB" sz="1600" b="1" dirty="0" err="1"/>
+              <a:t>Aktsentvärv</a:t>
+            </a:r>
+            <a:r>
+              <a:rPr lang="en-GB" sz="1600" b="1" dirty="0"/>
+              <a:t> (</a:t>
+            </a:r>
+            <a:r>
+              <a:rPr lang="en-GB" sz="1600" b="1" dirty="0" err="1"/>
+              <a:t>Erksad</a:t>
+            </a:r>
+            <a:r>
+              <a:rPr lang="en-GB" sz="1600" b="1" dirty="0"/>
+              <a:t> </a:t>
+            </a:r>
+            <a:r>
+              <a:rPr lang="en-GB" sz="1600" b="1" dirty="0" err="1"/>
+              <a:t>värvid</a:t>
+            </a:r>
+            <a:r>
+              <a:rPr lang="en-GB" sz="1600" b="1" dirty="0"/>
+              <a:t> </a:t>
+            </a:r>
+            <a:r>
+              <a:rPr lang="en-GB" sz="1600" b="1" dirty="0" err="1"/>
+              <a:t>tähelepanuks</a:t>
+            </a:r>
+            <a:r>
+              <a:rPr lang="en-GB" sz="1600" b="1" dirty="0"/>
+              <a:t>): </a:t>
+            </a:r>
+            <a:r>
+              <a:rPr lang="en-GB" sz="1600" dirty="0"/>
+              <a:t>See on Sinu "</a:t>
+            </a:r>
+            <a:r>
+              <a:rPr lang="en-GB" sz="1600" dirty="0" err="1"/>
+              <a:t>hoolitse</a:t>
+            </a:r>
+            <a:r>
+              <a:rPr lang="en-GB" sz="1600" dirty="0"/>
+              <a:t> </a:t>
+            </a:r>
+            <a:r>
+              <a:rPr lang="en-GB" sz="1600" dirty="0" err="1"/>
+              <a:t>selle</a:t>
+            </a:r>
+            <a:r>
+              <a:rPr lang="en-GB" sz="1600" dirty="0"/>
+              <a:t> </a:t>
+            </a:r>
+            <a:r>
+              <a:rPr lang="en-GB" sz="1600" dirty="0" err="1"/>
+              <a:t>eest</a:t>
+            </a:r>
+            <a:r>
+              <a:rPr lang="en-GB" sz="1600" dirty="0"/>
+              <a:t> </a:t>
+            </a:r>
+            <a:r>
+              <a:rPr lang="en-GB" sz="1600" dirty="0" err="1"/>
+              <a:t>kohe</a:t>
+            </a:r>
+            <a:r>
+              <a:rPr lang="en-GB" sz="1600" dirty="0"/>
+              <a:t>" </a:t>
+            </a:r>
+            <a:r>
+              <a:rPr lang="en-GB" sz="1600" dirty="0" err="1"/>
+              <a:t>värv</a:t>
+            </a:r>
+            <a:r>
+              <a:rPr lang="en-GB" sz="1600" dirty="0"/>
+              <a:t> (</a:t>
+            </a:r>
+            <a:r>
+              <a:rPr lang="en-GB" sz="1600" dirty="0" err="1"/>
+              <a:t>erkpunane</a:t>
+            </a:r>
+            <a:r>
+              <a:rPr lang="en-GB" sz="1600" dirty="0"/>
+              <a:t>,, </a:t>
+            </a:r>
+            <a:r>
+              <a:rPr lang="en-GB" sz="1600" dirty="0" err="1"/>
+              <a:t>oranž</a:t>
+            </a:r>
+            <a:r>
+              <a:rPr lang="en-GB" sz="1600" dirty="0"/>
+              <a:t>). Seda </a:t>
+            </a:r>
+            <a:r>
+              <a:rPr lang="en-GB" sz="1600" dirty="0" err="1"/>
+              <a:t>kasutatakse</a:t>
+            </a:r>
+            <a:r>
+              <a:rPr lang="en-GB" sz="1600" dirty="0"/>
+              <a:t> </a:t>
+            </a:r>
+            <a:r>
+              <a:rPr lang="en-GB" sz="1600" dirty="0" err="1"/>
+              <a:t>ainult</a:t>
+            </a:r>
+            <a:r>
+              <a:rPr lang="en-GB" sz="1600" dirty="0"/>
+              <a:t> </a:t>
+            </a:r>
+            <a:r>
+              <a:rPr lang="en-GB" sz="1600" dirty="0" err="1"/>
+              <a:t>siis</a:t>
+            </a:r>
+            <a:r>
+              <a:rPr lang="en-GB" sz="1600" dirty="0"/>
+              <a:t>, </a:t>
+            </a:r>
+            <a:r>
+              <a:rPr lang="en-GB" sz="1600" dirty="0" err="1"/>
+              <a:t>kui</a:t>
+            </a:r>
+            <a:r>
+              <a:rPr lang="en-GB" sz="1600" dirty="0"/>
+              <a:t> </a:t>
+            </a:r>
+            <a:r>
+              <a:rPr lang="en-GB" sz="1600" dirty="0" err="1"/>
+              <a:t>midagi</a:t>
+            </a:r>
+            <a:r>
+              <a:rPr lang="en-GB" sz="1600" dirty="0"/>
+              <a:t> on </a:t>
+            </a:r>
+            <a:r>
+              <a:rPr lang="en-GB" sz="1600" dirty="0" err="1"/>
+              <a:t>valesti</a:t>
+            </a:r>
+            <a:r>
+              <a:rPr lang="en-GB" sz="1600" dirty="0"/>
+              <a:t> </a:t>
+            </a:r>
+            <a:r>
+              <a:rPr lang="en-GB" sz="1600" dirty="0" err="1"/>
+              <a:t>või</a:t>
+            </a:r>
+            <a:r>
+              <a:rPr lang="en-GB" sz="1600" dirty="0"/>
+              <a:t> </a:t>
+            </a:r>
+            <a:r>
+              <a:rPr lang="en-GB" sz="1600" dirty="0" err="1"/>
+              <a:t>vajab</a:t>
+            </a:r>
+            <a:r>
+              <a:rPr lang="en-GB" sz="1600" dirty="0"/>
+              <a:t> </a:t>
+            </a:r>
+            <a:r>
+              <a:rPr lang="en-GB" sz="1600" dirty="0" err="1"/>
+              <a:t>kriitilist</a:t>
+            </a:r>
+            <a:r>
+              <a:rPr lang="en-GB" sz="1600" dirty="0"/>
+              <a:t> </a:t>
+            </a:r>
+            <a:r>
+              <a:rPr lang="en-GB" sz="1600" dirty="0" err="1"/>
+              <a:t>tähelepanu</a:t>
+            </a:r>
+            <a:r>
+              <a:rPr lang="en-GB" sz="1600" dirty="0"/>
+              <a:t> (</a:t>
+            </a:r>
+            <a:r>
+              <a:rPr lang="en-GB" sz="1600" dirty="0" err="1"/>
+              <a:t>nt</a:t>
+            </a:r>
+            <a:r>
+              <a:rPr lang="en-GB" sz="1600" dirty="0"/>
+              <a:t> </a:t>
+            </a:r>
+            <a:r>
+              <a:rPr lang="en-GB" sz="1600" dirty="0" err="1"/>
+              <a:t>kui</a:t>
+            </a:r>
+            <a:r>
+              <a:rPr lang="en-GB" sz="1600" dirty="0"/>
+              <a:t> Sentiment Gap </a:t>
+            </a:r>
+            <a:r>
+              <a:rPr lang="en-GB" sz="1600" dirty="0" err="1"/>
+              <a:t>läheb</a:t>
+            </a:r>
+            <a:r>
+              <a:rPr lang="en-GB" sz="1600" dirty="0"/>
+              <a:t> </a:t>
+            </a:r>
+            <a:r>
+              <a:rPr lang="en-GB" sz="1600" dirty="0" err="1"/>
+              <a:t>punasesse</a:t>
+            </a:r>
+            <a:r>
+              <a:rPr lang="en-GB" sz="1600" dirty="0"/>
+              <a:t> </a:t>
+            </a:r>
+            <a:r>
+              <a:rPr lang="en-GB" sz="1600" dirty="0" err="1"/>
+              <a:t>tsooni</a:t>
+            </a:r>
+            <a:r>
+              <a:rPr lang="en-GB" sz="1600" dirty="0"/>
+              <a:t>). </a:t>
+            </a:r>
+            <a:r>
+              <a:rPr lang="en-GB" sz="1600" dirty="0" err="1"/>
+              <a:t>Erista</a:t>
+            </a:r>
+            <a:r>
+              <a:rPr lang="en-GB" sz="1600" dirty="0"/>
+              <a:t> </a:t>
+            </a:r>
+            <a:r>
+              <a:rPr lang="en-GB" sz="1600" dirty="0" err="1"/>
+              <a:t>vaid</a:t>
+            </a:r>
+            <a:r>
+              <a:rPr lang="en-GB" sz="1600" dirty="0"/>
+              <a:t> </a:t>
+            </a:r>
+            <a:r>
+              <a:rPr lang="en-GB" sz="1600" dirty="0" err="1"/>
+              <a:t>olulist</a:t>
+            </a:r>
+            <a:r>
+              <a:rPr lang="en-GB" sz="1600" dirty="0"/>
+              <a:t>.</a:t>
+            </a:r>
+          </a:p>
+        </p:txBody>
+      </p:sp>
+    </p:spTree>
+    <p:extLst>
+      <p:ext uri="{BB962C8B-B14F-4D97-AF65-F5344CB8AC3E}">
+        <p14:creationId xmlns:p14="http://schemas.microsoft.com/office/powerpoint/2010/main" val="1334936561"/>
+      </p:ext>
+    </p:extLst>
+  </p:cSld>
+  <p:clrMapOvr>
+    <a:masterClrMapping/>
+  </p:clrMapOvr>
+</p:sld>
+</file>
+
+<file path=ppt/slides/slide24.xml><?xml version="1.0" encoding="utf-8"?>
+<p:sld xmlns:a="http://schemas.openxmlformats.org/drawingml/2006/main" xmlns:r="http://schemas.openxmlformats.org/officeDocument/2006/relationships" xmlns:p="http://schemas.openxmlformats.org/presentationml/2006/main">
+  <p:cSld>
+    <p:spTree>
+      <p:nvGrpSpPr>
+        <p:cNvPr id="1" name=""/>
+        <p:cNvGrpSpPr/>
+        <p:nvPr/>
+      </p:nvGrpSpPr>
+      <p:grpSpPr>
+        <a:xfrm>
+          <a:off x="0" y="0"/>
+          <a:ext cx="0" cy="0"/>
+          <a:chOff x="0" y="0"/>
+          <a:chExt cx="0" cy="0"/>
+        </a:xfrm>
+      </p:grpSpPr>
+      <p:sp>
+        <p:nvSpPr>
+          <p:cNvPr id="2" name="Title 1">
+            <a:extLst>
+              <a:ext uri="{FF2B5EF4-FFF2-40B4-BE49-F238E27FC236}">
+                <a16:creationId xmlns:a16="http://schemas.microsoft.com/office/drawing/2014/main" id="{CD26710A-585B-FF43-ACF7-7BD31A74FA7D}"/>
+              </a:ext>
+            </a:extLst>
+          </p:cNvPr>
+          <p:cNvSpPr>
+            <a:spLocks noGrp="1"/>
+          </p:cNvSpPr>
+          <p:nvPr>
+            <p:ph type="ctrTitle"/>
+          </p:nvPr>
+        </p:nvSpPr>
+        <p:spPr/>
+        <p:txBody>
+          <a:bodyPr/>
+          <a:lstStyle/>
+          <a:p>
+            <a:r>
+              <a:rPr lang="en-GB" dirty="0" err="1"/>
+              <a:t>Disaini</a:t>
+            </a:r>
+            <a:r>
+              <a:rPr lang="en-GB" dirty="0"/>
+              <a:t> </a:t>
+            </a:r>
+            <a:r>
+              <a:rPr lang="en-GB" dirty="0" err="1"/>
+              <a:t>ja</a:t>
+            </a:r>
+            <a:r>
+              <a:rPr lang="en-GB" dirty="0"/>
+              <a:t> </a:t>
+            </a:r>
+            <a:r>
+              <a:rPr lang="en-GB" dirty="0" err="1"/>
+              <a:t>kasutajamugavuse</a:t>
+            </a:r>
+            <a:r>
+              <a:rPr lang="en-GB" dirty="0"/>
+              <a:t> </a:t>
+            </a:r>
+            <a:r>
+              <a:rPr lang="en-GB" dirty="0" err="1"/>
+              <a:t>kontroll</a:t>
+            </a:r>
+            <a:endParaRPr lang="en-GB" dirty="0"/>
+          </a:p>
+        </p:txBody>
+      </p:sp>
+      <p:sp>
+        <p:nvSpPr>
+          <p:cNvPr id="3" name="Content Placeholder 2">
+            <a:extLst>
+              <a:ext uri="{FF2B5EF4-FFF2-40B4-BE49-F238E27FC236}">
+                <a16:creationId xmlns:a16="http://schemas.microsoft.com/office/drawing/2014/main" id="{019DEB3B-4461-1F71-4804-25717EAAD8E8}"/>
+              </a:ext>
+            </a:extLst>
+          </p:cNvPr>
+          <p:cNvSpPr>
+            <a:spLocks noGrp="1"/>
+          </p:cNvSpPr>
+          <p:nvPr>
+            <p:ph sz="quarter" idx="10"/>
+          </p:nvPr>
+        </p:nvSpPr>
+        <p:spPr/>
+        <p:txBody>
+          <a:bodyPr>
+            <a:normAutofit fontScale="70000" lnSpcReduction="20000"/>
+          </a:bodyPr>
+          <a:lstStyle/>
+          <a:p>
+            <a:pPr marL="514350" indent="-514350">
+              <a:buAutoNum type="arabicPeriod"/>
+            </a:pPr>
+            <a:r>
+              <a:rPr lang="en-GB" b="1" dirty="0" err="1"/>
+              <a:t>Viie</a:t>
+            </a:r>
+            <a:r>
+              <a:rPr lang="en-GB" b="1" dirty="0"/>
+              <a:t> </a:t>
+            </a:r>
+            <a:r>
+              <a:rPr lang="en-GB" b="1" dirty="0" err="1"/>
+              <a:t>sekundi</a:t>
+            </a:r>
+            <a:r>
+              <a:rPr lang="en-GB" b="1" dirty="0"/>
+              <a:t> test </a:t>
+            </a:r>
+          </a:p>
+          <a:p>
+            <a:pPr lvl="1"/>
+            <a:r>
+              <a:rPr lang="en-GB" dirty="0"/>
+              <a:t>Kas </a:t>
+            </a:r>
+            <a:r>
+              <a:rPr lang="en-GB" dirty="0" err="1"/>
+              <a:t>üldine</a:t>
+            </a:r>
+            <a:r>
+              <a:rPr lang="en-GB" dirty="0"/>
+              <a:t> </a:t>
+            </a:r>
+            <a:r>
+              <a:rPr lang="en-GB" dirty="0" err="1"/>
+              <a:t>seisukord</a:t>
+            </a:r>
+            <a:r>
+              <a:rPr lang="en-GB" dirty="0"/>
+              <a:t> (</a:t>
+            </a:r>
+            <a:r>
+              <a:rPr lang="en-GB" dirty="0" err="1"/>
+              <a:t>hea</a:t>
+            </a:r>
+            <a:r>
+              <a:rPr lang="en-GB" dirty="0"/>
+              <a:t> / </a:t>
+            </a:r>
+            <a:r>
+              <a:rPr lang="en-GB" dirty="0" err="1"/>
+              <a:t>halb</a:t>
+            </a:r>
+            <a:r>
+              <a:rPr lang="en-GB" dirty="0"/>
+              <a:t> / </a:t>
+            </a:r>
+            <a:r>
+              <a:rPr lang="en-GB" dirty="0" err="1"/>
+              <a:t>kriitiline</a:t>
+            </a:r>
+            <a:r>
+              <a:rPr lang="en-GB" dirty="0"/>
+              <a:t>) on </a:t>
+            </a:r>
+            <a:r>
+              <a:rPr lang="en-GB" dirty="0" err="1"/>
+              <a:t>arusaadav</a:t>
+            </a:r>
+            <a:r>
+              <a:rPr lang="en-GB" dirty="0"/>
+              <a:t> </a:t>
+            </a:r>
+            <a:r>
+              <a:rPr lang="en-GB" dirty="0" err="1"/>
+              <a:t>vähem</a:t>
+            </a:r>
+            <a:r>
+              <a:rPr lang="en-GB" dirty="0"/>
+              <a:t> </a:t>
+            </a:r>
+            <a:r>
+              <a:rPr lang="en-GB" dirty="0" err="1"/>
+              <a:t>kui</a:t>
+            </a:r>
+            <a:r>
+              <a:rPr lang="en-GB" dirty="0"/>
+              <a:t> 5 </a:t>
+            </a:r>
+            <a:r>
+              <a:rPr lang="en-GB" dirty="0" err="1"/>
+              <a:t>sekundiga</a:t>
+            </a:r>
+            <a:r>
+              <a:rPr lang="en-GB" dirty="0"/>
+              <a:t>?</a:t>
+            </a:r>
+          </a:p>
+          <a:p>
+            <a:pPr lvl="1"/>
+            <a:r>
+              <a:rPr lang="en-GB" dirty="0"/>
+              <a:t>Kas </a:t>
+            </a:r>
+            <a:r>
+              <a:rPr lang="en-GB" dirty="0" err="1"/>
+              <a:t>kõige</a:t>
+            </a:r>
+            <a:r>
+              <a:rPr lang="en-GB" dirty="0"/>
+              <a:t> </a:t>
+            </a:r>
+            <a:r>
+              <a:rPr lang="en-GB" dirty="0" err="1"/>
+              <a:t>olulisemad</a:t>
+            </a:r>
+            <a:r>
+              <a:rPr lang="en-GB" dirty="0"/>
+              <a:t> </a:t>
+            </a:r>
+            <a:r>
+              <a:rPr lang="en-GB" dirty="0" err="1"/>
+              <a:t>numbrid</a:t>
+            </a:r>
+            <a:r>
+              <a:rPr lang="en-GB" dirty="0"/>
+              <a:t> (KPI-d) </a:t>
+            </a:r>
+            <a:r>
+              <a:rPr lang="en-GB" dirty="0" err="1"/>
+              <a:t>asuvad</a:t>
+            </a:r>
+            <a:r>
+              <a:rPr lang="en-GB" dirty="0"/>
+              <a:t> </a:t>
+            </a:r>
+            <a:r>
+              <a:rPr lang="en-GB" dirty="0" err="1"/>
+              <a:t>ekraani</a:t>
+            </a:r>
+            <a:r>
+              <a:rPr lang="en-GB" dirty="0"/>
+              <a:t> </a:t>
+            </a:r>
+            <a:r>
+              <a:rPr lang="en-GB" dirty="0" err="1"/>
+              <a:t>vasakus</a:t>
+            </a:r>
+            <a:r>
+              <a:rPr lang="en-GB" dirty="0"/>
+              <a:t> </a:t>
+            </a:r>
+            <a:r>
+              <a:rPr lang="en-GB" dirty="0" err="1"/>
+              <a:t>ülemises</a:t>
+            </a:r>
+            <a:r>
+              <a:rPr lang="en-GB" dirty="0"/>
+              <a:t> </a:t>
+            </a:r>
+            <a:r>
+              <a:rPr lang="en-GB" dirty="0" err="1"/>
+              <a:t>nurgas</a:t>
+            </a:r>
+            <a:r>
+              <a:rPr lang="en-GB" dirty="0"/>
+              <a:t>?</a:t>
+            </a:r>
+          </a:p>
+          <a:p>
+            <a:pPr lvl="1"/>
+            <a:r>
+              <a:rPr lang="en-GB" dirty="0"/>
+              <a:t>Kas </a:t>
+            </a:r>
+            <a:r>
+              <a:rPr lang="en-GB" dirty="0" err="1"/>
+              <a:t>kasutaja</a:t>
+            </a:r>
+            <a:r>
+              <a:rPr lang="en-GB" dirty="0"/>
+              <a:t> </a:t>
+            </a:r>
+            <a:r>
+              <a:rPr lang="en-GB" dirty="0" err="1"/>
+              <a:t>saab</a:t>
+            </a:r>
+            <a:r>
+              <a:rPr lang="en-GB" dirty="0"/>
+              <a:t> </a:t>
+            </a:r>
+            <a:r>
+              <a:rPr lang="en-GB" dirty="0" err="1"/>
+              <a:t>kohe</a:t>
+            </a:r>
+            <a:r>
+              <a:rPr lang="en-GB" dirty="0"/>
+              <a:t> </a:t>
+            </a:r>
+            <a:r>
+              <a:rPr lang="en-GB" dirty="0" err="1"/>
+              <a:t>aru</a:t>
+            </a:r>
+            <a:r>
+              <a:rPr lang="en-GB" dirty="0"/>
+              <a:t>, </a:t>
+            </a:r>
+            <a:r>
+              <a:rPr lang="en-GB" dirty="0" err="1"/>
+              <a:t>kui</a:t>
+            </a:r>
+            <a:r>
+              <a:rPr lang="en-GB" dirty="0"/>
+              <a:t> </a:t>
+            </a:r>
+            <a:r>
+              <a:rPr lang="en-GB" dirty="0" err="1"/>
+              <a:t>miski</a:t>
+            </a:r>
+            <a:r>
+              <a:rPr lang="en-GB" dirty="0"/>
+              <a:t> </a:t>
+            </a:r>
+            <a:r>
+              <a:rPr lang="en-GB" dirty="0" err="1"/>
+              <a:t>vajab</a:t>
+            </a:r>
+            <a:r>
+              <a:rPr lang="en-GB" dirty="0"/>
+              <a:t> </a:t>
+            </a:r>
+            <a:r>
+              <a:rPr lang="en-GB" dirty="0" err="1"/>
+              <a:t>tema</a:t>
+            </a:r>
+            <a:r>
+              <a:rPr lang="en-GB" dirty="0"/>
+              <a:t> </a:t>
+            </a:r>
+            <a:r>
+              <a:rPr lang="en-GB" dirty="0" err="1"/>
+              <a:t>kiiret</a:t>
+            </a:r>
+            <a:r>
+              <a:rPr lang="en-GB" dirty="0"/>
+              <a:t> </a:t>
+            </a:r>
+            <a:r>
+              <a:rPr lang="en-GB" dirty="0" err="1"/>
+              <a:t>sekkumist</a:t>
+            </a:r>
+            <a:r>
+              <a:rPr lang="en-GB" dirty="0"/>
+              <a:t>?</a:t>
+            </a:r>
+          </a:p>
+          <a:p>
+            <a:pPr marL="0" indent="0">
+              <a:buNone/>
+            </a:pPr>
+            <a:r>
+              <a:rPr lang="en-GB" b="1" dirty="0"/>
+              <a:t>2. </a:t>
+            </a:r>
+            <a:r>
+              <a:rPr lang="en-GB" b="1" dirty="0" err="1"/>
+              <a:t>Värvid</a:t>
+            </a:r>
+            <a:r>
+              <a:rPr lang="en-GB" b="1" dirty="0"/>
+              <a:t> </a:t>
+            </a:r>
+            <a:r>
+              <a:rPr lang="en-GB" b="1" dirty="0" err="1"/>
+              <a:t>ja</a:t>
+            </a:r>
+            <a:r>
+              <a:rPr lang="en-GB" b="1" dirty="0"/>
+              <a:t> </a:t>
+            </a:r>
+            <a:r>
+              <a:rPr lang="en-GB" b="1" dirty="0" err="1"/>
+              <a:t>visuaalne</a:t>
+            </a:r>
+            <a:r>
+              <a:rPr lang="en-GB" b="1" dirty="0"/>
+              <a:t> </a:t>
+            </a:r>
+            <a:r>
+              <a:rPr lang="en-GB" b="1" dirty="0" err="1"/>
+              <a:t>koormus</a:t>
+            </a:r>
+            <a:endParaRPr lang="en-GB" b="1" dirty="0"/>
+          </a:p>
+          <a:p>
+            <a:pPr lvl="1"/>
+            <a:r>
+              <a:rPr lang="en-GB" dirty="0"/>
+              <a:t>Kas </a:t>
+            </a:r>
+            <a:r>
+              <a:rPr lang="en-GB" dirty="0" err="1"/>
+              <a:t>värvipalett</a:t>
+            </a:r>
+            <a:r>
+              <a:rPr lang="en-GB" dirty="0"/>
+              <a:t> on </a:t>
+            </a:r>
+            <a:r>
+              <a:rPr lang="en-GB" dirty="0" err="1"/>
+              <a:t>piiratud</a:t>
+            </a:r>
+            <a:r>
+              <a:rPr lang="en-GB" dirty="0"/>
+              <a:t> (</a:t>
+            </a:r>
+            <a:r>
+              <a:rPr lang="en-GB" dirty="0" err="1"/>
+              <a:t>soovitavalt</a:t>
+            </a:r>
+            <a:r>
+              <a:rPr lang="en-GB" dirty="0"/>
+              <a:t> </a:t>
+            </a:r>
+            <a:r>
+              <a:rPr lang="en-GB" dirty="0" err="1"/>
+              <a:t>maksimaalselt</a:t>
+            </a:r>
+            <a:r>
+              <a:rPr lang="en-GB" dirty="0"/>
+              <a:t> 2–3 </a:t>
+            </a:r>
+            <a:r>
+              <a:rPr lang="en-GB" dirty="0" err="1"/>
+              <a:t>põhivärvi</a:t>
+            </a:r>
+            <a:r>
+              <a:rPr lang="en-GB" dirty="0"/>
+              <a:t> + </a:t>
+            </a:r>
+            <a:r>
+              <a:rPr lang="en-GB" dirty="0" err="1"/>
+              <a:t>hallid</a:t>
+            </a:r>
+            <a:r>
+              <a:rPr lang="en-GB" dirty="0"/>
+              <a:t> </a:t>
+            </a:r>
+            <a:r>
+              <a:rPr lang="en-GB" dirty="0" err="1"/>
+              <a:t>toonid</a:t>
+            </a:r>
+            <a:r>
+              <a:rPr lang="en-GB" dirty="0"/>
+              <a:t> </a:t>
+            </a:r>
+            <a:r>
+              <a:rPr lang="en-GB" dirty="0" err="1"/>
+              <a:t>taustaks</a:t>
+            </a:r>
+            <a:r>
+              <a:rPr lang="en-GB" dirty="0"/>
+              <a:t>)?</a:t>
+            </a:r>
+          </a:p>
+          <a:p>
+            <a:pPr lvl="1"/>
+            <a:r>
+              <a:rPr lang="en-GB" dirty="0"/>
+              <a:t>Kas </a:t>
+            </a:r>
+            <a:r>
+              <a:rPr lang="en-GB" dirty="0" err="1"/>
+              <a:t>punast</a:t>
+            </a:r>
+            <a:r>
+              <a:rPr lang="en-GB" dirty="0"/>
+              <a:t> </a:t>
+            </a:r>
+            <a:r>
+              <a:rPr lang="en-GB" dirty="0" err="1"/>
+              <a:t>ja</a:t>
+            </a:r>
+            <a:r>
+              <a:rPr lang="en-GB" dirty="0"/>
+              <a:t> </a:t>
+            </a:r>
+            <a:r>
+              <a:rPr lang="en-GB" dirty="0" err="1"/>
+              <a:t>rohelist</a:t>
+            </a:r>
+            <a:r>
+              <a:rPr lang="en-GB" dirty="0"/>
+              <a:t> </a:t>
+            </a:r>
+            <a:r>
+              <a:rPr lang="en-GB" dirty="0" err="1"/>
+              <a:t>värvi</a:t>
+            </a:r>
+            <a:r>
+              <a:rPr lang="en-GB" dirty="0"/>
+              <a:t> </a:t>
+            </a:r>
+            <a:r>
+              <a:rPr lang="en-GB" dirty="0" err="1"/>
+              <a:t>kasutatakse</a:t>
+            </a:r>
+            <a:r>
+              <a:rPr lang="en-GB" dirty="0"/>
+              <a:t> </a:t>
+            </a:r>
+            <a:r>
+              <a:rPr lang="en-GB" b="1" dirty="0" err="1"/>
+              <a:t>ainult</a:t>
+            </a:r>
+            <a:r>
+              <a:rPr lang="en-GB" dirty="0"/>
+              <a:t> </a:t>
+            </a:r>
+            <a:r>
+              <a:rPr lang="en-GB" dirty="0" err="1"/>
+              <a:t>hoiatuste</a:t>
+            </a:r>
+            <a:r>
+              <a:rPr lang="en-GB" dirty="0"/>
+              <a:t> </a:t>
+            </a:r>
+            <a:r>
+              <a:rPr lang="en-GB" dirty="0" err="1"/>
+              <a:t>ja</a:t>
+            </a:r>
+            <a:r>
+              <a:rPr lang="en-GB" dirty="0"/>
+              <a:t> </a:t>
+            </a:r>
+            <a:r>
+              <a:rPr lang="en-GB" dirty="0" err="1"/>
+              <a:t>staatuse</a:t>
+            </a:r>
+            <a:r>
+              <a:rPr lang="en-GB" dirty="0"/>
+              <a:t> </a:t>
+            </a:r>
+            <a:r>
+              <a:rPr lang="en-GB" dirty="0" err="1"/>
+              <a:t>tähistamiseks</a:t>
+            </a:r>
+            <a:r>
+              <a:rPr lang="en-GB" dirty="0"/>
+              <a:t> (</a:t>
+            </a:r>
+            <a:r>
+              <a:rPr lang="en-GB" dirty="0" err="1"/>
+              <a:t>mitte</a:t>
+            </a:r>
+            <a:r>
+              <a:rPr lang="en-GB" dirty="0"/>
+              <a:t> </a:t>
+            </a:r>
+            <a:r>
+              <a:rPr lang="en-GB" dirty="0" err="1"/>
+              <a:t>tavalise</a:t>
+            </a:r>
+            <a:r>
+              <a:rPr lang="en-GB" dirty="0"/>
+              <a:t> </a:t>
+            </a:r>
+            <a:r>
+              <a:rPr lang="en-GB" dirty="0" err="1"/>
+              <a:t>kujunduselemendina</a:t>
+            </a:r>
+            <a:r>
+              <a:rPr lang="en-GB" dirty="0"/>
+              <a:t>)?</a:t>
+            </a:r>
+          </a:p>
+          <a:p>
+            <a:pPr lvl="1"/>
+            <a:r>
+              <a:rPr lang="en-GB" dirty="0"/>
+              <a:t>Kas </a:t>
+            </a:r>
+            <a:r>
+              <a:rPr lang="en-GB" dirty="0" err="1"/>
+              <a:t>ekraanil</a:t>
+            </a:r>
+            <a:r>
+              <a:rPr lang="en-GB" dirty="0"/>
+              <a:t> on </a:t>
+            </a:r>
+            <a:r>
+              <a:rPr lang="en-GB" dirty="0" err="1"/>
+              <a:t>piisavalt</a:t>
+            </a:r>
+            <a:r>
+              <a:rPr lang="en-GB" dirty="0"/>
+              <a:t> "</a:t>
+            </a:r>
+            <a:r>
+              <a:rPr lang="en-GB" dirty="0" err="1"/>
+              <a:t>hingamisruumi</a:t>
+            </a:r>
+            <a:r>
+              <a:rPr lang="en-GB" dirty="0"/>
+              <a:t>" (</a:t>
+            </a:r>
+            <a:r>
+              <a:rPr lang="en-GB" dirty="0" err="1"/>
+              <a:t>tühja</a:t>
+            </a:r>
+            <a:r>
+              <a:rPr lang="en-GB" dirty="0"/>
+              <a:t> </a:t>
+            </a:r>
+            <a:r>
+              <a:rPr lang="en-GB" dirty="0" err="1"/>
+              <a:t>valget</a:t>
+            </a:r>
+            <a:r>
+              <a:rPr lang="en-GB" dirty="0"/>
+              <a:t> ala), et </a:t>
+            </a:r>
+            <a:r>
+              <a:rPr lang="en-GB" dirty="0" err="1"/>
+              <a:t>silm</a:t>
+            </a:r>
+            <a:r>
+              <a:rPr lang="en-GB" dirty="0"/>
+              <a:t> </a:t>
+            </a:r>
+            <a:r>
+              <a:rPr lang="en-GB" dirty="0" err="1"/>
+              <a:t>saaks</a:t>
+            </a:r>
+            <a:r>
+              <a:rPr lang="en-GB" dirty="0"/>
+              <a:t> </a:t>
+            </a:r>
+            <a:r>
+              <a:rPr lang="en-GB" dirty="0" err="1"/>
+              <a:t>puhata</a:t>
+            </a:r>
+            <a:r>
+              <a:rPr lang="en-GB" dirty="0"/>
+              <a:t>?</a:t>
+            </a:r>
+          </a:p>
+          <a:p>
+            <a:pPr lvl="1"/>
+            <a:endParaRPr lang="en-GB" dirty="0"/>
+          </a:p>
+          <a:p>
+            <a:endParaRPr lang="en-GB" dirty="0"/>
+          </a:p>
+        </p:txBody>
+      </p:sp>
+    </p:spTree>
+    <p:extLst>
+      <p:ext uri="{BB962C8B-B14F-4D97-AF65-F5344CB8AC3E}">
+        <p14:creationId xmlns:p14="http://schemas.microsoft.com/office/powerpoint/2010/main" val="3559912707"/>
+      </p:ext>
+    </p:extLst>
+  </p:cSld>
+  <p:clrMapOvr>
+    <a:masterClrMapping/>
+  </p:clrMapOvr>
+</p:sld>
+</file>
+
+<file path=ppt/slides/slide25.xml><?xml version="1.0" encoding="utf-8"?>
+<p:sld xmlns:a="http://schemas.openxmlformats.org/drawingml/2006/main" xmlns:r="http://schemas.openxmlformats.org/officeDocument/2006/relationships" xmlns:p="http://schemas.openxmlformats.org/presentationml/2006/main">
+  <p:cSld>
+    <p:spTree>
+      <p:nvGrpSpPr>
+        <p:cNvPr id="1" name=""/>
+        <p:cNvGrpSpPr/>
+        <p:nvPr/>
+      </p:nvGrpSpPr>
+      <p:grpSpPr>
+        <a:xfrm>
+          <a:off x="0" y="0"/>
+          <a:ext cx="0" cy="0"/>
+          <a:chOff x="0" y="0"/>
+          <a:chExt cx="0" cy="0"/>
+        </a:xfrm>
+      </p:grpSpPr>
+      <p:sp>
+        <p:nvSpPr>
+          <p:cNvPr id="2" name="Title 1">
+            <a:extLst>
+              <a:ext uri="{FF2B5EF4-FFF2-40B4-BE49-F238E27FC236}">
+                <a16:creationId xmlns:a16="http://schemas.microsoft.com/office/drawing/2014/main" id="{CFE90CFB-8B93-AF39-A6EF-2CB68C57E7A4}"/>
+              </a:ext>
+            </a:extLst>
+          </p:cNvPr>
+          <p:cNvSpPr>
+            <a:spLocks noGrp="1"/>
+          </p:cNvSpPr>
+          <p:nvPr>
+            <p:ph type="ctrTitle"/>
+          </p:nvPr>
+        </p:nvSpPr>
+        <p:spPr/>
+        <p:txBody>
+          <a:bodyPr/>
+          <a:lstStyle/>
+          <a:p>
+            <a:r>
+              <a:rPr lang="en-GB" dirty="0" err="1"/>
+              <a:t>Disaini</a:t>
+            </a:r>
+            <a:r>
+              <a:rPr lang="en-GB" dirty="0"/>
+              <a:t> </a:t>
+            </a:r>
+            <a:r>
+              <a:rPr lang="en-GB" dirty="0" err="1"/>
+              <a:t>ja</a:t>
+            </a:r>
+            <a:r>
+              <a:rPr lang="en-GB" dirty="0"/>
+              <a:t> </a:t>
+            </a:r>
+            <a:r>
+              <a:rPr lang="en-GB" dirty="0" err="1"/>
+              <a:t>kasutajamugavuse</a:t>
+            </a:r>
+            <a:r>
+              <a:rPr lang="en-GB" dirty="0"/>
+              <a:t> </a:t>
+            </a:r>
+            <a:r>
+              <a:rPr lang="en-GB" dirty="0" err="1"/>
+              <a:t>kontroll</a:t>
+            </a:r>
+            <a:endParaRPr lang="en-GB" dirty="0"/>
+          </a:p>
+        </p:txBody>
+      </p:sp>
+      <p:sp>
+        <p:nvSpPr>
+          <p:cNvPr id="3" name="Content Placeholder 2">
+            <a:extLst>
+              <a:ext uri="{FF2B5EF4-FFF2-40B4-BE49-F238E27FC236}">
+                <a16:creationId xmlns:a16="http://schemas.microsoft.com/office/drawing/2014/main" id="{FC89C389-D78E-1CA2-021D-010A43BD000D}"/>
+              </a:ext>
+            </a:extLst>
+          </p:cNvPr>
+          <p:cNvSpPr>
+            <a:spLocks noGrp="1"/>
+          </p:cNvSpPr>
+          <p:nvPr>
+            <p:ph sz="quarter" idx="10"/>
+          </p:nvPr>
+        </p:nvSpPr>
+        <p:spPr/>
+        <p:txBody>
+          <a:bodyPr/>
+          <a:lstStyle/>
+          <a:p>
+            <a:pPr marL="0" indent="0">
+              <a:buNone/>
+            </a:pPr>
+            <a:r>
+              <a:rPr lang="en-GB" b="1" dirty="0"/>
+              <a:t>3. </a:t>
+            </a:r>
+            <a:r>
+              <a:rPr lang="en-GB" b="1" dirty="0" err="1"/>
+              <a:t>Diagrammid</a:t>
+            </a:r>
+            <a:r>
+              <a:rPr lang="en-GB" b="1" dirty="0"/>
+              <a:t> </a:t>
+            </a:r>
+            <a:r>
+              <a:rPr lang="en-GB" b="1" dirty="0" err="1"/>
+              <a:t>ja</a:t>
+            </a:r>
+            <a:r>
+              <a:rPr lang="en-GB" b="1" dirty="0"/>
+              <a:t> </a:t>
+            </a:r>
+            <a:r>
+              <a:rPr lang="en-GB" b="1" dirty="0" err="1"/>
+              <a:t>andmed</a:t>
+            </a:r>
+            <a:endParaRPr lang="en-GB" b="1" dirty="0"/>
+          </a:p>
+          <a:p>
+            <a:pPr lvl="1"/>
+            <a:r>
+              <a:rPr lang="en-GB" dirty="0"/>
+              <a:t>Kas </a:t>
+            </a:r>
+            <a:r>
+              <a:rPr lang="en-GB" dirty="0" err="1"/>
+              <a:t>ekraanil</a:t>
+            </a:r>
+            <a:r>
+              <a:rPr lang="en-GB" dirty="0"/>
+              <a:t> on </a:t>
+            </a:r>
+            <a:r>
+              <a:rPr lang="en-GB" dirty="0" err="1"/>
+              <a:t>korraga</a:t>
+            </a:r>
+            <a:r>
+              <a:rPr lang="en-GB" dirty="0"/>
+              <a:t> </a:t>
+            </a:r>
+            <a:r>
+              <a:rPr lang="en-GB" b="1" dirty="0" err="1"/>
+              <a:t>kuni</a:t>
+            </a:r>
+            <a:r>
+              <a:rPr lang="en-GB" b="1" dirty="0"/>
+              <a:t> 5</a:t>
+            </a:r>
+            <a:r>
+              <a:rPr lang="en-GB" dirty="0"/>
+              <a:t> </a:t>
+            </a:r>
+            <a:r>
+              <a:rPr lang="en-GB" dirty="0" err="1"/>
+              <a:t>peamist</a:t>
+            </a:r>
+            <a:r>
+              <a:rPr lang="en-GB" dirty="0"/>
+              <a:t> </a:t>
+            </a:r>
+            <a:r>
+              <a:rPr lang="en-GB" dirty="0" err="1"/>
+              <a:t>näitajat</a:t>
+            </a:r>
+            <a:r>
+              <a:rPr lang="en-GB" dirty="0"/>
+              <a:t>/</a:t>
+            </a:r>
+            <a:r>
+              <a:rPr lang="en-GB" dirty="0" err="1"/>
+              <a:t>graafikut</a:t>
+            </a:r>
+            <a:r>
+              <a:rPr lang="en-GB" dirty="0"/>
+              <a:t> (</a:t>
+            </a:r>
+            <a:r>
+              <a:rPr lang="en-GB" dirty="0" err="1"/>
+              <a:t>välditud</a:t>
+            </a:r>
+            <a:r>
+              <a:rPr lang="en-GB" dirty="0"/>
+              <a:t> on </a:t>
+            </a:r>
+            <a:r>
+              <a:rPr lang="en-GB" dirty="0" err="1"/>
+              <a:t>ülekuhjamist</a:t>
+            </a:r>
+            <a:r>
+              <a:rPr lang="en-GB" dirty="0"/>
+              <a:t>)?</a:t>
+            </a:r>
+          </a:p>
+          <a:p>
+            <a:pPr lvl="1"/>
+            <a:r>
+              <a:rPr lang="en-GB" dirty="0"/>
+              <a:t>Kas </a:t>
+            </a:r>
+            <a:r>
+              <a:rPr lang="en-GB" dirty="0" err="1"/>
+              <a:t>oled</a:t>
+            </a:r>
+            <a:r>
+              <a:rPr lang="en-GB" dirty="0"/>
+              <a:t> </a:t>
+            </a:r>
+            <a:r>
+              <a:rPr lang="en-GB" dirty="0" err="1"/>
+              <a:t>vältinud</a:t>
+            </a:r>
+            <a:r>
+              <a:rPr lang="en-GB" dirty="0"/>
+              <a:t> </a:t>
+            </a:r>
+            <a:r>
+              <a:rPr lang="en-GB" dirty="0" err="1"/>
+              <a:t>keerulisi</a:t>
+            </a:r>
+            <a:r>
+              <a:rPr lang="en-GB" dirty="0"/>
+              <a:t> 3D-graafikuid </a:t>
+            </a:r>
+            <a:r>
+              <a:rPr lang="en-GB" dirty="0" err="1"/>
+              <a:t>ja</a:t>
+            </a:r>
+            <a:r>
+              <a:rPr lang="en-GB" dirty="0"/>
+              <a:t> </a:t>
+            </a:r>
+            <a:r>
+              <a:rPr lang="en-GB" dirty="0" err="1"/>
+              <a:t>liiga</a:t>
+            </a:r>
+            <a:r>
+              <a:rPr lang="en-GB" dirty="0"/>
+              <a:t> </a:t>
+            </a:r>
+            <a:r>
+              <a:rPr lang="en-GB" dirty="0" err="1"/>
+              <a:t>paljude</a:t>
+            </a:r>
+            <a:r>
+              <a:rPr lang="en-GB" dirty="0"/>
+              <a:t> </a:t>
+            </a:r>
+            <a:r>
+              <a:rPr lang="en-GB" dirty="0" err="1"/>
+              <a:t>sektoritega</a:t>
+            </a:r>
+            <a:r>
+              <a:rPr lang="en-GB" dirty="0"/>
+              <a:t> </a:t>
+            </a:r>
+            <a:r>
+              <a:rPr lang="en-GB" dirty="0" err="1"/>
+              <a:t>ringdiagramme</a:t>
+            </a:r>
+            <a:r>
+              <a:rPr lang="en-GB" dirty="0"/>
+              <a:t> (pie charts)?</a:t>
+            </a:r>
+          </a:p>
+          <a:p>
+            <a:pPr lvl="1"/>
+            <a:r>
+              <a:rPr lang="en-GB" dirty="0"/>
+              <a:t>Kas </a:t>
+            </a:r>
+            <a:r>
+              <a:rPr lang="en-GB" dirty="0" err="1"/>
+              <a:t>igal</a:t>
+            </a:r>
+            <a:r>
+              <a:rPr lang="en-GB" dirty="0"/>
+              <a:t> </a:t>
+            </a:r>
+            <a:r>
+              <a:rPr lang="en-GB" dirty="0" err="1"/>
+              <a:t>numbril</a:t>
+            </a:r>
+            <a:r>
+              <a:rPr lang="en-GB" dirty="0"/>
+              <a:t> on </a:t>
+            </a:r>
+            <a:r>
+              <a:rPr lang="en-GB" dirty="0" err="1"/>
+              <a:t>olemas</a:t>
+            </a:r>
+            <a:r>
+              <a:rPr lang="en-GB" dirty="0"/>
+              <a:t> </a:t>
+            </a:r>
+            <a:r>
+              <a:rPr lang="en-GB" b="1" dirty="0" err="1"/>
+              <a:t>kontekst</a:t>
+            </a:r>
+            <a:r>
+              <a:rPr lang="en-GB" dirty="0"/>
+              <a:t> (</a:t>
+            </a:r>
+            <a:r>
+              <a:rPr lang="en-GB" dirty="0" err="1"/>
+              <a:t>nt</a:t>
+            </a:r>
+            <a:r>
+              <a:rPr lang="en-GB" dirty="0"/>
+              <a:t> </a:t>
+            </a:r>
+            <a:r>
+              <a:rPr lang="en-GB" dirty="0" err="1"/>
+              <a:t>võrdlus</a:t>
+            </a:r>
+            <a:r>
+              <a:rPr lang="en-GB" dirty="0"/>
+              <a:t> </a:t>
+            </a:r>
+            <a:r>
+              <a:rPr lang="en-GB" dirty="0" err="1"/>
+              <a:t>eelmise</a:t>
+            </a:r>
+            <a:r>
+              <a:rPr lang="en-GB" dirty="0"/>
+              <a:t> </a:t>
+            </a:r>
+            <a:r>
+              <a:rPr lang="en-GB" dirty="0" err="1"/>
+              <a:t>kuu</a:t>
+            </a:r>
+            <a:r>
+              <a:rPr lang="en-GB" dirty="0"/>
+              <a:t>, </a:t>
+            </a:r>
+            <a:r>
+              <a:rPr lang="en-GB" dirty="0" err="1"/>
+              <a:t>eesmärgi</a:t>
+            </a:r>
+            <a:r>
+              <a:rPr lang="en-GB" dirty="0"/>
+              <a:t> </a:t>
+            </a:r>
+            <a:r>
+              <a:rPr lang="en-GB" dirty="0" err="1"/>
+              <a:t>või</a:t>
+            </a:r>
+            <a:r>
+              <a:rPr lang="en-GB" dirty="0"/>
+              <a:t> </a:t>
+            </a:r>
+            <a:r>
+              <a:rPr lang="en-GB" dirty="0" err="1"/>
+              <a:t>trendiga</a:t>
+            </a:r>
+            <a:r>
+              <a:rPr lang="en-GB" dirty="0"/>
+              <a:t>)?</a:t>
+            </a:r>
+          </a:p>
+          <a:p>
+            <a:endParaRPr lang="en-GB" dirty="0"/>
+          </a:p>
+        </p:txBody>
+      </p:sp>
+    </p:spTree>
+    <p:extLst>
+      <p:ext uri="{BB962C8B-B14F-4D97-AF65-F5344CB8AC3E}">
+        <p14:creationId xmlns:p14="http://schemas.microsoft.com/office/powerpoint/2010/main" val="1793255232"/>
+      </p:ext>
+    </p:extLst>
+  </p:cSld>
+  <p:clrMapOvr>
+    <a:masterClrMapping/>
+  </p:clrMapOvr>
+</p:sld>
+</file>
+
+<file path=ppt/slides/slide26.xml><?xml version="1.0" encoding="utf-8"?>
+<p:sld xmlns:a="http://schemas.openxmlformats.org/drawingml/2006/main" xmlns:r="http://schemas.openxmlformats.org/officeDocument/2006/relationships" xmlns:p="http://schemas.openxmlformats.org/presentationml/2006/main">
+  <p:cSld>
+    <p:spTree>
+      <p:nvGrpSpPr>
+        <p:cNvPr id="1" name=""/>
+        <p:cNvGrpSpPr/>
+        <p:nvPr/>
+      </p:nvGrpSpPr>
+      <p:grpSpPr>
+        <a:xfrm>
+          <a:off x="0" y="0"/>
+          <a:ext cx="0" cy="0"/>
+          <a:chOff x="0" y="0"/>
+          <a:chExt cx="0" cy="0"/>
+        </a:xfrm>
+      </p:grpSpPr>
+      <p:sp>
+        <p:nvSpPr>
+          <p:cNvPr id="2" name="Title 1">
+            <a:extLst>
+              <a:ext uri="{FF2B5EF4-FFF2-40B4-BE49-F238E27FC236}">
+                <a16:creationId xmlns:a16="http://schemas.microsoft.com/office/drawing/2014/main" id="{1F34DDCA-8D9E-79DA-4261-8066F69A0E17}"/>
+              </a:ext>
+            </a:extLst>
+          </p:cNvPr>
+          <p:cNvSpPr>
+            <a:spLocks noGrp="1"/>
+          </p:cNvSpPr>
+          <p:nvPr>
+            <p:ph type="ctrTitle"/>
+          </p:nvPr>
+        </p:nvSpPr>
+        <p:spPr>
+          <a:xfrm>
+            <a:off x="1688316" y="1180730"/>
+            <a:ext cx="5364163" cy="2052637"/>
+          </a:xfrm>
+        </p:spPr>
+        <p:txBody>
+          <a:bodyPr/>
+          <a:lstStyle/>
+          <a:p>
+            <a:r>
+              <a:rPr lang="en-GB" dirty="0" err="1"/>
+              <a:t>Disaini</a:t>
+            </a:r>
+            <a:r>
+              <a:rPr lang="en-GB" dirty="0"/>
+              <a:t> </a:t>
+            </a:r>
+            <a:r>
+              <a:rPr lang="en-GB" dirty="0" err="1"/>
+              <a:t>ja</a:t>
+            </a:r>
+            <a:r>
+              <a:rPr lang="en-GB" dirty="0"/>
+              <a:t> </a:t>
+            </a:r>
+            <a:r>
+              <a:rPr lang="en-GB" dirty="0" err="1"/>
+              <a:t>kasutajamugavuse</a:t>
+            </a:r>
+            <a:r>
+              <a:rPr lang="en-GB" dirty="0"/>
+              <a:t> </a:t>
+            </a:r>
+            <a:r>
+              <a:rPr lang="en-GB" dirty="0" err="1"/>
+              <a:t>kontroll</a:t>
+            </a:r>
+            <a:endParaRPr lang="en-GB" dirty="0"/>
+          </a:p>
+        </p:txBody>
+      </p:sp>
+      <p:sp>
+        <p:nvSpPr>
+          <p:cNvPr id="3" name="Content Placeholder 2">
+            <a:extLst>
+              <a:ext uri="{FF2B5EF4-FFF2-40B4-BE49-F238E27FC236}">
+                <a16:creationId xmlns:a16="http://schemas.microsoft.com/office/drawing/2014/main" id="{8099EB22-B7A3-477A-F6D6-10AC53DC6DAD}"/>
+              </a:ext>
+            </a:extLst>
+          </p:cNvPr>
+          <p:cNvSpPr>
+            <a:spLocks noGrp="1"/>
+          </p:cNvSpPr>
+          <p:nvPr>
+            <p:ph sz="quarter" idx="10"/>
+          </p:nvPr>
+        </p:nvSpPr>
+        <p:spPr>
+          <a:xfrm>
+            <a:off x="4002066" y="3137770"/>
+            <a:ext cx="7566046" cy="2675201"/>
+          </a:xfrm>
+        </p:spPr>
+        <p:txBody>
+          <a:bodyPr>
+            <a:normAutofit/>
+          </a:bodyPr>
+          <a:lstStyle/>
+          <a:p>
+            <a:pPr marL="0" indent="0">
+              <a:buNone/>
+            </a:pPr>
+            <a:r>
+              <a:rPr lang="en-GB" sz="1200" b="1" dirty="0"/>
+              <a:t>4. </a:t>
+            </a:r>
+            <a:r>
+              <a:rPr lang="en-GB" sz="1200" b="1" dirty="0" err="1"/>
+              <a:t>Navigatsioon</a:t>
+            </a:r>
+            <a:r>
+              <a:rPr lang="en-GB" sz="1200" b="1" dirty="0"/>
+              <a:t> </a:t>
+            </a:r>
+            <a:r>
+              <a:rPr lang="en-GB" sz="1200" b="1" dirty="0" err="1"/>
+              <a:t>ja</a:t>
+            </a:r>
+            <a:r>
+              <a:rPr lang="en-GB" sz="1200" b="1" dirty="0"/>
+              <a:t> </a:t>
+            </a:r>
+            <a:r>
+              <a:rPr lang="en-GB" sz="1200" b="1" dirty="0" err="1"/>
+              <a:t>kasutatavus</a:t>
+            </a:r>
+            <a:endParaRPr lang="en-GB" sz="1200" b="1" dirty="0"/>
+          </a:p>
+          <a:p>
+            <a:pPr lvl="1"/>
+            <a:r>
+              <a:rPr lang="en-GB" sz="1200" dirty="0"/>
+              <a:t>Kas </a:t>
+            </a:r>
+            <a:r>
+              <a:rPr lang="en-GB" sz="1200" dirty="0" err="1"/>
+              <a:t>menüüd</a:t>
+            </a:r>
+            <a:r>
+              <a:rPr lang="en-GB" sz="1200" dirty="0"/>
+              <a:t> </a:t>
+            </a:r>
+            <a:r>
+              <a:rPr lang="en-GB" sz="1200" dirty="0" err="1"/>
+              <a:t>ja</a:t>
+            </a:r>
+            <a:r>
+              <a:rPr lang="en-GB" sz="1200" dirty="0"/>
+              <a:t> </a:t>
+            </a:r>
+            <a:r>
+              <a:rPr lang="en-GB" sz="1200" dirty="0" err="1"/>
+              <a:t>filtrid</a:t>
+            </a:r>
+            <a:r>
+              <a:rPr lang="en-GB" sz="1200" dirty="0"/>
+              <a:t> on </a:t>
+            </a:r>
+            <a:r>
+              <a:rPr lang="en-GB" sz="1200" dirty="0" err="1"/>
+              <a:t>peidetavad</a:t>
+            </a:r>
+            <a:r>
+              <a:rPr lang="en-GB" sz="1200" dirty="0"/>
+              <a:t> </a:t>
+            </a:r>
+            <a:r>
+              <a:rPr lang="en-GB" sz="1200" dirty="0" err="1"/>
+              <a:t>või</a:t>
+            </a:r>
+            <a:r>
+              <a:rPr lang="en-GB" sz="1200" dirty="0"/>
+              <a:t> </a:t>
+            </a:r>
+            <a:r>
+              <a:rPr lang="en-GB" sz="1200" dirty="0" err="1"/>
+              <a:t>kompaktsed</a:t>
+            </a:r>
+            <a:r>
+              <a:rPr lang="en-GB" sz="1200" dirty="0"/>
+              <a:t>, et </a:t>
+            </a:r>
+            <a:r>
+              <a:rPr lang="en-GB" sz="1200" dirty="0" err="1"/>
+              <a:t>mitte</a:t>
+            </a:r>
+            <a:r>
+              <a:rPr lang="en-GB" sz="1200" dirty="0"/>
+              <a:t> </a:t>
+            </a:r>
+            <a:r>
+              <a:rPr lang="en-GB" sz="1200" dirty="0" err="1"/>
+              <a:t>raisata</a:t>
+            </a:r>
+            <a:r>
+              <a:rPr lang="en-GB" sz="1200" dirty="0"/>
+              <a:t> </a:t>
+            </a:r>
+            <a:r>
+              <a:rPr lang="en-GB" sz="1200" dirty="0" err="1"/>
+              <a:t>väärtuslikku</a:t>
+            </a:r>
+            <a:r>
+              <a:rPr lang="en-GB" sz="1200" dirty="0"/>
+              <a:t> </a:t>
+            </a:r>
+            <a:r>
+              <a:rPr lang="en-GB" sz="1200" dirty="0" err="1"/>
+              <a:t>ekraanipinda</a:t>
+            </a:r>
+            <a:r>
+              <a:rPr lang="en-GB" sz="1200" dirty="0"/>
+              <a:t>?</a:t>
+            </a:r>
+          </a:p>
+          <a:p>
+            <a:pPr lvl="1"/>
+            <a:r>
+              <a:rPr lang="en-GB" sz="1200" dirty="0"/>
+              <a:t>Kas </a:t>
+            </a:r>
+            <a:r>
+              <a:rPr lang="en-GB" sz="1200" dirty="0" err="1"/>
+              <a:t>ekraanilt</a:t>
+            </a:r>
+            <a:r>
+              <a:rPr lang="en-GB" sz="1200" dirty="0"/>
+              <a:t> on </a:t>
+            </a:r>
+            <a:r>
+              <a:rPr lang="en-GB" sz="1200" dirty="0" err="1"/>
+              <a:t>eemaldatud</a:t>
+            </a:r>
+            <a:r>
+              <a:rPr lang="en-GB" sz="1200" dirty="0"/>
+              <a:t> </a:t>
+            </a:r>
+            <a:r>
+              <a:rPr lang="en-GB" sz="1200" dirty="0" err="1"/>
+              <a:t>ebaoluline</a:t>
+            </a:r>
+            <a:r>
+              <a:rPr lang="en-GB" sz="1200" dirty="0"/>
+              <a:t> "</a:t>
+            </a:r>
+            <a:r>
+              <a:rPr lang="en-GB" sz="1200" dirty="0" err="1"/>
+              <a:t>müra</a:t>
+            </a:r>
+            <a:r>
+              <a:rPr lang="en-GB" sz="1200" dirty="0"/>
+              <a:t>" (</a:t>
+            </a:r>
+            <a:r>
+              <a:rPr lang="en-GB" sz="1200" dirty="0" err="1"/>
+              <a:t>nt</a:t>
+            </a:r>
+            <a:r>
+              <a:rPr lang="en-GB" sz="1200" dirty="0"/>
+              <a:t> </a:t>
+            </a:r>
+            <a:r>
+              <a:rPr lang="en-GB" sz="1200" dirty="0" err="1"/>
+              <a:t>suured</a:t>
+            </a:r>
+            <a:r>
+              <a:rPr lang="en-GB" sz="1200" dirty="0"/>
+              <a:t> </a:t>
+            </a:r>
+            <a:r>
+              <a:rPr lang="en-GB" sz="1200" dirty="0" err="1"/>
+              <a:t>kellad</a:t>
+            </a:r>
+            <a:r>
+              <a:rPr lang="en-GB" sz="1200" dirty="0"/>
+              <a:t>, </a:t>
+            </a:r>
+            <a:r>
+              <a:rPr lang="en-GB" sz="1200" dirty="0" err="1"/>
+              <a:t>tervitustekstid</a:t>
+            </a:r>
+            <a:r>
+              <a:rPr lang="en-GB" sz="1200" dirty="0"/>
+              <a:t>, </a:t>
+            </a:r>
+            <a:r>
+              <a:rPr lang="en-GB" sz="1200" dirty="0" err="1"/>
+              <a:t>ilmateade</a:t>
+            </a:r>
+            <a:r>
+              <a:rPr lang="en-GB" sz="1200" dirty="0"/>
+              <a:t>, </a:t>
+            </a:r>
+            <a:r>
+              <a:rPr lang="en-GB" sz="1200" dirty="0" err="1"/>
+              <a:t>kui</a:t>
+            </a:r>
+            <a:r>
+              <a:rPr lang="en-GB" sz="1200" dirty="0"/>
+              <a:t> need pole </a:t>
+            </a:r>
+            <a:r>
+              <a:rPr lang="en-GB" sz="1200" dirty="0" err="1"/>
+              <a:t>tööks</a:t>
+            </a:r>
+            <a:r>
+              <a:rPr lang="en-GB" sz="1200" dirty="0"/>
+              <a:t> </a:t>
+            </a:r>
+            <a:r>
+              <a:rPr lang="en-GB" sz="1200" dirty="0" err="1"/>
+              <a:t>otseselt</a:t>
+            </a:r>
+            <a:r>
+              <a:rPr lang="en-GB" sz="1200" dirty="0"/>
+              <a:t> </a:t>
+            </a:r>
+            <a:r>
+              <a:rPr lang="en-GB" sz="1200" dirty="0" err="1"/>
+              <a:t>vajalikud</a:t>
+            </a:r>
+            <a:r>
+              <a:rPr lang="en-GB" sz="1200" dirty="0"/>
+              <a:t>)?</a:t>
+            </a:r>
+          </a:p>
+          <a:p>
+            <a:pPr lvl="0"/>
+            <a:r>
+              <a:rPr lang="en-GB" sz="1200" dirty="0" err="1"/>
+              <a:t>Visuaalidevahelised</a:t>
+            </a:r>
+            <a:r>
+              <a:rPr lang="en-GB" sz="1200" dirty="0"/>
+              <a:t> </a:t>
+            </a:r>
+            <a:r>
+              <a:rPr lang="en-GB" sz="1200" dirty="0" err="1"/>
+              <a:t>seosed</a:t>
+            </a:r>
+            <a:r>
+              <a:rPr lang="en-GB" sz="1200" dirty="0"/>
+              <a:t> (</a:t>
+            </a:r>
+            <a:r>
+              <a:rPr lang="en-GB" sz="1200" b="1" dirty="0"/>
+              <a:t>Edit Interactions</a:t>
+            </a:r>
+            <a:r>
+              <a:rPr lang="en-GB" sz="1200" dirty="0"/>
+              <a:t>) on </a:t>
+            </a:r>
+            <a:r>
+              <a:rPr lang="en-GB" sz="1200" dirty="0" err="1"/>
+              <a:t>kontrollitud</a:t>
+            </a:r>
+            <a:r>
+              <a:rPr lang="en-GB" sz="1200" dirty="0"/>
+              <a:t> </a:t>
+            </a:r>
+            <a:r>
+              <a:rPr lang="en-GB" sz="1200" dirty="0" err="1"/>
+              <a:t>ja</a:t>
+            </a:r>
+            <a:r>
+              <a:rPr lang="en-GB" sz="1200" dirty="0"/>
+              <a:t> </a:t>
+            </a:r>
+            <a:r>
+              <a:rPr lang="en-GB" sz="1200" dirty="0" err="1"/>
+              <a:t>piiratud</a:t>
+            </a:r>
+            <a:r>
+              <a:rPr lang="en-GB" sz="1200" dirty="0"/>
+              <a:t>.</a:t>
+            </a:r>
+          </a:p>
+          <a:p>
+            <a:pPr lvl="0"/>
+            <a:r>
+              <a:rPr lang="en-GB" sz="1200" dirty="0" err="1"/>
+              <a:t>Kasutusel</a:t>
+            </a:r>
+            <a:r>
+              <a:rPr lang="en-GB" sz="1200" dirty="0"/>
+              <a:t> on </a:t>
+            </a:r>
+            <a:r>
+              <a:rPr lang="en-GB" sz="1200" b="1" dirty="0"/>
+              <a:t>"</a:t>
+            </a:r>
+            <a:r>
+              <a:rPr lang="en-GB" sz="1200" b="1" dirty="0" err="1"/>
+              <a:t>Tühjenda</a:t>
+            </a:r>
+            <a:r>
+              <a:rPr lang="en-GB" sz="1200" b="1" dirty="0"/>
+              <a:t> </a:t>
+            </a:r>
+            <a:r>
+              <a:rPr lang="en-GB" sz="1200" b="1" dirty="0" err="1"/>
+              <a:t>filtrid</a:t>
+            </a:r>
+            <a:r>
+              <a:rPr lang="en-GB" sz="1200" b="1" dirty="0"/>
+              <a:t>"</a:t>
+            </a:r>
+            <a:r>
+              <a:rPr lang="en-GB" sz="1200" dirty="0"/>
+              <a:t> </a:t>
+            </a:r>
+            <a:r>
+              <a:rPr lang="en-GB" sz="1200" dirty="0" err="1"/>
+              <a:t>nupp</a:t>
+            </a:r>
+            <a:r>
+              <a:rPr lang="en-GB" sz="1200" dirty="0"/>
+              <a:t>.</a:t>
+            </a:r>
+          </a:p>
+          <a:p>
+            <a:pPr lvl="0"/>
+            <a:r>
+              <a:rPr lang="en-GB" sz="1200" dirty="0" err="1"/>
+              <a:t>Graafikute</a:t>
+            </a:r>
+            <a:r>
+              <a:rPr lang="en-GB" sz="1200" dirty="0"/>
+              <a:t> </a:t>
+            </a:r>
+            <a:r>
+              <a:rPr lang="en-GB" sz="1200" dirty="0" err="1"/>
+              <a:t>pealkirjad</a:t>
+            </a:r>
+            <a:r>
+              <a:rPr lang="en-GB" sz="1200" dirty="0"/>
+              <a:t> on </a:t>
+            </a:r>
+            <a:r>
+              <a:rPr lang="en-GB" sz="1200" b="1" dirty="0" err="1"/>
+              <a:t>selged</a:t>
+            </a:r>
+            <a:r>
+              <a:rPr lang="en-GB" sz="1200" b="1" dirty="0"/>
+              <a:t> </a:t>
+            </a:r>
+            <a:r>
+              <a:rPr lang="en-GB" sz="1200" b="1" dirty="0" err="1"/>
+              <a:t>ja</a:t>
+            </a:r>
+            <a:r>
+              <a:rPr lang="en-GB" sz="1200" b="1" dirty="0"/>
+              <a:t> </a:t>
+            </a:r>
+            <a:r>
+              <a:rPr lang="en-GB" sz="1200" b="1" dirty="0" err="1"/>
+              <a:t>kirjeldavad</a:t>
+            </a:r>
+            <a:r>
+              <a:rPr lang="en-GB" sz="1200" dirty="0"/>
+              <a:t>.</a:t>
+            </a:r>
+          </a:p>
+          <a:p>
+            <a:pPr lvl="0"/>
+            <a:r>
+              <a:rPr lang="en-GB" sz="1200" dirty="0" err="1"/>
+              <a:t>Navigatsioon</a:t>
+            </a:r>
+            <a:r>
+              <a:rPr lang="en-GB" sz="1200" dirty="0"/>
+              <a:t> on </a:t>
+            </a:r>
+            <a:r>
+              <a:rPr lang="en-GB" sz="1200" dirty="0" err="1"/>
+              <a:t>loogiline</a:t>
+            </a:r>
+            <a:r>
+              <a:rPr lang="en-GB" sz="1200" dirty="0"/>
+              <a:t>.</a:t>
+            </a:r>
+          </a:p>
+          <a:p>
+            <a:pPr lvl="0"/>
+            <a:r>
+              <a:rPr lang="en-GB" sz="1200" dirty="0" err="1"/>
+              <a:t>Aruandel</a:t>
+            </a:r>
+            <a:r>
+              <a:rPr lang="en-GB" sz="1200" dirty="0"/>
+              <a:t> on info </a:t>
+            </a:r>
+            <a:r>
+              <a:rPr lang="en-GB" sz="1200" dirty="0" err="1"/>
+              <a:t>leht</a:t>
+            </a:r>
+            <a:r>
+              <a:rPr lang="en-GB" sz="1200" dirty="0"/>
+              <a:t>.</a:t>
+            </a:r>
+          </a:p>
+          <a:p>
+            <a:pPr marL="0" indent="0">
+              <a:buNone/>
+            </a:pPr>
+            <a:br>
+              <a:rPr lang="en-GB" sz="1200" dirty="0"/>
+            </a:br>
+            <a:endParaRPr lang="en-GB" sz="1200" dirty="0"/>
+          </a:p>
+          <a:p>
+            <a:endParaRPr lang="en-GB" sz="1200" dirty="0"/>
+          </a:p>
+        </p:txBody>
+      </p:sp>
+    </p:spTree>
+    <p:extLst>
+      <p:ext uri="{BB962C8B-B14F-4D97-AF65-F5344CB8AC3E}">
+        <p14:creationId xmlns:p14="http://schemas.microsoft.com/office/powerpoint/2010/main" val="3956582901"/>
+      </p:ext>
+    </p:extLst>
+  </p:cSld>
+  <p:clrMapOvr>
+    <a:masterClrMapping/>
+  </p:clrMapOvr>
+</p:sld>
+</file>
+
+<file path=ppt/slides/slide27.xml><?xml version="1.0" encoding="utf-8"?>
+<p:sld xmlns:a="http://schemas.openxmlformats.org/drawingml/2006/main" xmlns:r="http://schemas.openxmlformats.org/officeDocument/2006/relationships" xmlns:p="http://schemas.openxmlformats.org/presentationml/2006/main">
+  <p:cSld>
+    <p:spTree>
+      <p:nvGrpSpPr>
+        <p:cNvPr id="1" name=""/>
+        <p:cNvGrpSpPr/>
+        <p:nvPr/>
+      </p:nvGrpSpPr>
+      <p:grpSpPr>
+        <a:xfrm>
+          <a:off x="0" y="0"/>
+          <a:ext cx="0" cy="0"/>
+          <a:chOff x="0" y="0"/>
+          <a:chExt cx="0" cy="0"/>
+        </a:xfrm>
+      </p:grpSpPr>
+      <p:sp>
+        <p:nvSpPr>
+          <p:cNvPr id="2" name="Title 1">
+            <a:extLst>
+              <a:ext uri="{FF2B5EF4-FFF2-40B4-BE49-F238E27FC236}">
+                <a16:creationId xmlns:a16="http://schemas.microsoft.com/office/drawing/2014/main" id="{A7C9E6B9-2AC8-5218-C39C-52614A3386D2}"/>
+              </a:ext>
+            </a:extLst>
+          </p:cNvPr>
+          <p:cNvSpPr>
+            <a:spLocks noGrp="1"/>
+          </p:cNvSpPr>
+          <p:nvPr>
+            <p:ph type="ctrTitle"/>
+          </p:nvPr>
+        </p:nvSpPr>
+        <p:spPr/>
+        <p:txBody>
+          <a:bodyPr/>
+          <a:lstStyle/>
+          <a:p>
+            <a:r>
+              <a:rPr lang="en-GB" dirty="0"/>
+              <a:t>Halb </a:t>
+            </a:r>
+            <a:r>
+              <a:rPr lang="en-GB" dirty="0" err="1"/>
+              <a:t>näide</a:t>
+            </a:r>
+            <a:endParaRPr lang="en-GB" dirty="0"/>
+          </a:p>
+        </p:txBody>
+      </p:sp>
+      <p:sp>
+        <p:nvSpPr>
+          <p:cNvPr id="3" name="Content Placeholder 2">
+            <a:extLst>
+              <a:ext uri="{FF2B5EF4-FFF2-40B4-BE49-F238E27FC236}">
+                <a16:creationId xmlns:a16="http://schemas.microsoft.com/office/drawing/2014/main" id="{82AD73B3-D6DF-B270-899B-BB933EED1E19}"/>
+              </a:ext>
+            </a:extLst>
+          </p:cNvPr>
+          <p:cNvSpPr>
+            <a:spLocks noGrp="1"/>
+          </p:cNvSpPr>
+          <p:nvPr>
+            <p:ph sz="quarter" idx="10"/>
+          </p:nvPr>
+        </p:nvSpPr>
+        <p:spPr>
+          <a:xfrm>
+            <a:off x="6266580" y="5246753"/>
+            <a:ext cx="5364162" cy="2276020"/>
+          </a:xfrm>
+        </p:spPr>
+        <p:txBody>
+          <a:bodyPr/>
+          <a:lstStyle/>
+          <a:p>
+            <a:r>
+              <a:rPr lang="en-GB" dirty="0" err="1"/>
+              <a:t>Uuri</a:t>
+            </a:r>
+            <a:r>
+              <a:rPr lang="en-GB" dirty="0"/>
+              <a:t> </a:t>
+            </a:r>
+            <a:r>
+              <a:rPr lang="en-GB" dirty="0" err="1"/>
+              <a:t>ja</a:t>
+            </a:r>
+            <a:r>
+              <a:rPr lang="en-GB" dirty="0"/>
+              <a:t> too </a:t>
+            </a:r>
+            <a:r>
+              <a:rPr lang="en-GB" dirty="0" err="1"/>
+              <a:t>välja</a:t>
+            </a:r>
+            <a:r>
+              <a:rPr lang="en-GB" dirty="0"/>
+              <a:t> 5-10 </a:t>
+            </a:r>
+            <a:r>
+              <a:rPr lang="en-GB" dirty="0" err="1"/>
+              <a:t>asja</a:t>
+            </a:r>
+            <a:r>
+              <a:rPr lang="en-GB" dirty="0"/>
+              <a:t>, mis on </a:t>
+            </a:r>
+            <a:r>
+              <a:rPr lang="en-GB" dirty="0" err="1"/>
+              <a:t>valesti</a:t>
+            </a:r>
+            <a:endParaRPr lang="en-GB" dirty="0"/>
+          </a:p>
+        </p:txBody>
+      </p:sp>
+      <p:pic>
+        <p:nvPicPr>
+          <p:cNvPr id="5" name="Picture 4" descr="r/BusinessIntelligence - I Tried My Hand at Designing the Worst Dashboard I Could Imagine">
+            <a:extLst>
+              <a:ext uri="{FF2B5EF4-FFF2-40B4-BE49-F238E27FC236}">
+                <a16:creationId xmlns:a16="http://schemas.microsoft.com/office/drawing/2014/main" id="{E5BA800A-4441-F23B-7348-103B10670405}"/>
+              </a:ext>
+            </a:extLst>
+          </p:cNvPr>
+          <p:cNvPicPr>
+            <a:picLocks noChangeAspect="1"/>
+          </p:cNvPicPr>
+          <p:nvPr/>
+        </p:nvPicPr>
+        <p:blipFill>
+          <a:blip r:embed="rId2"/>
+          <a:stretch>
+            <a:fillRect/>
+          </a:stretch>
+        </p:blipFill>
+        <p:spPr>
+          <a:xfrm>
+            <a:off x="1065340" y="275822"/>
+            <a:ext cx="7820690" cy="4399139"/>
+          </a:xfrm>
+          <a:prstGeom prst="rect">
+            <a:avLst/>
+          </a:prstGeom>
+        </p:spPr>
+      </p:pic>
+    </p:spTree>
+    <p:extLst>
+      <p:ext uri="{BB962C8B-B14F-4D97-AF65-F5344CB8AC3E}">
+        <p14:creationId xmlns:p14="http://schemas.microsoft.com/office/powerpoint/2010/main" val="2743895612"/>
+      </p:ext>
+    </p:extLst>
+  </p:cSld>
+  <p:clrMapOvr>
+    <a:masterClrMapping/>
+  </p:clrMapOvr>
+</p:sld>
+</file>
+
+<file path=ppt/slides/slide28.xml><?xml version="1.0" encoding="utf-8"?>
+<p:sld xmlns:a="http://schemas.openxmlformats.org/drawingml/2006/main" xmlns:r="http://schemas.openxmlformats.org/officeDocument/2006/relationships" xmlns:p="http://schemas.openxmlformats.org/presentationml/2006/main">
+  <p:cSld>
+    <p:spTree>
+      <p:nvGrpSpPr>
+        <p:cNvPr id="1" name=""/>
+        <p:cNvGrpSpPr/>
+        <p:nvPr/>
+      </p:nvGrpSpPr>
+      <p:grpSpPr>
+        <a:xfrm>
+          <a:off x="0" y="0"/>
+          <a:ext cx="0" cy="0"/>
+          <a:chOff x="0" y="0"/>
+          <a:chExt cx="0" cy="0"/>
+        </a:xfrm>
+      </p:grpSpPr>
+      <p:sp>
+        <p:nvSpPr>
+          <p:cNvPr id="2" name="Title 1">
+            <a:extLst>
+              <a:ext uri="{FF2B5EF4-FFF2-40B4-BE49-F238E27FC236}">
+                <a16:creationId xmlns:a16="http://schemas.microsoft.com/office/drawing/2014/main" id="{F7CB3548-4215-18ED-8E5C-90C8DED356BF}"/>
+              </a:ext>
+            </a:extLst>
+          </p:cNvPr>
+          <p:cNvSpPr>
+            <a:spLocks noGrp="1"/>
+          </p:cNvSpPr>
+          <p:nvPr>
+            <p:ph type="ctrTitle"/>
+          </p:nvPr>
+        </p:nvSpPr>
+        <p:spPr>
+          <a:xfrm>
+            <a:off x="999384" y="518948"/>
+            <a:ext cx="5364163" cy="2052637"/>
+          </a:xfrm>
+        </p:spPr>
+        <p:txBody>
+          <a:bodyPr/>
+          <a:lstStyle/>
+          <a:p>
+            <a:r>
+              <a:rPr lang="en-GB" dirty="0"/>
+              <a:t>Halb </a:t>
+            </a:r>
+            <a:r>
+              <a:rPr lang="en-GB" dirty="0" err="1"/>
+              <a:t>näide</a:t>
+            </a:r>
+            <a:endParaRPr lang="en-GB" dirty="0"/>
+          </a:p>
+        </p:txBody>
+      </p:sp>
+      <p:sp>
+        <p:nvSpPr>
+          <p:cNvPr id="3" name="Content Placeholder 2">
+            <a:extLst>
+              <a:ext uri="{FF2B5EF4-FFF2-40B4-BE49-F238E27FC236}">
+                <a16:creationId xmlns:a16="http://schemas.microsoft.com/office/drawing/2014/main" id="{C369A125-02B1-55CE-C088-83185654BE88}"/>
+              </a:ext>
+            </a:extLst>
+          </p:cNvPr>
+          <p:cNvSpPr>
+            <a:spLocks noGrp="1"/>
+          </p:cNvSpPr>
+          <p:nvPr>
+            <p:ph sz="quarter" idx="10"/>
+          </p:nvPr>
+        </p:nvSpPr>
+        <p:spPr>
+          <a:xfrm>
+            <a:off x="523396" y="3055707"/>
+            <a:ext cx="5364162" cy="2276020"/>
+          </a:xfrm>
+        </p:spPr>
+        <p:txBody>
+          <a:bodyPr>
+            <a:normAutofit fontScale="92500" lnSpcReduction="20000"/>
+          </a:bodyPr>
+          <a:lstStyle/>
+          <a:p>
+            <a:r>
+              <a:rPr lang="en-GB" dirty="0" err="1"/>
+              <a:t>Ekraanile</a:t>
+            </a:r>
+            <a:r>
+              <a:rPr lang="en-GB" dirty="0"/>
+              <a:t> on </a:t>
+            </a:r>
+            <a:r>
+              <a:rPr lang="en-GB" dirty="0" err="1"/>
+              <a:t>korraga</a:t>
+            </a:r>
+            <a:r>
+              <a:rPr lang="en-GB" dirty="0"/>
+              <a:t> </a:t>
+            </a:r>
+            <a:r>
+              <a:rPr lang="en-GB" dirty="0" err="1"/>
+              <a:t>kuhjatud</a:t>
+            </a:r>
+            <a:r>
+              <a:rPr lang="en-GB" dirty="0"/>
+              <a:t> </a:t>
+            </a:r>
+            <a:r>
+              <a:rPr lang="en-GB" dirty="0" err="1"/>
+              <a:t>liiga</a:t>
+            </a:r>
+            <a:r>
+              <a:rPr lang="en-GB" dirty="0"/>
+              <a:t> </a:t>
+            </a:r>
+            <a:r>
+              <a:rPr lang="en-GB" dirty="0" err="1"/>
+              <a:t>palju</a:t>
+            </a:r>
+            <a:r>
+              <a:rPr lang="en-GB" dirty="0"/>
+              <a:t> </a:t>
+            </a:r>
+            <a:r>
+              <a:rPr lang="en-GB" dirty="0" err="1"/>
+              <a:t>vidinaid</a:t>
+            </a:r>
+            <a:r>
+              <a:rPr lang="en-GB" dirty="0"/>
+              <a:t> </a:t>
+            </a:r>
+            <a:r>
+              <a:rPr lang="en-GB" dirty="0" err="1"/>
+              <a:t>ja</a:t>
+            </a:r>
+            <a:r>
+              <a:rPr lang="en-GB" dirty="0"/>
+              <a:t> </a:t>
+            </a:r>
+            <a:r>
+              <a:rPr lang="en-GB" dirty="0" err="1"/>
+              <a:t>graafikuid</a:t>
+            </a:r>
+            <a:r>
+              <a:rPr lang="en-GB" dirty="0"/>
+              <a:t>, mis </a:t>
+            </a:r>
+            <a:r>
+              <a:rPr lang="en-GB" dirty="0" err="1"/>
+              <a:t>teeb</a:t>
+            </a:r>
+            <a:r>
+              <a:rPr lang="en-GB" dirty="0"/>
+              <a:t> </a:t>
+            </a:r>
+            <a:r>
+              <a:rPr lang="en-GB" dirty="0" err="1"/>
+              <a:t>olulise</a:t>
+            </a:r>
+            <a:r>
+              <a:rPr lang="en-GB" dirty="0"/>
+              <a:t> info </a:t>
+            </a:r>
+            <a:r>
+              <a:rPr lang="en-GB" dirty="0" err="1"/>
+              <a:t>leidmise</a:t>
+            </a:r>
+            <a:r>
+              <a:rPr lang="en-GB" dirty="0"/>
+              <a:t> </a:t>
+            </a:r>
+            <a:r>
+              <a:rPr lang="en-GB" dirty="0" err="1"/>
+              <a:t>võimatuks</a:t>
+            </a:r>
+            <a:r>
+              <a:rPr lang="en-GB" dirty="0"/>
+              <a:t>.</a:t>
+            </a:r>
+          </a:p>
+          <a:p>
+            <a:r>
+              <a:rPr lang="en-GB" b="1" dirty="0"/>
+              <a:t>Silmi </a:t>
+            </a:r>
+            <a:r>
+              <a:rPr lang="en-GB" b="1" dirty="0" err="1"/>
+              <a:t>väsitavad</a:t>
+            </a:r>
+            <a:r>
+              <a:rPr lang="en-GB" b="1" dirty="0"/>
+              <a:t> </a:t>
+            </a:r>
+            <a:r>
+              <a:rPr lang="en-GB" b="1" dirty="0" err="1"/>
+              <a:t>värvid</a:t>
+            </a:r>
+            <a:r>
+              <a:rPr lang="en-GB" dirty="0"/>
+              <a:t>: </a:t>
+            </a:r>
+            <a:r>
+              <a:rPr lang="en-GB" dirty="0" err="1"/>
+              <a:t>Tumedal</a:t>
+            </a:r>
+            <a:r>
+              <a:rPr lang="en-GB" dirty="0"/>
+              <a:t> </a:t>
+            </a:r>
+            <a:r>
+              <a:rPr lang="en-GB" dirty="0" err="1"/>
+              <a:t>taustal</a:t>
+            </a:r>
+            <a:r>
+              <a:rPr lang="en-GB" dirty="0"/>
+              <a:t> </a:t>
+            </a:r>
+            <a:r>
+              <a:rPr lang="en-GB" dirty="0" err="1"/>
+              <a:t>kasutatud</a:t>
+            </a:r>
+            <a:r>
+              <a:rPr lang="en-GB" dirty="0"/>
+              <a:t> </a:t>
+            </a:r>
+            <a:r>
+              <a:rPr lang="en-GB" dirty="0" err="1"/>
+              <a:t>neoonrohelised</a:t>
+            </a:r>
+            <a:r>
+              <a:rPr lang="en-GB" dirty="0"/>
+              <a:t>, </a:t>
+            </a:r>
+            <a:r>
+              <a:rPr lang="en-GB" dirty="0" err="1"/>
+              <a:t>lillad</a:t>
+            </a:r>
+            <a:r>
+              <a:rPr lang="en-GB" dirty="0"/>
+              <a:t> </a:t>
+            </a:r>
+            <a:r>
+              <a:rPr lang="en-GB" dirty="0" err="1"/>
+              <a:t>ja</a:t>
+            </a:r>
+            <a:r>
+              <a:rPr lang="en-GB" dirty="0"/>
+              <a:t> </a:t>
+            </a:r>
+            <a:r>
+              <a:rPr lang="en-GB" dirty="0" err="1"/>
+              <a:t>kollased</a:t>
+            </a:r>
+            <a:r>
+              <a:rPr lang="en-GB" dirty="0"/>
+              <a:t> </a:t>
+            </a:r>
+            <a:r>
+              <a:rPr lang="en-GB" dirty="0" err="1"/>
+              <a:t>toonid</a:t>
+            </a:r>
+            <a:r>
+              <a:rPr lang="en-GB" dirty="0"/>
+              <a:t> </a:t>
+            </a:r>
+            <a:r>
+              <a:rPr lang="en-GB" dirty="0" err="1"/>
+              <a:t>väsitavad</a:t>
+            </a:r>
+            <a:r>
+              <a:rPr lang="en-GB" dirty="0"/>
+              <a:t> </a:t>
+            </a:r>
+            <a:r>
+              <a:rPr lang="en-GB" dirty="0" err="1"/>
+              <a:t>silmi</a:t>
+            </a:r>
+            <a:r>
+              <a:rPr lang="en-GB" dirty="0"/>
+              <a:t> </a:t>
+            </a:r>
+            <a:r>
+              <a:rPr lang="en-GB" dirty="0" err="1"/>
+              <a:t>ning</a:t>
+            </a:r>
+            <a:r>
+              <a:rPr lang="en-GB" dirty="0"/>
+              <a:t> </a:t>
+            </a:r>
+            <a:r>
+              <a:rPr lang="en-GB" dirty="0" err="1"/>
+              <a:t>neil</a:t>
+            </a:r>
+            <a:r>
+              <a:rPr lang="en-GB" dirty="0"/>
+              <a:t> </a:t>
+            </a:r>
+            <a:r>
+              <a:rPr lang="en-GB" dirty="0" err="1"/>
+              <a:t>puudub</a:t>
+            </a:r>
+            <a:r>
+              <a:rPr lang="en-GB" dirty="0"/>
+              <a:t> </a:t>
+            </a:r>
+            <a:r>
+              <a:rPr lang="en-GB" dirty="0" err="1"/>
+              <a:t>funktsionaalne</a:t>
+            </a:r>
+            <a:r>
+              <a:rPr lang="en-GB" dirty="0"/>
+              <a:t> </a:t>
+            </a:r>
+            <a:r>
+              <a:rPr lang="en-GB" dirty="0" err="1"/>
+              <a:t>tähendus</a:t>
+            </a:r>
+            <a:r>
+              <a:rPr lang="en-GB" dirty="0"/>
+              <a:t>.</a:t>
+            </a:r>
+          </a:p>
+          <a:p>
+            <a:pPr lvl="0"/>
+            <a:r>
+              <a:rPr lang="en-GB" b="1" dirty="0"/>
+              <a:t>Valed </a:t>
+            </a:r>
+            <a:r>
+              <a:rPr lang="en-GB" b="1" dirty="0" err="1"/>
+              <a:t>ja</a:t>
+            </a:r>
+            <a:r>
+              <a:rPr lang="en-GB" b="1" dirty="0"/>
+              <a:t> </a:t>
+            </a:r>
+            <a:r>
+              <a:rPr lang="en-GB" b="1" dirty="0" err="1"/>
+              <a:t>ebatäpsed</a:t>
+            </a:r>
+            <a:r>
+              <a:rPr lang="en-GB" b="1" dirty="0"/>
+              <a:t> </a:t>
+            </a:r>
+            <a:r>
+              <a:rPr lang="en-GB" b="1" dirty="0" err="1"/>
+              <a:t>diagrammid</a:t>
+            </a:r>
+            <a:r>
+              <a:rPr lang="en-GB" dirty="0"/>
+              <a:t>: </a:t>
+            </a:r>
+            <a:r>
+              <a:rPr lang="en-GB" dirty="0" err="1"/>
+              <a:t>Keerulised</a:t>
+            </a:r>
+            <a:r>
+              <a:rPr lang="en-GB" dirty="0"/>
+              <a:t> 3D-graafikud </a:t>
+            </a:r>
+            <a:r>
+              <a:rPr lang="en-GB" dirty="0" err="1"/>
+              <a:t>ja</a:t>
+            </a:r>
+            <a:r>
+              <a:rPr lang="en-GB" dirty="0"/>
+              <a:t> </a:t>
+            </a:r>
+            <a:r>
+              <a:rPr lang="en-GB" dirty="0" err="1"/>
+              <a:t>tihedalt</a:t>
+            </a:r>
+            <a:r>
+              <a:rPr lang="en-GB" dirty="0"/>
+              <a:t> </a:t>
+            </a:r>
+            <a:r>
+              <a:rPr lang="en-GB" dirty="0" err="1"/>
+              <a:t>üksteise</a:t>
+            </a:r>
+            <a:r>
+              <a:rPr lang="en-GB" dirty="0"/>
+              <a:t> </a:t>
+            </a:r>
+            <a:r>
+              <a:rPr lang="en-GB" dirty="0" err="1"/>
+              <a:t>otsa</a:t>
+            </a:r>
+            <a:r>
+              <a:rPr lang="en-GB" dirty="0"/>
+              <a:t> </a:t>
+            </a:r>
+            <a:r>
+              <a:rPr lang="en-GB" dirty="0" err="1"/>
+              <a:t>surutud</a:t>
+            </a:r>
+            <a:r>
+              <a:rPr lang="en-GB" dirty="0"/>
+              <a:t> </a:t>
+            </a:r>
+            <a:r>
+              <a:rPr lang="en-GB" dirty="0" err="1"/>
+              <a:t>jooned</a:t>
+            </a:r>
+            <a:r>
+              <a:rPr lang="en-GB" dirty="0"/>
+              <a:t> </a:t>
+            </a:r>
+            <a:r>
+              <a:rPr lang="en-GB" dirty="0" err="1"/>
+              <a:t>muudavad</a:t>
+            </a:r>
+            <a:r>
+              <a:rPr lang="en-GB" dirty="0"/>
+              <a:t> </a:t>
+            </a:r>
+            <a:r>
+              <a:rPr lang="en-GB" dirty="0" err="1"/>
+              <a:t>andmete</a:t>
+            </a:r>
+            <a:r>
+              <a:rPr lang="en-GB" dirty="0"/>
+              <a:t> </a:t>
+            </a:r>
+            <a:r>
+              <a:rPr lang="en-GB" dirty="0" err="1"/>
+              <a:t>lugemise</a:t>
+            </a:r>
+            <a:r>
+              <a:rPr lang="en-GB" dirty="0"/>
+              <a:t> </a:t>
+            </a:r>
+            <a:r>
+              <a:rPr lang="en-GB" dirty="0" err="1"/>
+              <a:t>ja</a:t>
+            </a:r>
+            <a:r>
+              <a:rPr lang="en-GB" dirty="0"/>
+              <a:t> </a:t>
+            </a:r>
+            <a:r>
+              <a:rPr lang="en-GB" dirty="0" err="1"/>
+              <a:t>võrdlemise</a:t>
+            </a:r>
+            <a:r>
+              <a:rPr lang="en-GB" dirty="0"/>
+              <a:t> </a:t>
+            </a:r>
+            <a:r>
+              <a:rPr lang="en-GB" dirty="0" err="1"/>
+              <a:t>ebatäpseks</a:t>
+            </a:r>
+            <a:r>
+              <a:rPr lang="en-GB" dirty="0"/>
+              <a:t>.</a:t>
+            </a:r>
+          </a:p>
+          <a:p>
+            <a:pPr lvl="0"/>
+            <a:r>
+              <a:rPr lang="en-GB" b="1" dirty="0" err="1"/>
+              <a:t>Puuduv</a:t>
+            </a:r>
+            <a:r>
+              <a:rPr lang="en-GB" b="1" dirty="0"/>
+              <a:t> </a:t>
+            </a:r>
+            <a:r>
+              <a:rPr lang="en-GB" b="1" dirty="0" err="1"/>
+              <a:t>ruum</a:t>
+            </a:r>
+            <a:r>
+              <a:rPr lang="en-GB" b="1" dirty="0"/>
+              <a:t> </a:t>
+            </a:r>
+            <a:r>
+              <a:rPr lang="en-GB" b="1" dirty="0" err="1"/>
+              <a:t>ja</a:t>
+            </a:r>
+            <a:r>
+              <a:rPr lang="en-GB" b="1" dirty="0"/>
+              <a:t> </a:t>
+            </a:r>
+            <a:r>
+              <a:rPr lang="en-GB" b="1" dirty="0" err="1"/>
+              <a:t>hierarhia</a:t>
+            </a:r>
+            <a:r>
+              <a:rPr lang="en-GB" dirty="0"/>
+              <a:t>: </a:t>
+            </a:r>
+            <a:r>
+              <a:rPr lang="en-GB" dirty="0" err="1"/>
+              <a:t>Elementide</a:t>
+            </a:r>
+            <a:r>
+              <a:rPr lang="en-GB" dirty="0"/>
+              <a:t> </a:t>
+            </a:r>
+            <a:r>
+              <a:rPr lang="en-GB" dirty="0" err="1"/>
+              <a:t>vahel</a:t>
+            </a:r>
+            <a:r>
+              <a:rPr lang="en-GB" dirty="0"/>
+              <a:t> </a:t>
+            </a:r>
+            <a:r>
+              <a:rPr lang="en-GB" dirty="0" err="1"/>
+              <a:t>puudub</a:t>
+            </a:r>
+            <a:r>
+              <a:rPr lang="en-GB" dirty="0"/>
+              <a:t> </a:t>
+            </a:r>
+            <a:r>
+              <a:rPr lang="en-GB" dirty="0" err="1"/>
+              <a:t>vaba</a:t>
+            </a:r>
+            <a:r>
+              <a:rPr lang="en-GB" dirty="0"/>
+              <a:t> "</a:t>
+            </a:r>
+            <a:r>
+              <a:rPr lang="en-GB" dirty="0" err="1"/>
+              <a:t>hingamisruum</a:t>
+            </a:r>
+            <a:r>
+              <a:rPr lang="en-GB" dirty="0"/>
+              <a:t>" </a:t>
+            </a:r>
+            <a:r>
+              <a:rPr lang="en-GB" dirty="0" err="1"/>
+              <a:t>ning</a:t>
+            </a:r>
+            <a:r>
+              <a:rPr lang="en-GB" dirty="0"/>
+              <a:t> </a:t>
+            </a:r>
+            <a:r>
+              <a:rPr lang="en-GB" dirty="0" err="1"/>
+              <a:t>kõik</a:t>
+            </a:r>
+            <a:r>
+              <a:rPr lang="en-GB" dirty="0"/>
+              <a:t> </a:t>
+            </a:r>
+            <a:r>
+              <a:rPr lang="en-GB" dirty="0" err="1"/>
+              <a:t>kastid</a:t>
+            </a:r>
+            <a:r>
+              <a:rPr lang="en-GB" dirty="0"/>
+              <a:t> on </a:t>
+            </a:r>
+            <a:r>
+              <a:rPr lang="en-GB" dirty="0" err="1"/>
+              <a:t>ühesuurused</a:t>
+            </a:r>
+            <a:r>
+              <a:rPr lang="en-GB" dirty="0"/>
+              <a:t>, </a:t>
+            </a:r>
+            <a:r>
+              <a:rPr lang="en-GB" dirty="0" err="1"/>
+              <a:t>mistõttu</a:t>
+            </a:r>
+            <a:r>
+              <a:rPr lang="en-GB" dirty="0"/>
+              <a:t> </a:t>
+            </a:r>
+            <a:r>
+              <a:rPr lang="en-GB" dirty="0" err="1"/>
+              <a:t>ei</a:t>
+            </a:r>
+            <a:r>
+              <a:rPr lang="en-GB" dirty="0"/>
+              <a:t> </a:t>
+            </a:r>
+            <a:r>
+              <a:rPr lang="en-GB" dirty="0" err="1"/>
+              <a:t>eristu</a:t>
+            </a:r>
+            <a:r>
+              <a:rPr lang="en-GB" dirty="0"/>
+              <a:t> </a:t>
+            </a:r>
+            <a:r>
+              <a:rPr lang="en-GB" dirty="0" err="1"/>
+              <a:t>kõige</a:t>
+            </a:r>
+            <a:r>
+              <a:rPr lang="en-GB" dirty="0"/>
+              <a:t> </a:t>
+            </a:r>
+            <a:r>
+              <a:rPr lang="en-GB" dirty="0" err="1"/>
+              <a:t>kriitilisemad</a:t>
+            </a:r>
+            <a:r>
+              <a:rPr lang="en-GB" dirty="0"/>
+              <a:t> </a:t>
+            </a:r>
+            <a:r>
+              <a:rPr lang="en-GB" dirty="0" err="1"/>
+              <a:t>näitajad</a:t>
+            </a:r>
+            <a:r>
+              <a:rPr lang="en-GB" dirty="0"/>
+              <a:t>.</a:t>
+            </a:r>
+          </a:p>
+          <a:p>
+            <a:endParaRPr lang="en-GB" dirty="0"/>
+          </a:p>
+        </p:txBody>
+      </p:sp>
+      <p:pic>
+        <p:nvPicPr>
+          <p:cNvPr id="4" name="Picture 3" descr="r/BusinessIntelligence - I Tried My Hand at Designing the Worst Dashboard I Could Imagine">
+            <a:extLst>
+              <a:ext uri="{FF2B5EF4-FFF2-40B4-BE49-F238E27FC236}">
+                <a16:creationId xmlns:a16="http://schemas.microsoft.com/office/drawing/2014/main" id="{809375E6-7B7A-AF11-FB36-276C6BC42A6A}"/>
+              </a:ext>
+            </a:extLst>
+          </p:cNvPr>
+          <p:cNvPicPr>
+            <a:picLocks noChangeAspect="1"/>
+          </p:cNvPicPr>
+          <p:nvPr/>
+        </p:nvPicPr>
+        <p:blipFill>
+          <a:blip r:embed="rId2"/>
+          <a:stretch>
+            <a:fillRect/>
+          </a:stretch>
+        </p:blipFill>
+        <p:spPr>
+          <a:xfrm>
+            <a:off x="6476143" y="597036"/>
+            <a:ext cx="5143500" cy="2893219"/>
+          </a:xfrm>
+          <a:prstGeom prst="rect">
+            <a:avLst/>
+          </a:prstGeom>
+        </p:spPr>
+      </p:pic>
+    </p:spTree>
+    <p:extLst>
+      <p:ext uri="{BB962C8B-B14F-4D97-AF65-F5344CB8AC3E}">
+        <p14:creationId xmlns:p14="http://schemas.microsoft.com/office/powerpoint/2010/main" val="4133231251"/>
+      </p:ext>
+    </p:extLst>
+  </p:cSld>
+  <p:clrMapOvr>
+    <a:masterClrMapping/>
+  </p:clrMapOvr>
+</p:sld>
+</file>
+
+<file path=ppt/slides/slide29.xml><?xml version="1.0" encoding="utf-8"?>
+<p:sld xmlns:a="http://schemas.openxmlformats.org/drawingml/2006/main" xmlns:r="http://schemas.openxmlformats.org/officeDocument/2006/relationships" xmlns:p="http://schemas.openxmlformats.org/presentationml/2006/main">
+  <p:cSld>
+    <p:spTree>
+      <p:nvGrpSpPr>
+        <p:cNvPr id="1" name=""/>
+        <p:cNvGrpSpPr/>
+        <p:nvPr/>
+      </p:nvGrpSpPr>
+      <p:grpSpPr>
+        <a:xfrm>
+          <a:off x="0" y="0"/>
+          <a:ext cx="0" cy="0"/>
+          <a:chOff x="0" y="0"/>
+          <a:chExt cx="0" cy="0"/>
+        </a:xfrm>
+      </p:grpSpPr>
+      <p:sp>
+        <p:nvSpPr>
+          <p:cNvPr id="2" name="Title 1">
+            <a:extLst>
+              <a:ext uri="{FF2B5EF4-FFF2-40B4-BE49-F238E27FC236}">
+                <a16:creationId xmlns:a16="http://schemas.microsoft.com/office/drawing/2014/main" id="{94FCF7A6-C222-A7DA-6B43-F9D7AD0A164B}"/>
+              </a:ext>
+            </a:extLst>
+          </p:cNvPr>
+          <p:cNvSpPr>
+            <a:spLocks noGrp="1"/>
+          </p:cNvSpPr>
+          <p:nvPr>
+            <p:ph type="ctrTitle"/>
+          </p:nvPr>
+        </p:nvSpPr>
+        <p:spPr>
+          <a:xfrm>
+            <a:off x="360557" y="698478"/>
+            <a:ext cx="5364163" cy="2052637"/>
+          </a:xfrm>
+        </p:spPr>
+        <p:txBody>
+          <a:bodyPr/>
+          <a:lstStyle/>
+          <a:p>
+            <a:r>
+              <a:rPr lang="en-GB" dirty="0"/>
+              <a:t>HEAD NÄITED</a:t>
+            </a:r>
+          </a:p>
+        </p:txBody>
+      </p:sp>
+      <p:sp>
+        <p:nvSpPr>
+          <p:cNvPr id="3" name="Content Placeholder 2">
+            <a:extLst>
+              <a:ext uri="{FF2B5EF4-FFF2-40B4-BE49-F238E27FC236}">
+                <a16:creationId xmlns:a16="http://schemas.microsoft.com/office/drawing/2014/main" id="{A66ADC50-5A1E-1AE7-16D9-9D4C7CAD3AEC}"/>
+              </a:ext>
+            </a:extLst>
+          </p:cNvPr>
+          <p:cNvSpPr>
+            <a:spLocks noGrp="1"/>
+          </p:cNvSpPr>
+          <p:nvPr>
+            <p:ph sz="quarter" idx="10"/>
+          </p:nvPr>
+        </p:nvSpPr>
+        <p:spPr>
+          <a:xfrm>
+            <a:off x="1231117" y="4472356"/>
+            <a:ext cx="5364162" cy="2276020"/>
+          </a:xfrm>
+        </p:spPr>
+        <p:txBody>
+          <a:bodyPr/>
+          <a:lstStyle/>
+          <a:p>
+            <a:pPr marL="0" indent="0">
+              <a:buNone/>
+            </a:pPr>
+            <a:r>
+              <a:rPr lang="en-GB" b="1" dirty="0" err="1"/>
+              <a:t>Selge</a:t>
+            </a:r>
+            <a:r>
+              <a:rPr lang="en-GB" b="1" dirty="0"/>
+              <a:t> Z-</a:t>
+            </a:r>
+            <a:r>
+              <a:rPr lang="en-GB" b="1" dirty="0" err="1"/>
+              <a:t>kujuline</a:t>
+            </a:r>
+            <a:r>
+              <a:rPr lang="en-GB" b="1" dirty="0"/>
+              <a:t> </a:t>
+            </a:r>
+            <a:r>
+              <a:rPr lang="en-GB" b="1" dirty="0" err="1"/>
+              <a:t>hierarhia</a:t>
+            </a:r>
+            <a:r>
+              <a:rPr lang="en-GB" b="1" dirty="0"/>
+              <a:t> </a:t>
+            </a:r>
+            <a:r>
+              <a:rPr lang="en-GB" dirty="0" err="1"/>
+              <a:t>paigutab</a:t>
+            </a:r>
+            <a:r>
+              <a:rPr lang="en-GB" dirty="0"/>
+              <a:t> </a:t>
+            </a:r>
+            <a:r>
+              <a:rPr lang="en-GB" dirty="0" err="1"/>
+              <a:t>kõige</a:t>
+            </a:r>
+            <a:r>
+              <a:rPr lang="en-GB" dirty="0"/>
+              <a:t> </a:t>
+            </a:r>
+            <a:r>
+              <a:rPr lang="en-GB" dirty="0" err="1"/>
+              <a:t>olulisemad</a:t>
+            </a:r>
+            <a:r>
+              <a:rPr lang="en-GB" dirty="0"/>
+              <a:t> KPI </a:t>
+            </a:r>
+            <a:r>
+              <a:rPr lang="en-GB" dirty="0" err="1"/>
+              <a:t>põhinumbrid</a:t>
+            </a:r>
+            <a:r>
+              <a:rPr lang="en-GB" dirty="0"/>
+              <a:t> (</a:t>
+            </a:r>
+            <a:r>
+              <a:rPr lang="en-GB" dirty="0" err="1"/>
+              <a:t>käive</a:t>
+            </a:r>
+            <a:r>
+              <a:rPr lang="en-GB" dirty="0"/>
+              <a:t>, </a:t>
+            </a:r>
+            <a:r>
+              <a:rPr lang="en-GB" dirty="0" err="1"/>
+              <a:t>marginaal</a:t>
+            </a:r>
+            <a:r>
+              <a:rPr lang="en-GB" dirty="0"/>
+              <a:t>) </a:t>
+            </a:r>
+            <a:r>
+              <a:rPr lang="en-GB" dirty="0" err="1"/>
+              <a:t>kohe</a:t>
+            </a:r>
+            <a:r>
+              <a:rPr lang="en-GB" dirty="0"/>
+              <a:t> </a:t>
+            </a:r>
+            <a:r>
+              <a:rPr lang="en-GB" dirty="0" err="1"/>
+              <a:t>ekraani</a:t>
+            </a:r>
+            <a:r>
+              <a:rPr lang="en-GB" dirty="0"/>
+              <a:t> </a:t>
+            </a:r>
+            <a:r>
+              <a:rPr lang="en-GB" dirty="0" err="1"/>
+              <a:t>ülaosasse</a:t>
+            </a:r>
+            <a:r>
+              <a:rPr lang="en-GB" dirty="0"/>
+              <a:t>. </a:t>
+            </a:r>
+            <a:r>
+              <a:rPr lang="en-GB" dirty="0" err="1"/>
+              <a:t>Pilk</a:t>
+            </a:r>
+            <a:r>
+              <a:rPr lang="en-GB" dirty="0"/>
+              <a:t> </a:t>
+            </a:r>
+            <a:r>
+              <a:rPr lang="en-GB" dirty="0" err="1"/>
+              <a:t>liigub</a:t>
+            </a:r>
+            <a:r>
+              <a:rPr lang="en-GB" dirty="0"/>
+              <a:t> </a:t>
+            </a:r>
+            <a:r>
+              <a:rPr lang="en-GB" dirty="0" err="1"/>
+              <a:t>sealt</a:t>
+            </a:r>
+            <a:r>
+              <a:rPr lang="en-GB" dirty="0"/>
+              <a:t> </a:t>
+            </a:r>
+            <a:r>
+              <a:rPr lang="en-GB" dirty="0" err="1"/>
+              <a:t>sujuvalt</a:t>
+            </a:r>
+            <a:r>
+              <a:rPr lang="en-GB" dirty="0"/>
+              <a:t> alla </a:t>
+            </a:r>
+            <a:r>
+              <a:rPr lang="en-GB" dirty="0" err="1"/>
+              <a:t>detailsemate</a:t>
+            </a:r>
+            <a:r>
+              <a:rPr lang="en-GB" dirty="0"/>
+              <a:t> </a:t>
+            </a:r>
+            <a:r>
+              <a:rPr lang="en-GB" dirty="0" err="1"/>
+              <a:t>joon</a:t>
+            </a:r>
+            <a:r>
+              <a:rPr lang="en-GB" dirty="0"/>
+              <a:t>- </a:t>
+            </a:r>
+            <a:r>
+              <a:rPr lang="en-GB" dirty="0" err="1"/>
+              <a:t>ja</a:t>
+            </a:r>
+            <a:r>
+              <a:rPr lang="en-GB" dirty="0"/>
+              <a:t> </a:t>
+            </a:r>
+            <a:r>
+              <a:rPr lang="en-GB" dirty="0" err="1"/>
+              <a:t>tulpdiagrammide</a:t>
+            </a:r>
+            <a:r>
+              <a:rPr lang="en-GB" dirty="0"/>
+              <a:t> </a:t>
+            </a:r>
+            <a:r>
+              <a:rPr lang="en-GB" dirty="0" err="1"/>
+              <a:t>poole</a:t>
+            </a:r>
+            <a:r>
+              <a:rPr lang="en-GB" dirty="0"/>
+              <a:t>.</a:t>
+            </a:r>
+          </a:p>
+          <a:p>
+            <a:endParaRPr lang="en-GB" dirty="0"/>
+          </a:p>
+        </p:txBody>
+      </p:sp>
+      <p:pic>
+        <p:nvPicPr>
+          <p:cNvPr id="4" name="Picture 3" descr="Power BI Dashboard Design Toolkit from Numerro">
+            <a:extLst>
+              <a:ext uri="{FF2B5EF4-FFF2-40B4-BE49-F238E27FC236}">
+                <a16:creationId xmlns:a16="http://schemas.microsoft.com/office/drawing/2014/main" id="{94DEE7F7-596B-23DD-9013-0B85E17CEC19}"/>
+              </a:ext>
+            </a:extLst>
+          </p:cNvPr>
+          <p:cNvPicPr>
+            <a:picLocks noChangeAspect="1"/>
+          </p:cNvPicPr>
+          <p:nvPr/>
+        </p:nvPicPr>
+        <p:blipFill>
+          <a:blip r:embed="rId2"/>
+          <a:stretch>
+            <a:fillRect/>
+          </a:stretch>
+        </p:blipFill>
+        <p:spPr>
+          <a:xfrm>
+            <a:off x="4805819" y="109624"/>
+            <a:ext cx="7106244" cy="3997262"/>
+          </a:xfrm>
+          <a:prstGeom prst="rect">
+            <a:avLst/>
+          </a:prstGeom>
+        </p:spPr>
+      </p:pic>
+    </p:spTree>
+    <p:extLst>
+      <p:ext uri="{BB962C8B-B14F-4D97-AF65-F5344CB8AC3E}">
+        <p14:creationId xmlns:p14="http://schemas.microsoft.com/office/powerpoint/2010/main" val="3712510639"/>
+      </p:ext>
+    </p:extLst>
+  </p:cSld>
+  <p:clrMapOvr>
+    <a:masterClrMapping/>
+  </p:clrMapOvr>
+</p:sld>
+</file>
+
+<file path=ppt/slides/slide3.xml><?xml version="1.0" encoding="utf-8"?>
+<p:sld xmlns:a="http://schemas.openxmlformats.org/drawingml/2006/main" xmlns:r="http://schemas.openxmlformats.org/officeDocument/2006/relationships" xmlns:p="http://schemas.openxmlformats.org/presentationml/2006/main" show="0">
+  <p:cSld>
+    <p:spTree>
+      <p:nvGrpSpPr>
+        <p:cNvPr id="1" name=""/>
+        <p:cNvGrpSpPr/>
+        <p:nvPr/>
+      </p:nvGrpSpPr>
+      <p:grpSpPr>
+        <a:xfrm>
+          <a:off x="0" y="0"/>
+          <a:ext cx="0" cy="0"/>
+          <a:chOff x="0" y="0"/>
+          <a:chExt cx="0" cy="0"/>
+        </a:xfrm>
+      </p:grpSpPr>
+      <p:sp>
+        <p:nvSpPr>
+          <p:cNvPr id="2" name="Title 1">
+            <a:extLst>
+              <a:ext uri="{FF2B5EF4-FFF2-40B4-BE49-F238E27FC236}">
+                <a16:creationId xmlns:a16="http://schemas.microsoft.com/office/drawing/2014/main" id="{0C3C55E8-FBF1-AD5D-6DA0-CBD58BBEB5DB}"/>
+              </a:ext>
+            </a:extLst>
+          </p:cNvPr>
+          <p:cNvSpPr>
+            <a:spLocks noGrp="1"/>
+          </p:cNvSpPr>
+          <p:nvPr>
+            <p:ph type="ctrTitle"/>
+          </p:nvPr>
+        </p:nvSpPr>
+        <p:spPr/>
+        <p:txBody>
+          <a:bodyPr/>
+          <a:lstStyle/>
+          <a:p>
+            <a:r>
+              <a:rPr lang="en-US"/>
+              <a:t>Power BI – </a:t>
+            </a:r>
+            <a:r>
+              <a:rPr lang="en-US" err="1"/>
+              <a:t>Päringud</a:t>
+            </a:r>
+            <a:r>
+              <a:rPr lang="en-US"/>
+              <a:t> (M-language)</a:t>
+            </a:r>
+          </a:p>
+        </p:txBody>
+      </p:sp>
+      <p:sp>
+        <p:nvSpPr>
+          <p:cNvPr id="3" name="Content Placeholder 2">
+            <a:extLst>
+              <a:ext uri="{FF2B5EF4-FFF2-40B4-BE49-F238E27FC236}">
+                <a16:creationId xmlns:a16="http://schemas.microsoft.com/office/drawing/2014/main" id="{2D37BB7F-4F12-0B50-CEE8-3F6E6A2C9EE7}"/>
+              </a:ext>
+            </a:extLst>
+          </p:cNvPr>
+          <p:cNvSpPr>
+            <a:spLocks noGrp="1"/>
+          </p:cNvSpPr>
+          <p:nvPr>
+            <p:ph sz="quarter" idx="10"/>
+          </p:nvPr>
+        </p:nvSpPr>
+        <p:spPr/>
+        <p:txBody>
+          <a:bodyPr/>
+          <a:lstStyle/>
+          <a:p>
+            <a:pPr>
+              <a:lnSpc>
+                <a:spcPct val="150000"/>
+              </a:lnSpc>
+            </a:pPr>
+            <a:r>
+              <a:rPr lang="en-US" sz="2400">
+                <a:ea typeface="Inter"/>
+              </a:rPr>
+              <a:t>Power BI </a:t>
+            </a:r>
+            <a:r>
+              <a:rPr lang="en-US" sz="2400" err="1">
+                <a:ea typeface="Inter"/>
+              </a:rPr>
+              <a:t>päringukeel</a:t>
+            </a:r>
+            <a:r>
+              <a:rPr lang="en-US" sz="2400">
+                <a:ea typeface="Inter"/>
+              </a:rPr>
+              <a:t> </a:t>
+            </a:r>
+            <a:endParaRPr lang="en-US"/>
+          </a:p>
+          <a:p>
+            <a:pPr>
+              <a:lnSpc>
+                <a:spcPct val="150000"/>
+              </a:lnSpc>
+            </a:pPr>
+            <a:r>
+              <a:rPr lang="en-US" sz="2400" err="1">
+                <a:ea typeface="Inter"/>
+              </a:rPr>
+              <a:t>Juhend</a:t>
+            </a:r>
+            <a:r>
+              <a:rPr lang="en-US" sz="2400">
+                <a:ea typeface="Inter"/>
+              </a:rPr>
+              <a:t>: </a:t>
+            </a:r>
+            <a:r>
+              <a:rPr lang="en-US" sz="2400">
+                <a:ea typeface="+mn-lt"/>
+                <a:cs typeface="+mn-lt"/>
+                <a:hlinkClick r:id="rId2"/>
+              </a:rPr>
+              <a:t>Power Query M formula language reference - PowerQuery M | Microsoft Learn</a:t>
+            </a:r>
+          </a:p>
+          <a:p>
+            <a:pPr>
+              <a:lnSpc>
+                <a:spcPct val="150000"/>
+              </a:lnSpc>
+            </a:pPr>
+            <a:r>
+              <a:rPr lang="en-US" sz="2400" err="1">
+                <a:ea typeface="+mn-lt"/>
+                <a:cs typeface="+mn-lt"/>
+              </a:rPr>
+              <a:t>Leitav</a:t>
+            </a:r>
+            <a:r>
+              <a:rPr lang="en-US" sz="2400">
+                <a:ea typeface="+mn-lt"/>
+                <a:cs typeface="+mn-lt"/>
+              </a:rPr>
+              <a:t>: Model View --&gt; Edit Query</a:t>
+            </a:r>
+          </a:p>
+          <a:p>
+            <a:pPr lvl="1" indent="-514350">
+              <a:lnSpc>
+                <a:spcPct val="150000"/>
+              </a:lnSpc>
+              <a:buFont typeface="Courier New" panose="020B0502030000000004" pitchFamily="34" charset="0"/>
+              <a:buChar char="o"/>
+            </a:pPr>
+            <a:r>
+              <a:rPr lang="en-US" sz="2400">
+                <a:ea typeface="+mn-lt"/>
+                <a:cs typeface="+mn-lt"/>
+              </a:rPr>
+              <a:t>Paremal </a:t>
+            </a:r>
+            <a:r>
+              <a:rPr lang="en-US" sz="2400" err="1">
+                <a:ea typeface="+mn-lt"/>
+                <a:cs typeface="+mn-lt"/>
+              </a:rPr>
+              <a:t>sammude</a:t>
+            </a:r>
+            <a:r>
+              <a:rPr lang="en-US" sz="2400">
+                <a:ea typeface="+mn-lt"/>
+                <a:cs typeface="+mn-lt"/>
+              </a:rPr>
+              <a:t> </a:t>
+            </a:r>
+            <a:r>
+              <a:rPr lang="en-US" sz="2400" err="1">
+                <a:ea typeface="+mn-lt"/>
+                <a:cs typeface="+mn-lt"/>
+              </a:rPr>
+              <a:t>kaupa</a:t>
+            </a:r>
+          </a:p>
+          <a:p>
+            <a:pPr lvl="1" indent="-514350">
+              <a:lnSpc>
+                <a:spcPct val="150000"/>
+              </a:lnSpc>
+              <a:buFont typeface="Courier New" panose="020B0502030000000004" pitchFamily="34" charset="0"/>
+              <a:buChar char="o"/>
+            </a:pPr>
+            <a:r>
+              <a:rPr lang="en-US" sz="2400">
+                <a:ea typeface="+mn-lt"/>
+                <a:cs typeface="+mn-lt"/>
+              </a:rPr>
+              <a:t>Advanced Editor – </a:t>
+            </a:r>
+            <a:r>
+              <a:rPr lang="en-US" sz="2400" err="1">
+                <a:ea typeface="+mn-lt"/>
+                <a:cs typeface="+mn-lt"/>
+              </a:rPr>
+              <a:t>kogu</a:t>
+            </a:r>
+            <a:r>
+              <a:rPr lang="en-US" sz="2400">
+                <a:ea typeface="+mn-lt"/>
+                <a:cs typeface="+mn-lt"/>
+              </a:rPr>
+              <a:t> </a:t>
+            </a:r>
+            <a:r>
+              <a:rPr lang="en-US" sz="2400" err="1">
+                <a:ea typeface="+mn-lt"/>
+                <a:cs typeface="+mn-lt"/>
+              </a:rPr>
+              <a:t>päring</a:t>
+            </a:r>
+          </a:p>
+        </p:txBody>
+      </p:sp>
+    </p:spTree>
+    <p:extLst>
+      <p:ext uri="{BB962C8B-B14F-4D97-AF65-F5344CB8AC3E}">
+        <p14:creationId xmlns:p14="http://schemas.microsoft.com/office/powerpoint/2010/main" val="2761534892"/>
+      </p:ext>
+    </p:extLst>
+  </p:cSld>
+  <p:clrMapOvr>
+    <a:masterClrMapping/>
+  </p:clrMapOvr>
+</p:sld>
+</file>
+
+<file path=ppt/slides/slide30.xml><?xml version="1.0" encoding="utf-8"?>
+<p:sld xmlns:a="http://schemas.openxmlformats.org/drawingml/2006/main" xmlns:r="http://schemas.openxmlformats.org/officeDocument/2006/relationships" xmlns:p="http://schemas.openxmlformats.org/presentationml/2006/main">
+  <p:cSld>
+    <p:spTree>
+      <p:nvGrpSpPr>
+        <p:cNvPr id="1" name=""/>
+        <p:cNvGrpSpPr/>
+        <p:nvPr/>
+      </p:nvGrpSpPr>
+      <p:grpSpPr>
+        <a:xfrm>
+          <a:off x="0" y="0"/>
+          <a:ext cx="0" cy="0"/>
+          <a:chOff x="0" y="0"/>
+          <a:chExt cx="0" cy="0"/>
+        </a:xfrm>
+      </p:grpSpPr>
+      <p:sp>
+        <p:nvSpPr>
+          <p:cNvPr id="2" name="Title 1">
+            <a:extLst>
+              <a:ext uri="{FF2B5EF4-FFF2-40B4-BE49-F238E27FC236}">
+                <a16:creationId xmlns:a16="http://schemas.microsoft.com/office/drawing/2014/main" id="{0FA6D4EE-C154-4AB8-1445-79A84FCF6E78}"/>
+              </a:ext>
+            </a:extLst>
+          </p:cNvPr>
+          <p:cNvSpPr>
+            <a:spLocks noGrp="1"/>
+          </p:cNvSpPr>
+          <p:nvPr>
+            <p:ph type="ctrTitle"/>
+          </p:nvPr>
+        </p:nvSpPr>
+        <p:spPr>
+          <a:xfrm>
+            <a:off x="1609687" y="141071"/>
+            <a:ext cx="5364163" cy="2052637"/>
+          </a:xfrm>
+        </p:spPr>
+        <p:txBody>
+          <a:bodyPr/>
+          <a:lstStyle/>
+          <a:p>
+            <a:r>
+              <a:rPr lang="en-GB" dirty="0"/>
+              <a:t>HEAD NÄITED</a:t>
+            </a:r>
+          </a:p>
+        </p:txBody>
+      </p:sp>
+      <p:sp>
+        <p:nvSpPr>
+          <p:cNvPr id="3" name="Content Placeholder 2">
+            <a:extLst>
+              <a:ext uri="{FF2B5EF4-FFF2-40B4-BE49-F238E27FC236}">
+                <a16:creationId xmlns:a16="http://schemas.microsoft.com/office/drawing/2014/main" id="{6E539BBB-4CE6-4B4E-04C4-CEBEFCBC0BD5}"/>
+              </a:ext>
+            </a:extLst>
+          </p:cNvPr>
+          <p:cNvSpPr>
+            <a:spLocks noGrp="1"/>
+          </p:cNvSpPr>
+          <p:nvPr>
+            <p:ph sz="quarter" idx="10"/>
+          </p:nvPr>
+        </p:nvSpPr>
+        <p:spPr>
+          <a:xfrm>
+            <a:off x="1669528" y="4294776"/>
+            <a:ext cx="5364162" cy="2276020"/>
+          </a:xfrm>
+        </p:spPr>
+        <p:txBody>
+          <a:bodyPr/>
+          <a:lstStyle/>
+          <a:p>
+            <a:pPr marL="0" indent="0">
+              <a:buNone/>
+            </a:pPr>
+            <a:r>
+              <a:rPr lang="en-GB" b="1" dirty="0"/>
+              <a:t>"</a:t>
+            </a:r>
+            <a:r>
+              <a:rPr lang="en-GB" b="1" dirty="0" err="1"/>
+              <a:t>Hingamisruum</a:t>
+            </a:r>
+            <a:r>
+              <a:rPr lang="en-GB" b="1" dirty="0"/>
+              <a:t>" </a:t>
+            </a:r>
+            <a:r>
+              <a:rPr lang="en-GB" b="1" dirty="0" err="1"/>
+              <a:t>ja</a:t>
+            </a:r>
+            <a:r>
+              <a:rPr lang="en-GB" b="1" dirty="0"/>
+              <a:t> </a:t>
+            </a:r>
+            <a:r>
+              <a:rPr lang="en-GB" b="1" dirty="0" err="1"/>
+              <a:t>ümarad</a:t>
+            </a:r>
+            <a:r>
+              <a:rPr lang="en-GB" b="1" dirty="0"/>
+              <a:t> </a:t>
+            </a:r>
+            <a:r>
+              <a:rPr lang="en-GB" b="1" dirty="0" err="1"/>
+              <a:t>konteinerid</a:t>
+            </a:r>
+            <a:r>
+              <a:rPr lang="en-GB" b="1" dirty="0"/>
+              <a:t> (</a:t>
+            </a:r>
+            <a:r>
+              <a:rPr lang="en-GB" b="1" dirty="0" err="1"/>
+              <a:t>Keskmine</a:t>
+            </a:r>
+            <a:r>
+              <a:rPr lang="en-GB" b="1" dirty="0"/>
+              <a:t> </a:t>
+            </a:r>
+            <a:r>
+              <a:rPr lang="en-GB" b="1" dirty="0" err="1"/>
+              <a:t>pilt</a:t>
+            </a:r>
+            <a:r>
+              <a:rPr lang="en-GB" b="1" dirty="0"/>
+              <a:t>)</a:t>
+            </a:r>
+            <a:r>
+              <a:rPr lang="en-GB" dirty="0"/>
+              <a:t>: </a:t>
+            </a:r>
+            <a:r>
+              <a:rPr lang="en-GB" dirty="0" err="1"/>
+              <a:t>kasutab</a:t>
+            </a:r>
+            <a:r>
+              <a:rPr lang="en-GB" dirty="0"/>
+              <a:t> </a:t>
+            </a:r>
+            <a:r>
+              <a:rPr lang="en-GB" dirty="0" err="1"/>
+              <a:t>õrna</a:t>
+            </a:r>
+            <a:r>
+              <a:rPr lang="en-GB" dirty="0"/>
+              <a:t> halli </a:t>
+            </a:r>
+            <a:r>
+              <a:rPr lang="en-GB" dirty="0" err="1"/>
+              <a:t>tausta</a:t>
+            </a:r>
+            <a:r>
+              <a:rPr lang="en-GB" dirty="0"/>
+              <a:t> </a:t>
+            </a:r>
+            <a:r>
+              <a:rPr lang="en-GB" dirty="0" err="1"/>
+              <a:t>ja</a:t>
+            </a:r>
+            <a:r>
+              <a:rPr lang="en-GB" dirty="0"/>
+              <a:t> </a:t>
+            </a:r>
+            <a:r>
+              <a:rPr lang="en-GB" dirty="0" err="1"/>
+              <a:t>valgeid</a:t>
+            </a:r>
+            <a:r>
+              <a:rPr lang="en-GB" dirty="0"/>
+              <a:t> </a:t>
+            </a:r>
+            <a:r>
+              <a:rPr lang="en-GB" dirty="0" err="1"/>
+              <a:t>ümarate</a:t>
+            </a:r>
+            <a:r>
+              <a:rPr lang="en-GB" dirty="0"/>
+              <a:t> </a:t>
+            </a:r>
+            <a:r>
+              <a:rPr lang="en-GB" dirty="0" err="1"/>
+              <a:t>nurkadega</a:t>
+            </a:r>
+            <a:r>
+              <a:rPr lang="en-GB" dirty="0"/>
+              <a:t> </a:t>
+            </a:r>
+            <a:r>
+              <a:rPr lang="en-GB" dirty="0" err="1"/>
+              <a:t>kaste</a:t>
+            </a:r>
+            <a:r>
+              <a:rPr lang="en-GB" dirty="0"/>
+              <a:t> (</a:t>
+            </a:r>
+            <a:r>
+              <a:rPr lang="en-GB" dirty="0" err="1"/>
+              <a:t>kontenereid</a:t>
+            </a:r>
+            <a:r>
+              <a:rPr lang="en-GB" dirty="0"/>
+              <a:t>). </a:t>
+            </a:r>
+            <a:r>
+              <a:rPr lang="en-GB" dirty="0" err="1"/>
+              <a:t>Graafikud</a:t>
+            </a:r>
+            <a:r>
+              <a:rPr lang="en-GB" dirty="0"/>
+              <a:t> </a:t>
+            </a:r>
+            <a:r>
+              <a:rPr lang="en-GB" dirty="0" err="1"/>
+              <a:t>ei</a:t>
+            </a:r>
+            <a:r>
+              <a:rPr lang="en-GB" dirty="0"/>
+              <a:t> </a:t>
+            </a:r>
+            <a:r>
+              <a:rPr lang="en-GB" dirty="0" err="1"/>
+              <a:t>puutu</a:t>
+            </a:r>
+            <a:r>
+              <a:rPr lang="en-GB" dirty="0"/>
+              <a:t> </a:t>
+            </a:r>
+            <a:r>
+              <a:rPr lang="en-GB" dirty="0" err="1"/>
+              <a:t>kokku</a:t>
+            </a:r>
+            <a:r>
+              <a:rPr lang="en-GB" dirty="0"/>
+              <a:t> </a:t>
+            </a:r>
+            <a:r>
+              <a:rPr lang="en-GB" dirty="0" err="1"/>
+              <a:t>ning</a:t>
+            </a:r>
+            <a:r>
+              <a:rPr lang="en-GB" dirty="0"/>
+              <a:t> </a:t>
+            </a:r>
+            <a:r>
+              <a:rPr lang="en-GB" dirty="0" err="1"/>
+              <a:t>ekraan</a:t>
+            </a:r>
+            <a:r>
+              <a:rPr lang="en-GB" dirty="0"/>
+              <a:t> </a:t>
+            </a:r>
+            <a:r>
+              <a:rPr lang="en-GB" dirty="0" err="1"/>
+              <a:t>mõjub</a:t>
+            </a:r>
+            <a:r>
+              <a:rPr lang="en-GB" dirty="0"/>
+              <a:t> </a:t>
+            </a:r>
+            <a:r>
+              <a:rPr lang="en-GB" dirty="0" err="1"/>
+              <a:t>puhtalt</a:t>
+            </a:r>
+            <a:r>
+              <a:rPr lang="en-GB" dirty="0"/>
+              <a:t>, </a:t>
+            </a:r>
+            <a:r>
+              <a:rPr lang="en-GB" dirty="0" err="1"/>
+              <a:t>kuigi</a:t>
+            </a:r>
+            <a:r>
+              <a:rPr lang="en-GB" dirty="0"/>
+              <a:t> </a:t>
+            </a:r>
+            <a:r>
+              <a:rPr lang="en-GB" dirty="0" err="1"/>
+              <a:t>andmetihedus</a:t>
+            </a:r>
+            <a:r>
+              <a:rPr lang="en-GB" dirty="0"/>
+              <a:t> on </a:t>
+            </a:r>
+            <a:r>
+              <a:rPr lang="en-GB" dirty="0" err="1"/>
+              <a:t>kõrge</a:t>
+            </a:r>
+            <a:r>
+              <a:rPr lang="en-GB" dirty="0"/>
+              <a:t>.</a:t>
+            </a:r>
+          </a:p>
+          <a:p>
+            <a:endParaRPr lang="en-GB" dirty="0"/>
+          </a:p>
+        </p:txBody>
+      </p:sp>
+      <p:pic>
+        <p:nvPicPr>
+          <p:cNvPr id="4" name="Picture 3" descr="Power BI Dashboard Example: Sales Actuals vs Budget - Lukas ...">
+            <a:extLst>
+              <a:ext uri="{FF2B5EF4-FFF2-40B4-BE49-F238E27FC236}">
+                <a16:creationId xmlns:a16="http://schemas.microsoft.com/office/drawing/2014/main" id="{09D1DA94-1BE3-5869-ACCE-64A84E3D940A}"/>
+              </a:ext>
+            </a:extLst>
+          </p:cNvPr>
+          <p:cNvPicPr>
+            <a:picLocks noChangeAspect="1"/>
+          </p:cNvPicPr>
+          <p:nvPr/>
+        </p:nvPicPr>
+        <p:blipFill>
+          <a:blip r:embed="rId2"/>
+          <a:stretch>
+            <a:fillRect/>
+          </a:stretch>
+        </p:blipFill>
+        <p:spPr>
+          <a:xfrm>
+            <a:off x="4973262" y="10384"/>
+            <a:ext cx="7218738" cy="3969383"/>
+          </a:xfrm>
+          <a:prstGeom prst="rect">
+            <a:avLst/>
+          </a:prstGeom>
+        </p:spPr>
+      </p:pic>
+    </p:spTree>
+    <p:extLst>
+      <p:ext uri="{BB962C8B-B14F-4D97-AF65-F5344CB8AC3E}">
+        <p14:creationId xmlns:p14="http://schemas.microsoft.com/office/powerpoint/2010/main" val="1928077864"/>
+      </p:ext>
+    </p:extLst>
+  </p:cSld>
+  <p:clrMapOvr>
+    <a:masterClrMapping/>
+  </p:clrMapOvr>
+</p:sld>
+</file>
+
+<file path=ppt/slides/slide31.xml><?xml version="1.0" encoding="utf-8"?>
+<p:sld xmlns:a="http://schemas.openxmlformats.org/drawingml/2006/main" xmlns:r="http://schemas.openxmlformats.org/officeDocument/2006/relationships" xmlns:p="http://schemas.openxmlformats.org/presentationml/2006/main">
+  <p:cSld>
+    <p:spTree>
+      <p:nvGrpSpPr>
+        <p:cNvPr id="1" name=""/>
+        <p:cNvGrpSpPr/>
+        <p:nvPr/>
+      </p:nvGrpSpPr>
+      <p:grpSpPr>
+        <a:xfrm>
+          <a:off x="0" y="0"/>
+          <a:ext cx="0" cy="0"/>
+          <a:chOff x="0" y="0"/>
+          <a:chExt cx="0" cy="0"/>
+        </a:xfrm>
+      </p:grpSpPr>
+      <p:sp>
+        <p:nvSpPr>
+          <p:cNvPr id="2" name="Title 1">
+            <a:extLst>
+              <a:ext uri="{FF2B5EF4-FFF2-40B4-BE49-F238E27FC236}">
+                <a16:creationId xmlns:a16="http://schemas.microsoft.com/office/drawing/2014/main" id="{BCE757FF-1FE5-C8B6-35F9-0B03C2D78D8E}"/>
+              </a:ext>
+            </a:extLst>
+          </p:cNvPr>
+          <p:cNvSpPr>
+            <a:spLocks noGrp="1"/>
+          </p:cNvSpPr>
+          <p:nvPr>
+            <p:ph type="ctrTitle"/>
+          </p:nvPr>
+        </p:nvSpPr>
+        <p:spPr/>
+        <p:txBody>
+          <a:bodyPr/>
+          <a:lstStyle/>
+          <a:p>
+            <a:r>
+              <a:rPr lang="en-GB" dirty="0"/>
+              <a:t>HEAD NÄITED</a:t>
+            </a:r>
+          </a:p>
+        </p:txBody>
+      </p:sp>
+      <p:sp>
+        <p:nvSpPr>
+          <p:cNvPr id="3" name="Content Placeholder 2">
+            <a:extLst>
+              <a:ext uri="{FF2B5EF4-FFF2-40B4-BE49-F238E27FC236}">
+                <a16:creationId xmlns:a16="http://schemas.microsoft.com/office/drawing/2014/main" id="{5E294C94-F2AA-F14B-0ABD-686DEE48C879}"/>
+              </a:ext>
+            </a:extLst>
+          </p:cNvPr>
+          <p:cNvSpPr>
+            <a:spLocks noGrp="1"/>
+          </p:cNvSpPr>
+          <p:nvPr>
+            <p:ph sz="quarter" idx="10"/>
+          </p:nvPr>
+        </p:nvSpPr>
+        <p:spPr>
+          <a:xfrm>
+            <a:off x="968071" y="4313640"/>
+            <a:ext cx="5364162" cy="2276020"/>
+          </a:xfrm>
+        </p:spPr>
+        <p:txBody>
+          <a:bodyPr/>
+          <a:lstStyle/>
+          <a:p>
+            <a:pPr marL="0" indent="0">
+              <a:buNone/>
+            </a:pPr>
+            <a:r>
+              <a:rPr lang="en-GB" b="1" dirty="0" err="1"/>
+              <a:t>Funktsionaalne</a:t>
+            </a:r>
+            <a:r>
+              <a:rPr lang="en-GB" b="1" dirty="0"/>
+              <a:t> </a:t>
+            </a:r>
+            <a:r>
+              <a:rPr lang="en-GB" b="1" dirty="0" err="1"/>
+              <a:t>värvikasutus</a:t>
+            </a:r>
+            <a:r>
+              <a:rPr lang="en-GB" b="1" dirty="0"/>
+              <a:t> </a:t>
+            </a:r>
+            <a:r>
+              <a:rPr lang="en-GB" dirty="0" err="1"/>
+              <a:t>näitab</a:t>
+            </a:r>
+            <a:r>
+              <a:rPr lang="en-GB" dirty="0"/>
+              <a:t>, </a:t>
+            </a:r>
+            <a:r>
+              <a:rPr lang="en-GB" dirty="0" err="1"/>
+              <a:t>kuidas</a:t>
+            </a:r>
+            <a:r>
+              <a:rPr lang="en-GB" dirty="0"/>
+              <a:t> </a:t>
+            </a:r>
+            <a:r>
+              <a:rPr lang="en-GB" dirty="0" err="1"/>
+              <a:t>hoida</a:t>
+            </a:r>
+            <a:r>
+              <a:rPr lang="en-GB" dirty="0"/>
+              <a:t> </a:t>
+            </a:r>
+            <a:r>
+              <a:rPr lang="en-GB" dirty="0" err="1"/>
+              <a:t>põhiosa</a:t>
+            </a:r>
+            <a:r>
+              <a:rPr lang="en-GB" dirty="0"/>
+              <a:t> </a:t>
+            </a:r>
+            <a:r>
+              <a:rPr lang="en-GB" dirty="0" err="1"/>
+              <a:t>graafikutest</a:t>
+            </a:r>
+            <a:r>
+              <a:rPr lang="en-GB" dirty="0"/>
+              <a:t> </a:t>
+            </a:r>
+            <a:r>
+              <a:rPr lang="en-GB" dirty="0" err="1"/>
+              <a:t>neutraalselt</a:t>
+            </a:r>
+            <a:r>
+              <a:rPr lang="en-GB" dirty="0"/>
+              <a:t> halli </a:t>
+            </a:r>
+            <a:r>
+              <a:rPr lang="en-GB" dirty="0" err="1"/>
+              <a:t>või</a:t>
+            </a:r>
+            <a:r>
+              <a:rPr lang="en-GB" dirty="0"/>
+              <a:t> </a:t>
+            </a:r>
+            <a:r>
+              <a:rPr lang="en-GB" dirty="0" err="1"/>
+              <a:t>mustana</a:t>
+            </a:r>
+            <a:r>
+              <a:rPr lang="en-GB" dirty="0"/>
+              <a:t> </a:t>
+            </a:r>
+            <a:r>
+              <a:rPr lang="en-GB" dirty="0" err="1"/>
+              <a:t>ning</a:t>
+            </a:r>
+            <a:r>
+              <a:rPr lang="en-GB" dirty="0"/>
+              <a:t> </a:t>
+            </a:r>
+            <a:r>
+              <a:rPr lang="en-GB" dirty="0" err="1"/>
+              <a:t>kasutada</a:t>
+            </a:r>
+            <a:r>
+              <a:rPr lang="en-GB" dirty="0"/>
+              <a:t> </a:t>
+            </a:r>
+            <a:r>
+              <a:rPr lang="en-GB" dirty="0" err="1"/>
+              <a:t>rohelist</a:t>
+            </a:r>
+            <a:r>
+              <a:rPr lang="en-GB" dirty="0"/>
+              <a:t> </a:t>
+            </a:r>
+            <a:r>
+              <a:rPr lang="en-GB" dirty="0" err="1"/>
+              <a:t>ja</a:t>
+            </a:r>
+            <a:r>
+              <a:rPr lang="en-GB" dirty="0"/>
+              <a:t> </a:t>
+            </a:r>
+            <a:r>
+              <a:rPr lang="en-GB" dirty="0" err="1"/>
+              <a:t>punast</a:t>
+            </a:r>
+            <a:r>
+              <a:rPr lang="en-GB" dirty="0"/>
+              <a:t> </a:t>
+            </a:r>
+            <a:r>
+              <a:rPr lang="en-GB" dirty="0" err="1"/>
+              <a:t>värvi</a:t>
+            </a:r>
+            <a:r>
+              <a:rPr lang="en-GB" dirty="0"/>
+              <a:t> </a:t>
+            </a:r>
+            <a:r>
+              <a:rPr lang="en-GB" b="1" dirty="0" err="1"/>
+              <a:t>ainult</a:t>
+            </a:r>
+            <a:r>
+              <a:rPr lang="en-GB" dirty="0"/>
+              <a:t> </a:t>
+            </a:r>
+            <a:r>
+              <a:rPr lang="en-GB" dirty="0" err="1"/>
+              <a:t>eelarve</a:t>
+            </a:r>
+            <a:r>
+              <a:rPr lang="en-GB" dirty="0"/>
+              <a:t> </a:t>
+            </a:r>
+            <a:r>
+              <a:rPr lang="en-GB" dirty="0" err="1"/>
+              <a:t>ja</a:t>
+            </a:r>
+            <a:r>
+              <a:rPr lang="en-GB" dirty="0"/>
+              <a:t> </a:t>
+            </a:r>
+            <a:r>
+              <a:rPr lang="en-GB" dirty="0" err="1"/>
+              <a:t>reaalsuse</a:t>
+            </a:r>
+            <a:r>
+              <a:rPr lang="en-GB" dirty="0"/>
+              <a:t> </a:t>
+            </a:r>
+            <a:r>
+              <a:rPr lang="en-GB" dirty="0" err="1"/>
+              <a:t>erinevuste</a:t>
+            </a:r>
+            <a:r>
+              <a:rPr lang="en-GB" dirty="0"/>
+              <a:t> (</a:t>
+            </a:r>
+            <a:r>
+              <a:rPr lang="en-GB" dirty="0" err="1"/>
+              <a:t>pluss</a:t>
+            </a:r>
+            <a:r>
+              <a:rPr lang="en-GB" dirty="0"/>
+              <a:t>/</a:t>
+            </a:r>
+            <a:r>
+              <a:rPr lang="en-GB" dirty="0" err="1"/>
+              <a:t>miinus</a:t>
+            </a:r>
+            <a:r>
+              <a:rPr lang="en-GB" dirty="0"/>
+              <a:t>) </a:t>
+            </a:r>
+            <a:r>
+              <a:rPr lang="en-GB" dirty="0" err="1"/>
+              <a:t>näitamiseks</a:t>
+            </a:r>
+            <a:r>
+              <a:rPr lang="en-GB" dirty="0"/>
+              <a:t>.</a:t>
+            </a:r>
+          </a:p>
+          <a:p>
+            <a:endParaRPr lang="en-GB" dirty="0"/>
+          </a:p>
+        </p:txBody>
+      </p:sp>
+      <p:pic>
+        <p:nvPicPr>
+          <p:cNvPr id="4" name="Picture 3" descr="Power BI Financial Dashboard: Examples, KPIs &amp; Free Templates ...">
+            <a:extLst>
+              <a:ext uri="{FF2B5EF4-FFF2-40B4-BE49-F238E27FC236}">
+                <a16:creationId xmlns:a16="http://schemas.microsoft.com/office/drawing/2014/main" id="{F6BA9306-AE9A-CD3F-EDD9-334AF6F37ABC}"/>
+              </a:ext>
+            </a:extLst>
+          </p:cNvPr>
+          <p:cNvPicPr>
+            <a:picLocks noChangeAspect="1"/>
+          </p:cNvPicPr>
+          <p:nvPr/>
+        </p:nvPicPr>
+        <p:blipFill>
+          <a:blip r:embed="rId2"/>
+          <a:stretch>
+            <a:fillRect/>
+          </a:stretch>
+        </p:blipFill>
+        <p:spPr>
+          <a:xfrm>
+            <a:off x="4848102" y="275823"/>
+            <a:ext cx="7104133" cy="3821058"/>
+          </a:xfrm>
+          <a:prstGeom prst="rect">
+            <a:avLst/>
+          </a:prstGeom>
+        </p:spPr>
+      </p:pic>
+    </p:spTree>
+    <p:extLst>
+      <p:ext uri="{BB962C8B-B14F-4D97-AF65-F5344CB8AC3E}">
+        <p14:creationId xmlns:p14="http://schemas.microsoft.com/office/powerpoint/2010/main" val="3847737916"/>
+      </p:ext>
+    </p:extLst>
+  </p:cSld>
+  <p:clrMapOvr>
+    <a:masterClrMapping/>
+  </p:clrMapOvr>
+</p:sld>
+</file>
+
+<file path=ppt/slides/slide32.xml><?xml version="1.0" encoding="utf-8"?>
+<p:sld xmlns:a="http://schemas.openxmlformats.org/drawingml/2006/main" xmlns:r="http://schemas.openxmlformats.org/officeDocument/2006/relationships" xmlns:p="http://schemas.openxmlformats.org/presentationml/2006/main">
+  <p:cSld>
+    <p:spTree>
+      <p:nvGrpSpPr>
+        <p:cNvPr id="1" name=""/>
+        <p:cNvGrpSpPr/>
+        <p:nvPr/>
+      </p:nvGrpSpPr>
+      <p:grpSpPr>
+        <a:xfrm>
+          <a:off x="0" y="0"/>
+          <a:ext cx="0" cy="0"/>
+          <a:chOff x="0" y="0"/>
+          <a:chExt cx="0" cy="0"/>
+        </a:xfrm>
+      </p:grpSpPr>
+      <p:sp>
+        <p:nvSpPr>
+          <p:cNvPr id="2" name="Title 1">
+            <a:extLst>
+              <a:ext uri="{FF2B5EF4-FFF2-40B4-BE49-F238E27FC236}">
+                <a16:creationId xmlns:a16="http://schemas.microsoft.com/office/drawing/2014/main" id="{6859D975-99C6-BF57-C572-65565056EB0B}"/>
+              </a:ext>
+            </a:extLst>
+          </p:cNvPr>
+          <p:cNvSpPr>
+            <a:spLocks noGrp="1"/>
+          </p:cNvSpPr>
+          <p:nvPr>
+            <p:ph type="title"/>
+          </p:nvPr>
+        </p:nvSpPr>
+        <p:spPr/>
+        <p:txBody>
+          <a:bodyPr/>
+          <a:lstStyle/>
+          <a:p>
+            <a:r>
+              <a:rPr lang="en-GB" dirty="0" err="1"/>
+              <a:t>Harjutus</a:t>
+            </a:r>
+            <a:endParaRPr lang="en-GB" dirty="0"/>
+          </a:p>
+        </p:txBody>
+      </p:sp>
+      <p:sp>
+        <p:nvSpPr>
+          <p:cNvPr id="3" name="Content Placeholder 2">
+            <a:extLst>
+              <a:ext uri="{FF2B5EF4-FFF2-40B4-BE49-F238E27FC236}">
+                <a16:creationId xmlns:a16="http://schemas.microsoft.com/office/drawing/2014/main" id="{58C904B3-29E4-C3E0-A31D-19657250C0F8}"/>
+              </a:ext>
+            </a:extLst>
+          </p:cNvPr>
+          <p:cNvSpPr>
+            <a:spLocks noGrp="1"/>
+          </p:cNvSpPr>
+          <p:nvPr>
+            <p:ph idx="1"/>
+          </p:nvPr>
+        </p:nvSpPr>
+        <p:spPr/>
+        <p:txBody>
+          <a:bodyPr/>
+          <a:lstStyle/>
+          <a:p>
+            <a:r>
+              <a:rPr lang="en-GB" dirty="0"/>
+              <a:t>Sales </a:t>
+            </a:r>
+            <a:r>
+              <a:rPr lang="en-GB" dirty="0" err="1"/>
+              <a:t>aruanne</a:t>
+            </a:r>
+            <a:r>
+              <a:rPr lang="en-GB" dirty="0"/>
+              <a:t> HARJUTUS 1</a:t>
+            </a:r>
+          </a:p>
+          <a:p>
+            <a:r>
+              <a:rPr lang="en-GB" dirty="0" err="1"/>
+              <a:t>Kujundame</a:t>
+            </a:r>
+            <a:endParaRPr lang="en-GB" dirty="0"/>
+          </a:p>
+          <a:p>
+            <a:r>
+              <a:rPr lang="en-GB" dirty="0" err="1"/>
+              <a:t>Testime</a:t>
+            </a:r>
+            <a:endParaRPr lang="en-GB" dirty="0"/>
+          </a:p>
+        </p:txBody>
+      </p:sp>
+    </p:spTree>
+    <p:extLst>
+      <p:ext uri="{BB962C8B-B14F-4D97-AF65-F5344CB8AC3E}">
+        <p14:creationId xmlns:p14="http://schemas.microsoft.com/office/powerpoint/2010/main" val="36857709"/>
+      </p:ext>
+    </p:extLst>
+  </p:cSld>
+  <p:clrMapOvr>
+    <a:masterClrMapping/>
+  </p:clrMapOvr>
+</p:sld>
+</file>
+
+<file path=ppt/slides/slide33.xml><?xml version="1.0" encoding="utf-8"?>
+<p:sld xmlns:a="http://schemas.openxmlformats.org/drawingml/2006/main" xmlns:r="http://schemas.openxmlformats.org/officeDocument/2006/relationships" xmlns:p="http://schemas.openxmlformats.org/presentationml/2006/main">
+  <p:cSld>
+    <p:spTree>
+      <p:nvGrpSpPr>
+        <p:cNvPr id="1" name="">
+          <a:extLst>
+            <a:ext uri="{FF2B5EF4-FFF2-40B4-BE49-F238E27FC236}">
+              <a16:creationId xmlns:a16="http://schemas.microsoft.com/office/drawing/2014/main" id="{6BCD841B-1620-7F64-AABF-17AC8BEADE23}"/>
+            </a:ext>
+          </a:extLst>
+        </p:cNvPr>
+        <p:cNvGrpSpPr/>
+        <p:nvPr/>
+      </p:nvGrpSpPr>
+      <p:grpSpPr>
+        <a:xfrm>
+          <a:off x="0" y="0"/>
+          <a:ext cx="0" cy="0"/>
+          <a:chOff x="0" y="0"/>
+          <a:chExt cx="0" cy="0"/>
+        </a:xfrm>
+      </p:grpSpPr>
+      <p:sp>
+        <p:nvSpPr>
+          <p:cNvPr id="2" name="Title 1">
+            <a:extLst>
+              <a:ext uri="{FF2B5EF4-FFF2-40B4-BE49-F238E27FC236}">
+                <a16:creationId xmlns:a16="http://schemas.microsoft.com/office/drawing/2014/main" id="{4EBF5146-E745-CD30-E5D4-2398C96FDCFD}"/>
+              </a:ext>
+            </a:extLst>
+          </p:cNvPr>
+          <p:cNvSpPr>
+            <a:spLocks noGrp="1"/>
+          </p:cNvSpPr>
+          <p:nvPr>
+            <p:ph type="ctrTitle"/>
+          </p:nvPr>
+        </p:nvSpPr>
+        <p:spPr/>
+        <p:txBody>
+          <a:bodyPr/>
+          <a:lstStyle/>
+          <a:p>
+            <a:r>
+              <a:rPr lang="en-US" err="1"/>
+              <a:t>Müükide</a:t>
+            </a:r>
+            <a:r>
+              <a:rPr lang="en-US"/>
+              <a:t> </a:t>
+            </a:r>
+            <a:r>
+              <a:rPr lang="en-US" err="1"/>
+              <a:t>ülevaade</a:t>
+            </a:r>
+            <a:r>
+              <a:rPr lang="en-US"/>
+              <a:t> </a:t>
+            </a:r>
+            <a:r>
+              <a:rPr lang="en-US" err="1"/>
+              <a:t>müügitiimile</a:t>
+            </a:r>
+            <a:endParaRPr lang="en-US"/>
+          </a:p>
+        </p:txBody>
+      </p:sp>
+      <p:sp>
+        <p:nvSpPr>
+          <p:cNvPr id="3" name="Content Placeholder 2">
+            <a:extLst>
+              <a:ext uri="{FF2B5EF4-FFF2-40B4-BE49-F238E27FC236}">
+                <a16:creationId xmlns:a16="http://schemas.microsoft.com/office/drawing/2014/main" id="{21904B09-5239-995B-53EC-8B8446BCCFC9}"/>
+              </a:ext>
+            </a:extLst>
+          </p:cNvPr>
+          <p:cNvSpPr>
+            <a:spLocks noGrp="1"/>
+          </p:cNvSpPr>
+          <p:nvPr>
+            <p:ph sz="quarter" idx="10"/>
+          </p:nvPr>
+        </p:nvSpPr>
+        <p:spPr/>
+        <p:txBody>
+          <a:bodyPr/>
+          <a:lstStyle/>
+          <a:p>
+            <a:pPr>
+              <a:lnSpc>
+                <a:spcPct val="150000"/>
+              </a:lnSpc>
+            </a:pPr>
+            <a:r>
+              <a:rPr lang="en-US" sz="2400" err="1">
+                <a:solidFill>
+                  <a:srgbClr val="000000"/>
+                </a:solidFill>
+                <a:ea typeface="+mn-lt"/>
+                <a:cs typeface="+mn-lt"/>
+              </a:rPr>
+              <a:t>Kuidas</a:t>
+            </a:r>
+            <a:r>
+              <a:rPr lang="en-US" sz="2400">
+                <a:solidFill>
+                  <a:srgbClr val="000000"/>
+                </a:solidFill>
+                <a:ea typeface="+mn-lt"/>
+                <a:cs typeface="+mn-lt"/>
+              </a:rPr>
+              <a:t> </a:t>
+            </a:r>
+            <a:r>
+              <a:rPr lang="en-US" sz="2400" err="1">
+                <a:solidFill>
+                  <a:srgbClr val="000000"/>
+                </a:solidFill>
+                <a:ea typeface="+mn-lt"/>
+                <a:cs typeface="+mn-lt"/>
+              </a:rPr>
+              <a:t>edeneb</a:t>
+            </a:r>
+            <a:r>
+              <a:rPr lang="en-US" sz="2400">
+                <a:solidFill>
+                  <a:srgbClr val="000000"/>
+                </a:solidFill>
+                <a:ea typeface="+mn-lt"/>
+                <a:cs typeface="+mn-lt"/>
+              </a:rPr>
+              <a:t> </a:t>
+            </a:r>
+            <a:r>
+              <a:rPr lang="en-US" sz="2400" err="1">
+                <a:solidFill>
+                  <a:srgbClr val="000000"/>
+                </a:solidFill>
+                <a:ea typeface="+mn-lt"/>
+                <a:cs typeface="+mn-lt"/>
+              </a:rPr>
+              <a:t>käesoleval</a:t>
+            </a:r>
+            <a:r>
+              <a:rPr lang="en-US" sz="2400">
+                <a:solidFill>
+                  <a:srgbClr val="000000"/>
+                </a:solidFill>
+                <a:ea typeface="+mn-lt"/>
+                <a:cs typeface="+mn-lt"/>
+              </a:rPr>
+              <a:t> </a:t>
+            </a:r>
+            <a:r>
+              <a:rPr lang="en-US" sz="2400" err="1">
+                <a:solidFill>
+                  <a:srgbClr val="000000"/>
+                </a:solidFill>
+                <a:ea typeface="+mn-lt"/>
+                <a:cs typeface="+mn-lt"/>
+              </a:rPr>
+              <a:t>kuul</a:t>
+            </a:r>
+            <a:r>
+              <a:rPr lang="en-US" sz="2400">
+                <a:solidFill>
+                  <a:srgbClr val="000000"/>
+                </a:solidFill>
+                <a:ea typeface="+mn-lt"/>
+                <a:cs typeface="+mn-lt"/>
+              </a:rPr>
+              <a:t> </a:t>
+            </a:r>
+            <a:r>
+              <a:rPr lang="en-US" sz="2400" err="1">
+                <a:solidFill>
+                  <a:srgbClr val="000000"/>
+                </a:solidFill>
+                <a:ea typeface="+mn-lt"/>
+                <a:cs typeface="+mn-lt"/>
+              </a:rPr>
+              <a:t>eelarve</a:t>
+            </a:r>
+            <a:r>
+              <a:rPr lang="en-US" sz="2400">
+                <a:solidFill>
+                  <a:srgbClr val="000000"/>
+                </a:solidFill>
+                <a:ea typeface="+mn-lt"/>
+                <a:cs typeface="+mn-lt"/>
+              </a:rPr>
+              <a:t> </a:t>
+            </a:r>
+            <a:r>
+              <a:rPr lang="en-US" sz="2400" err="1">
+                <a:solidFill>
+                  <a:srgbClr val="000000"/>
+                </a:solidFill>
+                <a:ea typeface="+mn-lt"/>
+                <a:cs typeface="+mn-lt"/>
+              </a:rPr>
+              <a:t>täitmine</a:t>
+            </a:r>
+            <a:r>
+              <a:rPr lang="en-US" sz="2400">
+                <a:solidFill>
+                  <a:srgbClr val="000000"/>
+                </a:solidFill>
+                <a:ea typeface="+mn-lt"/>
+                <a:cs typeface="+mn-lt"/>
+              </a:rPr>
+              <a:t> </a:t>
+            </a:r>
+            <a:r>
+              <a:rPr lang="en-US" sz="2400" err="1">
+                <a:solidFill>
+                  <a:srgbClr val="000000"/>
+                </a:solidFill>
+                <a:ea typeface="+mn-lt"/>
+                <a:cs typeface="+mn-lt"/>
+              </a:rPr>
+              <a:t>müügiesindajate</a:t>
+            </a:r>
+            <a:r>
+              <a:rPr lang="en-US" sz="2400">
+                <a:solidFill>
+                  <a:srgbClr val="000000"/>
+                </a:solidFill>
+                <a:ea typeface="+mn-lt"/>
+                <a:cs typeface="+mn-lt"/>
+              </a:rPr>
+              <a:t> </a:t>
+            </a:r>
+            <a:r>
+              <a:rPr lang="en-US" sz="2400" err="1">
+                <a:solidFill>
+                  <a:srgbClr val="000000"/>
+                </a:solidFill>
+                <a:ea typeface="+mn-lt"/>
+                <a:cs typeface="+mn-lt"/>
+              </a:rPr>
+              <a:t>kaupa</a:t>
+            </a:r>
+            <a:r>
+              <a:rPr lang="en-US" sz="2400">
+                <a:solidFill>
+                  <a:srgbClr val="000000"/>
+                </a:solidFill>
+                <a:ea typeface="+mn-lt"/>
+                <a:cs typeface="+mn-lt"/>
+              </a:rPr>
+              <a:t>?</a:t>
+            </a:r>
+          </a:p>
+          <a:p>
+            <a:pPr>
+              <a:lnSpc>
+                <a:spcPct val="150000"/>
+              </a:lnSpc>
+            </a:pPr>
+            <a:endParaRPr lang="en-US" sz="2400">
+              <a:solidFill>
+                <a:srgbClr val="000000"/>
+              </a:solidFill>
+              <a:ea typeface="Inter"/>
+            </a:endParaRPr>
+          </a:p>
+          <a:p>
+            <a:pPr marL="0" indent="0">
+              <a:lnSpc>
+                <a:spcPct val="150000"/>
+              </a:lnSpc>
+              <a:buNone/>
+            </a:pPr>
+            <a:endParaRPr lang="en-US" sz="2400">
+              <a:solidFill>
+                <a:srgbClr val="000000"/>
+              </a:solidFill>
+              <a:ea typeface="Inter"/>
+            </a:endParaRPr>
+          </a:p>
+          <a:p>
+            <a:pPr>
+              <a:lnSpc>
+                <a:spcPct val="150000"/>
+              </a:lnSpc>
+            </a:pPr>
+            <a:endParaRPr lang="en-US" sz="2400">
+              <a:solidFill>
+                <a:srgbClr val="000000"/>
+              </a:solidFill>
+              <a:ea typeface="Inter"/>
+            </a:endParaRPr>
+          </a:p>
+        </p:txBody>
+      </p:sp>
+    </p:spTree>
+    <p:extLst>
+      <p:ext uri="{BB962C8B-B14F-4D97-AF65-F5344CB8AC3E}">
+        <p14:creationId xmlns:p14="http://schemas.microsoft.com/office/powerpoint/2010/main" val="2130150789"/>
+      </p:ext>
+    </p:extLst>
+  </p:cSld>
+  <p:clrMapOvr>
+    <a:masterClrMapping/>
+  </p:clrMapOvr>
+</p:sld>
+</file>
+
+<file path=ppt/slides/slide34.xml><?xml version="1.0" encoding="utf-8"?>
+<p:sld xmlns:a="http://schemas.openxmlformats.org/drawingml/2006/main" xmlns:r="http://schemas.openxmlformats.org/officeDocument/2006/relationships" xmlns:p="http://schemas.openxmlformats.org/presentationml/2006/main">
+  <p:cSld>
+    <p:spTree>
+      <p:nvGrpSpPr>
+        <p:cNvPr id="1" name=""/>
+        <p:cNvGrpSpPr/>
+        <p:nvPr/>
+      </p:nvGrpSpPr>
+      <p:grpSpPr>
+        <a:xfrm>
+          <a:off x="0" y="0"/>
+          <a:ext cx="0" cy="0"/>
+          <a:chOff x="0" y="0"/>
+          <a:chExt cx="0" cy="0"/>
+        </a:xfrm>
+      </p:grpSpPr>
+      <p:sp>
+        <p:nvSpPr>
+          <p:cNvPr id="2" name="Title 1">
+            <a:extLst>
+              <a:ext uri="{FF2B5EF4-FFF2-40B4-BE49-F238E27FC236}">
+                <a16:creationId xmlns:a16="http://schemas.microsoft.com/office/drawing/2014/main" id="{34200C85-88E6-D982-59D1-DFBAC8A3E627}"/>
+              </a:ext>
+            </a:extLst>
+          </p:cNvPr>
+          <p:cNvSpPr>
+            <a:spLocks noGrp="1"/>
+          </p:cNvSpPr>
+          <p:nvPr>
+            <p:ph type="ctrTitle"/>
+          </p:nvPr>
+        </p:nvSpPr>
+        <p:spPr/>
+        <p:txBody>
+          <a:bodyPr/>
+          <a:lstStyle/>
+          <a:p>
+            <a:r>
+              <a:rPr lang="et-EE" dirty="0"/>
+              <a:t>Millistele küsimustele vastust otsid?</a:t>
+            </a:r>
+          </a:p>
+        </p:txBody>
+      </p:sp>
+      <p:sp>
+        <p:nvSpPr>
+          <p:cNvPr id="3" name="Content Placeholder 2">
+            <a:extLst>
+              <a:ext uri="{FF2B5EF4-FFF2-40B4-BE49-F238E27FC236}">
+                <a16:creationId xmlns:a16="http://schemas.microsoft.com/office/drawing/2014/main" id="{272C4812-3AC1-5277-F013-28F80EBC2F26}"/>
+              </a:ext>
+            </a:extLst>
+          </p:cNvPr>
+          <p:cNvSpPr>
+            <a:spLocks noGrp="1"/>
+          </p:cNvSpPr>
+          <p:nvPr>
+            <p:ph sz="quarter" idx="10"/>
+          </p:nvPr>
+        </p:nvSpPr>
+        <p:spPr/>
+        <p:txBody>
+          <a:bodyPr/>
+          <a:lstStyle/>
+          <a:p>
+            <a:pPr marL="0" indent="0">
+              <a:buNone/>
+            </a:pPr>
+            <a:r>
+              <a:rPr lang="et-EE" sz="2000" b="1" dirty="0"/>
+              <a:t>● Regioonide ja müüjate lõikes:</a:t>
+            </a:r>
+          </a:p>
+          <a:p>
+            <a:pPr marL="0" indent="0">
+              <a:buNone/>
+            </a:pPr>
+            <a:r>
+              <a:rPr lang="et-EE" dirty="0"/>
+              <a:t>○ Millised regioonid toovad kõige suurema kogukasumi ja millised töötavad kahjumiga</a:t>
+            </a:r>
+          </a:p>
+          <a:p>
+            <a:pPr marL="0" indent="0">
+              <a:buNone/>
+            </a:pPr>
+            <a:r>
+              <a:rPr lang="et-EE" dirty="0"/>
+              <a:t>või nulli piiril?</a:t>
+            </a:r>
+          </a:p>
+          <a:p>
+            <a:pPr marL="0" indent="0">
+              <a:buNone/>
+            </a:pPr>
+            <a:r>
+              <a:rPr lang="et-EE" dirty="0"/>
+              <a:t>○ Kas mõni müüja (Salesperson) teeb suurt käivet ainult tänu sellele, et jagab liiga</a:t>
+            </a:r>
+          </a:p>
+          <a:p>
+            <a:pPr marL="0" indent="0">
+              <a:buNone/>
+            </a:pPr>
+            <a:r>
+              <a:rPr lang="et-EE" dirty="0"/>
+              <a:t>kergekäeliselt allahindlusi?</a:t>
+            </a:r>
+          </a:p>
+          <a:p>
+            <a:pPr marL="0" indent="0">
+              <a:buNone/>
+            </a:pPr>
+            <a:r>
+              <a:rPr lang="et-EE" sz="2000" b="1" dirty="0"/>
+              <a:t>● Toodete ja marginaali lõikes:</a:t>
+            </a:r>
+          </a:p>
+          <a:p>
+            <a:pPr marL="0" indent="0">
+              <a:buNone/>
+            </a:pPr>
+            <a:r>
+              <a:rPr lang="et-EE" dirty="0"/>
+              <a:t>○ Millised tootekategooriad on meie "rahamasinad" (kõrge marginaal ja suur maht) ja</a:t>
+            </a:r>
+          </a:p>
+          <a:p>
+            <a:pPr marL="0" indent="0">
+              <a:buNone/>
+            </a:pPr>
+            <a:r>
+              <a:rPr lang="et-EE" dirty="0"/>
+              <a:t>millised võtavad lihtsalt ruumi?</a:t>
+            </a:r>
+          </a:p>
+          <a:p>
+            <a:pPr marL="0" indent="0">
+              <a:buNone/>
+            </a:pPr>
+            <a:r>
+              <a:rPr lang="et-EE" dirty="0"/>
+              <a:t>○ Kas meie allahindluse (Discount) strateegia kasvatab reaalset müügimahtu</a:t>
+            </a:r>
+          </a:p>
+          <a:p>
+            <a:pPr marL="0" indent="0">
+              <a:buNone/>
+            </a:pPr>
+            <a:r>
+              <a:rPr lang="et-EE" dirty="0"/>
+              <a:t>(Quantity) või sööb lihtsalt kasumit?</a:t>
+            </a:r>
+          </a:p>
+        </p:txBody>
+      </p:sp>
+    </p:spTree>
+    <p:extLst>
+      <p:ext uri="{BB962C8B-B14F-4D97-AF65-F5344CB8AC3E}">
+        <p14:creationId xmlns:p14="http://schemas.microsoft.com/office/powerpoint/2010/main" val="2985737251"/>
+      </p:ext>
+    </p:extLst>
+  </p:cSld>
+  <p:clrMapOvr>
+    <a:masterClrMapping/>
+  </p:clrMapOvr>
+</p:sld>
+</file>
+
+<file path=ppt/slides/slide35.xml><?xml version="1.0" encoding="utf-8"?>
+<p:sld xmlns:a="http://schemas.openxmlformats.org/drawingml/2006/main" xmlns:r="http://schemas.openxmlformats.org/officeDocument/2006/relationships" xmlns:p="http://schemas.openxmlformats.org/presentationml/2006/main">
+  <p:cSld>
+    <p:spTree>
+      <p:nvGrpSpPr>
+        <p:cNvPr id="1" name=""/>
+        <p:cNvGrpSpPr/>
+        <p:nvPr/>
+      </p:nvGrpSpPr>
+      <p:grpSpPr>
+        <a:xfrm>
+          <a:off x="0" y="0"/>
+          <a:ext cx="0" cy="0"/>
+          <a:chOff x="0" y="0"/>
+          <a:chExt cx="0" cy="0"/>
+        </a:xfrm>
+      </p:grpSpPr>
+      <p:sp>
+        <p:nvSpPr>
+          <p:cNvPr id="2" name="Title 1">
+            <a:extLst>
+              <a:ext uri="{FF2B5EF4-FFF2-40B4-BE49-F238E27FC236}">
                 <a16:creationId xmlns:a16="http://schemas.microsoft.com/office/drawing/2014/main" id="{60F6DEFC-16F3-98E6-00F6-ADDFE4A8EFB3}"/>
               </a:ext>
             </a:extLst>
@@ -28612,7 +35882,7 @@
 </p:sld>
 </file>
 
-<file path=ppt/slides/slide21.xml><?xml version="1.0" encoding="utf-8"?>
+<file path=ppt/slides/slide36.xml><?xml version="1.0" encoding="utf-8"?>
 <p:sld xmlns:a="http://schemas.openxmlformats.org/drawingml/2006/main" xmlns:r="http://schemas.openxmlformats.org/officeDocument/2006/relationships" xmlns:p="http://schemas.openxmlformats.org/presentationml/2006/main">
   <p:cSld>
     <p:spTree>
@@ -28825,7 +36095,7 @@
 </p:sld>
 </file>
 
-<file path=ppt/slides/slide22.xml><?xml version="1.0" encoding="utf-8"?>
+<file path=ppt/slides/slide37.xml><?xml version="1.0" encoding="utf-8"?>
 <p:sld xmlns:a="http://schemas.openxmlformats.org/drawingml/2006/main" xmlns:r="http://schemas.openxmlformats.org/officeDocument/2006/relationships" xmlns:p="http://schemas.openxmlformats.org/presentationml/2006/main">
   <p:cSld>
     <p:spTree>
@@ -29264,7 +36534,7 @@
 </p:sld>
 </file>
 
-<file path=ppt/slides/slide23.xml><?xml version="1.0" encoding="utf-8"?>
+<file path=ppt/slides/slide38.xml><?xml version="1.0" encoding="utf-8"?>
 <p:sld xmlns:a="http://schemas.openxmlformats.org/drawingml/2006/main" xmlns:r="http://schemas.openxmlformats.org/officeDocument/2006/relationships" xmlns:p="http://schemas.openxmlformats.org/presentationml/2006/main">
   <p:cSld>
     <p:spTree>
@@ -29777,7 +37047,7 @@
 </p:sld>
 </file>
 
-<file path=ppt/slides/slide24.xml><?xml version="1.0" encoding="utf-8"?>
+<file path=ppt/slides/slide39.xml><?xml version="1.0" encoding="utf-8"?>
 <p:sld xmlns:a="http://schemas.openxmlformats.org/drawingml/2006/main" xmlns:r="http://schemas.openxmlformats.org/officeDocument/2006/relationships" xmlns:p="http://schemas.openxmlformats.org/presentationml/2006/main">
   <p:cSld>
     <p:spTree>
@@ -29890,7 +37160,203 @@
 </p:sld>
 </file>
 
-<file path=ppt/slides/slide25.xml><?xml version="1.0" encoding="utf-8"?>
+<file path=ppt/slides/slide4.xml><?xml version="1.0" encoding="utf-8"?>
+<p:sld xmlns:a="http://schemas.openxmlformats.org/drawingml/2006/main" xmlns:r="http://schemas.openxmlformats.org/officeDocument/2006/relationships" xmlns:p="http://schemas.openxmlformats.org/presentationml/2006/main">
+  <p:cSld>
+    <p:spTree>
+      <p:nvGrpSpPr>
+        <p:cNvPr id="1" name=""/>
+        <p:cNvGrpSpPr/>
+        <p:nvPr/>
+      </p:nvGrpSpPr>
+      <p:grpSpPr>
+        <a:xfrm>
+          <a:off x="0" y="0"/>
+          <a:ext cx="0" cy="0"/>
+          <a:chOff x="0" y="0"/>
+          <a:chExt cx="0" cy="0"/>
+        </a:xfrm>
+      </p:grpSpPr>
+      <p:sp>
+        <p:nvSpPr>
+          <p:cNvPr id="2" name="Title 1">
+            <a:extLst>
+              <a:ext uri="{FF2B5EF4-FFF2-40B4-BE49-F238E27FC236}">
+                <a16:creationId xmlns:a16="http://schemas.microsoft.com/office/drawing/2014/main" id="{179DFB7D-B6F0-73A1-D3C4-814B38B7CEE9}"/>
+              </a:ext>
+            </a:extLst>
+          </p:cNvPr>
+          <p:cNvSpPr>
+            <a:spLocks noGrp="1"/>
+          </p:cNvSpPr>
+          <p:nvPr>
+            <p:ph type="ctrTitle"/>
+          </p:nvPr>
+        </p:nvSpPr>
+        <p:spPr/>
+        <p:txBody>
+          <a:bodyPr/>
+          <a:lstStyle/>
+          <a:p>
+            <a:r>
+              <a:rPr lang="et-EE" dirty="0"/>
+              <a:t>Teeme veebipõhiseks</a:t>
+            </a:r>
+            <a:endParaRPr lang="en-GB" dirty="0"/>
+          </a:p>
+        </p:txBody>
+      </p:sp>
+      <p:sp>
+        <p:nvSpPr>
+          <p:cNvPr id="3" name="Content Placeholder 2">
+            <a:extLst>
+              <a:ext uri="{FF2B5EF4-FFF2-40B4-BE49-F238E27FC236}">
+                <a16:creationId xmlns:a16="http://schemas.microsoft.com/office/drawing/2014/main" id="{1590A32E-6C24-47B1-84E4-7C548BB30766}"/>
+              </a:ext>
+            </a:extLst>
+          </p:cNvPr>
+          <p:cNvSpPr>
+            <a:spLocks noGrp="1"/>
+          </p:cNvSpPr>
+          <p:nvPr>
+            <p:ph sz="quarter" idx="10"/>
+          </p:nvPr>
+        </p:nvSpPr>
+        <p:spPr/>
+        <p:txBody>
+          <a:bodyPr/>
+          <a:lstStyle/>
+          <a:p>
+            <a:pPr marL="0" indent="0">
+              <a:buNone/>
+            </a:pPr>
+            <a:r>
+              <a:rPr lang="en-GB" dirty="0"/>
+              <a:t>Google Sheets</a:t>
+            </a:r>
+          </a:p>
+          <a:p>
+            <a:r>
+              <a:rPr lang="en-GB" dirty="0">
+                <a:solidFill>
+                  <a:schemeClr val="accent4"/>
+                </a:solidFill>
+              </a:rPr>
+              <a:t>Date Table</a:t>
+            </a:r>
+          </a:p>
+          <a:p>
+            <a:r>
+              <a:rPr lang="en-GB" dirty="0">
+                <a:solidFill>
+                  <a:schemeClr val="accent4"/>
+                </a:solidFill>
+              </a:rPr>
+              <a:t>Region Table</a:t>
+            </a:r>
+          </a:p>
+          <a:p>
+            <a:r>
+              <a:rPr lang="en-GB" dirty="0">
+                <a:solidFill>
+                  <a:schemeClr val="accent4"/>
+                </a:solidFill>
+              </a:rPr>
+              <a:t>Budget Table</a:t>
+            </a:r>
+          </a:p>
+          <a:p>
+            <a:r>
+              <a:rPr lang="en-GB" dirty="0">
+                <a:solidFill>
+                  <a:schemeClr val="accent4"/>
+                </a:solidFill>
+              </a:rPr>
+              <a:t>Customer Table</a:t>
+            </a:r>
+          </a:p>
+          <a:p>
+            <a:r>
+              <a:rPr lang="en-GB" dirty="0">
+                <a:solidFill>
+                  <a:schemeClr val="accent4"/>
+                </a:solidFill>
+              </a:rPr>
+              <a:t>Sales Table</a:t>
+            </a:r>
+          </a:p>
+          <a:p>
+            <a:endParaRPr lang="en-GB" dirty="0">
+              <a:solidFill>
+                <a:schemeClr val="accent4"/>
+              </a:solidFill>
+            </a:endParaRPr>
+          </a:p>
+          <a:p>
+            <a:endParaRPr lang="en-GB" dirty="0">
+              <a:solidFill>
+                <a:schemeClr val="accent4"/>
+              </a:solidFill>
+            </a:endParaRPr>
+          </a:p>
+          <a:p>
+            <a:pPr marL="0" indent="0">
+              <a:buNone/>
+            </a:pPr>
+            <a:r>
+              <a:rPr lang="en-GB" dirty="0" err="1"/>
+              <a:t>GitHUB</a:t>
+            </a:r>
+            <a:endParaRPr lang="en-GB" dirty="0"/>
+          </a:p>
+          <a:p>
+            <a:r>
+              <a:rPr lang="en-GB" dirty="0"/>
+              <a:t>Product Table</a:t>
+            </a:r>
+          </a:p>
+          <a:p>
+            <a:r>
+              <a:rPr lang="en-GB" dirty="0" err="1"/>
+              <a:t>SalesRep</a:t>
+            </a:r>
+            <a:r>
+              <a:rPr lang="en-GB" dirty="0"/>
+              <a:t> Table</a:t>
+            </a:r>
+          </a:p>
+          <a:p>
+            <a:endParaRPr lang="en-GB" dirty="0"/>
+          </a:p>
+          <a:p>
+            <a:endParaRPr lang="en-GB" dirty="0">
+              <a:solidFill>
+                <a:schemeClr val="accent4"/>
+              </a:solidFill>
+            </a:endParaRPr>
+          </a:p>
+          <a:p>
+            <a:pPr marL="0" indent="0">
+              <a:buNone/>
+            </a:pPr>
+            <a:endParaRPr lang="en-GB" dirty="0"/>
+          </a:p>
+        </p:txBody>
+      </p:sp>
+    </p:spTree>
+    <p:extLst>
+      <p:ext uri="{BB962C8B-B14F-4D97-AF65-F5344CB8AC3E}">
+        <p14:creationId xmlns:p14="http://schemas.microsoft.com/office/powerpoint/2010/main" val="616072544"/>
+      </p:ext>
+    </p:extLst>
+  </p:cSld>
+  <p:clrMapOvr>
+    <a:masterClrMapping/>
+  </p:clrMapOvr>
+</p:sld>
+</file>
+
+<file path=ppt/slides/slide40.xml><?xml version="1.0" encoding="utf-8"?>
 <p:sld xmlns:a="http://schemas.openxmlformats.org/drawingml/2006/main" xmlns:r="http://schemas.openxmlformats.org/officeDocument/2006/relationships" xmlns:p="http://schemas.openxmlformats.org/presentationml/2006/main">
   <p:cSld>
     <p:spTree>
@@ -30470,7 +37936,7 @@
 </p:sld>
 </file>
 
-<file path=ppt/slides/slide26.xml><?xml version="1.0" encoding="utf-8"?>
+<file path=ppt/slides/slide41.xml><?xml version="1.0" encoding="utf-8"?>
 <p:sld xmlns:a="http://schemas.openxmlformats.org/drawingml/2006/main" xmlns:r="http://schemas.openxmlformats.org/officeDocument/2006/relationships" xmlns:p="http://schemas.openxmlformats.org/presentationml/2006/main">
   <p:cSld>
     <p:spTree>
@@ -30832,438 +38298,6 @@
     <p:extLst>
       <p:ext uri="{BB962C8B-B14F-4D97-AF65-F5344CB8AC3E}">
         <p14:creationId xmlns:p14="http://schemas.microsoft.com/office/powerpoint/2010/main" val="3184440662"/>
-      </p:ext>
-    </p:extLst>
-  </p:cSld>
-  <p:clrMapOvr>
-    <a:masterClrMapping/>
-  </p:clrMapOvr>
-</p:sld>
-</file>
-
-<file path=ppt/slides/slide3.xml><?xml version="1.0" encoding="utf-8"?>
-<p:sld xmlns:a="http://schemas.openxmlformats.org/drawingml/2006/main" xmlns:r="http://schemas.openxmlformats.org/officeDocument/2006/relationships" xmlns:p="http://schemas.openxmlformats.org/presentationml/2006/main">
-  <p:cSld>
-    <p:spTree>
-      <p:nvGrpSpPr>
-        <p:cNvPr id="1" name=""/>
-        <p:cNvGrpSpPr/>
-        <p:nvPr/>
-      </p:nvGrpSpPr>
-      <p:grpSpPr>
-        <a:xfrm>
-          <a:off x="0" y="0"/>
-          <a:ext cx="0" cy="0"/>
-          <a:chOff x="0" y="0"/>
-          <a:chExt cx="0" cy="0"/>
-        </a:xfrm>
-      </p:grpSpPr>
-      <p:sp>
-        <p:nvSpPr>
-          <p:cNvPr id="2" name="Title 1">
-            <a:extLst>
-              <a:ext uri="{FF2B5EF4-FFF2-40B4-BE49-F238E27FC236}">
-                <a16:creationId xmlns:a16="http://schemas.microsoft.com/office/drawing/2014/main" id="{0C3C55E8-FBF1-AD5D-6DA0-CBD58BBEB5DB}"/>
-              </a:ext>
-            </a:extLst>
-          </p:cNvPr>
-          <p:cNvSpPr>
-            <a:spLocks noGrp="1"/>
-          </p:cNvSpPr>
-          <p:nvPr>
-            <p:ph type="ctrTitle"/>
-          </p:nvPr>
-        </p:nvSpPr>
-        <p:spPr/>
-        <p:txBody>
-          <a:bodyPr/>
-          <a:lstStyle/>
-          <a:p>
-            <a:r>
-              <a:rPr lang="en-US"/>
-              <a:t>Power BI – </a:t>
-            </a:r>
-            <a:r>
-              <a:rPr lang="en-US" err="1"/>
-              <a:t>Päringud</a:t>
-            </a:r>
-            <a:r>
-              <a:rPr lang="en-US"/>
-              <a:t> (M-language)</a:t>
-            </a:r>
-          </a:p>
-        </p:txBody>
-      </p:sp>
-      <p:sp>
-        <p:nvSpPr>
-          <p:cNvPr id="3" name="Content Placeholder 2">
-            <a:extLst>
-              <a:ext uri="{FF2B5EF4-FFF2-40B4-BE49-F238E27FC236}">
-                <a16:creationId xmlns:a16="http://schemas.microsoft.com/office/drawing/2014/main" id="{2D37BB7F-4F12-0B50-CEE8-3F6E6A2C9EE7}"/>
-              </a:ext>
-            </a:extLst>
-          </p:cNvPr>
-          <p:cNvSpPr>
-            <a:spLocks noGrp="1"/>
-          </p:cNvSpPr>
-          <p:nvPr>
-            <p:ph sz="quarter" idx="10"/>
-          </p:nvPr>
-        </p:nvSpPr>
-        <p:spPr/>
-        <p:txBody>
-          <a:bodyPr/>
-          <a:lstStyle/>
-          <a:p>
-            <a:pPr>
-              <a:lnSpc>
-                <a:spcPct val="150000"/>
-              </a:lnSpc>
-            </a:pPr>
-            <a:r>
-              <a:rPr lang="en-US" sz="2400">
-                <a:ea typeface="Inter"/>
-              </a:rPr>
-              <a:t>Power BI </a:t>
-            </a:r>
-            <a:r>
-              <a:rPr lang="en-US" sz="2400" err="1">
-                <a:ea typeface="Inter"/>
-              </a:rPr>
-              <a:t>päringukeel</a:t>
-            </a:r>
-            <a:r>
-              <a:rPr lang="en-US" sz="2400">
-                <a:ea typeface="Inter"/>
-              </a:rPr>
-              <a:t> </a:t>
-            </a:r>
-            <a:endParaRPr lang="en-US"/>
-          </a:p>
-          <a:p>
-            <a:pPr>
-              <a:lnSpc>
-                <a:spcPct val="150000"/>
-              </a:lnSpc>
-            </a:pPr>
-            <a:r>
-              <a:rPr lang="en-US" sz="2400" err="1">
-                <a:ea typeface="Inter"/>
-              </a:rPr>
-              <a:t>Juhend</a:t>
-            </a:r>
-            <a:r>
-              <a:rPr lang="en-US" sz="2400">
-                <a:ea typeface="Inter"/>
-              </a:rPr>
-              <a:t>: </a:t>
-            </a:r>
-            <a:r>
-              <a:rPr lang="en-US" sz="2400">
-                <a:ea typeface="+mn-lt"/>
-                <a:cs typeface="+mn-lt"/>
-                <a:hlinkClick r:id="rId2"/>
-              </a:rPr>
-              <a:t>Power Query M formula language reference - PowerQuery M | Microsoft Learn</a:t>
-            </a:r>
-          </a:p>
-          <a:p>
-            <a:pPr>
-              <a:lnSpc>
-                <a:spcPct val="150000"/>
-              </a:lnSpc>
-            </a:pPr>
-            <a:r>
-              <a:rPr lang="en-US" sz="2400" err="1">
-                <a:ea typeface="+mn-lt"/>
-                <a:cs typeface="+mn-lt"/>
-              </a:rPr>
-              <a:t>Leitav</a:t>
-            </a:r>
-            <a:r>
-              <a:rPr lang="en-US" sz="2400">
-                <a:ea typeface="+mn-lt"/>
-                <a:cs typeface="+mn-lt"/>
-              </a:rPr>
-              <a:t>: Model View --&gt; Edit Query</a:t>
-            </a:r>
-          </a:p>
-          <a:p>
-            <a:pPr lvl="1" indent="-514350">
-              <a:lnSpc>
-                <a:spcPct val="150000"/>
-              </a:lnSpc>
-              <a:buFont typeface="Courier New" panose="020B0502030000000004" pitchFamily="34" charset="0"/>
-              <a:buChar char="o"/>
-            </a:pPr>
-            <a:r>
-              <a:rPr lang="en-US" sz="2400">
-                <a:ea typeface="+mn-lt"/>
-                <a:cs typeface="+mn-lt"/>
-              </a:rPr>
-              <a:t>Paremal </a:t>
-            </a:r>
-            <a:r>
-              <a:rPr lang="en-US" sz="2400" err="1">
-                <a:ea typeface="+mn-lt"/>
-                <a:cs typeface="+mn-lt"/>
-              </a:rPr>
-              <a:t>sammude</a:t>
-            </a:r>
-            <a:r>
-              <a:rPr lang="en-US" sz="2400">
-                <a:ea typeface="+mn-lt"/>
-                <a:cs typeface="+mn-lt"/>
-              </a:rPr>
-              <a:t> </a:t>
-            </a:r>
-            <a:r>
-              <a:rPr lang="en-US" sz="2400" err="1">
-                <a:ea typeface="+mn-lt"/>
-                <a:cs typeface="+mn-lt"/>
-              </a:rPr>
-              <a:t>kaupa</a:t>
-            </a:r>
-          </a:p>
-          <a:p>
-            <a:pPr lvl="1" indent="-514350">
-              <a:lnSpc>
-                <a:spcPct val="150000"/>
-              </a:lnSpc>
-              <a:buFont typeface="Courier New" panose="020B0502030000000004" pitchFamily="34" charset="0"/>
-              <a:buChar char="o"/>
-            </a:pPr>
-            <a:r>
-              <a:rPr lang="en-US" sz="2400">
-                <a:ea typeface="+mn-lt"/>
-                <a:cs typeface="+mn-lt"/>
-              </a:rPr>
-              <a:t>Advanced Editor – </a:t>
-            </a:r>
-            <a:r>
-              <a:rPr lang="en-US" sz="2400" err="1">
-                <a:ea typeface="+mn-lt"/>
-                <a:cs typeface="+mn-lt"/>
-              </a:rPr>
-              <a:t>kogu</a:t>
-            </a:r>
-            <a:r>
-              <a:rPr lang="en-US" sz="2400">
-                <a:ea typeface="+mn-lt"/>
-                <a:cs typeface="+mn-lt"/>
-              </a:rPr>
-              <a:t> </a:t>
-            </a:r>
-            <a:r>
-              <a:rPr lang="en-US" sz="2400" err="1">
-                <a:ea typeface="+mn-lt"/>
-                <a:cs typeface="+mn-lt"/>
-              </a:rPr>
-              <a:t>päring</a:t>
-            </a:r>
-          </a:p>
-        </p:txBody>
-      </p:sp>
-    </p:spTree>
-    <p:extLst>
-      <p:ext uri="{BB962C8B-B14F-4D97-AF65-F5344CB8AC3E}">
-        <p14:creationId xmlns:p14="http://schemas.microsoft.com/office/powerpoint/2010/main" val="2761534892"/>
-      </p:ext>
-    </p:extLst>
-  </p:cSld>
-  <p:clrMapOvr>
-    <a:masterClrMapping/>
-  </p:clrMapOvr>
-</p:sld>
-</file>
-
-<file path=ppt/slides/slide4.xml><?xml version="1.0" encoding="utf-8"?>
-<p:sld xmlns:a="http://schemas.openxmlformats.org/drawingml/2006/main" xmlns:r="http://schemas.openxmlformats.org/officeDocument/2006/relationships" xmlns:p="http://schemas.openxmlformats.org/presentationml/2006/main">
-  <p:cSld>
-    <p:spTree>
-      <p:nvGrpSpPr>
-        <p:cNvPr id="1" name=""/>
-        <p:cNvGrpSpPr/>
-        <p:nvPr/>
-      </p:nvGrpSpPr>
-      <p:grpSpPr>
-        <a:xfrm>
-          <a:off x="0" y="0"/>
-          <a:ext cx="0" cy="0"/>
-          <a:chOff x="0" y="0"/>
-          <a:chExt cx="0" cy="0"/>
-        </a:xfrm>
-      </p:grpSpPr>
-      <p:sp>
-        <p:nvSpPr>
-          <p:cNvPr id="2" name="Title 1">
-            <a:extLst>
-              <a:ext uri="{FF2B5EF4-FFF2-40B4-BE49-F238E27FC236}">
-                <a16:creationId xmlns:a16="http://schemas.microsoft.com/office/drawing/2014/main" id="{179DFB7D-B6F0-73A1-D3C4-814B38B7CEE9}"/>
-              </a:ext>
-            </a:extLst>
-          </p:cNvPr>
-          <p:cNvSpPr>
-            <a:spLocks noGrp="1"/>
-          </p:cNvSpPr>
-          <p:nvPr>
-            <p:ph type="ctrTitle"/>
-          </p:nvPr>
-        </p:nvSpPr>
-        <p:spPr/>
-        <p:txBody>
-          <a:bodyPr/>
-          <a:lstStyle/>
-          <a:p>
-            <a:r>
-              <a:rPr lang="et-EE" dirty="0"/>
-              <a:t>Teeme veebipõhiseks</a:t>
-            </a:r>
-            <a:endParaRPr lang="en-GB" dirty="0"/>
-          </a:p>
-        </p:txBody>
-      </p:sp>
-      <p:sp>
-        <p:nvSpPr>
-          <p:cNvPr id="3" name="Content Placeholder 2">
-            <a:extLst>
-              <a:ext uri="{FF2B5EF4-FFF2-40B4-BE49-F238E27FC236}">
-                <a16:creationId xmlns:a16="http://schemas.microsoft.com/office/drawing/2014/main" id="{1590A32E-6C24-47B1-84E4-7C548BB30766}"/>
-              </a:ext>
-            </a:extLst>
-          </p:cNvPr>
-          <p:cNvSpPr>
-            <a:spLocks noGrp="1"/>
-          </p:cNvSpPr>
-          <p:nvPr>
-            <p:ph sz="quarter" idx="10"/>
-          </p:nvPr>
-        </p:nvSpPr>
-        <p:spPr/>
-        <p:txBody>
-          <a:bodyPr/>
-          <a:lstStyle/>
-          <a:p>
-            <a:pPr marL="0" indent="0">
-              <a:buNone/>
-            </a:pPr>
-            <a:r>
-              <a:rPr lang="en-GB" dirty="0"/>
-              <a:t>Google Sheets</a:t>
-            </a:r>
-          </a:p>
-          <a:p>
-            <a:r>
-              <a:rPr lang="en-GB" dirty="0">
-                <a:solidFill>
-                  <a:schemeClr val="accent4"/>
-                </a:solidFill>
-              </a:rPr>
-              <a:t>Date Table</a:t>
-            </a:r>
-          </a:p>
-          <a:p>
-            <a:r>
-              <a:rPr lang="en-GB" dirty="0">
-                <a:solidFill>
-                  <a:schemeClr val="accent4"/>
-                </a:solidFill>
-              </a:rPr>
-              <a:t>Region Table</a:t>
-            </a:r>
-          </a:p>
-          <a:p>
-            <a:r>
-              <a:rPr lang="en-GB" dirty="0">
-                <a:solidFill>
-                  <a:schemeClr val="accent4"/>
-                </a:solidFill>
-              </a:rPr>
-              <a:t>Budget Table</a:t>
-            </a:r>
-          </a:p>
-          <a:p>
-            <a:r>
-              <a:rPr lang="en-GB" dirty="0">
-                <a:solidFill>
-                  <a:schemeClr val="accent4"/>
-                </a:solidFill>
-              </a:rPr>
-              <a:t>Customer Table</a:t>
-            </a:r>
-          </a:p>
-          <a:p>
-            <a:r>
-              <a:rPr lang="en-GB" dirty="0">
-                <a:solidFill>
-                  <a:schemeClr val="accent4"/>
-                </a:solidFill>
-              </a:rPr>
-              <a:t>Sales Table</a:t>
-            </a:r>
-          </a:p>
-          <a:p>
-            <a:endParaRPr lang="en-GB" dirty="0">
-              <a:solidFill>
-                <a:schemeClr val="accent4"/>
-              </a:solidFill>
-            </a:endParaRPr>
-          </a:p>
-          <a:p>
-            <a:endParaRPr lang="en-GB" dirty="0">
-              <a:solidFill>
-                <a:schemeClr val="accent4"/>
-              </a:solidFill>
-            </a:endParaRPr>
-          </a:p>
-          <a:p>
-            <a:pPr marL="0" indent="0">
-              <a:buNone/>
-            </a:pPr>
-            <a:r>
-              <a:rPr lang="en-GB" dirty="0" err="1"/>
-              <a:t>GitHUB</a:t>
-            </a:r>
-            <a:endParaRPr lang="en-GB" dirty="0"/>
-          </a:p>
-          <a:p>
-            <a:r>
-              <a:rPr lang="en-GB" dirty="0"/>
-              <a:t>Product Table</a:t>
-            </a:r>
-          </a:p>
-          <a:p>
-            <a:r>
-              <a:rPr lang="en-GB" dirty="0" err="1"/>
-              <a:t>SalesRep</a:t>
-            </a:r>
-            <a:r>
-              <a:rPr lang="en-GB" dirty="0"/>
-              <a:t> Table</a:t>
-            </a:r>
-          </a:p>
-          <a:p>
-            <a:endParaRPr lang="en-GB" dirty="0"/>
-          </a:p>
-          <a:p>
-            <a:endParaRPr lang="en-GB" dirty="0">
-              <a:solidFill>
-                <a:schemeClr val="accent4"/>
-              </a:solidFill>
-            </a:endParaRPr>
-          </a:p>
-          <a:p>
-            <a:pPr marL="0" indent="0">
-              <a:buNone/>
-            </a:pPr>
-            <a:endParaRPr lang="en-GB" dirty="0"/>
-          </a:p>
-        </p:txBody>
-      </p:sp>
-    </p:spTree>
-    <p:extLst>
-      <p:ext uri="{BB962C8B-B14F-4D97-AF65-F5344CB8AC3E}">
-        <p14:creationId xmlns:p14="http://schemas.microsoft.com/office/powerpoint/2010/main" val="616072544"/>
       </p:ext>
     </p:extLst>
   </p:cSld>
@@ -34029,6 +41063,21 @@
 </file>
 
 <file path=customXml/item1.xml><?xml version="1.0" encoding="utf-8"?>
+<p:properties xmlns:p="http://schemas.microsoft.com/office/2006/metadata/properties" xmlns:xsi="http://www.w3.org/2001/XMLSchema-instance" xmlns:pc="http://schemas.microsoft.com/office/infopath/2007/PartnerControls">
+  <documentManagement/>
+</p:properties>
+</file>
+
+<file path=customXml/item2.xml><?xml version="1.0" encoding="utf-8"?>
+<?mso-contentType ?>
+<FormTemplates xmlns="http://schemas.microsoft.com/sharepoint/v3/contenttype/forms">
+  <Display>DocumentLibraryForm</Display>
+  <Edit>DocumentLibraryForm</Edit>
+  <New>DocumentLibraryForm</New>
+</FormTemplates>
+</file>
+
+<file path=customXml/item3.xml><?xml version="1.0" encoding="utf-8"?>
 <ct:contentTypeSchema xmlns:ct="http://schemas.microsoft.com/office/2006/metadata/contentType" xmlns:ma="http://schemas.microsoft.com/office/2006/metadata/properties/metaAttributes" ct:_="" ma:_="" ma:contentTypeName="Document" ma:contentTypeID="0x010100C4D27B8FA8976546BCD79313C588588D" ma:contentTypeVersion="8" ma:contentTypeDescription="Create a new document." ma:contentTypeScope="" ma:versionID="a112c56f6fe148a79025c76584832af0">
   <xsd:schema xmlns:xsd="http://www.w3.org/2001/XMLSchema" xmlns:xs="http://www.w3.org/2001/XMLSchema" xmlns:p="http://schemas.microsoft.com/office/2006/metadata/properties" xmlns:ns2="a1a2d923-8fea-42f1-bd41-9cdfff65694e" targetNamespace="http://schemas.microsoft.com/office/2006/metadata/properties" ma:root="true" ma:fieldsID="97c8655d467eaa9470a714421e7268c0" ns2:_="">
     <xsd:import namespace="a1a2d923-8fea-42f1-bd41-9cdfff65694e"/>
@@ -34196,22 +41245,24 @@
 </ct:contentTypeSchema>
 </file>
 
-<file path=customXml/item2.xml><?xml version="1.0" encoding="utf-8"?>
-<?mso-contentType ?>
-<FormTemplates xmlns="http://schemas.microsoft.com/sharepoint/v3/contenttype/forms">
-  <Display>DocumentLibraryForm</Display>
-  <Edit>DocumentLibraryForm</Edit>
-  <New>DocumentLibraryForm</New>
-</FormTemplates>
+<file path=customXml/itemProps1.xml><?xml version="1.0" encoding="utf-8"?>
+<ds:datastoreItem xmlns:ds="http://schemas.openxmlformats.org/officeDocument/2006/customXml" ds:itemID="{5BDF4908-A52A-47DD-A794-6E02D71942FC}">
+  <ds:schemaRefs>
+    <ds:schemaRef ds:uri="http://schemas.microsoft.com/office/2006/metadata/properties"/>
+    <ds:schemaRef ds:uri="http://schemas.microsoft.com/office/infopath/2007/PartnerControls"/>
+  </ds:schemaRefs>
+</ds:datastoreItem>
 </file>
 
-<file path=customXml/item3.xml><?xml version="1.0" encoding="utf-8"?>
-<p:properties xmlns:p="http://schemas.microsoft.com/office/2006/metadata/properties" xmlns:xsi="http://www.w3.org/2001/XMLSchema-instance" xmlns:pc="http://schemas.microsoft.com/office/infopath/2007/PartnerControls">
-  <documentManagement/>
-</p:properties>
+<file path=customXml/itemProps2.xml><?xml version="1.0" encoding="utf-8"?>
+<ds:datastoreItem xmlns:ds="http://schemas.openxmlformats.org/officeDocument/2006/customXml" ds:itemID="{9DC439CA-6F1C-4005-ACA6-A52E04DEE0A7}">
+  <ds:schemaRefs>
+    <ds:schemaRef ds:uri="http://schemas.microsoft.com/sharepoint/v3/contenttype/forms"/>
+  </ds:schemaRefs>
+</ds:datastoreItem>
 </file>
 
-<file path=customXml/itemProps1.xml><?xml version="1.0" encoding="utf-8"?>
+<file path=customXml/itemProps3.xml><?xml version="1.0" encoding="utf-8"?>
 <ds:datastoreItem xmlns:ds="http://schemas.openxmlformats.org/officeDocument/2006/customXml" ds:itemID="{9CF4F972-2392-44D0-AA45-41AC4FDC4A59}">
   <ds:schemaRefs>
     <ds:schemaRef ds:uri="a1a2d923-8fea-42f1-bd41-9cdfff65694e"/>
@@ -34227,21 +41278,4 @@
     <ds:schemaRef ds:uri="http://www.w3.org/2001/XMLSchema"/>
   </ds:schemaRefs>
 </ds:datastoreItem>
-</file>
-
-<file path=customXml/itemProps2.xml><?xml version="1.0" encoding="utf-8"?>
-<ds:datastoreItem xmlns:ds="http://schemas.openxmlformats.org/officeDocument/2006/customXml" ds:itemID="{9DC439CA-6F1C-4005-ACA6-A52E04DEE0A7}">
-  <ds:schemaRefs>
-    <ds:schemaRef ds:uri="http://schemas.microsoft.com/sharepoint/v3/contenttype/forms"/>
-  </ds:schemaRefs>
-</ds:datastoreItem>
-</file>
-
-<file path=customXml/itemProps3.xml><?xml version="1.0" encoding="utf-8"?>
-<ds:datastoreItem xmlns:ds="http://schemas.openxmlformats.org/officeDocument/2006/customXml" ds:itemID="{5BDF4908-A52A-47DD-A794-6E02D71942FC}">
-  <ds:schemaRefs>
-    <ds:schemaRef ds:uri="http://schemas.microsoft.com/office/2006/metadata/properties"/>
-    <ds:schemaRef ds:uri="http://schemas.microsoft.com/office/infopath/2007/PartnerControls"/>
-  </ds:schemaRefs>
-</ds:datastoreItem>
 </file>
--- a/Materjalid/Day3 M Visuaalid Andmelugu/3-paev-andmetarkus-esitlus.pptx
+++ b/Materjalid/Day3 M Visuaalid Andmelugu/3-paev-andmetarkus-esitlus.pptx
@@ -35647,8 +35647,41 @@
                 </a:solidFill>
                 <a:ea typeface="Inter"/>
               </a:rPr>
-              <a:t> on korras, andmed korrektsed, objektid organiseeritud, koristatud</a:t>
-            </a:r>
+              <a:t> on korras, andmed </a:t>
+            </a:r>
+            <a:r>
+              <a:rPr lang="et-EE" sz="2400">
+                <a:solidFill>
+                  <a:srgbClr val="000000"/>
+                </a:solidFill>
+                <a:ea typeface="Inter"/>
+              </a:rPr>
+              <a:t>korrektsed,andmetüübid õiged, </a:t>
+            </a:r>
+            <a:r>
+              <a:rPr lang="et-EE" sz="2400" dirty="0">
+                <a:solidFill>
+                  <a:srgbClr val="000000"/>
+                </a:solidFill>
+                <a:ea typeface="Inter"/>
+              </a:rPr>
+              <a:t>objektid organiseeritud</a:t>
+            </a:r>
+            <a:r>
+              <a:rPr lang="et-EE" sz="2400">
+                <a:solidFill>
+                  <a:srgbClr val="000000"/>
+                </a:solidFill>
+                <a:ea typeface="Inter"/>
+              </a:rPr>
+              <a:t>, koristatud</a:t>
+            </a:r>
+            <a:endParaRPr lang="et-EE" sz="2400" dirty="0">
+              <a:solidFill>
+                <a:srgbClr val="000000"/>
+              </a:solidFill>
+              <a:ea typeface="Inter"/>
+            </a:endParaRPr>
           </a:p>
           <a:p>
             <a:pPr>
@@ -39835,6 +39868,12 @@
 </file>
 
 <file path=customXml/item1.xml><?xml version="1.0" encoding="utf-8"?>
+<p:properties xmlns:p="http://schemas.microsoft.com/office/2006/metadata/properties" xmlns:xsi="http://www.w3.org/2001/XMLSchema-instance" xmlns:pc="http://schemas.microsoft.com/office/infopath/2007/PartnerControls">
+  <documentManagement/>
+</p:properties>
+</file>
+
+<file path=customXml/item2.xml><?xml version="1.0" encoding="utf-8"?>
 <?mso-contentType ?>
 <FormTemplates xmlns="http://schemas.microsoft.com/sharepoint/v3/contenttype/forms">
   <Display>DocumentLibraryForm</Display>
@@ -39843,7 +39882,7 @@
 </FormTemplates>
 </file>
 
-<file path=customXml/item2.xml><?xml version="1.0" encoding="utf-8"?>
+<file path=customXml/item3.xml><?xml version="1.0" encoding="utf-8"?>
 <ct:contentTypeSchema xmlns:ct="http://schemas.microsoft.com/office/2006/metadata/contentType" xmlns:ma="http://schemas.microsoft.com/office/2006/metadata/properties/metaAttributes" ct:_="" ma:_="" ma:contentTypeName="Document" ma:contentTypeID="0x010100C4D27B8FA8976546BCD79313C588588D" ma:contentTypeVersion="8" ma:contentTypeDescription="Create a new document." ma:contentTypeScope="" ma:versionID="a112c56f6fe148a79025c76584832af0">
   <xsd:schema xmlns:xsd="http://www.w3.org/2001/XMLSchema" xmlns:xs="http://www.w3.org/2001/XMLSchema" xmlns:p="http://schemas.microsoft.com/office/2006/metadata/properties" xmlns:ns2="a1a2d923-8fea-42f1-bd41-9cdfff65694e" targetNamespace="http://schemas.microsoft.com/office/2006/metadata/properties" ma:root="true" ma:fieldsID="97c8655d467eaa9470a714421e7268c0" ns2:_="">
     <xsd:import namespace="a1a2d923-8fea-42f1-bd41-9cdfff65694e"/>
@@ -40011,13 +40050,16 @@
 </ct:contentTypeSchema>
 </file>
 
-<file path=customXml/item3.xml><?xml version="1.0" encoding="utf-8"?>
-<p:properties xmlns:p="http://schemas.microsoft.com/office/2006/metadata/properties" xmlns:xsi="http://www.w3.org/2001/XMLSchema-instance" xmlns:pc="http://schemas.microsoft.com/office/infopath/2007/PartnerControls">
-  <documentManagement/>
-</p:properties>
+<file path=customXml/itemProps1.xml><?xml version="1.0" encoding="utf-8"?>
+<ds:datastoreItem xmlns:ds="http://schemas.openxmlformats.org/officeDocument/2006/customXml" ds:itemID="{5BDF4908-A52A-47DD-A794-6E02D71942FC}">
+  <ds:schemaRefs>
+    <ds:schemaRef ds:uri="http://schemas.microsoft.com/office/2006/metadata/properties"/>
+    <ds:schemaRef ds:uri="http://schemas.microsoft.com/office/infopath/2007/PartnerControls"/>
+  </ds:schemaRefs>
+</ds:datastoreItem>
 </file>
 
-<file path=customXml/itemProps1.xml><?xml version="1.0" encoding="utf-8"?>
+<file path=customXml/itemProps2.xml><?xml version="1.0" encoding="utf-8"?>
 <ds:datastoreItem xmlns:ds="http://schemas.openxmlformats.org/officeDocument/2006/customXml" ds:itemID="{9DC439CA-6F1C-4005-ACA6-A52E04DEE0A7}">
   <ds:schemaRefs>
     <ds:schemaRef ds:uri="http://schemas.microsoft.com/sharepoint/v3/contenttype/forms"/>
@@ -40025,7 +40067,7 @@
 </ds:datastoreItem>
 </file>
 
-<file path=customXml/itemProps2.xml><?xml version="1.0" encoding="utf-8"?>
+<file path=customXml/itemProps3.xml><?xml version="1.0" encoding="utf-8"?>
 <ds:datastoreItem xmlns:ds="http://schemas.openxmlformats.org/officeDocument/2006/customXml" ds:itemID="{9CF4F972-2392-44D0-AA45-41AC4FDC4A59}">
   <ds:schemaRefs>
     <ds:schemaRef ds:uri="a1a2d923-8fea-42f1-bd41-9cdfff65694e"/>
@@ -40041,13 +40083,4 @@
     <ds:schemaRef ds:uri="http://www.w3.org/2001/XMLSchema"/>
   </ds:schemaRefs>
 </ds:datastoreItem>
-</file>
-
-<file path=customXml/itemProps3.xml><?xml version="1.0" encoding="utf-8"?>
-<ds:datastoreItem xmlns:ds="http://schemas.openxmlformats.org/officeDocument/2006/customXml" ds:itemID="{5BDF4908-A52A-47DD-A794-6E02D71942FC}">
-  <ds:schemaRefs>
-    <ds:schemaRef ds:uri="http://schemas.microsoft.com/office/2006/metadata/properties"/>
-    <ds:schemaRef ds:uri="http://schemas.microsoft.com/office/infopath/2007/PartnerControls"/>
-  </ds:schemaRefs>
-</ds:datastoreItem>
 </file>
--- a/Materjalid/Day3 M Visuaalid Andmelugu/3-paev-andmetarkus-esitlus.pptx
+++ b/Materjalid/Day3 M Visuaalid Andmelugu/3-paev-andmetarkus-esitlus.pptx
@@ -5,74 +5,85 @@
     <p:sldMasterId id="2147483648" r:id="rId4"/>
   </p:sldMasterIdLst>
   <p:notesMasterIdLst>
-    <p:notesMasterId r:id="rId48"/>
+    <p:notesMasterId r:id="rId52"/>
   </p:notesMasterIdLst>
   <p:handoutMasterIdLst>
-    <p:handoutMasterId r:id="rId49"/>
+    <p:handoutMasterId r:id="rId53"/>
   </p:handoutMasterIdLst>
   <p:sldIdLst>
     <p:sldId id="417" r:id="rId5"/>
     <p:sldId id="457" r:id="rId6"/>
-    <p:sldId id="447" r:id="rId7"/>
-    <p:sldId id="669" r:id="rId8"/>
-    <p:sldId id="449" r:id="rId9"/>
-    <p:sldId id="644" r:id="rId10"/>
-    <p:sldId id="641" r:id="rId11"/>
-    <p:sldId id="643" r:id="rId12"/>
-    <p:sldId id="448" r:id="rId13"/>
-    <p:sldId id="579" r:id="rId14"/>
-    <p:sldId id="670" r:id="rId15"/>
-    <p:sldId id="580" r:id="rId16"/>
-    <p:sldId id="257" r:id="rId17"/>
-    <p:sldId id="258" r:id="rId18"/>
-    <p:sldId id="259" r:id="rId19"/>
-    <p:sldId id="260" r:id="rId20"/>
-    <p:sldId id="261" r:id="rId21"/>
-    <p:sldId id="672" r:id="rId22"/>
-    <p:sldId id="674" r:id="rId23"/>
-    <p:sldId id="484" r:id="rId24"/>
-    <p:sldId id="603" r:id="rId25"/>
-    <p:sldId id="638" r:id="rId26"/>
-    <p:sldId id="639" r:id="rId27"/>
-    <p:sldId id="640" r:id="rId28"/>
-    <p:sldId id="635" r:id="rId29"/>
-    <p:sldId id="267" r:id="rId30"/>
-    <p:sldId id="265" r:id="rId31"/>
-    <p:sldId id="271" r:id="rId32"/>
-    <p:sldId id="272" r:id="rId33"/>
-    <p:sldId id="273" r:id="rId34"/>
-    <p:sldId id="268" r:id="rId35"/>
-    <p:sldId id="269" r:id="rId36"/>
-    <p:sldId id="270" r:id="rId37"/>
-    <p:sldId id="673" r:id="rId38"/>
-    <p:sldId id="503" r:id="rId39"/>
-    <p:sldId id="666" r:id="rId40"/>
-    <p:sldId id="667" r:id="rId41"/>
-    <p:sldId id="668" r:id="rId42"/>
-    <p:sldId id="460" r:id="rId43"/>
-    <p:sldId id="581" r:id="rId44"/>
-    <p:sldId id="671" r:id="rId45"/>
-    <p:sldId id="450" r:id="rId46"/>
-    <p:sldId id="461" r:id="rId47"/>
+    <p:sldId id="670" r:id="rId7"/>
+    <p:sldId id="675" r:id="rId8"/>
+    <p:sldId id="447" r:id="rId9"/>
+    <p:sldId id="669" r:id="rId10"/>
+    <p:sldId id="449" r:id="rId11"/>
+    <p:sldId id="644" r:id="rId12"/>
+    <p:sldId id="641" r:id="rId13"/>
+    <p:sldId id="643" r:id="rId14"/>
+    <p:sldId id="448" r:id="rId15"/>
+    <p:sldId id="579" r:id="rId16"/>
+    <p:sldId id="580" r:id="rId17"/>
+    <p:sldId id="257" r:id="rId18"/>
+    <p:sldId id="258" r:id="rId19"/>
+    <p:sldId id="259" r:id="rId20"/>
+    <p:sldId id="260" r:id="rId21"/>
+    <p:sldId id="261" r:id="rId22"/>
+    <p:sldId id="672" r:id="rId23"/>
+    <p:sldId id="674" r:id="rId24"/>
+    <p:sldId id="484" r:id="rId25"/>
+    <p:sldId id="603" r:id="rId26"/>
+    <p:sldId id="638" r:id="rId27"/>
+    <p:sldId id="639" r:id="rId28"/>
+    <p:sldId id="640" r:id="rId29"/>
+    <p:sldId id="635" r:id="rId30"/>
+    <p:sldId id="267" r:id="rId31"/>
+    <p:sldId id="265" r:id="rId32"/>
+    <p:sldId id="271" r:id="rId33"/>
+    <p:sldId id="272" r:id="rId34"/>
+    <p:sldId id="273" r:id="rId35"/>
+    <p:sldId id="268" r:id="rId36"/>
+    <p:sldId id="269" r:id="rId37"/>
+    <p:sldId id="270" r:id="rId38"/>
+    <p:sldId id="673" r:id="rId39"/>
+    <p:sldId id="503" r:id="rId40"/>
+    <p:sldId id="666" r:id="rId41"/>
+    <p:sldId id="667" r:id="rId42"/>
+    <p:sldId id="668" r:id="rId43"/>
+    <p:sldId id="659" r:id="rId44"/>
+    <p:sldId id="460" r:id="rId45"/>
+    <p:sldId id="581" r:id="rId46"/>
+    <p:sldId id="671" r:id="rId47"/>
+    <p:sldId id="450" r:id="rId48"/>
+    <p:sldId id="432" r:id="rId49"/>
+    <p:sldId id="676" r:id="rId50"/>
+    <p:sldId id="461" r:id="rId51"/>
   </p:sldIdLst>
   <p:sldSz cx="12192000" cy="6858000"/>
   <p:notesSz cx="6858000" cy="9144000"/>
   <p:embeddedFontLst>
     <p:embeddedFont>
+      <p:font typeface="Consolas" panose="020B0609020204030204" pitchFamily="49" charset="0"/>
+      <p:regular r:id="rId54"/>
+      <p:bold r:id="rId55"/>
+      <p:italic r:id="rId56"/>
+      <p:boldItalic r:id="rId57"/>
+    </p:embeddedFont>
+    <p:embeddedFont>
       <p:font typeface="Inter" panose="020B0604020202020204" charset="0"/>
-      <p:regular r:id="rId50"/>
-      <p:bold r:id="rId51"/>
-      <p:italic r:id="rId52"/>
-      <p:boldItalic r:id="rId53"/>
+      <p:regular r:id="rId58"/>
+      <p:bold r:id="rId59"/>
+      <p:italic r:id="rId60"/>
+      <p:boldItalic r:id="rId61"/>
     </p:embeddedFont>
     <p:embeddedFont>
       <p:font typeface="Inter Bold" panose="020B0604020202020204" charset="0"/>
-      <p:bold r:id="rId54"/>
+      <p:bold r:id="rId62"/>
     </p:embeddedFont>
     <p:embeddedFont>
       <p:font typeface="Poppins SemiBold" panose="00000700000000000000" pitchFamily="2" charset="-70"/>
-      <p:bold r:id="rId55"/>
-      <p:boldItalic r:id="rId56"/>
+      <p:bold r:id="rId63"/>
+      <p:boldItalic r:id="rId64"/>
     </p:embeddedFont>
   </p:embeddedFontLst>
   <p:defaultTextStyle>
@@ -1089,7 +1100,7 @@
           <a:p>
             <a:fld id="{46699514-027B-49BD-8B49-5054CA40ECF4}" type="slidenum">
               <a:rPr lang="et-EE" smtClean="0"/>
-              <a:t>9</a:t>
+              <a:t>11</a:t>
             </a:fld>
             <a:endParaRPr lang="et-EE"/>
           </a:p>
@@ -1176,7 +1187,7 @@
           <a:p>
             <a:fld id="{46699514-027B-49BD-8B49-5054CA40ECF4}" type="slidenum">
               <a:rPr lang="en-US"/>
-              <a:t>35</a:t>
+              <a:t>36</a:t>
             </a:fld>
             <a:endParaRPr lang="en-US"/>
           </a:p>
@@ -1263,7 +1274,7 @@
           <a:p>
             <a:fld id="{46699514-027B-49BD-8B49-5054CA40ECF4}" type="slidenum">
               <a:rPr lang="en-US"/>
-              <a:t>42</a:t>
+              <a:t>44</a:t>
             </a:fld>
             <a:endParaRPr lang="en-US"/>
           </a:p>
@@ -1273,6 +1284,1426 @@
     <p:extLst>
       <p:ext uri="{BB962C8B-B14F-4D97-AF65-F5344CB8AC3E}">
         <p14:creationId xmlns:p14="http://schemas.microsoft.com/office/powerpoint/2010/main" val="2143394262"/>
+      </p:ext>
+    </p:extLst>
+  </p:cSld>
+  <p:clrMapOvr>
+    <a:masterClrMapping/>
+  </p:clrMapOvr>
+</p:notes>
+</file>
+
+<file path=ppt/notesSlides/notesSlide5.xml><?xml version="1.0" encoding="utf-8"?>
+<p:notes xmlns:a="http://schemas.openxmlformats.org/drawingml/2006/main" xmlns:r="http://schemas.openxmlformats.org/officeDocument/2006/relationships" xmlns:p="http://schemas.openxmlformats.org/presentationml/2006/main">
+  <p:cSld>
+    <p:spTree>
+      <p:nvGrpSpPr>
+        <p:cNvPr id="1" name=""/>
+        <p:cNvGrpSpPr/>
+        <p:nvPr/>
+      </p:nvGrpSpPr>
+      <p:grpSpPr>
+        <a:xfrm>
+          <a:off x="0" y="0"/>
+          <a:ext cx="0" cy="0"/>
+          <a:chOff x="0" y="0"/>
+          <a:chExt cx="0" cy="0"/>
+        </a:xfrm>
+      </p:grpSpPr>
+      <p:sp>
+        <p:nvSpPr>
+          <p:cNvPr id="2" name="Slide Image Placeholder 1"/>
+          <p:cNvSpPr>
+            <a:spLocks noGrp="1" noRot="1" noChangeAspect="1"/>
+          </p:cNvSpPr>
+          <p:nvPr>
+            <p:ph type="sldImg"/>
+          </p:nvPr>
+        </p:nvSpPr>
+        <p:spPr/>
+      </p:sp>
+      <p:sp>
+        <p:nvSpPr>
+          <p:cNvPr id="3" name="Notes Placeholder 2"/>
+          <p:cNvSpPr>
+            <a:spLocks noGrp="1"/>
+          </p:cNvSpPr>
+          <p:nvPr>
+            <p:ph type="body" idx="1"/>
+          </p:nvPr>
+        </p:nvSpPr>
+        <p:spPr/>
+        <p:txBody>
+          <a:bodyPr/>
+          <a:lstStyle/>
+          <a:p>
+            <a:r>
+              <a:rPr lang="en-US" dirty="0" err="1">
+                <a:ea typeface="Calibri"/>
+                <a:cs typeface="Calibri"/>
+              </a:rPr>
+              <a:t>Mõõdiku</a:t>
+            </a:r>
+            <a:r>
+              <a:rPr lang="en-US" dirty="0">
+                <a:ea typeface="Calibri"/>
+                <a:cs typeface="Calibri"/>
+              </a:rPr>
+              <a:t> </a:t>
+            </a:r>
+            <a:r>
+              <a:rPr lang="en-US" dirty="0" err="1">
+                <a:ea typeface="Calibri"/>
+                <a:cs typeface="Calibri"/>
+              </a:rPr>
+              <a:t>loogika</a:t>
+            </a:r>
+            <a:r>
+              <a:rPr lang="en-US" dirty="0">
+                <a:ea typeface="Calibri"/>
+                <a:cs typeface="Calibri"/>
+              </a:rPr>
+              <a:t>: </a:t>
+            </a:r>
+            <a:br>
+              <a:rPr lang="en-US" dirty="0">
+                <a:ea typeface="Calibri"/>
+                <a:cs typeface="+mn-lt"/>
+              </a:rPr>
+            </a:br>
+            <a:r>
+              <a:rPr lang="en-US" dirty="0">
+                <a:ea typeface="Calibri"/>
+                <a:cs typeface="Calibri"/>
+              </a:rPr>
+              <a:t>1) Kui </a:t>
+            </a:r>
+            <a:r>
+              <a:rPr lang="en-US" dirty="0" err="1">
+                <a:ea typeface="Calibri"/>
+                <a:cs typeface="Calibri"/>
+              </a:rPr>
+              <a:t>mitu</a:t>
+            </a:r>
+            <a:r>
+              <a:rPr lang="en-US" dirty="0">
+                <a:ea typeface="Calibri"/>
+                <a:cs typeface="Calibri"/>
+              </a:rPr>
+              <a:t> </a:t>
+            </a:r>
+            <a:r>
+              <a:rPr lang="en-US" dirty="0" err="1">
+                <a:ea typeface="Calibri"/>
+                <a:cs typeface="Calibri"/>
+              </a:rPr>
+              <a:t>korda</a:t>
+            </a:r>
+            <a:r>
+              <a:rPr lang="en-US" dirty="0">
+                <a:ea typeface="Calibri"/>
+                <a:cs typeface="Calibri"/>
+              </a:rPr>
+              <a:t> </a:t>
+            </a:r>
+            <a:r>
+              <a:rPr lang="en-US" dirty="0" err="1">
+                <a:ea typeface="Calibri"/>
+                <a:cs typeface="Calibri"/>
+              </a:rPr>
+              <a:t>soovid</a:t>
+            </a:r>
+            <a:r>
+              <a:rPr lang="en-US" dirty="0">
+                <a:ea typeface="Calibri"/>
+                <a:cs typeface="Calibri"/>
+              </a:rPr>
+              <a:t> </a:t>
+            </a:r>
+            <a:r>
+              <a:rPr lang="en-US" dirty="0" err="1">
+                <a:ea typeface="Calibri"/>
+                <a:cs typeface="Calibri"/>
+              </a:rPr>
+              <a:t>sama</a:t>
+            </a:r>
+            <a:r>
+              <a:rPr lang="en-US" dirty="0">
+                <a:ea typeface="Calibri"/>
+                <a:cs typeface="Calibri"/>
+              </a:rPr>
+              <a:t> </a:t>
+            </a:r>
+            <a:r>
+              <a:rPr lang="en-US" dirty="0" err="1">
+                <a:ea typeface="Calibri"/>
+                <a:cs typeface="Calibri"/>
+              </a:rPr>
+              <a:t>asja</a:t>
+            </a:r>
+            <a:r>
+              <a:rPr lang="en-US" dirty="0">
+                <a:ea typeface="Calibri"/>
+                <a:cs typeface="Calibri"/>
+              </a:rPr>
+              <a:t> </a:t>
+            </a:r>
+            <a:r>
+              <a:rPr lang="en-US" dirty="0" err="1">
+                <a:ea typeface="Calibri"/>
+                <a:cs typeface="Calibri"/>
+              </a:rPr>
+              <a:t>kasutada</a:t>
+            </a:r>
+            <a:r>
+              <a:rPr lang="en-US" dirty="0">
+                <a:ea typeface="Calibri"/>
+                <a:cs typeface="Calibri"/>
+              </a:rPr>
+              <a:t>, </a:t>
+            </a:r>
+            <a:r>
+              <a:rPr lang="en-US" dirty="0" err="1">
+                <a:ea typeface="Calibri"/>
+                <a:cs typeface="Calibri"/>
+              </a:rPr>
+              <a:t>siis</a:t>
+            </a:r>
+            <a:r>
+              <a:rPr lang="en-US" dirty="0">
+                <a:ea typeface="Calibri"/>
+                <a:cs typeface="Calibri"/>
+              </a:rPr>
+              <a:t> </a:t>
+            </a:r>
+            <a:r>
+              <a:rPr lang="en-US" dirty="0" err="1">
+                <a:ea typeface="Calibri"/>
+                <a:cs typeface="Calibri"/>
+              </a:rPr>
+              <a:t>saad</a:t>
+            </a:r>
+            <a:r>
+              <a:rPr lang="en-US" dirty="0">
+                <a:ea typeface="Calibri"/>
+                <a:cs typeface="Calibri"/>
+              </a:rPr>
+              <a:t> variable-I VAR </a:t>
+            </a:r>
+            <a:r>
+              <a:rPr lang="en-US" dirty="0" err="1">
+                <a:ea typeface="Calibri"/>
+                <a:cs typeface="Calibri"/>
+              </a:rPr>
+              <a:t>märksõnaga</a:t>
+            </a:r>
+            <a:r>
+              <a:rPr lang="en-US" dirty="0">
+                <a:ea typeface="Calibri"/>
+                <a:cs typeface="Calibri"/>
+              </a:rPr>
+              <a:t> </a:t>
+            </a:r>
+            <a:r>
+              <a:rPr lang="en-US" dirty="0" err="1">
+                <a:ea typeface="Calibri"/>
+                <a:cs typeface="Calibri"/>
+              </a:rPr>
+              <a:t>defineerida</a:t>
+            </a:r>
+            <a:r>
+              <a:rPr lang="en-US" dirty="0">
+                <a:ea typeface="Calibri"/>
+                <a:cs typeface="Calibri"/>
+              </a:rPr>
+              <a:t>. </a:t>
+            </a:r>
+            <a:br>
+              <a:rPr lang="en-US" dirty="0">
+                <a:ea typeface="Calibri"/>
+                <a:cs typeface="+mn-lt"/>
+              </a:rPr>
+            </a:br>
+            <a:r>
+              <a:rPr lang="en-US" dirty="0">
+                <a:ea typeface="Calibri"/>
+                <a:cs typeface="Calibri"/>
+              </a:rPr>
+              <a:t>2) CALCULATE </a:t>
+            </a:r>
+            <a:r>
+              <a:rPr lang="en-US" dirty="0" err="1">
+                <a:ea typeface="Calibri"/>
+                <a:cs typeface="Calibri"/>
+              </a:rPr>
+              <a:t>abil</a:t>
+            </a:r>
+            <a:r>
+              <a:rPr lang="en-US" dirty="0">
+                <a:ea typeface="Calibri"/>
+                <a:cs typeface="Calibri"/>
+              </a:rPr>
+              <a:t> </a:t>
+            </a:r>
+            <a:r>
+              <a:rPr lang="en-US" dirty="0" err="1">
+                <a:ea typeface="Calibri"/>
+                <a:cs typeface="Calibri"/>
+              </a:rPr>
+              <a:t>saab</a:t>
+            </a:r>
+            <a:r>
+              <a:rPr lang="en-US" dirty="0">
+                <a:ea typeface="Calibri"/>
+                <a:cs typeface="Calibri"/>
+              </a:rPr>
+              <a:t> </a:t>
+            </a:r>
+            <a:r>
+              <a:rPr lang="en-US" dirty="0" err="1">
+                <a:ea typeface="Calibri"/>
+                <a:cs typeface="Calibri"/>
+              </a:rPr>
+              <a:t>luua</a:t>
+            </a:r>
+            <a:r>
+              <a:rPr lang="en-US" dirty="0">
+                <a:ea typeface="Calibri"/>
+                <a:cs typeface="Calibri"/>
+              </a:rPr>
+              <a:t> </a:t>
+            </a:r>
+            <a:r>
+              <a:rPr lang="en-US" dirty="0" err="1">
+                <a:ea typeface="Calibri"/>
+                <a:cs typeface="Calibri"/>
+              </a:rPr>
+              <a:t>arvutusi</a:t>
+            </a:r>
+            <a:r>
+              <a:rPr lang="en-US" dirty="0">
+                <a:ea typeface="Calibri"/>
+                <a:cs typeface="Calibri"/>
+              </a:rPr>
+              <a:t> </a:t>
+            </a:r>
+            <a:r>
+              <a:rPr lang="en-US" dirty="0" err="1">
+                <a:ea typeface="Calibri"/>
+                <a:cs typeface="Calibri"/>
+              </a:rPr>
+              <a:t>koos</a:t>
+            </a:r>
+            <a:r>
+              <a:rPr lang="en-US" dirty="0">
+                <a:ea typeface="Calibri"/>
+                <a:cs typeface="Calibri"/>
+              </a:rPr>
+              <a:t> </a:t>
+            </a:r>
+            <a:r>
+              <a:rPr lang="en-US" dirty="0" err="1">
+                <a:ea typeface="Calibri"/>
+                <a:cs typeface="Calibri"/>
+              </a:rPr>
+              <a:t>filtritega</a:t>
+            </a:r>
+            <a:r>
+              <a:rPr lang="en-US" dirty="0">
+                <a:ea typeface="Calibri"/>
+                <a:cs typeface="Calibri"/>
+              </a:rPr>
+              <a:t> </a:t>
+            </a:r>
+            <a:r>
+              <a:rPr lang="en-US" dirty="0" err="1">
+                <a:ea typeface="Calibri"/>
+                <a:cs typeface="Calibri"/>
+              </a:rPr>
+              <a:t>tabeli</a:t>
+            </a:r>
+            <a:r>
+              <a:rPr lang="en-US" dirty="0">
+                <a:ea typeface="Calibri"/>
+                <a:cs typeface="Calibri"/>
+              </a:rPr>
+              <a:t> peal. </a:t>
+            </a:r>
+            <a:r>
+              <a:rPr lang="en-US" dirty="0" err="1">
+                <a:ea typeface="Calibri"/>
+                <a:cs typeface="Calibri"/>
+              </a:rPr>
+              <a:t>Praegusel</a:t>
+            </a:r>
+            <a:r>
+              <a:rPr lang="en-US" dirty="0">
+                <a:ea typeface="Calibri"/>
+                <a:cs typeface="Calibri"/>
+              </a:rPr>
+              <a:t> </a:t>
+            </a:r>
+            <a:r>
+              <a:rPr lang="en-US" dirty="0" err="1">
+                <a:ea typeface="Calibri"/>
+                <a:cs typeface="Calibri"/>
+              </a:rPr>
+              <a:t>juhul</a:t>
+            </a:r>
+            <a:r>
+              <a:rPr lang="en-US" dirty="0">
+                <a:ea typeface="Calibri"/>
+                <a:cs typeface="Calibri"/>
+              </a:rPr>
+              <a:t> </a:t>
+            </a:r>
+            <a:r>
+              <a:rPr lang="en-US" dirty="0" err="1">
+                <a:ea typeface="Calibri"/>
+                <a:cs typeface="Calibri"/>
+              </a:rPr>
+              <a:t>tahame</a:t>
+            </a:r>
+            <a:r>
+              <a:rPr lang="en-US" dirty="0">
+                <a:ea typeface="Calibri"/>
+                <a:cs typeface="Calibri"/>
+              </a:rPr>
+              <a:t>, et </a:t>
+            </a:r>
+            <a:r>
+              <a:rPr lang="en-US" dirty="0" err="1">
+                <a:ea typeface="Calibri"/>
+                <a:cs typeface="Calibri"/>
+              </a:rPr>
+              <a:t>kuupäeva</a:t>
+            </a:r>
+            <a:r>
+              <a:rPr lang="en-US" dirty="0">
+                <a:ea typeface="Calibri"/>
+                <a:cs typeface="Calibri"/>
+              </a:rPr>
+              <a:t> </a:t>
+            </a:r>
+            <a:r>
+              <a:rPr lang="en-US" dirty="0" err="1">
+                <a:ea typeface="Calibri"/>
+                <a:cs typeface="Calibri"/>
+              </a:rPr>
+              <a:t>filtreerimine</a:t>
+            </a:r>
+            <a:r>
+              <a:rPr lang="en-US" dirty="0">
+                <a:ea typeface="Calibri"/>
+                <a:cs typeface="Calibri"/>
+              </a:rPr>
+              <a:t> </a:t>
+            </a:r>
+            <a:r>
+              <a:rPr lang="en-US" dirty="0" err="1">
+                <a:ea typeface="Calibri"/>
+                <a:cs typeface="Calibri"/>
+              </a:rPr>
+              <a:t>ei</a:t>
+            </a:r>
+            <a:r>
+              <a:rPr lang="en-US" dirty="0">
+                <a:ea typeface="Calibri"/>
+                <a:cs typeface="Calibri"/>
+              </a:rPr>
+              <a:t> </a:t>
+            </a:r>
+            <a:r>
+              <a:rPr lang="en-US" dirty="0" err="1">
+                <a:ea typeface="Calibri"/>
+                <a:cs typeface="Calibri"/>
+              </a:rPr>
+              <a:t>mõjutaks</a:t>
+            </a:r>
+            <a:r>
+              <a:rPr lang="en-US" dirty="0">
+                <a:ea typeface="Calibri"/>
+                <a:cs typeface="Calibri"/>
+              </a:rPr>
+              <a:t> </a:t>
+            </a:r>
+            <a:r>
+              <a:rPr lang="en-US" dirty="0" err="1">
+                <a:ea typeface="Calibri"/>
+                <a:cs typeface="Calibri"/>
+              </a:rPr>
+              <a:t>arvutust</a:t>
+            </a:r>
+            <a:r>
+              <a:rPr lang="en-US" dirty="0">
+                <a:ea typeface="Calibri"/>
+                <a:cs typeface="Calibri"/>
+              </a:rPr>
+              <a:t>, </a:t>
+            </a:r>
+            <a:r>
+              <a:rPr lang="en-US" dirty="0" err="1">
+                <a:ea typeface="Calibri"/>
+                <a:cs typeface="Calibri"/>
+              </a:rPr>
+              <a:t>seega</a:t>
+            </a:r>
+            <a:r>
+              <a:rPr lang="en-US" dirty="0">
+                <a:ea typeface="Calibri"/>
+                <a:cs typeface="Calibri"/>
+              </a:rPr>
+              <a:t> </a:t>
+            </a:r>
+            <a:r>
+              <a:rPr lang="en-US" dirty="0" err="1">
+                <a:ea typeface="Calibri"/>
+                <a:cs typeface="Calibri"/>
+              </a:rPr>
+              <a:t>kasutame</a:t>
+            </a:r>
+            <a:r>
+              <a:rPr lang="en-US" dirty="0">
+                <a:ea typeface="Calibri"/>
+                <a:cs typeface="Calibri"/>
+              </a:rPr>
+              <a:t> </a:t>
+            </a:r>
+            <a:r>
+              <a:rPr lang="en-US" dirty="0" err="1">
+                <a:ea typeface="Calibri"/>
+                <a:cs typeface="Calibri"/>
+              </a:rPr>
+              <a:t>märksõna</a:t>
+            </a:r>
+            <a:r>
+              <a:rPr lang="en-US" dirty="0">
+                <a:ea typeface="Calibri"/>
+                <a:cs typeface="Calibri"/>
+              </a:rPr>
+              <a:t> "ALL" </a:t>
+            </a:r>
+            <a:r>
+              <a:rPr lang="en-US" dirty="0" err="1">
+                <a:ea typeface="Calibri"/>
+                <a:cs typeface="Calibri"/>
+              </a:rPr>
+              <a:t>ehk</a:t>
+            </a:r>
+            <a:r>
+              <a:rPr lang="en-US" dirty="0">
+                <a:ea typeface="Calibri"/>
+                <a:cs typeface="Calibri"/>
+              </a:rPr>
+              <a:t> </a:t>
+            </a:r>
+            <a:r>
+              <a:rPr lang="en-US" dirty="0" err="1">
+                <a:ea typeface="Calibri"/>
+                <a:cs typeface="Calibri"/>
+              </a:rPr>
+              <a:t>eemaldame</a:t>
+            </a:r>
+            <a:r>
+              <a:rPr lang="en-US" dirty="0">
+                <a:ea typeface="Calibri"/>
+                <a:cs typeface="Calibri"/>
+              </a:rPr>
+              <a:t> </a:t>
+            </a:r>
+            <a:r>
+              <a:rPr lang="en-US" dirty="0" err="1">
+                <a:ea typeface="Calibri"/>
+                <a:cs typeface="Calibri"/>
+              </a:rPr>
+              <a:t>kõik</a:t>
+            </a:r>
+            <a:r>
+              <a:rPr lang="en-US" dirty="0">
+                <a:ea typeface="Calibri"/>
+                <a:cs typeface="Calibri"/>
+              </a:rPr>
+              <a:t> </a:t>
+            </a:r>
+            <a:r>
+              <a:rPr lang="en-US" dirty="0" err="1">
+                <a:ea typeface="Calibri"/>
+                <a:cs typeface="Calibri"/>
+              </a:rPr>
+              <a:t>filtrid</a:t>
+            </a:r>
+            <a:r>
+              <a:rPr lang="en-US" dirty="0">
+                <a:ea typeface="Calibri"/>
+                <a:cs typeface="Calibri"/>
+              </a:rPr>
+              <a:t>.</a:t>
+            </a:r>
+            <a:br>
+              <a:rPr lang="en-US" dirty="0">
+                <a:cs typeface="+mn-lt"/>
+              </a:rPr>
+            </a:br>
+            <a:r>
+              <a:rPr lang="en-US" dirty="0">
+                <a:ea typeface="Calibri"/>
+                <a:cs typeface="Calibri"/>
+              </a:rPr>
+              <a:t>3) MAX </a:t>
+            </a:r>
+            <a:r>
+              <a:rPr lang="en-US" dirty="0" err="1">
+                <a:ea typeface="Calibri"/>
+                <a:cs typeface="Calibri"/>
+              </a:rPr>
+              <a:t>leiab</a:t>
+            </a:r>
+            <a:r>
+              <a:rPr lang="en-US" dirty="0">
+                <a:ea typeface="Calibri"/>
+                <a:cs typeface="Calibri"/>
+              </a:rPr>
+              <a:t> </a:t>
+            </a:r>
+            <a:r>
+              <a:rPr lang="en-US" dirty="0" err="1">
+                <a:ea typeface="Calibri"/>
+                <a:cs typeface="Calibri"/>
+              </a:rPr>
+              <a:t>maksimumväärtuse</a:t>
+            </a:r>
+            <a:br>
+              <a:rPr lang="en-US" dirty="0">
+                <a:cs typeface="+mn-lt"/>
+              </a:rPr>
+            </a:br>
+            <a:r>
+              <a:rPr lang="en-US" dirty="0">
+                <a:ea typeface="Calibri"/>
+                <a:cs typeface="Calibri"/>
+              </a:rPr>
+              <a:t>4) MONTH </a:t>
+            </a:r>
+            <a:r>
+              <a:rPr lang="en-US" dirty="0" err="1">
+                <a:ea typeface="Calibri"/>
+                <a:cs typeface="Calibri"/>
+              </a:rPr>
+              <a:t>leiab</a:t>
+            </a:r>
+            <a:r>
+              <a:rPr lang="en-US" dirty="0">
+                <a:ea typeface="Calibri"/>
+                <a:cs typeface="Calibri"/>
+              </a:rPr>
+              <a:t> </a:t>
+            </a:r>
+            <a:r>
+              <a:rPr lang="en-US" dirty="0" err="1">
+                <a:ea typeface="Calibri"/>
+                <a:cs typeface="Calibri"/>
+              </a:rPr>
+              <a:t>kuu</a:t>
+            </a:r>
+            <a:r>
+              <a:rPr lang="en-US" dirty="0">
+                <a:ea typeface="Calibri"/>
+                <a:cs typeface="Calibri"/>
+              </a:rPr>
+              <a:t> </a:t>
+            </a:r>
+            <a:r>
+              <a:rPr lang="en-US" dirty="0" err="1">
+                <a:ea typeface="Calibri"/>
+                <a:cs typeface="Calibri"/>
+              </a:rPr>
+              <a:t>numbri</a:t>
+            </a:r>
+            <a:r>
+              <a:rPr lang="en-US" dirty="0">
+                <a:ea typeface="Calibri"/>
+                <a:cs typeface="Calibri"/>
+              </a:rPr>
+              <a:t>. </a:t>
+            </a:r>
+            <a:br>
+              <a:rPr lang="en-US" dirty="0">
+                <a:ea typeface="Calibri"/>
+                <a:cs typeface="+mn-lt"/>
+              </a:rPr>
+            </a:br>
+            <a:r>
+              <a:rPr lang="en-US" dirty="0">
+                <a:ea typeface="Calibri"/>
+                <a:cs typeface="Calibri"/>
+              </a:rPr>
+              <a:t>5) DAY </a:t>
+            </a:r>
+            <a:r>
+              <a:rPr lang="en-US" dirty="0" err="1">
+                <a:ea typeface="Calibri"/>
+                <a:cs typeface="Calibri"/>
+              </a:rPr>
+              <a:t>leiab</a:t>
+            </a:r>
+            <a:r>
+              <a:rPr lang="en-US" dirty="0">
+                <a:ea typeface="Calibri"/>
+                <a:cs typeface="Calibri"/>
+              </a:rPr>
+              <a:t> </a:t>
+            </a:r>
+            <a:r>
+              <a:rPr lang="en-US" dirty="0" err="1">
+                <a:ea typeface="Calibri"/>
+                <a:cs typeface="Calibri"/>
+              </a:rPr>
+              <a:t>päeva</a:t>
+            </a:r>
+            <a:r>
+              <a:rPr lang="en-US" dirty="0">
+                <a:ea typeface="Calibri"/>
+                <a:cs typeface="Calibri"/>
+              </a:rPr>
+              <a:t> </a:t>
+            </a:r>
+            <a:r>
+              <a:rPr lang="en-US" dirty="0" err="1">
+                <a:ea typeface="Calibri"/>
+                <a:cs typeface="Calibri"/>
+              </a:rPr>
+              <a:t>numbri</a:t>
+            </a:r>
+            <a:r>
+              <a:rPr lang="en-US" dirty="0">
+                <a:ea typeface="Calibri"/>
+                <a:cs typeface="Calibri"/>
+              </a:rPr>
+              <a:t>. </a:t>
+            </a:r>
+            <a:br>
+              <a:rPr lang="en-US" dirty="0">
+                <a:ea typeface="Calibri"/>
+                <a:cs typeface="+mn-lt"/>
+              </a:rPr>
+            </a:br>
+            <a:r>
+              <a:rPr lang="en-US" dirty="0">
+                <a:ea typeface="Calibri"/>
+                <a:cs typeface="Calibri"/>
+              </a:rPr>
+              <a:t>6) RETURN </a:t>
+            </a:r>
+            <a:r>
+              <a:rPr lang="en-US" dirty="0" err="1">
+                <a:ea typeface="Calibri"/>
+                <a:cs typeface="Calibri"/>
+              </a:rPr>
+              <a:t>täpsustab</a:t>
+            </a:r>
+            <a:r>
+              <a:rPr lang="en-US" dirty="0">
+                <a:ea typeface="Calibri"/>
+                <a:cs typeface="Calibri"/>
+              </a:rPr>
+              <a:t>, et </a:t>
+            </a:r>
+            <a:r>
+              <a:rPr lang="en-US" dirty="0" err="1">
+                <a:ea typeface="Calibri"/>
+                <a:cs typeface="Calibri"/>
+              </a:rPr>
+              <a:t>alustame</a:t>
+            </a:r>
+            <a:r>
+              <a:rPr lang="en-US" dirty="0">
+                <a:ea typeface="Calibri"/>
+                <a:cs typeface="Calibri"/>
+              </a:rPr>
+              <a:t> </a:t>
+            </a:r>
+            <a:r>
+              <a:rPr lang="en-US" dirty="0" err="1">
+                <a:ea typeface="Calibri"/>
+                <a:cs typeface="Calibri"/>
+              </a:rPr>
+              <a:t>valemi</a:t>
+            </a:r>
+            <a:r>
+              <a:rPr lang="en-US" dirty="0">
+                <a:ea typeface="Calibri"/>
+                <a:cs typeface="Calibri"/>
+              </a:rPr>
+              <a:t> </a:t>
+            </a:r>
+            <a:r>
+              <a:rPr lang="en-US" dirty="0" err="1">
+                <a:ea typeface="Calibri"/>
+                <a:cs typeface="Calibri"/>
+              </a:rPr>
+              <a:t>osaga</a:t>
+            </a:r>
+            <a:r>
+              <a:rPr lang="en-US" dirty="0">
+                <a:ea typeface="Calibri"/>
+                <a:cs typeface="Calibri"/>
+              </a:rPr>
+              <a:t>, mis </a:t>
+            </a:r>
+            <a:r>
+              <a:rPr lang="en-US" dirty="0" err="1">
+                <a:ea typeface="Calibri"/>
+                <a:cs typeface="Calibri"/>
+              </a:rPr>
+              <a:t>tagastab</a:t>
+            </a:r>
+            <a:r>
+              <a:rPr lang="en-US" dirty="0">
+                <a:ea typeface="Calibri"/>
+                <a:cs typeface="Calibri"/>
+              </a:rPr>
+              <a:t> </a:t>
+            </a:r>
+            <a:r>
+              <a:rPr lang="en-US" dirty="0" err="1">
+                <a:ea typeface="Calibri"/>
+                <a:cs typeface="Calibri"/>
+              </a:rPr>
+              <a:t>väärtuse</a:t>
+            </a:r>
+            <a:r>
+              <a:rPr lang="en-US" dirty="0">
+                <a:ea typeface="Calibri"/>
+                <a:cs typeface="Calibri"/>
+              </a:rPr>
+              <a:t>, </a:t>
+            </a:r>
+            <a:r>
+              <a:rPr lang="en-US" dirty="0" err="1">
+                <a:ea typeface="Calibri"/>
+                <a:cs typeface="Calibri"/>
+              </a:rPr>
+              <a:t>mida</a:t>
+            </a:r>
+            <a:r>
+              <a:rPr lang="en-US" dirty="0">
+                <a:ea typeface="Calibri"/>
+                <a:cs typeface="Calibri"/>
+              </a:rPr>
+              <a:t> </a:t>
+            </a:r>
+            <a:r>
+              <a:rPr lang="en-US" dirty="0" err="1">
+                <a:ea typeface="Calibri"/>
+                <a:cs typeface="Calibri"/>
+              </a:rPr>
+              <a:t>soovime</a:t>
+            </a:r>
+            <a:r>
+              <a:rPr lang="en-US" dirty="0">
+                <a:ea typeface="Calibri"/>
+                <a:cs typeface="Calibri"/>
+              </a:rPr>
+              <a:t> </a:t>
+            </a:r>
+            <a:r>
+              <a:rPr lang="en-US" dirty="0" err="1">
+                <a:ea typeface="Calibri"/>
+                <a:cs typeface="Calibri"/>
+              </a:rPr>
+              <a:t>näha</a:t>
+            </a:r>
+            <a:r>
+              <a:rPr lang="en-US" dirty="0">
+                <a:ea typeface="Calibri"/>
+                <a:cs typeface="Calibri"/>
+              </a:rPr>
+              <a:t>. </a:t>
+            </a:r>
+            <a:br>
+              <a:rPr lang="en-US" dirty="0">
+                <a:cs typeface="+mn-lt"/>
+              </a:rPr>
+            </a:br>
+            <a:r>
+              <a:rPr lang="en-US" dirty="0">
+                <a:ea typeface="Calibri"/>
+                <a:cs typeface="Calibri"/>
+              </a:rPr>
+              <a:t>7) </a:t>
+            </a:r>
+            <a:r>
+              <a:rPr lang="en-US" dirty="0" err="1">
+                <a:ea typeface="Calibri"/>
+                <a:cs typeface="Calibri"/>
+              </a:rPr>
+              <a:t>Kasutame</a:t>
+            </a:r>
+            <a:r>
+              <a:rPr lang="en-US" dirty="0">
+                <a:ea typeface="Calibri"/>
+                <a:cs typeface="Calibri"/>
+              </a:rPr>
+              <a:t> </a:t>
+            </a:r>
+            <a:r>
+              <a:rPr lang="en-US" dirty="0" err="1">
+                <a:ea typeface="Calibri"/>
+                <a:cs typeface="Calibri"/>
+              </a:rPr>
+              <a:t>uuesti</a:t>
+            </a:r>
+            <a:r>
+              <a:rPr lang="en-US" dirty="0">
+                <a:ea typeface="Calibri"/>
+                <a:cs typeface="Calibri"/>
+              </a:rPr>
+              <a:t> CALCULATE, et </a:t>
+            </a:r>
+            <a:r>
+              <a:rPr lang="en-US" dirty="0" err="1">
+                <a:ea typeface="Calibri"/>
+                <a:cs typeface="Calibri"/>
+              </a:rPr>
+              <a:t>lisada</a:t>
+            </a:r>
+            <a:r>
+              <a:rPr lang="en-US" dirty="0">
+                <a:ea typeface="Calibri"/>
+                <a:cs typeface="Calibri"/>
+              </a:rPr>
+              <a:t> filter. </a:t>
+            </a:r>
+            <a:br>
+              <a:rPr lang="en-US" dirty="0">
+                <a:ea typeface="Calibri"/>
+                <a:cs typeface="+mn-lt"/>
+              </a:rPr>
+            </a:br>
+            <a:r>
+              <a:rPr lang="en-US" dirty="0">
+                <a:ea typeface="Calibri"/>
+                <a:cs typeface="Calibri"/>
+              </a:rPr>
+              <a:t>8) </a:t>
+            </a:r>
+            <a:r>
+              <a:rPr lang="en-US" dirty="0" err="1">
+                <a:ea typeface="Calibri"/>
+                <a:cs typeface="Calibri"/>
+              </a:rPr>
+              <a:t>Täpsustame</a:t>
+            </a:r>
+            <a:r>
+              <a:rPr lang="en-US" dirty="0">
+                <a:ea typeface="Calibri"/>
+                <a:cs typeface="Calibri"/>
+              </a:rPr>
+              <a:t> SUM </a:t>
+            </a:r>
+            <a:r>
+              <a:rPr lang="en-US" dirty="0" err="1">
+                <a:ea typeface="Calibri"/>
+                <a:cs typeface="Calibri"/>
+              </a:rPr>
+              <a:t>abil</a:t>
+            </a:r>
+            <a:r>
+              <a:rPr lang="en-US" dirty="0">
+                <a:ea typeface="Calibri"/>
+                <a:cs typeface="Calibri"/>
+              </a:rPr>
+              <a:t>, et </a:t>
+            </a:r>
+            <a:r>
+              <a:rPr lang="en-US" dirty="0" err="1">
+                <a:ea typeface="Calibri"/>
+                <a:cs typeface="Calibri"/>
+              </a:rPr>
+              <a:t>soovime</a:t>
+            </a:r>
+            <a:r>
+              <a:rPr lang="en-US" dirty="0">
+                <a:ea typeface="Calibri"/>
+                <a:cs typeface="Calibri"/>
+              </a:rPr>
+              <a:t> </a:t>
+            </a:r>
+            <a:r>
+              <a:rPr lang="en-US" dirty="0" err="1">
+                <a:ea typeface="Calibri"/>
+                <a:cs typeface="Calibri"/>
+              </a:rPr>
+              <a:t>müügisummat</a:t>
+            </a:r>
+            <a:r>
+              <a:rPr lang="en-US" dirty="0">
+                <a:ea typeface="Calibri"/>
+                <a:cs typeface="Calibri"/>
+              </a:rPr>
+              <a:t>. </a:t>
+            </a:r>
+            <a:br>
+              <a:rPr lang="en-US" dirty="0">
+                <a:ea typeface="Calibri"/>
+                <a:cs typeface="+mn-lt"/>
+              </a:rPr>
+            </a:br>
+            <a:r>
+              <a:rPr lang="en-US" dirty="0">
+                <a:ea typeface="Calibri"/>
+                <a:cs typeface="Calibri"/>
+              </a:rPr>
+              <a:t>9) </a:t>
+            </a:r>
+            <a:r>
+              <a:rPr lang="en-US" dirty="0" err="1">
+                <a:ea typeface="Calibri"/>
+                <a:cs typeface="Calibri"/>
+              </a:rPr>
+              <a:t>Lisame</a:t>
+            </a:r>
+            <a:r>
+              <a:rPr lang="en-US" dirty="0">
+                <a:ea typeface="Calibri"/>
+                <a:cs typeface="Calibri"/>
+              </a:rPr>
+              <a:t> FILTER </a:t>
+            </a:r>
+            <a:r>
+              <a:rPr lang="en-US" dirty="0" err="1">
+                <a:ea typeface="Calibri"/>
+                <a:cs typeface="Calibri"/>
+              </a:rPr>
+              <a:t>tingimuse</a:t>
+            </a:r>
+            <a:r>
+              <a:rPr lang="en-US" dirty="0">
+                <a:ea typeface="Calibri"/>
+                <a:cs typeface="Calibri"/>
+              </a:rPr>
+              <a:t> ja </a:t>
+            </a:r>
+            <a:r>
+              <a:rPr lang="en-US" dirty="0" err="1">
+                <a:ea typeface="Calibri"/>
+                <a:cs typeface="Calibri"/>
+              </a:rPr>
+              <a:t>täpsustame</a:t>
+            </a:r>
+            <a:r>
+              <a:rPr lang="en-US" dirty="0">
+                <a:ea typeface="Calibri"/>
+                <a:cs typeface="Calibri"/>
+              </a:rPr>
+              <a:t>, </a:t>
+            </a:r>
+            <a:r>
+              <a:rPr lang="en-US" dirty="0" err="1">
+                <a:ea typeface="Calibri"/>
+                <a:cs typeface="Calibri"/>
+              </a:rPr>
+              <a:t>millist</a:t>
+            </a:r>
+            <a:r>
+              <a:rPr lang="en-US" dirty="0">
+                <a:ea typeface="Calibri"/>
+                <a:cs typeface="Calibri"/>
+              </a:rPr>
+              <a:t> </a:t>
+            </a:r>
+            <a:r>
+              <a:rPr lang="en-US" dirty="0" err="1">
+                <a:ea typeface="Calibri"/>
+                <a:cs typeface="Calibri"/>
+              </a:rPr>
+              <a:t>tabelit</a:t>
+            </a:r>
+            <a:r>
+              <a:rPr lang="en-US" dirty="0">
+                <a:ea typeface="Calibri"/>
+                <a:cs typeface="Calibri"/>
+              </a:rPr>
+              <a:t> </a:t>
+            </a:r>
+            <a:r>
+              <a:rPr lang="en-US" dirty="0" err="1">
+                <a:ea typeface="Calibri"/>
+                <a:cs typeface="Calibri"/>
+              </a:rPr>
+              <a:t>filtreerida</a:t>
+            </a:r>
+            <a:r>
+              <a:rPr lang="en-US" dirty="0">
+                <a:ea typeface="Calibri"/>
+                <a:cs typeface="Calibri"/>
+              </a:rPr>
+              <a:t>. See </a:t>
+            </a:r>
+            <a:r>
+              <a:rPr lang="en-US" dirty="0" err="1">
+                <a:ea typeface="Calibri"/>
+                <a:cs typeface="Calibri"/>
+              </a:rPr>
+              <a:t>aitab</a:t>
+            </a:r>
+            <a:r>
+              <a:rPr lang="en-US" dirty="0">
+                <a:ea typeface="Calibri"/>
+                <a:cs typeface="Calibri"/>
+              </a:rPr>
+              <a:t> </a:t>
+            </a:r>
+            <a:r>
+              <a:rPr lang="en-US" dirty="0" err="1">
+                <a:ea typeface="Calibri"/>
+                <a:cs typeface="Calibri"/>
+              </a:rPr>
+              <a:t>loetavusele</a:t>
+            </a:r>
+            <a:r>
+              <a:rPr lang="en-US" dirty="0">
+                <a:ea typeface="Calibri"/>
+                <a:cs typeface="Calibri"/>
+              </a:rPr>
+              <a:t> </a:t>
+            </a:r>
+            <a:r>
+              <a:rPr lang="en-US" dirty="0" err="1">
+                <a:ea typeface="Calibri"/>
+                <a:cs typeface="Calibri"/>
+              </a:rPr>
+              <a:t>kaasa</a:t>
+            </a:r>
+            <a:r>
+              <a:rPr lang="en-US" dirty="0">
+                <a:ea typeface="Calibri"/>
+                <a:cs typeface="Calibri"/>
+              </a:rPr>
+              <a:t>.</a:t>
+            </a:r>
+            <a:br>
+              <a:rPr lang="en-US" dirty="0">
+                <a:ea typeface="Calibri"/>
+                <a:cs typeface="+mn-lt"/>
+              </a:rPr>
+            </a:br>
+            <a:r>
+              <a:rPr lang="en-US" dirty="0">
+                <a:ea typeface="Calibri"/>
+                <a:cs typeface="Calibri"/>
+              </a:rPr>
+              <a:t>10) </a:t>
+            </a:r>
+            <a:r>
+              <a:rPr lang="en-US" dirty="0" err="1">
+                <a:ea typeface="Calibri"/>
+                <a:cs typeface="Calibri"/>
+              </a:rPr>
+              <a:t>Võtame</a:t>
+            </a:r>
+            <a:r>
+              <a:rPr lang="en-US" dirty="0">
+                <a:ea typeface="Calibri"/>
+                <a:cs typeface="Calibri"/>
+              </a:rPr>
+              <a:t> </a:t>
+            </a:r>
+            <a:r>
+              <a:rPr lang="en-US" dirty="0" err="1">
+                <a:ea typeface="Calibri"/>
+                <a:cs typeface="Calibri"/>
+              </a:rPr>
+              <a:t>kõik</a:t>
+            </a:r>
+            <a:r>
+              <a:rPr lang="en-US" dirty="0">
+                <a:ea typeface="Calibri"/>
+                <a:cs typeface="Calibri"/>
+              </a:rPr>
+              <a:t> </a:t>
+            </a:r>
+            <a:r>
+              <a:rPr lang="en-US" dirty="0" err="1">
+                <a:ea typeface="Calibri"/>
+                <a:cs typeface="Calibri"/>
+              </a:rPr>
+              <a:t>kuud</a:t>
+            </a:r>
+            <a:r>
+              <a:rPr lang="en-US" dirty="0">
+                <a:ea typeface="Calibri"/>
+                <a:cs typeface="Calibri"/>
+              </a:rPr>
+              <a:t>, mis on </a:t>
+            </a:r>
+            <a:r>
+              <a:rPr lang="en-US" dirty="0" err="1">
+                <a:ea typeface="Calibri"/>
+                <a:cs typeface="Calibri"/>
+              </a:rPr>
+              <a:t>enne</a:t>
+            </a:r>
+            <a:r>
+              <a:rPr lang="en-US" dirty="0">
+                <a:ea typeface="Calibri"/>
+                <a:cs typeface="Calibri"/>
+              </a:rPr>
+              <a:t> </a:t>
+            </a:r>
+            <a:r>
+              <a:rPr lang="en-US" dirty="0" err="1">
+                <a:ea typeface="Calibri"/>
+                <a:cs typeface="Calibri"/>
+              </a:rPr>
+              <a:t>viimast</a:t>
+            </a:r>
+            <a:r>
+              <a:rPr lang="en-US" dirty="0">
+                <a:ea typeface="Calibri"/>
+                <a:cs typeface="Calibri"/>
+              </a:rPr>
+              <a:t> </a:t>
+            </a:r>
+            <a:r>
+              <a:rPr lang="en-US" dirty="0" err="1">
+                <a:ea typeface="Calibri"/>
+                <a:cs typeface="Calibri"/>
+              </a:rPr>
+              <a:t>müügikuud</a:t>
+            </a:r>
+            <a:br>
+              <a:rPr lang="en-US" dirty="0">
+                <a:cs typeface="+mn-lt"/>
+              </a:rPr>
+            </a:br>
+            <a:r>
+              <a:rPr lang="en-US" dirty="0">
+                <a:ea typeface="Calibri"/>
+                <a:cs typeface="Calibri"/>
+              </a:rPr>
+              <a:t>11) </a:t>
+            </a:r>
+            <a:r>
+              <a:rPr lang="en-US" dirty="0" err="1">
+                <a:ea typeface="Calibri"/>
+                <a:cs typeface="Calibri"/>
+              </a:rPr>
+              <a:t>Võtame</a:t>
+            </a:r>
+            <a:r>
+              <a:rPr lang="en-US" dirty="0">
+                <a:ea typeface="Calibri"/>
+                <a:cs typeface="Calibri"/>
+              </a:rPr>
+              <a:t> </a:t>
+            </a:r>
+            <a:r>
+              <a:rPr lang="en-US" dirty="0" err="1">
+                <a:ea typeface="Calibri"/>
+                <a:cs typeface="Calibri"/>
+              </a:rPr>
+              <a:t>kõik</a:t>
+            </a:r>
+            <a:r>
+              <a:rPr lang="en-US" dirty="0">
+                <a:ea typeface="Calibri"/>
+                <a:cs typeface="Calibri"/>
+              </a:rPr>
+              <a:t> </a:t>
+            </a:r>
+            <a:r>
+              <a:rPr lang="en-US" dirty="0" err="1">
+                <a:ea typeface="Calibri"/>
+                <a:cs typeface="Calibri"/>
+              </a:rPr>
+              <a:t>päevad</a:t>
+            </a:r>
+            <a:r>
+              <a:rPr lang="en-US" dirty="0">
+                <a:ea typeface="Calibri"/>
+                <a:cs typeface="Calibri"/>
+              </a:rPr>
+              <a:t>, mis on </a:t>
+            </a:r>
+            <a:r>
+              <a:rPr lang="en-US" dirty="0" err="1">
+                <a:ea typeface="Calibri"/>
+                <a:cs typeface="Calibri"/>
+              </a:rPr>
+              <a:t>sel</a:t>
+            </a:r>
+            <a:r>
+              <a:rPr lang="en-US" dirty="0">
+                <a:ea typeface="Calibri"/>
+                <a:cs typeface="Calibri"/>
+              </a:rPr>
+              <a:t> </a:t>
+            </a:r>
+            <a:r>
+              <a:rPr lang="en-US" dirty="0" err="1">
+                <a:ea typeface="Calibri"/>
+                <a:cs typeface="Calibri"/>
+              </a:rPr>
+              <a:t>kuul</a:t>
+            </a:r>
+            <a:r>
+              <a:rPr lang="en-US" dirty="0">
+                <a:ea typeface="Calibri"/>
+                <a:cs typeface="Calibri"/>
+              </a:rPr>
+              <a:t> ja </a:t>
+            </a:r>
+            <a:r>
+              <a:rPr lang="en-US" dirty="0" err="1">
+                <a:ea typeface="Calibri"/>
+                <a:cs typeface="Calibri"/>
+              </a:rPr>
+              <a:t>enne</a:t>
+            </a:r>
+            <a:r>
+              <a:rPr lang="en-US" dirty="0">
+                <a:ea typeface="Calibri"/>
+                <a:cs typeface="Calibri"/>
+              </a:rPr>
+              <a:t> </a:t>
+            </a:r>
+            <a:r>
+              <a:rPr lang="en-US" dirty="0" err="1">
+                <a:ea typeface="Calibri"/>
+                <a:cs typeface="Calibri"/>
+              </a:rPr>
+              <a:t>viimast</a:t>
+            </a:r>
+            <a:r>
+              <a:rPr lang="en-US" dirty="0">
+                <a:ea typeface="Calibri"/>
+                <a:cs typeface="Calibri"/>
+              </a:rPr>
+              <a:t> </a:t>
+            </a:r>
+            <a:r>
+              <a:rPr lang="en-US" dirty="0" err="1">
+                <a:ea typeface="Calibri"/>
+                <a:cs typeface="Calibri"/>
+              </a:rPr>
+              <a:t>müügipäeva</a:t>
+            </a:r>
+            <a:r>
+              <a:rPr lang="en-US" dirty="0">
+                <a:ea typeface="Calibri"/>
+                <a:cs typeface="Calibri"/>
+              </a:rPr>
+              <a:t>.</a:t>
+            </a:r>
+          </a:p>
+          <a:p>
+            <a:endParaRPr lang="en-US" dirty="0">
+              <a:ea typeface="Calibri"/>
+              <a:cs typeface="Calibri"/>
+            </a:endParaRPr>
+          </a:p>
+          <a:p>
+            <a:r>
+              <a:rPr lang="en-US" dirty="0" err="1">
+                <a:ea typeface="Calibri"/>
+                <a:cs typeface="Calibri"/>
+              </a:rPr>
+              <a:t>Kontrollime</a:t>
+            </a:r>
+            <a:r>
+              <a:rPr lang="en-US" dirty="0">
+                <a:ea typeface="Calibri"/>
+                <a:cs typeface="Calibri"/>
+              </a:rPr>
+              <a:t> </a:t>
+            </a:r>
+            <a:r>
+              <a:rPr lang="en-US" dirty="0" err="1">
+                <a:ea typeface="Calibri"/>
+                <a:cs typeface="Calibri"/>
+              </a:rPr>
+              <a:t>risttabelist</a:t>
+            </a:r>
+            <a:r>
+              <a:rPr lang="en-US" dirty="0">
+                <a:ea typeface="Calibri"/>
+                <a:cs typeface="Calibri"/>
+              </a:rPr>
+              <a:t>, kas </a:t>
+            </a:r>
+            <a:r>
+              <a:rPr lang="en-US" dirty="0" err="1">
+                <a:ea typeface="Calibri"/>
+                <a:cs typeface="Calibri"/>
+              </a:rPr>
+              <a:t>saadud</a:t>
+            </a:r>
+            <a:r>
+              <a:rPr lang="en-US" dirty="0">
+                <a:ea typeface="Calibri"/>
+                <a:cs typeface="Calibri"/>
+              </a:rPr>
+              <a:t> </a:t>
+            </a:r>
+            <a:r>
+              <a:rPr lang="en-US" dirty="0" err="1">
+                <a:ea typeface="Calibri"/>
+                <a:cs typeface="Calibri"/>
+              </a:rPr>
+              <a:t>arvutus</a:t>
+            </a:r>
+            <a:r>
+              <a:rPr lang="en-US" dirty="0">
+                <a:ea typeface="Calibri"/>
+                <a:cs typeface="Calibri"/>
+              </a:rPr>
+              <a:t> on </a:t>
+            </a:r>
+            <a:r>
+              <a:rPr lang="en-US" dirty="0" err="1">
+                <a:ea typeface="Calibri"/>
+                <a:cs typeface="Calibri"/>
+              </a:rPr>
+              <a:t>õige</a:t>
+            </a:r>
+            <a:r>
+              <a:rPr lang="en-US" dirty="0">
+                <a:ea typeface="Calibri"/>
+                <a:cs typeface="Calibri"/>
+              </a:rPr>
+              <a:t>.</a:t>
+            </a:r>
+          </a:p>
+        </p:txBody>
+      </p:sp>
+      <p:sp>
+        <p:nvSpPr>
+          <p:cNvPr id="4" name="Slide Number Placeholder 3"/>
+          <p:cNvSpPr>
+            <a:spLocks noGrp="1"/>
+          </p:cNvSpPr>
+          <p:nvPr>
+            <p:ph type="sldNum" sz="quarter" idx="5"/>
+          </p:nvPr>
+        </p:nvSpPr>
+        <p:spPr/>
+        <p:txBody>
+          <a:bodyPr/>
+          <a:lstStyle/>
+          <a:p>
+            <a:fld id="{46699514-027B-49BD-8B49-5054CA40ECF4}" type="slidenum">
+              <a:rPr lang="en-US"/>
+              <a:t>45</a:t>
+            </a:fld>
+            <a:endParaRPr lang="en-US"/>
+          </a:p>
+        </p:txBody>
+      </p:sp>
+    </p:spTree>
+    <p:extLst>
+      <p:ext uri="{BB962C8B-B14F-4D97-AF65-F5344CB8AC3E}">
+        <p14:creationId xmlns:p14="http://schemas.microsoft.com/office/powerpoint/2010/main" val="2435554556"/>
       </p:ext>
     </p:extLst>
   </p:cSld>
@@ -24427,6 +25858,550 @@
   <p:cSld>
     <p:spTree>
       <p:nvGrpSpPr>
+        <p:cNvPr id="1" name=""/>
+        <p:cNvGrpSpPr/>
+        <p:nvPr/>
+      </p:nvGrpSpPr>
+      <p:grpSpPr>
+        <a:xfrm>
+          <a:off x="0" y="0"/>
+          <a:ext cx="0" cy="0"/>
+          <a:chOff x="0" y="0"/>
+          <a:chExt cx="0" cy="0"/>
+        </a:xfrm>
+      </p:grpSpPr>
+      <p:sp>
+        <p:nvSpPr>
+          <p:cNvPr id="2" name="Title 1">
+            <a:extLst>
+              <a:ext uri="{FF2B5EF4-FFF2-40B4-BE49-F238E27FC236}">
+                <a16:creationId xmlns:a16="http://schemas.microsoft.com/office/drawing/2014/main" id="{F4FB2843-84FC-6050-6780-3E1CF9056EB6}"/>
+              </a:ext>
+            </a:extLst>
+          </p:cNvPr>
+          <p:cNvSpPr>
+            <a:spLocks noGrp="1"/>
+          </p:cNvSpPr>
+          <p:nvPr>
+            <p:ph type="ctrTitle"/>
+          </p:nvPr>
+        </p:nvSpPr>
+        <p:spPr/>
+        <p:txBody>
+          <a:bodyPr/>
+          <a:lstStyle/>
+          <a:p>
+            <a:r>
+              <a:rPr lang="en-GB" dirty="0" err="1"/>
+              <a:t>Githu</a:t>
+            </a:r>
+            <a:r>
+              <a:rPr lang="et-EE" dirty="0"/>
+              <a:t>b</a:t>
+            </a:r>
+            <a:endParaRPr lang="en-GB" dirty="0"/>
+          </a:p>
+        </p:txBody>
+      </p:sp>
+      <p:sp>
+        <p:nvSpPr>
+          <p:cNvPr id="3" name="Content Placeholder 2">
+            <a:extLst>
+              <a:ext uri="{FF2B5EF4-FFF2-40B4-BE49-F238E27FC236}">
+                <a16:creationId xmlns:a16="http://schemas.microsoft.com/office/drawing/2014/main" id="{0B745C53-3E1D-61A6-CE62-781555F7FC02}"/>
+              </a:ext>
+            </a:extLst>
+          </p:cNvPr>
+          <p:cNvSpPr>
+            <a:spLocks noGrp="1"/>
+          </p:cNvSpPr>
+          <p:nvPr>
+            <p:ph sz="quarter" idx="10"/>
+          </p:nvPr>
+        </p:nvSpPr>
+        <p:spPr/>
+        <p:txBody>
+          <a:bodyPr/>
+          <a:lstStyle/>
+          <a:p>
+            <a:r>
+              <a:rPr lang="en-GB" sz="2800" dirty="0"/>
+              <a:t>Product Table</a:t>
+            </a:r>
+          </a:p>
+          <a:p>
+            <a:r>
+              <a:rPr lang="en-GB" sz="2800" dirty="0" err="1"/>
+              <a:t>SalesRep</a:t>
+            </a:r>
+            <a:r>
+              <a:rPr lang="en-GB" sz="2800" dirty="0"/>
+              <a:t> Table</a:t>
+            </a:r>
+          </a:p>
+          <a:p>
+            <a:pPr marL="0" indent="0">
+              <a:buNone/>
+            </a:pPr>
+            <a:endParaRPr lang="et-EE" sz="2800" dirty="0"/>
+          </a:p>
+          <a:p>
+            <a:r>
+              <a:rPr lang="et-EE" sz="2800" dirty="0"/>
+              <a:t>Ava fail</a:t>
+            </a:r>
+          </a:p>
+          <a:p>
+            <a:r>
+              <a:rPr lang="et-EE" sz="2800" dirty="0"/>
+              <a:t>Vali Raw</a:t>
+            </a:r>
+          </a:p>
+          <a:p>
+            <a:r>
+              <a:rPr lang="et-EE" sz="2800" dirty="0"/>
+              <a:t>Kopeeri URL</a:t>
+            </a:r>
+            <a:endParaRPr lang="en-GB" sz="2800" dirty="0"/>
+          </a:p>
+        </p:txBody>
+      </p:sp>
+    </p:spTree>
+    <p:extLst>
+      <p:ext uri="{BB962C8B-B14F-4D97-AF65-F5344CB8AC3E}">
+        <p14:creationId xmlns:p14="http://schemas.microsoft.com/office/powerpoint/2010/main" val="771217817"/>
+      </p:ext>
+    </p:extLst>
+  </p:cSld>
+  <p:clrMapOvr>
+    <a:masterClrMapping/>
+  </p:clrMapOvr>
+</p:sld>
+</file>
+
+<file path=ppt/slides/slide11.xml><?xml version="1.0" encoding="utf-8"?>
+<p:sld xmlns:a="http://schemas.openxmlformats.org/drawingml/2006/main" xmlns:r="http://schemas.openxmlformats.org/officeDocument/2006/relationships" xmlns:p="http://schemas.openxmlformats.org/presentationml/2006/main">
+  <p:cSld>
+    <p:spTree>
+      <p:nvGrpSpPr>
+        <p:cNvPr id="1" name="">
+          <a:extLst>
+            <a:ext uri="{FF2B5EF4-FFF2-40B4-BE49-F238E27FC236}">
+              <a16:creationId xmlns:a16="http://schemas.microsoft.com/office/drawing/2014/main" id="{80D2BCF1-3C9A-3A58-37F2-D2D006BF1CC8}"/>
+            </a:ext>
+          </a:extLst>
+        </p:cNvPr>
+        <p:cNvGrpSpPr/>
+        <p:nvPr/>
+      </p:nvGrpSpPr>
+      <p:grpSpPr>
+        <a:xfrm>
+          <a:off x="0" y="0"/>
+          <a:ext cx="0" cy="0"/>
+          <a:chOff x="0" y="0"/>
+          <a:chExt cx="0" cy="0"/>
+        </a:xfrm>
+      </p:grpSpPr>
+      <p:sp>
+        <p:nvSpPr>
+          <p:cNvPr id="2" name="Title 1">
+            <a:extLst>
+              <a:ext uri="{FF2B5EF4-FFF2-40B4-BE49-F238E27FC236}">
+                <a16:creationId xmlns:a16="http://schemas.microsoft.com/office/drawing/2014/main" id="{2C11C9DA-68C6-2574-D71F-9682677EC888}"/>
+              </a:ext>
+            </a:extLst>
+          </p:cNvPr>
+          <p:cNvSpPr>
+            <a:spLocks noGrp="1"/>
+          </p:cNvSpPr>
+          <p:nvPr>
+            <p:ph type="ctrTitle"/>
+          </p:nvPr>
+        </p:nvSpPr>
+        <p:spPr>
+          <a:xfrm>
+            <a:off x="623888" y="836614"/>
+            <a:ext cx="8208962" cy="2484436"/>
+          </a:xfrm>
+        </p:spPr>
+        <p:txBody>
+          <a:bodyPr anchor="t">
+            <a:normAutofit/>
+          </a:bodyPr>
+          <a:lstStyle/>
+          <a:p>
+            <a:r>
+              <a:rPr lang="en-US" dirty="0"/>
+              <a:t>Power BI – Eelarve </a:t>
+            </a:r>
+            <a:r>
+              <a:rPr lang="en-US" dirty="0" err="1"/>
+              <a:t>faili</a:t>
+            </a:r>
+            <a:r>
+              <a:rPr lang="en-US" dirty="0"/>
+              <a:t> </a:t>
+            </a:r>
+            <a:r>
+              <a:rPr lang="en-US" dirty="0" err="1"/>
+              <a:t>lisamine</a:t>
+            </a:r>
+            <a:endParaRPr lang="en-US" dirty="0"/>
+          </a:p>
+        </p:txBody>
+      </p:sp>
+      <p:sp>
+        <p:nvSpPr>
+          <p:cNvPr id="3" name="Content Placeholder 2">
+            <a:extLst>
+              <a:ext uri="{FF2B5EF4-FFF2-40B4-BE49-F238E27FC236}">
+                <a16:creationId xmlns:a16="http://schemas.microsoft.com/office/drawing/2014/main" id="{10527649-761C-3A2F-3446-721B53FB495A}"/>
+              </a:ext>
+            </a:extLst>
+          </p:cNvPr>
+          <p:cNvSpPr>
+            <a:spLocks noGrp="1"/>
+          </p:cNvSpPr>
+          <p:nvPr>
+            <p:ph type="body" sz="quarter" idx="10"/>
+          </p:nvPr>
+        </p:nvSpPr>
+        <p:spPr>
+          <a:xfrm>
+            <a:off x="623887" y="2279737"/>
+            <a:ext cx="8208961" cy="3454313"/>
+          </a:xfrm>
+        </p:spPr>
+        <p:txBody>
+          <a:bodyPr anchor="t">
+            <a:normAutofit/>
+          </a:bodyPr>
+          <a:lstStyle/>
+          <a:p>
+            <a:pPr>
+              <a:lnSpc>
+                <a:spcPct val="100000"/>
+              </a:lnSpc>
+              <a:spcAft>
+                <a:spcPts val="600"/>
+              </a:spcAft>
+            </a:pPr>
+            <a:r>
+              <a:rPr lang="et-EE" sz="1400" dirty="0"/>
+              <a:t>Lisa fail</a:t>
+            </a:r>
+          </a:p>
+          <a:p>
+            <a:pPr>
+              <a:lnSpc>
+                <a:spcPct val="100000"/>
+              </a:lnSpc>
+              <a:spcAft>
+                <a:spcPts val="600"/>
+              </a:spcAft>
+            </a:pPr>
+            <a:r>
+              <a:rPr lang="en-US" sz="1400" dirty="0" err="1"/>
+              <a:t>Ühendus</a:t>
+            </a:r>
+            <a:r>
+              <a:rPr lang="en-US" sz="1400" dirty="0"/>
+              <a:t> </a:t>
+            </a:r>
+            <a:r>
+              <a:rPr lang="en-US" sz="1400" dirty="0" err="1"/>
+              <a:t>kuupäeva</a:t>
+            </a:r>
+            <a:r>
+              <a:rPr lang="en-US" sz="1400" dirty="0"/>
+              <a:t> (eelarve </a:t>
+            </a:r>
+            <a:r>
+              <a:rPr lang="en-US" sz="1400" dirty="0" err="1"/>
+              <a:t>failis</a:t>
+            </a:r>
+            <a:r>
+              <a:rPr lang="en-US" sz="1400" dirty="0"/>
+              <a:t> kuu </a:t>
+            </a:r>
+            <a:r>
+              <a:rPr lang="en-US" sz="1400" dirty="0" err="1"/>
+              <a:t>esimene</a:t>
+            </a:r>
+            <a:r>
+              <a:rPr lang="en-US" sz="1400" dirty="0"/>
+              <a:t> </a:t>
+            </a:r>
+            <a:r>
+              <a:rPr lang="en-US" sz="1400" dirty="0" err="1"/>
+              <a:t>päev</a:t>
+            </a:r>
+            <a:r>
+              <a:rPr lang="en-US" sz="1400" dirty="0"/>
+              <a:t>) ja </a:t>
+            </a:r>
+            <a:r>
+              <a:rPr lang="en-US" sz="1400" dirty="0" err="1"/>
+              <a:t>SalesRep</a:t>
+            </a:r>
+            <a:r>
+              <a:rPr lang="en-US" sz="1400" dirty="0"/>
+              <a:t> alusel</a:t>
+            </a:r>
+          </a:p>
+          <a:p>
+            <a:pPr>
+              <a:lnSpc>
+                <a:spcPct val="100000"/>
+              </a:lnSpc>
+              <a:spcAft>
+                <a:spcPts val="600"/>
+              </a:spcAft>
+            </a:pPr>
+            <a:r>
+              <a:rPr lang="en-US" sz="1400" dirty="0"/>
+              <a:t>Eelarve fail on </a:t>
+            </a:r>
+            <a:r>
+              <a:rPr lang="en-US" sz="1400" dirty="0" err="1"/>
+              <a:t>risttabeli</a:t>
+            </a:r>
+            <a:r>
+              <a:rPr lang="en-US" sz="1400" dirty="0"/>
+              <a:t> </a:t>
+            </a:r>
+            <a:r>
+              <a:rPr lang="en-US" sz="1400" dirty="0" err="1"/>
+              <a:t>kujul</a:t>
+            </a:r>
+            <a:r>
+              <a:rPr lang="en-US" sz="1400" dirty="0"/>
+              <a:t> – vajalik muuta </a:t>
+            </a:r>
+            <a:r>
+              <a:rPr lang="en-US" sz="1400" dirty="0" err="1"/>
+              <a:t>lihttabeliks</a:t>
+            </a:r>
+            <a:endParaRPr lang="en-US" sz="1400" dirty="0"/>
+          </a:p>
+          <a:p>
+            <a:pPr lvl="1" indent="-514350">
+              <a:lnSpc>
+                <a:spcPct val="100000"/>
+              </a:lnSpc>
+              <a:spcAft>
+                <a:spcPts val="600"/>
+              </a:spcAft>
+              <a:buAutoNum type="arabicPeriod"/>
+            </a:pPr>
+            <a:r>
+              <a:rPr lang="en-US" sz="1400" dirty="0"/>
+              <a:t>Promote Headers</a:t>
+            </a:r>
+          </a:p>
+          <a:p>
+            <a:pPr lvl="1" indent="-514350">
+              <a:lnSpc>
+                <a:spcPct val="100000"/>
+              </a:lnSpc>
+              <a:spcAft>
+                <a:spcPts val="600"/>
+              </a:spcAft>
+              <a:buAutoNum type="arabicPeriod"/>
+            </a:pPr>
+            <a:r>
+              <a:rPr lang="en-US" sz="1400" dirty="0"/>
+              <a:t>Vali </a:t>
+            </a:r>
+            <a:r>
+              <a:rPr lang="en-US" sz="1400" dirty="0" err="1"/>
+              <a:t>SalesRep</a:t>
+            </a:r>
+            <a:r>
+              <a:rPr lang="en-US" sz="1400" dirty="0"/>
+              <a:t> </a:t>
+            </a:r>
+            <a:r>
+              <a:rPr lang="en-US" sz="1400" dirty="0" err="1"/>
+              <a:t>tulp</a:t>
+            </a:r>
+            <a:r>
+              <a:rPr lang="en-US" sz="1400" dirty="0"/>
+              <a:t> ja Unpivot other columns</a:t>
+            </a:r>
+          </a:p>
+          <a:p>
+            <a:pPr lvl="1" indent="-514350">
+              <a:lnSpc>
+                <a:spcPct val="100000"/>
+              </a:lnSpc>
+              <a:spcAft>
+                <a:spcPts val="600"/>
+              </a:spcAft>
+              <a:buAutoNum type="arabicPeriod"/>
+            </a:pPr>
+            <a:r>
+              <a:rPr lang="en-US" sz="1400" dirty="0" err="1"/>
+              <a:t>Vaata</a:t>
+            </a:r>
+            <a:r>
+              <a:rPr lang="en-US" sz="1400" dirty="0"/>
+              <a:t> üle </a:t>
+            </a:r>
+            <a:r>
+              <a:rPr lang="en-US" sz="1400" dirty="0" err="1"/>
+              <a:t>tulpade</a:t>
+            </a:r>
+            <a:r>
+              <a:rPr lang="en-US" sz="1400" dirty="0"/>
+              <a:t> </a:t>
+            </a:r>
+            <a:r>
+              <a:rPr lang="en-US" sz="1400" dirty="0" err="1"/>
+              <a:t>formaat</a:t>
+            </a:r>
+            <a:endParaRPr lang="en-US" sz="1400" dirty="0"/>
+          </a:p>
+          <a:p>
+            <a:pPr lvl="1" indent="-514350">
+              <a:lnSpc>
+                <a:spcPct val="100000"/>
+              </a:lnSpc>
+              <a:spcAft>
+                <a:spcPts val="600"/>
+              </a:spcAft>
+              <a:buAutoNum type="arabicPeriod"/>
+            </a:pPr>
+            <a:r>
+              <a:rPr lang="en-US" sz="1400" dirty="0" err="1"/>
+              <a:t>Nimeta</a:t>
+            </a:r>
+            <a:r>
+              <a:rPr lang="en-US" sz="1400" dirty="0"/>
+              <a:t> </a:t>
+            </a:r>
+            <a:r>
+              <a:rPr lang="en-US" sz="1400" dirty="0" err="1"/>
+              <a:t>tulbad</a:t>
+            </a:r>
+            <a:r>
+              <a:rPr lang="en-US" sz="1400" dirty="0"/>
+              <a:t> </a:t>
+            </a:r>
+            <a:r>
+              <a:rPr lang="en-US" sz="1400" dirty="0" err="1"/>
+              <a:t>kirjeldavate</a:t>
+            </a:r>
+            <a:r>
+              <a:rPr lang="en-US" sz="1400" dirty="0"/>
+              <a:t> </a:t>
+            </a:r>
+            <a:r>
+              <a:rPr lang="en-US" sz="1400" dirty="0" err="1"/>
+              <a:t>nimedega</a:t>
+            </a:r>
+            <a:endParaRPr lang="en-US" sz="1400" dirty="0"/>
+          </a:p>
+          <a:p>
+            <a:pPr lvl="1" indent="-514350">
+              <a:lnSpc>
+                <a:spcPct val="100000"/>
+              </a:lnSpc>
+              <a:spcAft>
+                <a:spcPts val="600"/>
+              </a:spcAft>
+              <a:buAutoNum type="arabicPeriod"/>
+            </a:pPr>
+            <a:r>
+              <a:rPr lang="en-US" sz="1400" dirty="0"/>
+              <a:t>Loo </a:t>
+            </a:r>
+            <a:r>
+              <a:rPr lang="en-US" sz="1400" dirty="0" err="1"/>
+              <a:t>ühendused</a:t>
+            </a:r>
+            <a:r>
+              <a:rPr lang="en-US" sz="1400" dirty="0"/>
+              <a:t> </a:t>
+            </a:r>
+            <a:r>
+              <a:rPr lang="en-US" sz="1400" dirty="0" err="1"/>
+              <a:t>mudelis</a:t>
+            </a:r>
+            <a:r>
+              <a:rPr lang="en-US" sz="1400" dirty="0"/>
+              <a:t> </a:t>
+            </a:r>
+            <a:r>
+              <a:rPr lang="en-US" sz="1400" dirty="0" err="1"/>
+              <a:t>teiste</a:t>
+            </a:r>
+            <a:r>
+              <a:rPr lang="en-US" sz="1400" dirty="0"/>
+              <a:t> </a:t>
+            </a:r>
+            <a:r>
+              <a:rPr lang="en-US" sz="1400" dirty="0" err="1"/>
+              <a:t>tabelitega</a:t>
+            </a:r>
+            <a:endParaRPr lang="en-US" sz="1400" dirty="0"/>
+          </a:p>
+          <a:p>
+            <a:pPr lvl="1" indent="-514350">
+              <a:lnSpc>
+                <a:spcPct val="100000"/>
+              </a:lnSpc>
+              <a:spcAft>
+                <a:spcPts val="600"/>
+              </a:spcAft>
+              <a:buAutoNum type="arabicPeriod"/>
+            </a:pPr>
+            <a:r>
+              <a:rPr lang="en-US" sz="1400" dirty="0"/>
+              <a:t>Loo </a:t>
+            </a:r>
+            <a:r>
+              <a:rPr lang="en-US" sz="1400" dirty="0" err="1"/>
+              <a:t>visuaalid</a:t>
+            </a:r>
+            <a:endParaRPr lang="et-EE" sz="1400" dirty="0"/>
+          </a:p>
+          <a:p>
+            <a:pPr lvl="2" indent="-514350">
+              <a:lnSpc>
+                <a:spcPct val="100000"/>
+              </a:lnSpc>
+              <a:spcAft>
+                <a:spcPts val="600"/>
+              </a:spcAft>
+              <a:buAutoNum type="arabicPeriod"/>
+            </a:pPr>
+            <a:r>
+              <a:rPr lang="et-EE" sz="1400" dirty="0"/>
+              <a:t>Eelarve ja müügi võrdlus</a:t>
+            </a:r>
+            <a:endParaRPr lang="en-US" sz="1400" dirty="0"/>
+          </a:p>
+        </p:txBody>
+      </p:sp>
+    </p:spTree>
+    <p:extLst>
+      <p:ext uri="{BB962C8B-B14F-4D97-AF65-F5344CB8AC3E}">
+        <p14:creationId xmlns:p14="http://schemas.microsoft.com/office/powerpoint/2010/main" val="1699116838"/>
+      </p:ext>
+    </p:extLst>
+  </p:cSld>
+  <p:clrMapOvr>
+    <a:masterClrMapping/>
+  </p:clrMapOvr>
+</p:sld>
+</file>
+
+<file path=ppt/slides/slide12.xml><?xml version="1.0" encoding="utf-8"?>
+<p:sld xmlns:a="http://schemas.openxmlformats.org/drawingml/2006/main" xmlns:r="http://schemas.openxmlformats.org/officeDocument/2006/relationships" xmlns:p="http://schemas.openxmlformats.org/presentationml/2006/main">
+  <p:cSld>
+    <p:spTree>
+      <p:nvGrpSpPr>
         <p:cNvPr id="1" name="">
           <a:extLst>
             <a:ext uri="{FF2B5EF4-FFF2-40B4-BE49-F238E27FC236}">
@@ -24535,481 +26510,7 @@
 </p:sld>
 </file>
 
-<file path=ppt/slides/slide11.xml><?xml version="1.0" encoding="utf-8"?>
-<p:sld xmlns:a="http://schemas.openxmlformats.org/drawingml/2006/main" xmlns:r="http://schemas.openxmlformats.org/officeDocument/2006/relationships" xmlns:p="http://schemas.openxmlformats.org/presentationml/2006/main">
-  <p:cSld>
-    <p:spTree>
-      <p:nvGrpSpPr>
-        <p:cNvPr id="1" name=""/>
-        <p:cNvGrpSpPr/>
-        <p:nvPr/>
-      </p:nvGrpSpPr>
-      <p:grpSpPr>
-        <a:xfrm>
-          <a:off x="0" y="0"/>
-          <a:ext cx="0" cy="0"/>
-          <a:chOff x="0" y="0"/>
-          <a:chExt cx="0" cy="0"/>
-        </a:xfrm>
-      </p:grpSpPr>
-      <p:sp>
-        <p:nvSpPr>
-          <p:cNvPr id="2" name="Title 1">
-            <a:extLst>
-              <a:ext uri="{FF2B5EF4-FFF2-40B4-BE49-F238E27FC236}">
-                <a16:creationId xmlns:a16="http://schemas.microsoft.com/office/drawing/2014/main" id="{4155340F-C524-6C04-CAB6-B5622613C264}"/>
-              </a:ext>
-            </a:extLst>
-          </p:cNvPr>
-          <p:cNvSpPr>
-            <a:spLocks noGrp="1"/>
-          </p:cNvSpPr>
-          <p:nvPr>
-            <p:ph type="ctrTitle"/>
-          </p:nvPr>
-        </p:nvSpPr>
-        <p:spPr/>
-        <p:txBody>
-          <a:bodyPr/>
-          <a:lstStyle/>
-          <a:p>
-            <a:r>
-              <a:rPr lang="et-EE" dirty="0"/>
-              <a:t>Mida me POWER Bis õppinud oleme</a:t>
-            </a:r>
-          </a:p>
-        </p:txBody>
-      </p:sp>
-      <p:sp>
-        <p:nvSpPr>
-          <p:cNvPr id="3" name="Content Placeholder 2">
-            <a:extLst>
-              <a:ext uri="{FF2B5EF4-FFF2-40B4-BE49-F238E27FC236}">
-                <a16:creationId xmlns:a16="http://schemas.microsoft.com/office/drawing/2014/main" id="{CD3C14F8-A1DB-0AC6-3A5E-361FF67BCDD2}"/>
-              </a:ext>
-            </a:extLst>
-          </p:cNvPr>
-          <p:cNvSpPr>
-            <a:spLocks noGrp="1"/>
-          </p:cNvSpPr>
-          <p:nvPr>
-            <p:ph sz="quarter" idx="10"/>
-          </p:nvPr>
-        </p:nvSpPr>
-        <p:spPr>
-          <a:xfrm>
-            <a:off x="6330950" y="1420812"/>
-            <a:ext cx="5554662" cy="4465637"/>
-          </a:xfrm>
-        </p:spPr>
-        <p:txBody>
-          <a:bodyPr/>
-          <a:lstStyle/>
-          <a:p>
-            <a:r>
-              <a:rPr lang="et-EE" dirty="0"/>
-              <a:t>Kaustade tegemine</a:t>
-            </a:r>
-          </a:p>
-          <a:p>
-            <a:r>
-              <a:rPr lang="et-EE" dirty="0"/>
-              <a:t>Mõõdikute tabeli tegemine</a:t>
-            </a:r>
-          </a:p>
-          <a:p>
-            <a:r>
-              <a:rPr lang="et-EE" dirty="0"/>
-              <a:t>Visuaalid</a:t>
-            </a:r>
-          </a:p>
-          <a:p>
-            <a:pPr lvl="1"/>
-            <a:r>
-              <a:rPr lang="et-EE" dirty="0"/>
-              <a:t>Tabel</a:t>
-            </a:r>
-          </a:p>
-          <a:p>
-            <a:pPr lvl="1"/>
-            <a:r>
-              <a:rPr lang="et-EE" dirty="0"/>
-              <a:t>Graafik</a:t>
-            </a:r>
-          </a:p>
-          <a:p>
-            <a:r>
-              <a:rPr lang="et-EE" dirty="0"/>
-              <a:t>Nupp, bookmark</a:t>
-            </a:r>
-          </a:p>
-          <a:p>
-            <a:r>
-              <a:rPr lang="et-EE" dirty="0"/>
-              <a:t>Filtrid</a:t>
-            </a:r>
-          </a:p>
-          <a:p>
-            <a:r>
-              <a:rPr lang="et-EE" dirty="0"/>
-              <a:t>Tabelite filtreerimine</a:t>
-            </a:r>
-          </a:p>
-          <a:p>
-            <a:r>
-              <a:rPr lang="et-EE" dirty="0"/>
-              <a:t>Visuaalide vaheline klikkimine</a:t>
-            </a:r>
-          </a:p>
-          <a:p>
-            <a:pPr lvl="1"/>
-            <a:r>
-              <a:rPr lang="et-EE" dirty="0"/>
-              <a:t>Klikkimise eemaldamine/tagasi lülitamine</a:t>
-            </a:r>
-          </a:p>
-          <a:p>
-            <a:r>
-              <a:rPr lang="et-EE" dirty="0"/>
-              <a:t>Drill</a:t>
-            </a:r>
-          </a:p>
-          <a:p>
-            <a:r>
-              <a:rPr lang="et-EE" dirty="0"/>
-              <a:t>Sort</a:t>
-            </a:r>
-          </a:p>
-          <a:p>
-            <a:r>
-              <a:rPr lang="et-EE" dirty="0"/>
-              <a:t>Conditional formatting</a:t>
-            </a:r>
-          </a:p>
-        </p:txBody>
-      </p:sp>
-      <p:sp>
-        <p:nvSpPr>
-          <p:cNvPr id="4" name="Content Placeholder 2">
-            <a:extLst>
-              <a:ext uri="{FF2B5EF4-FFF2-40B4-BE49-F238E27FC236}">
-                <a16:creationId xmlns:a16="http://schemas.microsoft.com/office/drawing/2014/main" id="{8F981EC0-6572-C6AB-344C-F28EBF81273E}"/>
-              </a:ext>
-            </a:extLst>
-          </p:cNvPr>
-          <p:cNvSpPr txBox="1">
-            <a:spLocks/>
-          </p:cNvSpPr>
-          <p:nvPr/>
-        </p:nvSpPr>
-        <p:spPr>
-          <a:xfrm>
-            <a:off x="776288" y="1420813"/>
-            <a:ext cx="5554662" cy="4465637"/>
-          </a:xfrm>
-          <a:prstGeom prst="rect">
-            <a:avLst/>
-          </a:prstGeom>
-        </p:spPr>
-        <p:txBody>
-          <a:bodyPr vert="horz" lIns="0" tIns="0" rIns="0" bIns="0" rtlCol="0" anchor="t" anchorCtr="0">
-            <a:noAutofit/>
-          </a:bodyPr>
-          <a:lstStyle>
-            <a:lvl1pPr marL="228600" indent="-228600" algn="l" defTabSz="914400" rtl="0" eaLnBrk="1" latinLnBrk="0" hangingPunct="1">
-              <a:lnSpc>
-                <a:spcPct val="110000"/>
-              </a:lnSpc>
-              <a:spcBef>
-                <a:spcPts val="0"/>
-              </a:spcBef>
-              <a:buClr>
-                <a:schemeClr val="tx1"/>
-              </a:buClr>
-              <a:buFont typeface="Inter" panose="020B0502030000000004" pitchFamily="34" charset="0"/>
-              <a:buChar char="‣"/>
-              <a:defRPr sz="1600" b="0" i="0" kern="1200">
-                <a:solidFill>
-                  <a:schemeClr val="tx1"/>
-                </a:solidFill>
-                <a:latin typeface="+mn-lt"/>
-                <a:ea typeface="Inter" panose="02000503000000020004" pitchFamily="2" charset="0"/>
-                <a:cs typeface="Inter" panose="02000503000000020004" pitchFamily="2" charset="0"/>
-              </a:defRPr>
-            </a:lvl1pPr>
-            <a:lvl2pPr marL="742950" indent="-285750" algn="l" defTabSz="914400" rtl="0" eaLnBrk="1" latinLnBrk="0" hangingPunct="1">
-              <a:lnSpc>
-                <a:spcPct val="110000"/>
-              </a:lnSpc>
-              <a:spcBef>
-                <a:spcPts val="0"/>
-              </a:spcBef>
-              <a:buFont typeface="Inter" panose="020B0502030000000004" pitchFamily="34" charset="0"/>
-              <a:buChar char="‣"/>
-              <a:defRPr sz="1600" b="0" i="0" kern="1200">
-                <a:solidFill>
-                  <a:schemeClr val="tx1"/>
-                </a:solidFill>
-                <a:latin typeface="+mn-lt"/>
-                <a:ea typeface="Inter" panose="02000503000000020004" pitchFamily="2" charset="0"/>
-                <a:cs typeface="Inter" panose="02000503000000020004" pitchFamily="2" charset="0"/>
-              </a:defRPr>
-            </a:lvl2pPr>
-            <a:lvl3pPr marL="1143000" indent="-228600" algn="l" defTabSz="914400" rtl="0" eaLnBrk="1" latinLnBrk="0" hangingPunct="1">
-              <a:lnSpc>
-                <a:spcPct val="110000"/>
-              </a:lnSpc>
-              <a:spcBef>
-                <a:spcPts val="0"/>
-              </a:spcBef>
-              <a:buFont typeface="Inter" panose="020B0502030000000004" pitchFamily="34" charset="0"/>
-              <a:buChar char="‣"/>
-              <a:defRPr sz="1600" b="0" i="0" kern="1200">
-                <a:solidFill>
-                  <a:schemeClr val="tx1"/>
-                </a:solidFill>
-                <a:latin typeface="+mn-lt"/>
-                <a:ea typeface="Inter" panose="02000503000000020004" pitchFamily="2" charset="0"/>
-                <a:cs typeface="Inter" panose="02000503000000020004" pitchFamily="2" charset="0"/>
-              </a:defRPr>
-            </a:lvl3pPr>
-            <a:lvl4pPr marL="1600200" indent="-228600" algn="l" defTabSz="914400" rtl="0" eaLnBrk="1" latinLnBrk="0" hangingPunct="1">
-              <a:lnSpc>
-                <a:spcPct val="110000"/>
-              </a:lnSpc>
-              <a:spcBef>
-                <a:spcPts val="0"/>
-              </a:spcBef>
-              <a:buFont typeface="Inter" panose="020B0502030000000004" pitchFamily="34" charset="0"/>
-              <a:buChar char=""/>
-              <a:defRPr sz="1600" b="0" i="0" kern="1200">
-                <a:solidFill>
-                  <a:schemeClr val="tx1"/>
-                </a:solidFill>
-                <a:latin typeface="+mn-lt"/>
-                <a:ea typeface="Inter" panose="02000503000000020004" pitchFamily="2" charset="0"/>
-                <a:cs typeface="Inter" panose="02000503000000020004" pitchFamily="2" charset="0"/>
-              </a:defRPr>
-            </a:lvl4pPr>
-            <a:lvl5pPr marL="2057400" indent="-228600" algn="l" defTabSz="914400" rtl="0" eaLnBrk="1" latinLnBrk="0" hangingPunct="1">
-              <a:lnSpc>
-                <a:spcPct val="110000"/>
-              </a:lnSpc>
-              <a:spcBef>
-                <a:spcPts val="500"/>
-              </a:spcBef>
-              <a:buFont typeface="Arial" panose="020B0604020202020204" pitchFamily="34" charset="0"/>
-              <a:buChar char="•"/>
-              <a:defRPr sz="1600" b="0" i="0" kern="1200">
-                <a:solidFill>
-                  <a:schemeClr val="tx1"/>
-                </a:solidFill>
-                <a:latin typeface="+mn-lt"/>
-                <a:ea typeface="Inter" panose="02000503000000020004" pitchFamily="2" charset="0"/>
-                <a:cs typeface="Inter" panose="02000503000000020004" pitchFamily="2" charset="0"/>
-              </a:defRPr>
-            </a:lvl5pPr>
-            <a:lvl6pPr marL="2514600" indent="-228600" algn="l" defTabSz="914400" rtl="0" eaLnBrk="1" latinLnBrk="0" hangingPunct="1">
-              <a:lnSpc>
-                <a:spcPct val="90000"/>
-              </a:lnSpc>
-              <a:spcBef>
-                <a:spcPts val="500"/>
-              </a:spcBef>
-              <a:buFont typeface="Arial" panose="020B0604020202020204" pitchFamily="34" charset="0"/>
-              <a:buChar char="•"/>
-              <a:defRPr sz="1800" kern="1200">
-                <a:solidFill>
-                  <a:schemeClr val="tx1"/>
-                </a:solidFill>
-                <a:latin typeface="+mn-lt"/>
-                <a:ea typeface="+mn-ea"/>
-                <a:cs typeface="+mn-cs"/>
-              </a:defRPr>
-            </a:lvl6pPr>
-            <a:lvl7pPr marL="2971800" indent="-228600" algn="l" defTabSz="914400" rtl="0" eaLnBrk="1" latinLnBrk="0" hangingPunct="1">
-              <a:lnSpc>
-                <a:spcPct val="90000"/>
-              </a:lnSpc>
-              <a:spcBef>
-                <a:spcPts val="500"/>
-              </a:spcBef>
-              <a:buFont typeface="Arial" panose="020B0604020202020204" pitchFamily="34" charset="0"/>
-              <a:buChar char="•"/>
-              <a:defRPr sz="1800" kern="1200">
-                <a:solidFill>
-                  <a:schemeClr val="tx1"/>
-                </a:solidFill>
-                <a:latin typeface="+mn-lt"/>
-                <a:ea typeface="+mn-ea"/>
-                <a:cs typeface="+mn-cs"/>
-              </a:defRPr>
-            </a:lvl7pPr>
-            <a:lvl8pPr marL="3429000" indent="-228600" algn="l" defTabSz="914400" rtl="0" eaLnBrk="1" latinLnBrk="0" hangingPunct="1">
-              <a:lnSpc>
-                <a:spcPct val="90000"/>
-              </a:lnSpc>
-              <a:spcBef>
-                <a:spcPts val="500"/>
-              </a:spcBef>
-              <a:buFont typeface="Arial" panose="020B0604020202020204" pitchFamily="34" charset="0"/>
-              <a:buChar char="•"/>
-              <a:defRPr sz="1800" kern="1200">
-                <a:solidFill>
-                  <a:schemeClr val="tx1"/>
-                </a:solidFill>
-                <a:latin typeface="+mn-lt"/>
-                <a:ea typeface="+mn-ea"/>
-                <a:cs typeface="+mn-cs"/>
-              </a:defRPr>
-            </a:lvl8pPr>
-            <a:lvl9pPr marL="3886200" indent="-228600" algn="l" defTabSz="914400" rtl="0" eaLnBrk="1" latinLnBrk="0" hangingPunct="1">
-              <a:lnSpc>
-                <a:spcPct val="90000"/>
-              </a:lnSpc>
-              <a:spcBef>
-                <a:spcPts val="500"/>
-              </a:spcBef>
-              <a:buFont typeface="Arial" panose="020B0604020202020204" pitchFamily="34" charset="0"/>
-              <a:buChar char="•"/>
-              <a:defRPr sz="1800" kern="1200">
-                <a:solidFill>
-                  <a:schemeClr val="tx1"/>
-                </a:solidFill>
-                <a:latin typeface="+mn-lt"/>
-                <a:ea typeface="+mn-ea"/>
-                <a:cs typeface="+mn-cs"/>
-              </a:defRPr>
-            </a:lvl9pPr>
-          </a:lstStyle>
-          <a:p>
-            <a:r>
-              <a:rPr lang="et-EE"/>
-              <a:t>Faili import</a:t>
-            </a:r>
-          </a:p>
-          <a:p>
-            <a:pPr lvl="1"/>
-            <a:r>
-              <a:rPr lang="et-EE"/>
-              <a:t>Arvutist</a:t>
-            </a:r>
-          </a:p>
-          <a:p>
-            <a:pPr lvl="1"/>
-            <a:r>
-              <a:rPr lang="et-EE"/>
-              <a:t>Võrgust</a:t>
-            </a:r>
-          </a:p>
-          <a:p>
-            <a:r>
-              <a:rPr lang="et-EE"/>
-              <a:t>Andmete kontrollimine</a:t>
-            </a:r>
-          </a:p>
-          <a:p>
-            <a:pPr lvl="1"/>
-            <a:r>
-              <a:rPr lang="et-EE"/>
-              <a:t>Column distribute, Qualitiy, Profile + visuaalne kontroll</a:t>
-            </a:r>
-          </a:p>
-          <a:p>
-            <a:r>
-              <a:rPr lang="et-EE"/>
-              <a:t>Andmete parandamine</a:t>
-            </a:r>
-          </a:p>
-          <a:p>
-            <a:pPr lvl="1"/>
-            <a:r>
-              <a:rPr lang="et-EE"/>
-              <a:t>Päise rida</a:t>
-            </a:r>
-          </a:p>
-          <a:p>
-            <a:pPr lvl="1"/>
-            <a:r>
-              <a:rPr lang="et-EE"/>
-              <a:t>Tühjad read</a:t>
-            </a:r>
-          </a:p>
-          <a:p>
-            <a:pPr lvl="1"/>
-            <a:r>
-              <a:rPr lang="et-EE"/>
-              <a:t>Valed kpv eraldajad</a:t>
-            </a:r>
-          </a:p>
-          <a:p>
-            <a:pPr lvl="1"/>
-            <a:r>
-              <a:rPr lang="et-EE"/>
-              <a:t>Valed komakoha eraldajad</a:t>
-            </a:r>
-          </a:p>
-          <a:p>
-            <a:pPr lvl="1"/>
-            <a:r>
-              <a:rPr lang="et-EE"/>
-              <a:t>Valed sümbolid</a:t>
-            </a:r>
-          </a:p>
-          <a:p>
-            <a:r>
-              <a:rPr lang="et-EE"/>
-              <a:t>Andmete töötlemine ja andmemudel</a:t>
-            </a:r>
-          </a:p>
-          <a:p>
-            <a:pPr lvl="1"/>
-            <a:r>
-              <a:rPr lang="et-EE"/>
-              <a:t>Dim, fakt</a:t>
-            </a:r>
-          </a:p>
-          <a:p>
-            <a:pPr lvl="1"/>
-            <a:r>
-              <a:rPr lang="et-EE"/>
-              <a:t>Seosed, seose suund ja tüüp</a:t>
-            </a:r>
-          </a:p>
-          <a:p>
-            <a:pPr lvl="1"/>
-            <a:r>
-              <a:rPr lang="et-EE"/>
-              <a:t>Tabelisse uus arvutatud Column</a:t>
-            </a:r>
-          </a:p>
-          <a:p>
-            <a:pPr lvl="1"/>
-            <a:r>
-              <a:rPr lang="et-EE"/>
-              <a:t>Mõõdik</a:t>
-            </a:r>
-          </a:p>
-          <a:p>
-            <a:pPr lvl="1"/>
-            <a:endParaRPr lang="et-EE" dirty="0"/>
-          </a:p>
-        </p:txBody>
-      </p:sp>
-    </p:spTree>
-    <p:extLst>
-      <p:ext uri="{BB962C8B-B14F-4D97-AF65-F5344CB8AC3E}">
-        <p14:creationId xmlns:p14="http://schemas.microsoft.com/office/powerpoint/2010/main" val="2844155180"/>
-      </p:ext>
-    </p:extLst>
-  </p:cSld>
-  <p:clrMapOvr>
-    <a:masterClrMapping/>
-  </p:clrMapOvr>
-</p:sld>
-</file>
-
-<file path=ppt/slides/slide12.xml><?xml version="1.0" encoding="utf-8"?>
+<file path=ppt/slides/slide13.xml><?xml version="1.0" encoding="utf-8"?>
 <p:sld xmlns:a="http://schemas.openxmlformats.org/drawingml/2006/main" xmlns:r="http://schemas.openxmlformats.org/officeDocument/2006/relationships" xmlns:p="http://schemas.openxmlformats.org/presentationml/2006/main">
   <p:cSld>
     <p:spTree>
@@ -25126,7 +26627,7 @@
 </p:sld>
 </file>
 
-<file path=ppt/slides/slide13.xml><?xml version="1.0" encoding="utf-8"?>
+<file path=ppt/slides/slide14.xml><?xml version="1.0" encoding="utf-8"?>
 <p:sld xmlns:a="http://schemas.openxmlformats.org/drawingml/2006/main" xmlns:r="http://schemas.openxmlformats.org/officeDocument/2006/relationships" xmlns:p="http://schemas.openxmlformats.org/presentationml/2006/main">
   <p:cSld>
     <p:spTree>
@@ -25585,7 +27086,7 @@
 </p:sld>
 </file>
 
-<file path=ppt/slides/slide14.xml><?xml version="1.0" encoding="utf-8"?>
+<file path=ppt/slides/slide15.xml><?xml version="1.0" encoding="utf-8"?>
 <p:sld xmlns:a="http://schemas.openxmlformats.org/drawingml/2006/main" xmlns:r="http://schemas.openxmlformats.org/officeDocument/2006/relationships" xmlns:p="http://schemas.openxmlformats.org/presentationml/2006/main">
   <p:cSld>
     <p:spTree>
@@ -26201,7 +27702,7 @@
 </p:sld>
 </file>
 
-<file path=ppt/slides/slide15.xml><?xml version="1.0" encoding="utf-8"?>
+<file path=ppt/slides/slide16.xml><?xml version="1.0" encoding="utf-8"?>
 <p:sld xmlns:a="http://schemas.openxmlformats.org/drawingml/2006/main" xmlns:r="http://schemas.openxmlformats.org/officeDocument/2006/relationships" xmlns:p="http://schemas.openxmlformats.org/presentationml/2006/main">
   <p:cSld>
     <p:spTree>
@@ -26885,7 +28386,7 @@
 </p:sld>
 </file>
 
-<file path=ppt/slides/slide16.xml><?xml version="1.0" encoding="utf-8"?>
+<file path=ppt/slides/slide17.xml><?xml version="1.0" encoding="utf-8"?>
 <p:sld xmlns:a="http://schemas.openxmlformats.org/drawingml/2006/main" xmlns:r="http://schemas.openxmlformats.org/officeDocument/2006/relationships" xmlns:p="http://schemas.openxmlformats.org/presentationml/2006/main">
   <p:cSld>
     <p:spTree>
@@ -27365,7 +28866,7 @@
 </p:sld>
 </file>
 
-<file path=ppt/slides/slide17.xml><?xml version="1.0" encoding="utf-8"?>
+<file path=ppt/slides/slide18.xml><?xml version="1.0" encoding="utf-8"?>
 <p:sld xmlns:a="http://schemas.openxmlformats.org/drawingml/2006/main" xmlns:r="http://schemas.openxmlformats.org/officeDocument/2006/relationships" xmlns:p="http://schemas.openxmlformats.org/presentationml/2006/main">
   <p:cSld>
     <p:spTree>
@@ -28283,7 +29784,7 @@
 </p:sld>
 </file>
 
-<file path=ppt/slides/slide18.xml><?xml version="1.0" encoding="utf-8"?>
+<file path=ppt/slides/slide19.xml><?xml version="1.0" encoding="utf-8"?>
 <p:sld xmlns:a="http://schemas.openxmlformats.org/drawingml/2006/main" xmlns:r="http://schemas.openxmlformats.org/officeDocument/2006/relationships" xmlns:p="http://schemas.openxmlformats.org/presentationml/2006/main">
   <p:cSld>
     <p:spTree>
@@ -28505,93 +30006,6 @@
     <p:extLst>
       <p:ext uri="{BB962C8B-B14F-4D97-AF65-F5344CB8AC3E}">
         <p14:creationId xmlns:p14="http://schemas.microsoft.com/office/powerpoint/2010/main" val="4146186367"/>
-      </p:ext>
-    </p:extLst>
-  </p:cSld>
-  <p:clrMapOvr>
-    <a:masterClrMapping/>
-  </p:clrMapOvr>
-</p:sld>
-</file>
-
-<file path=ppt/slides/slide19.xml><?xml version="1.0" encoding="utf-8"?>
-<p:sld xmlns:a="http://schemas.openxmlformats.org/drawingml/2006/main" xmlns:r="http://schemas.openxmlformats.org/officeDocument/2006/relationships" xmlns:p="http://schemas.openxmlformats.org/presentationml/2006/main">
-  <p:cSld>
-    <p:spTree>
-      <p:nvGrpSpPr>
-        <p:cNvPr id="1" name=""/>
-        <p:cNvGrpSpPr/>
-        <p:nvPr/>
-      </p:nvGrpSpPr>
-      <p:grpSpPr>
-        <a:xfrm>
-          <a:off x="0" y="0"/>
-          <a:ext cx="0" cy="0"/>
-          <a:chOff x="0" y="0"/>
-          <a:chExt cx="0" cy="0"/>
-        </a:xfrm>
-      </p:grpSpPr>
-      <p:sp>
-        <p:nvSpPr>
-          <p:cNvPr id="2" name="Title 1">
-            <a:extLst>
-              <a:ext uri="{FF2B5EF4-FFF2-40B4-BE49-F238E27FC236}">
-                <a16:creationId xmlns:a16="http://schemas.microsoft.com/office/drawing/2014/main" id="{17642BA4-0921-C570-F635-E66488782712}"/>
-              </a:ext>
-            </a:extLst>
-          </p:cNvPr>
-          <p:cNvSpPr>
-            <a:spLocks noGrp="1"/>
-          </p:cNvSpPr>
-          <p:nvPr>
-            <p:ph type="ctrTitle"/>
-          </p:nvPr>
-        </p:nvSpPr>
-        <p:spPr/>
-        <p:txBody>
-          <a:bodyPr/>
-          <a:lstStyle/>
-          <a:p>
-            <a:r>
-              <a:rPr lang="et-EE" dirty="0"/>
-              <a:t>Graafikute võrdlus</a:t>
-            </a:r>
-            <a:br>
-              <a:rPr lang="et-EE" dirty="0"/>
-            </a:br>
-            <a:endParaRPr lang="et-EE" dirty="0"/>
-          </a:p>
-        </p:txBody>
-      </p:sp>
-      <p:sp>
-        <p:nvSpPr>
-          <p:cNvPr id="3" name="Content Placeholder 2">
-            <a:extLst>
-              <a:ext uri="{FF2B5EF4-FFF2-40B4-BE49-F238E27FC236}">
-                <a16:creationId xmlns:a16="http://schemas.microsoft.com/office/drawing/2014/main" id="{1FE764EF-FE9E-65A4-7BBE-3DF8139E02ED}"/>
-              </a:ext>
-            </a:extLst>
-          </p:cNvPr>
-          <p:cNvSpPr>
-            <a:spLocks noGrp="1"/>
-          </p:cNvSpPr>
-          <p:nvPr>
-            <p:ph sz="quarter" idx="10"/>
-          </p:nvPr>
-        </p:nvSpPr>
-        <p:spPr/>
-        <p:txBody>
-          <a:bodyPr/>
-          <a:lstStyle/>
-          <a:p>
-            <a:endParaRPr lang="et-EE" dirty="0"/>
-          </a:p>
-        </p:txBody>
-      </p:sp>
-    </p:spTree>
-    <p:extLst>
-      <p:ext uri="{BB962C8B-B14F-4D97-AF65-F5344CB8AC3E}">
-        <p14:creationId xmlns:p14="http://schemas.microsoft.com/office/powerpoint/2010/main" val="665045020"/>
       </p:ext>
     </p:extLst>
   </p:cSld>
@@ -28686,7 +30100,7 @@
             <p:ph sz="quarter" idx="10"/>
             <p:extLst>
               <p:ext uri="{D42A27DB-BD31-4B8C-83A1-F6EECF244321}">
-                <p14:modId xmlns:p14="http://schemas.microsoft.com/office/powerpoint/2010/main" val="3937847010"/>
+                <p14:modId xmlns:p14="http://schemas.microsoft.com/office/powerpoint/2010/main" val="1381639505"/>
               </p:ext>
             </p:extLst>
           </p:nvPr>
@@ -28751,37 +30165,17 @@
                           <a:effectLst/>
                           <a:latin typeface="Inter"/>
                         </a:rPr>
-                        <a:t> – M-</a:t>
+                        <a:t> </a:t>
                       </a:r>
                       <a:r>
-                        <a:rPr lang="en-US" sz="2400" b="0" i="0" dirty="0" err="1">
+                        <a:rPr lang="et-EE" sz="2400" b="0" i="0" dirty="0">
                           <a:solidFill>
                             <a:srgbClr val="121212"/>
                           </a:solidFill>
                           <a:effectLst/>
                           <a:latin typeface="Inter"/>
                         </a:rPr>
-                        <a:t>päringukeel</a:t>
-                      </a:r>
-                      <a:r>
-                        <a:rPr lang="en-US" sz="2400" b="0" i="0" dirty="0">
-                          <a:solidFill>
-                            <a:srgbClr val="121212"/>
-                          </a:solidFill>
-                          <a:effectLst/>
-                          <a:latin typeface="Inter"/>
-                        </a:rPr>
-                        <a:t> ja </a:t>
-                      </a:r>
-                      <a:r>
-                        <a:rPr lang="en-US" sz="2400" b="0" i="0" dirty="0" err="1">
-                          <a:solidFill>
-                            <a:srgbClr val="121212"/>
-                          </a:solidFill>
-                          <a:effectLst/>
-                          <a:latin typeface="Inter"/>
-                        </a:rPr>
-                        <a:t>visuaalid</a:t>
+                        <a:t>Vaatame üle seni õpitu</a:t>
                       </a:r>
                       <a:endParaRPr lang="en-US" sz="2400" b="0" i="0" dirty="0">
                         <a:solidFill>
@@ -28852,7 +30246,7 @@
                         <a:buChar char="•"/>
                       </a:pPr>
                       <a:r>
-                        <a:rPr lang="en-US" sz="2400" b="0" i="0">
+                        <a:rPr lang="en-US" sz="2400" b="0" i="0" dirty="0">
                           <a:solidFill>
                             <a:srgbClr val="121212"/>
                           </a:solidFill>
@@ -28923,7 +30317,7 @@
                         <a:buChar char="•"/>
                       </a:pPr>
                       <a:r>
-                        <a:rPr lang="en-US" sz="2400" b="0" i="0">
+                        <a:rPr lang="en-US" sz="2400" b="0" i="0" dirty="0">
                           <a:solidFill>
                             <a:srgbClr val="121212"/>
                           </a:solidFill>
@@ -28933,7 +30327,17 @@
                         <a:t>10:45 – 12:15 – </a:t>
                       </a:r>
                       <a:r>
-                        <a:rPr lang="en-US" sz="2400" b="0" i="0" err="1">
+                        <a:rPr lang="et-EE" sz="2400" b="0" i="0" dirty="0">
+                          <a:solidFill>
+                            <a:srgbClr val="121212"/>
+                          </a:solidFill>
+                          <a:effectLst/>
+                          <a:latin typeface="Inter"/>
+                        </a:rPr>
+                        <a:t> </a:t>
+                      </a:r>
+                      <a:r>
+                        <a:rPr lang="en-US" sz="2400" b="0" i="0" dirty="0" err="1">
                           <a:solidFill>
                             <a:srgbClr val="121212"/>
                           </a:solidFill>
@@ -28943,7 +30347,7 @@
                         <a:t>Koolitus</a:t>
                       </a:r>
                       <a:r>
-                        <a:rPr lang="en-US" sz="2400" b="0" i="0">
+                        <a:rPr lang="en-US" sz="2400" b="0" i="0" dirty="0">
                           <a:solidFill>
                             <a:srgbClr val="121212"/>
                           </a:solidFill>
@@ -28953,17 +30357,27 @@
                         <a:t> – </a:t>
                       </a:r>
                       <a:r>
-                        <a:rPr lang="en-US" sz="2400" b="0" i="0" u="none" strike="noStrike" noProof="0" err="1">
+                        <a:rPr lang="en-US" sz="2400" b="0" i="0" u="none" strike="noStrike" noProof="0" dirty="0">
                           <a:solidFill>
                             <a:srgbClr val="121212"/>
                           </a:solidFill>
                           <a:effectLst/>
                           <a:latin typeface="Inter"/>
                         </a:rPr>
-                        <a:t>Andmete</a:t>
+                        <a:t>Andmete </a:t>
                       </a:r>
                       <a:r>
-                        <a:rPr lang="en-US" sz="2400" b="0" i="0" u="none" strike="noStrike" noProof="0">
+                        <a:rPr lang="en-US" sz="2400" b="0" i="0" u="none" strike="noStrike" noProof="0" dirty="0" err="1">
+                          <a:solidFill>
+                            <a:srgbClr val="121212"/>
+                          </a:solidFill>
+                          <a:effectLst/>
+                          <a:latin typeface="Inter"/>
+                        </a:rPr>
+                        <a:t>visualiseerimise</a:t>
+                      </a:r>
+                      <a:r>
+                        <a:rPr lang="en-US" sz="2400" b="0" i="0" u="none" strike="noStrike" noProof="0" dirty="0">
                           <a:solidFill>
                             <a:srgbClr val="121212"/>
                           </a:solidFill>
@@ -28973,17 +30387,17 @@
                         <a:t> </a:t>
                       </a:r>
                       <a:r>
-                        <a:rPr lang="en-US" sz="2400" b="0" i="0" u="none" strike="noStrike" noProof="0" err="1">
+                        <a:rPr lang="en-US" sz="2400" b="0" i="0" u="none" strike="noStrike" noProof="0" dirty="0" err="1">
                           <a:solidFill>
                             <a:srgbClr val="121212"/>
                           </a:solidFill>
                           <a:effectLst/>
                           <a:latin typeface="Inter"/>
                         </a:rPr>
-                        <a:t>visualiseerimise</a:t>
+                        <a:t>parimad</a:t>
                       </a:r>
                       <a:r>
-                        <a:rPr lang="en-US" sz="2400" b="0" i="0" u="none" strike="noStrike" noProof="0">
+                        <a:rPr lang="en-US" sz="2400" b="0" i="0" u="none" strike="noStrike" noProof="0" dirty="0">
                           <a:solidFill>
                             <a:srgbClr val="121212"/>
                           </a:solidFill>
@@ -28993,27 +30407,7 @@
                         <a:t> </a:t>
                       </a:r>
                       <a:r>
-                        <a:rPr lang="en-US" sz="2400" b="0" i="0" u="none" strike="noStrike" noProof="0" err="1">
-                          <a:solidFill>
-                            <a:srgbClr val="121212"/>
-                          </a:solidFill>
-                          <a:effectLst/>
-                          <a:latin typeface="Inter"/>
-                        </a:rPr>
-                        <a:t>parimad</a:t>
-                      </a:r>
-                      <a:r>
-                        <a:rPr lang="en-US" sz="2400" b="0" i="0" u="none" strike="noStrike" noProof="0">
-                          <a:solidFill>
-                            <a:srgbClr val="121212"/>
-                          </a:solidFill>
-                          <a:effectLst/>
-                          <a:latin typeface="Inter"/>
-                        </a:rPr>
-                        <a:t> </a:t>
-                      </a:r>
-                      <a:r>
-                        <a:rPr lang="en-US" sz="2400" b="0" i="0" u="none" strike="noStrike" noProof="0" err="1">
+                        <a:rPr lang="en-US" sz="2400" b="0" i="0" u="none" strike="noStrike" noProof="0" dirty="0" err="1">
                           <a:solidFill>
                             <a:srgbClr val="121212"/>
                           </a:solidFill>
@@ -29022,7 +30416,7 @@
                         </a:rPr>
                         <a:t>praktikad</a:t>
                       </a:r>
-                      <a:endParaRPr lang="en-US" b="0" i="0" err="1">
+                      <a:endParaRPr lang="en-US" b="0" i="0" dirty="0">
                         <a:solidFill>
                           <a:srgbClr val="121212"/>
                         </a:solidFill>
@@ -29224,9 +30618,9 @@
                             <a:srgbClr val="121212"/>
                           </a:solidFill>
                           <a:effectLst/>
-                          <a:latin typeface="Inter"/>
+                          <a:latin typeface="+mn-lt"/>
                         </a:rPr>
-                        <a:t>Raporti</a:t>
+                        <a:t>Andmeloo</a:t>
                       </a:r>
                       <a:r>
                         <a:rPr lang="en-US" sz="2400" b="0" i="0" dirty="0">
@@ -29234,7 +30628,7 @@
                             <a:srgbClr val="121212"/>
                           </a:solidFill>
                           <a:effectLst/>
-                          <a:latin typeface="Inter"/>
+                          <a:latin typeface="+mn-lt"/>
                         </a:rPr>
                         <a:t> </a:t>
                       </a:r>
@@ -29244,49 +30638,9 @@
                             <a:srgbClr val="121212"/>
                           </a:solidFill>
                           <a:effectLst/>
-                          <a:latin typeface="Inter"/>
+                          <a:latin typeface="+mn-lt"/>
                         </a:rPr>
-                        <a:t>kirjeldamine</a:t>
-                      </a:r>
-                      <a:r>
-                        <a:rPr lang="en-US" sz="2400" b="0" i="0" dirty="0">
-                          <a:solidFill>
-                            <a:srgbClr val="121212"/>
-                          </a:solidFill>
-                          <a:effectLst/>
-                          <a:latin typeface="Inter"/>
-                        </a:rPr>
-                        <a:t>, </a:t>
-                      </a:r>
-                      <a:r>
-                        <a:rPr lang="en-US" sz="2400" b="0" i="0" dirty="0" err="1">
-                          <a:solidFill>
-                            <a:srgbClr val="121212"/>
-                          </a:solidFill>
-                          <a:effectLst/>
-                          <a:latin typeface="Inter"/>
-                        </a:rPr>
-                        <a:t>vormistamine</a:t>
-                      </a:r>
-                      <a:r>
-                        <a:rPr lang="en-US" sz="2400" b="0" i="0" dirty="0">
-                          <a:solidFill>
-                            <a:srgbClr val="121212"/>
-                          </a:solidFill>
-                          <a:effectLst/>
-                          <a:latin typeface="Inter"/>
-                        </a:rPr>
-                        <a:t> ja </a:t>
-                      </a:r>
-                      <a:r>
-                        <a:rPr lang="en-US" sz="2400" b="0" i="0" dirty="0" err="1">
-                          <a:solidFill>
-                            <a:srgbClr val="121212"/>
-                          </a:solidFill>
-                          <a:effectLst/>
-                          <a:latin typeface="Inter"/>
-                        </a:rPr>
-                        <a:t>jagamine</a:t>
+                        <a:t>jutustamine</a:t>
                       </a:r>
                       <a:endParaRPr lang="en-US" b="0" i="0" dirty="0">
                         <a:solidFill>
@@ -29435,71 +30789,121 @@
                         <a:buChar char="•"/>
                       </a:pPr>
                       <a:r>
-                        <a:rPr lang="en-US" sz="2400" b="0" i="0" dirty="0">
+                        <a:rPr lang="en-US" sz="2400" b="0" i="0" u="none" strike="noStrike" kern="1200" dirty="0">
                           <a:solidFill>
                             <a:srgbClr val="121212"/>
                           </a:solidFill>
                           <a:effectLst/>
                           <a:latin typeface="Inter"/>
+                          <a:ea typeface="+mn-ea"/>
+                          <a:cs typeface="+mn-cs"/>
                         </a:rPr>
                         <a:t>15:00 – 16:30 – </a:t>
                       </a:r>
                       <a:r>
-                        <a:rPr lang="en-US" sz="2400" b="0" i="0" dirty="0" err="1">
+                        <a:rPr lang="en-US" sz="2400" b="0" i="0" u="none" strike="noStrike" kern="1200" dirty="0" err="1">
                           <a:solidFill>
                             <a:srgbClr val="121212"/>
                           </a:solidFill>
                           <a:effectLst/>
                           <a:latin typeface="Inter"/>
+                          <a:ea typeface="+mn-ea"/>
+                          <a:cs typeface="+mn-cs"/>
                         </a:rPr>
                         <a:t>Koolitus</a:t>
                       </a:r>
                       <a:r>
-                        <a:rPr lang="en-US" sz="2400" b="0" i="0" dirty="0">
+                        <a:rPr lang="en-US" sz="2400" b="0" i="0" u="none" strike="noStrike" kern="1200" dirty="0">
                           <a:solidFill>
                             <a:srgbClr val="121212"/>
                           </a:solidFill>
                           <a:effectLst/>
                           <a:latin typeface="Inter"/>
+                          <a:ea typeface="+mn-ea"/>
+                          <a:cs typeface="+mn-cs"/>
                         </a:rPr>
-                        <a:t> - </a:t>
+                        <a:t> -</a:t>
                       </a:r>
                       <a:r>
-                        <a:rPr lang="en-US" sz="2400" b="0" i="0" dirty="0" err="1">
+                        <a:rPr lang="en-US" sz="2400" b="0" i="0" u="none" strike="noStrike" kern="1200" dirty="0" err="1">
                           <a:solidFill>
                             <a:srgbClr val="121212"/>
                           </a:solidFill>
                           <a:effectLst/>
-                          <a:latin typeface="+mn-lt"/>
+                          <a:latin typeface="Inter"/>
+                          <a:ea typeface="+mn-ea"/>
+                          <a:cs typeface="+mn-cs"/>
                         </a:rPr>
-                        <a:t>Andmeloo</a:t>
+                        <a:t>Raporti</a:t>
                       </a:r>
                       <a:r>
-                        <a:rPr lang="en-US" sz="2400" b="0" i="0" dirty="0">
+                        <a:rPr lang="en-US" sz="2400" b="0" i="0" u="none" strike="noStrike" kern="1200" dirty="0">
                           <a:solidFill>
                             <a:srgbClr val="121212"/>
                           </a:solidFill>
                           <a:effectLst/>
-                          <a:latin typeface="+mn-lt"/>
+                          <a:latin typeface="Inter"/>
+                          <a:ea typeface="+mn-ea"/>
+                          <a:cs typeface="+mn-cs"/>
                         </a:rPr>
                         <a:t> </a:t>
                       </a:r>
                       <a:r>
-                        <a:rPr lang="en-US" sz="2400" b="0" i="0" dirty="0" err="1">
+                        <a:rPr lang="en-US" sz="2400" b="0" i="0" u="none" strike="noStrike" kern="1200" dirty="0" err="1">
                           <a:solidFill>
                             <a:srgbClr val="121212"/>
                           </a:solidFill>
                           <a:effectLst/>
-                          <a:latin typeface="+mn-lt"/>
+                          <a:latin typeface="Inter"/>
+                          <a:ea typeface="+mn-ea"/>
+                          <a:cs typeface="+mn-cs"/>
                         </a:rPr>
-                        <a:t>jutustamine</a:t>
+                        <a:t>kirjeldamine</a:t>
                       </a:r>
-                      <a:endParaRPr lang="en-US" b="0" i="0" dirty="0">
+                      <a:r>
+                        <a:rPr lang="en-US" sz="2400" b="0" i="0" u="none" strike="noStrike" kern="1200" dirty="0">
+                          <a:solidFill>
+                            <a:srgbClr val="121212"/>
+                          </a:solidFill>
+                          <a:effectLst/>
+                          <a:latin typeface="Inter"/>
+                          <a:ea typeface="+mn-ea"/>
+                          <a:cs typeface="+mn-cs"/>
+                        </a:rPr>
+                        <a:t>, </a:t>
+                      </a:r>
+                      <a:r>
+                        <a:rPr lang="en-US" sz="2400" b="0" i="0" u="none" strike="noStrike" kern="1200" dirty="0" err="1">
+                          <a:solidFill>
+                            <a:srgbClr val="121212"/>
+                          </a:solidFill>
+                          <a:effectLst/>
+                          <a:latin typeface="Inter"/>
+                          <a:ea typeface="+mn-ea"/>
+                          <a:cs typeface="+mn-cs"/>
+                        </a:rPr>
+                        <a:t>vormistamin</a:t>
+                      </a:r>
+                      <a:r>
+                        <a:rPr lang="et-EE" sz="2400" b="0" i="0" u="none" strike="noStrike" kern="1200" dirty="0">
+                          <a:solidFill>
+                            <a:srgbClr val="121212"/>
+                          </a:solidFill>
+                          <a:effectLst/>
+                          <a:latin typeface="Inter"/>
+                          <a:ea typeface="+mn-ea"/>
+                          <a:cs typeface="+mn-cs"/>
+                        </a:rPr>
+                        <a:t>e</a:t>
+                      </a:r>
+                      <a:endParaRPr lang="en-US" sz="2400" b="0" i="0" u="none" strike="noStrike" kern="1200" dirty="0">
                         <a:solidFill>
                           <a:srgbClr val="121212"/>
                         </a:solidFill>
                         <a:effectLst/>
                         <a:latin typeface="Inter"/>
+                        <a:ea typeface="+mn-ea"/>
+                        <a:cs typeface="+mn-cs"/>
                       </a:endParaRPr>
                     </a:p>
                   </a:txBody>
@@ -29571,6 +30975,93 @@
   <p:cSld>
     <p:spTree>
       <p:nvGrpSpPr>
+        <p:cNvPr id="1" name=""/>
+        <p:cNvGrpSpPr/>
+        <p:nvPr/>
+      </p:nvGrpSpPr>
+      <p:grpSpPr>
+        <a:xfrm>
+          <a:off x="0" y="0"/>
+          <a:ext cx="0" cy="0"/>
+          <a:chOff x="0" y="0"/>
+          <a:chExt cx="0" cy="0"/>
+        </a:xfrm>
+      </p:grpSpPr>
+      <p:sp>
+        <p:nvSpPr>
+          <p:cNvPr id="2" name="Title 1">
+            <a:extLst>
+              <a:ext uri="{FF2B5EF4-FFF2-40B4-BE49-F238E27FC236}">
+                <a16:creationId xmlns:a16="http://schemas.microsoft.com/office/drawing/2014/main" id="{17642BA4-0921-C570-F635-E66488782712}"/>
+              </a:ext>
+            </a:extLst>
+          </p:cNvPr>
+          <p:cNvSpPr>
+            <a:spLocks noGrp="1"/>
+          </p:cNvSpPr>
+          <p:nvPr>
+            <p:ph type="ctrTitle"/>
+          </p:nvPr>
+        </p:nvSpPr>
+        <p:spPr/>
+        <p:txBody>
+          <a:bodyPr/>
+          <a:lstStyle/>
+          <a:p>
+            <a:r>
+              <a:rPr lang="et-EE" dirty="0"/>
+              <a:t>Graafikute võrdlus</a:t>
+            </a:r>
+            <a:br>
+              <a:rPr lang="et-EE" dirty="0"/>
+            </a:br>
+            <a:endParaRPr lang="et-EE" dirty="0"/>
+          </a:p>
+        </p:txBody>
+      </p:sp>
+      <p:sp>
+        <p:nvSpPr>
+          <p:cNvPr id="3" name="Content Placeholder 2">
+            <a:extLst>
+              <a:ext uri="{FF2B5EF4-FFF2-40B4-BE49-F238E27FC236}">
+                <a16:creationId xmlns:a16="http://schemas.microsoft.com/office/drawing/2014/main" id="{1FE764EF-FE9E-65A4-7BBE-3DF8139E02ED}"/>
+              </a:ext>
+            </a:extLst>
+          </p:cNvPr>
+          <p:cNvSpPr>
+            <a:spLocks noGrp="1"/>
+          </p:cNvSpPr>
+          <p:nvPr>
+            <p:ph sz="quarter" idx="10"/>
+          </p:nvPr>
+        </p:nvSpPr>
+        <p:spPr/>
+        <p:txBody>
+          <a:bodyPr/>
+          <a:lstStyle/>
+          <a:p>
+            <a:endParaRPr lang="et-EE" dirty="0"/>
+          </a:p>
+        </p:txBody>
+      </p:sp>
+    </p:spTree>
+    <p:extLst>
+      <p:ext uri="{BB962C8B-B14F-4D97-AF65-F5344CB8AC3E}">
+        <p14:creationId xmlns:p14="http://schemas.microsoft.com/office/powerpoint/2010/main" val="665045020"/>
+      </p:ext>
+    </p:extLst>
+  </p:cSld>
+  <p:clrMapOvr>
+    <a:masterClrMapping/>
+  </p:clrMapOvr>
+</p:sld>
+</file>
+
+<file path=ppt/slides/slide21.xml><?xml version="1.0" encoding="utf-8"?>
+<p:sld xmlns:a="http://schemas.openxmlformats.org/drawingml/2006/main" xmlns:r="http://schemas.openxmlformats.org/officeDocument/2006/relationships" xmlns:p="http://schemas.openxmlformats.org/presentationml/2006/main">
+  <p:cSld>
+    <p:spTree>
+      <p:nvGrpSpPr>
         <p:cNvPr id="1" name="">
           <a:extLst>
             <a:ext uri="{FF2B5EF4-FFF2-40B4-BE49-F238E27FC236}">
@@ -29726,7 +31217,7 @@
 </p:sld>
 </file>
 
-<file path=ppt/slides/slide21.xml><?xml version="1.0" encoding="utf-8"?>
+<file path=ppt/slides/slide22.xml><?xml version="1.0" encoding="utf-8"?>
 <p:sld xmlns:a="http://schemas.openxmlformats.org/drawingml/2006/main" xmlns:r="http://schemas.openxmlformats.org/officeDocument/2006/relationships" xmlns:p="http://schemas.openxmlformats.org/presentationml/2006/main">
   <p:cSld>
     <p:spTree>
@@ -29913,7 +31404,7 @@
 </p:sld>
 </file>
 
-<file path=ppt/slides/slide22.xml><?xml version="1.0" encoding="utf-8"?>
+<file path=ppt/slides/slide23.xml><?xml version="1.0" encoding="utf-8"?>
 <p:sld xmlns:a="http://schemas.openxmlformats.org/drawingml/2006/main" xmlns:r="http://schemas.openxmlformats.org/officeDocument/2006/relationships" xmlns:p="http://schemas.openxmlformats.org/presentationml/2006/main">
   <p:cSld>
     <p:spTree>
@@ -30164,7 +31655,7 @@
 </p:sld>
 </file>
 
-<file path=ppt/slides/slide23.xml><?xml version="1.0" encoding="utf-8"?>
+<file path=ppt/slides/slide24.xml><?xml version="1.0" encoding="utf-8"?>
 <p:sld xmlns:a="http://schemas.openxmlformats.org/drawingml/2006/main" xmlns:r="http://schemas.openxmlformats.org/officeDocument/2006/relationships" xmlns:p="http://schemas.openxmlformats.org/presentationml/2006/main">
   <p:cSld>
     <p:spTree>
@@ -30324,7 +31815,7 @@
 </p:sld>
 </file>
 
-<file path=ppt/slides/slide24.xml><?xml version="1.0" encoding="utf-8"?>
+<file path=ppt/slides/slide25.xml><?xml version="1.0" encoding="utf-8"?>
 <p:sld xmlns:a="http://schemas.openxmlformats.org/drawingml/2006/main" xmlns:r="http://schemas.openxmlformats.org/officeDocument/2006/relationships" xmlns:p="http://schemas.openxmlformats.org/presentationml/2006/main">
   <p:cSld>
     <p:spTree>
@@ -30535,7 +32026,7 @@
 </p:sld>
 </file>
 
-<file path=ppt/slides/slide25.xml><?xml version="1.0" encoding="utf-8"?>
+<file path=ppt/slides/slide26.xml><?xml version="1.0" encoding="utf-8"?>
 <p:sld xmlns:a="http://schemas.openxmlformats.org/drawingml/2006/main" xmlns:r="http://schemas.openxmlformats.org/officeDocument/2006/relationships" xmlns:p="http://schemas.openxmlformats.org/presentationml/2006/main">
   <p:cSld>
     <p:spTree>
@@ -30666,7 +32157,7 @@
 </p:sld>
 </file>
 
-<file path=ppt/slides/slide26.xml><?xml version="1.0" encoding="utf-8"?>
+<file path=ppt/slides/slide27.xml><?xml version="1.0" encoding="utf-8"?>
 <p:sld xmlns:a="http://schemas.openxmlformats.org/drawingml/2006/main" xmlns:r="http://schemas.openxmlformats.org/officeDocument/2006/relationships" xmlns:p="http://schemas.openxmlformats.org/presentationml/2006/main">
   <p:cSld>
     <p:spTree>
@@ -30825,7 +32316,7 @@
 </p:sld>
 </file>
 
-<file path=ppt/slides/slide27.xml><?xml version="1.0" encoding="utf-8"?>
+<file path=ppt/slides/slide28.xml><?xml version="1.0" encoding="utf-8"?>
 <p:sld xmlns:a="http://schemas.openxmlformats.org/drawingml/2006/main" xmlns:r="http://schemas.openxmlformats.org/officeDocument/2006/relationships" xmlns:p="http://schemas.openxmlformats.org/presentationml/2006/main">
   <p:cSld>
     <p:spTree>
@@ -31485,7 +32976,7 @@
 </p:sld>
 </file>
 
-<file path=ppt/slides/slide28.xml><?xml version="1.0" encoding="utf-8"?>
+<file path=ppt/slides/slide29.xml><?xml version="1.0" encoding="utf-8"?>
 <p:sld xmlns:a="http://schemas.openxmlformats.org/drawingml/2006/main" xmlns:r="http://schemas.openxmlformats.org/officeDocument/2006/relationships" xmlns:p="http://schemas.openxmlformats.org/presentationml/2006/main">
   <p:cSld>
     <p:spTree>
@@ -31781,7 +33272,506 @@
 </p:sld>
 </file>
 
-<file path=ppt/slides/slide29.xml><?xml version="1.0" encoding="utf-8"?>
+<file path=ppt/slides/slide3.xml><?xml version="1.0" encoding="utf-8"?>
+<p:sld xmlns:a="http://schemas.openxmlformats.org/drawingml/2006/main" xmlns:r="http://schemas.openxmlformats.org/officeDocument/2006/relationships" xmlns:p="http://schemas.openxmlformats.org/presentationml/2006/main">
+  <p:cSld>
+    <p:spTree>
+      <p:nvGrpSpPr>
+        <p:cNvPr id="1" name=""/>
+        <p:cNvGrpSpPr/>
+        <p:nvPr/>
+      </p:nvGrpSpPr>
+      <p:grpSpPr>
+        <a:xfrm>
+          <a:off x="0" y="0"/>
+          <a:ext cx="0" cy="0"/>
+          <a:chOff x="0" y="0"/>
+          <a:chExt cx="0" cy="0"/>
+        </a:xfrm>
+      </p:grpSpPr>
+      <p:sp>
+        <p:nvSpPr>
+          <p:cNvPr id="2" name="Title 1">
+            <a:extLst>
+              <a:ext uri="{FF2B5EF4-FFF2-40B4-BE49-F238E27FC236}">
+                <a16:creationId xmlns:a16="http://schemas.microsoft.com/office/drawing/2014/main" id="{4155340F-C524-6C04-CAB6-B5622613C264}"/>
+              </a:ext>
+            </a:extLst>
+          </p:cNvPr>
+          <p:cNvSpPr>
+            <a:spLocks noGrp="1"/>
+          </p:cNvSpPr>
+          <p:nvPr>
+            <p:ph type="ctrTitle"/>
+          </p:nvPr>
+        </p:nvSpPr>
+        <p:spPr/>
+        <p:txBody>
+          <a:bodyPr/>
+          <a:lstStyle/>
+          <a:p>
+            <a:r>
+              <a:rPr lang="et-EE" dirty="0"/>
+              <a:t>Mida me POWER Bis õppinud oleme</a:t>
+            </a:r>
+          </a:p>
+        </p:txBody>
+      </p:sp>
+      <p:sp>
+        <p:nvSpPr>
+          <p:cNvPr id="3" name="Content Placeholder 2">
+            <a:extLst>
+              <a:ext uri="{FF2B5EF4-FFF2-40B4-BE49-F238E27FC236}">
+                <a16:creationId xmlns:a16="http://schemas.microsoft.com/office/drawing/2014/main" id="{CD3C14F8-A1DB-0AC6-3A5E-361FF67BCDD2}"/>
+              </a:ext>
+            </a:extLst>
+          </p:cNvPr>
+          <p:cNvSpPr>
+            <a:spLocks noGrp="1"/>
+          </p:cNvSpPr>
+          <p:nvPr>
+            <p:ph sz="quarter" idx="10"/>
+          </p:nvPr>
+        </p:nvSpPr>
+        <p:spPr>
+          <a:xfrm>
+            <a:off x="6330950" y="1420812"/>
+            <a:ext cx="5554662" cy="4465637"/>
+          </a:xfrm>
+        </p:spPr>
+        <p:txBody>
+          <a:bodyPr/>
+          <a:lstStyle/>
+          <a:p>
+            <a:r>
+              <a:rPr lang="et-EE" dirty="0"/>
+              <a:t>Kaustade tegemine</a:t>
+            </a:r>
+          </a:p>
+          <a:p>
+            <a:r>
+              <a:rPr lang="et-EE" dirty="0"/>
+              <a:t>Mõõdikute tabeli tegemine</a:t>
+            </a:r>
+          </a:p>
+          <a:p>
+            <a:r>
+              <a:rPr lang="et-EE" dirty="0"/>
+              <a:t>Visuaalid</a:t>
+            </a:r>
+          </a:p>
+          <a:p>
+            <a:pPr lvl="1"/>
+            <a:r>
+              <a:rPr lang="et-EE" dirty="0"/>
+              <a:t>Tabel</a:t>
+            </a:r>
+          </a:p>
+          <a:p>
+            <a:pPr lvl="1"/>
+            <a:r>
+              <a:rPr lang="et-EE" dirty="0"/>
+              <a:t>Graafik</a:t>
+            </a:r>
+          </a:p>
+          <a:p>
+            <a:r>
+              <a:rPr lang="et-EE" dirty="0"/>
+              <a:t>Nupp, bookmark</a:t>
+            </a:r>
+          </a:p>
+          <a:p>
+            <a:r>
+              <a:rPr lang="et-EE" dirty="0"/>
+              <a:t>Filtrid</a:t>
+            </a:r>
+          </a:p>
+          <a:p>
+            <a:r>
+              <a:rPr lang="et-EE" dirty="0"/>
+              <a:t>Tabelite filtreerimine</a:t>
+            </a:r>
+          </a:p>
+          <a:p>
+            <a:r>
+              <a:rPr lang="et-EE" dirty="0"/>
+              <a:t>Visuaalide vaheline klikkimine</a:t>
+            </a:r>
+          </a:p>
+          <a:p>
+            <a:pPr lvl="1"/>
+            <a:r>
+              <a:rPr lang="et-EE" dirty="0"/>
+              <a:t>Klikkimise eemaldamine/tagasi lülitamine</a:t>
+            </a:r>
+          </a:p>
+          <a:p>
+            <a:r>
+              <a:rPr lang="et-EE" dirty="0"/>
+              <a:t>Drill</a:t>
+            </a:r>
+          </a:p>
+          <a:p>
+            <a:r>
+              <a:rPr lang="et-EE" dirty="0"/>
+              <a:t>Sort</a:t>
+            </a:r>
+          </a:p>
+          <a:p>
+            <a:r>
+              <a:rPr lang="et-EE" dirty="0"/>
+              <a:t>Conditional formatting</a:t>
+            </a:r>
+          </a:p>
+          <a:p>
+            <a:r>
+              <a:rPr lang="et-EE" sz="2000" i="1" dirty="0"/>
+              <a:t>Mõõdikute kirjelduse tabel</a:t>
+            </a:r>
+          </a:p>
+          <a:p>
+            <a:r>
+              <a:rPr lang="et-EE" sz="2000" i="1" dirty="0"/>
+              <a:t>Objektide kirjeldused</a:t>
+            </a:r>
+          </a:p>
+          <a:p>
+            <a:r>
+              <a:rPr lang="et-EE" sz="2000" i="1" dirty="0"/>
+              <a:t>Visuaalil agregeerimine</a:t>
+            </a:r>
+          </a:p>
+        </p:txBody>
+      </p:sp>
+      <p:sp>
+        <p:nvSpPr>
+          <p:cNvPr id="4" name="Content Placeholder 2">
+            <a:extLst>
+              <a:ext uri="{FF2B5EF4-FFF2-40B4-BE49-F238E27FC236}">
+                <a16:creationId xmlns:a16="http://schemas.microsoft.com/office/drawing/2014/main" id="{8F981EC0-6572-C6AB-344C-F28EBF81273E}"/>
+              </a:ext>
+            </a:extLst>
+          </p:cNvPr>
+          <p:cNvSpPr txBox="1">
+            <a:spLocks/>
+          </p:cNvSpPr>
+          <p:nvPr/>
+        </p:nvSpPr>
+        <p:spPr>
+          <a:xfrm>
+            <a:off x="776288" y="1420813"/>
+            <a:ext cx="5554662" cy="4465637"/>
+          </a:xfrm>
+          <a:prstGeom prst="rect">
+            <a:avLst/>
+          </a:prstGeom>
+        </p:spPr>
+        <p:txBody>
+          <a:bodyPr vert="horz" lIns="0" tIns="0" rIns="0" bIns="0" rtlCol="0" anchor="t" anchorCtr="0">
+            <a:noAutofit/>
+          </a:bodyPr>
+          <a:lstStyle>
+            <a:lvl1pPr marL="228600" indent="-228600" algn="l" defTabSz="914400" rtl="0" eaLnBrk="1" latinLnBrk="0" hangingPunct="1">
+              <a:lnSpc>
+                <a:spcPct val="110000"/>
+              </a:lnSpc>
+              <a:spcBef>
+                <a:spcPts val="0"/>
+              </a:spcBef>
+              <a:buClr>
+                <a:schemeClr val="tx1"/>
+              </a:buClr>
+              <a:buFont typeface="Inter" panose="020B0502030000000004" pitchFamily="34" charset="0"/>
+              <a:buChar char="‣"/>
+              <a:defRPr sz="1600" b="0" i="0" kern="1200">
+                <a:solidFill>
+                  <a:schemeClr val="tx1"/>
+                </a:solidFill>
+                <a:latin typeface="+mn-lt"/>
+                <a:ea typeface="Inter" panose="02000503000000020004" pitchFamily="2" charset="0"/>
+                <a:cs typeface="Inter" panose="02000503000000020004" pitchFamily="2" charset="0"/>
+              </a:defRPr>
+            </a:lvl1pPr>
+            <a:lvl2pPr marL="742950" indent="-285750" algn="l" defTabSz="914400" rtl="0" eaLnBrk="1" latinLnBrk="0" hangingPunct="1">
+              <a:lnSpc>
+                <a:spcPct val="110000"/>
+              </a:lnSpc>
+              <a:spcBef>
+                <a:spcPts val="0"/>
+              </a:spcBef>
+              <a:buFont typeface="Inter" panose="020B0502030000000004" pitchFamily="34" charset="0"/>
+              <a:buChar char="‣"/>
+              <a:defRPr sz="1600" b="0" i="0" kern="1200">
+                <a:solidFill>
+                  <a:schemeClr val="tx1"/>
+                </a:solidFill>
+                <a:latin typeface="+mn-lt"/>
+                <a:ea typeface="Inter" panose="02000503000000020004" pitchFamily="2" charset="0"/>
+                <a:cs typeface="Inter" panose="02000503000000020004" pitchFamily="2" charset="0"/>
+              </a:defRPr>
+            </a:lvl2pPr>
+            <a:lvl3pPr marL="1143000" indent="-228600" algn="l" defTabSz="914400" rtl="0" eaLnBrk="1" latinLnBrk="0" hangingPunct="1">
+              <a:lnSpc>
+                <a:spcPct val="110000"/>
+              </a:lnSpc>
+              <a:spcBef>
+                <a:spcPts val="0"/>
+              </a:spcBef>
+              <a:buFont typeface="Inter" panose="020B0502030000000004" pitchFamily="34" charset="0"/>
+              <a:buChar char="‣"/>
+              <a:defRPr sz="1600" b="0" i="0" kern="1200">
+                <a:solidFill>
+                  <a:schemeClr val="tx1"/>
+                </a:solidFill>
+                <a:latin typeface="+mn-lt"/>
+                <a:ea typeface="Inter" panose="02000503000000020004" pitchFamily="2" charset="0"/>
+                <a:cs typeface="Inter" panose="02000503000000020004" pitchFamily="2" charset="0"/>
+              </a:defRPr>
+            </a:lvl3pPr>
+            <a:lvl4pPr marL="1600200" indent="-228600" algn="l" defTabSz="914400" rtl="0" eaLnBrk="1" latinLnBrk="0" hangingPunct="1">
+              <a:lnSpc>
+                <a:spcPct val="110000"/>
+              </a:lnSpc>
+              <a:spcBef>
+                <a:spcPts val="0"/>
+              </a:spcBef>
+              <a:buFont typeface="Inter" panose="020B0502030000000004" pitchFamily="34" charset="0"/>
+              <a:buChar char=""/>
+              <a:defRPr sz="1600" b="0" i="0" kern="1200">
+                <a:solidFill>
+                  <a:schemeClr val="tx1"/>
+                </a:solidFill>
+                <a:latin typeface="+mn-lt"/>
+                <a:ea typeface="Inter" panose="02000503000000020004" pitchFamily="2" charset="0"/>
+                <a:cs typeface="Inter" panose="02000503000000020004" pitchFamily="2" charset="0"/>
+              </a:defRPr>
+            </a:lvl4pPr>
+            <a:lvl5pPr marL="2057400" indent="-228600" algn="l" defTabSz="914400" rtl="0" eaLnBrk="1" latinLnBrk="0" hangingPunct="1">
+              <a:lnSpc>
+                <a:spcPct val="110000"/>
+              </a:lnSpc>
+              <a:spcBef>
+                <a:spcPts val="500"/>
+              </a:spcBef>
+              <a:buFont typeface="Arial" panose="020B0604020202020204" pitchFamily="34" charset="0"/>
+              <a:buChar char="•"/>
+              <a:defRPr sz="1600" b="0" i="0" kern="1200">
+                <a:solidFill>
+                  <a:schemeClr val="tx1"/>
+                </a:solidFill>
+                <a:latin typeface="+mn-lt"/>
+                <a:ea typeface="Inter" panose="02000503000000020004" pitchFamily="2" charset="0"/>
+                <a:cs typeface="Inter" panose="02000503000000020004" pitchFamily="2" charset="0"/>
+              </a:defRPr>
+            </a:lvl5pPr>
+            <a:lvl6pPr marL="2514600" indent="-228600" algn="l" defTabSz="914400" rtl="0" eaLnBrk="1" latinLnBrk="0" hangingPunct="1">
+              <a:lnSpc>
+                <a:spcPct val="90000"/>
+              </a:lnSpc>
+              <a:spcBef>
+                <a:spcPts val="500"/>
+              </a:spcBef>
+              <a:buFont typeface="Arial" panose="020B0604020202020204" pitchFamily="34" charset="0"/>
+              <a:buChar char="•"/>
+              <a:defRPr sz="1800" kern="1200">
+                <a:solidFill>
+                  <a:schemeClr val="tx1"/>
+                </a:solidFill>
+                <a:latin typeface="+mn-lt"/>
+                <a:ea typeface="+mn-ea"/>
+                <a:cs typeface="+mn-cs"/>
+              </a:defRPr>
+            </a:lvl6pPr>
+            <a:lvl7pPr marL="2971800" indent="-228600" algn="l" defTabSz="914400" rtl="0" eaLnBrk="1" latinLnBrk="0" hangingPunct="1">
+              <a:lnSpc>
+                <a:spcPct val="90000"/>
+              </a:lnSpc>
+              <a:spcBef>
+                <a:spcPts val="500"/>
+              </a:spcBef>
+              <a:buFont typeface="Arial" panose="020B0604020202020204" pitchFamily="34" charset="0"/>
+              <a:buChar char="•"/>
+              <a:defRPr sz="1800" kern="1200">
+                <a:solidFill>
+                  <a:schemeClr val="tx1"/>
+                </a:solidFill>
+                <a:latin typeface="+mn-lt"/>
+                <a:ea typeface="+mn-ea"/>
+                <a:cs typeface="+mn-cs"/>
+              </a:defRPr>
+            </a:lvl7pPr>
+            <a:lvl8pPr marL="3429000" indent="-228600" algn="l" defTabSz="914400" rtl="0" eaLnBrk="1" latinLnBrk="0" hangingPunct="1">
+              <a:lnSpc>
+                <a:spcPct val="90000"/>
+              </a:lnSpc>
+              <a:spcBef>
+                <a:spcPts val="500"/>
+              </a:spcBef>
+              <a:buFont typeface="Arial" panose="020B0604020202020204" pitchFamily="34" charset="0"/>
+              <a:buChar char="•"/>
+              <a:defRPr sz="1800" kern="1200">
+                <a:solidFill>
+                  <a:schemeClr val="tx1"/>
+                </a:solidFill>
+                <a:latin typeface="+mn-lt"/>
+                <a:ea typeface="+mn-ea"/>
+                <a:cs typeface="+mn-cs"/>
+              </a:defRPr>
+            </a:lvl8pPr>
+            <a:lvl9pPr marL="3886200" indent="-228600" algn="l" defTabSz="914400" rtl="0" eaLnBrk="1" latinLnBrk="0" hangingPunct="1">
+              <a:lnSpc>
+                <a:spcPct val="90000"/>
+              </a:lnSpc>
+              <a:spcBef>
+                <a:spcPts val="500"/>
+              </a:spcBef>
+              <a:buFont typeface="Arial" panose="020B0604020202020204" pitchFamily="34" charset="0"/>
+              <a:buChar char="•"/>
+              <a:defRPr sz="1800" kern="1200">
+                <a:solidFill>
+                  <a:schemeClr val="tx1"/>
+                </a:solidFill>
+                <a:latin typeface="+mn-lt"/>
+                <a:ea typeface="+mn-ea"/>
+                <a:cs typeface="+mn-cs"/>
+              </a:defRPr>
+            </a:lvl9pPr>
+          </a:lstStyle>
+          <a:p>
+            <a:r>
+              <a:rPr lang="et-EE" dirty="0"/>
+              <a:t>Faili import</a:t>
+            </a:r>
+          </a:p>
+          <a:p>
+            <a:pPr lvl="1"/>
+            <a:r>
+              <a:rPr lang="et-EE" dirty="0"/>
+              <a:t>Arvutist</a:t>
+            </a:r>
+          </a:p>
+          <a:p>
+            <a:pPr lvl="1"/>
+            <a:r>
+              <a:rPr lang="et-EE" sz="2000" i="1" dirty="0"/>
+              <a:t>Võrgust</a:t>
+            </a:r>
+          </a:p>
+          <a:p>
+            <a:r>
+              <a:rPr lang="et-EE" dirty="0"/>
+              <a:t>Andmete kontrollimine</a:t>
+            </a:r>
+          </a:p>
+          <a:p>
+            <a:pPr lvl="1"/>
+            <a:r>
+              <a:rPr lang="et-EE" dirty="0"/>
+              <a:t>Column distribute, Qualitiy, Profile + visuaalne kontroll</a:t>
+            </a:r>
+          </a:p>
+          <a:p>
+            <a:pPr lvl="1"/>
+            <a:r>
+              <a:rPr lang="et-EE" sz="1800" i="1" dirty="0"/>
+              <a:t>Veergude lõikamine, dubleerimine</a:t>
+            </a:r>
+          </a:p>
+          <a:p>
+            <a:r>
+              <a:rPr lang="et-EE" dirty="0"/>
+              <a:t>Andmete parandamine</a:t>
+            </a:r>
+          </a:p>
+          <a:p>
+            <a:pPr lvl="1"/>
+            <a:r>
+              <a:rPr lang="et-EE" dirty="0"/>
+              <a:t>Päise rida</a:t>
+            </a:r>
+          </a:p>
+          <a:p>
+            <a:pPr lvl="1"/>
+            <a:r>
+              <a:rPr lang="et-EE" dirty="0"/>
+              <a:t>Tühjad read</a:t>
+            </a:r>
+          </a:p>
+          <a:p>
+            <a:pPr lvl="1"/>
+            <a:r>
+              <a:rPr lang="et-EE" dirty="0"/>
+              <a:t>Valed kpv eraldajad</a:t>
+            </a:r>
+          </a:p>
+          <a:p>
+            <a:pPr lvl="1"/>
+            <a:r>
+              <a:rPr lang="et-EE" dirty="0"/>
+              <a:t>Valed komakoha eraldajad</a:t>
+            </a:r>
+          </a:p>
+          <a:p>
+            <a:pPr lvl="1"/>
+            <a:r>
+              <a:rPr lang="et-EE" dirty="0"/>
+              <a:t>Valed sümbolid</a:t>
+            </a:r>
+          </a:p>
+          <a:p>
+            <a:r>
+              <a:rPr lang="et-EE" dirty="0"/>
+              <a:t>Andmete töötlemine ja andmemudel</a:t>
+            </a:r>
+          </a:p>
+          <a:p>
+            <a:pPr lvl="1"/>
+            <a:r>
+              <a:rPr lang="et-EE" dirty="0"/>
+              <a:t>Dim, fakt</a:t>
+            </a:r>
+          </a:p>
+          <a:p>
+            <a:pPr lvl="1"/>
+            <a:r>
+              <a:rPr lang="et-EE" dirty="0"/>
+              <a:t>Seosed, seose suund ja tüüp</a:t>
+            </a:r>
+          </a:p>
+          <a:p>
+            <a:pPr lvl="1"/>
+            <a:r>
+              <a:rPr lang="et-EE" dirty="0"/>
+              <a:t>Tabelisse uus arvutatud Column</a:t>
+            </a:r>
+          </a:p>
+          <a:p>
+            <a:pPr lvl="1"/>
+            <a:r>
+              <a:rPr lang="et-EE" dirty="0"/>
+              <a:t>Mõõdik</a:t>
+            </a:r>
+          </a:p>
+          <a:p>
+            <a:pPr lvl="1"/>
+            <a:endParaRPr lang="et-EE" dirty="0"/>
+          </a:p>
+        </p:txBody>
+      </p:sp>
+    </p:spTree>
+    <p:extLst>
+      <p:ext uri="{BB962C8B-B14F-4D97-AF65-F5344CB8AC3E}">
+        <p14:creationId xmlns:p14="http://schemas.microsoft.com/office/powerpoint/2010/main" val="2844155180"/>
+      </p:ext>
+    </p:extLst>
+  </p:cSld>
+  <p:clrMapOvr>
+    <a:masterClrMapping/>
+  </p:clrMapOvr>
+</p:sld>
+</file>
+
+<file path=ppt/slides/slide30.xml><?xml version="1.0" encoding="utf-8"?>
 <p:sld xmlns:a="http://schemas.openxmlformats.org/drawingml/2006/main" xmlns:r="http://schemas.openxmlformats.org/officeDocument/2006/relationships" xmlns:p="http://schemas.openxmlformats.org/presentationml/2006/main">
   <p:cSld>
     <p:spTree>
@@ -32125,263 +34115,7 @@
 </p:sld>
 </file>
 
-<file path=ppt/slides/slide3.xml><?xml version="1.0" encoding="utf-8"?>
-<p:sld xmlns:a="http://schemas.openxmlformats.org/drawingml/2006/main" xmlns:r="http://schemas.openxmlformats.org/officeDocument/2006/relationships" xmlns:p="http://schemas.openxmlformats.org/presentationml/2006/main">
-  <p:cSld>
-    <p:spTree>
-      <p:nvGrpSpPr>
-        <p:cNvPr id="1" name=""/>
-        <p:cNvGrpSpPr/>
-        <p:nvPr/>
-      </p:nvGrpSpPr>
-      <p:grpSpPr>
-        <a:xfrm>
-          <a:off x="0" y="0"/>
-          <a:ext cx="0" cy="0"/>
-          <a:chOff x="0" y="0"/>
-          <a:chExt cx="0" cy="0"/>
-        </a:xfrm>
-      </p:grpSpPr>
-      <p:sp>
-        <p:nvSpPr>
-          <p:cNvPr id="2" name="Title 1">
-            <a:extLst>
-              <a:ext uri="{FF2B5EF4-FFF2-40B4-BE49-F238E27FC236}">
-                <a16:creationId xmlns:a16="http://schemas.microsoft.com/office/drawing/2014/main" id="{0C3C55E8-FBF1-AD5D-6DA0-CBD58BBEB5DB}"/>
-              </a:ext>
-            </a:extLst>
-          </p:cNvPr>
-          <p:cNvSpPr>
-            <a:spLocks noGrp="1"/>
-          </p:cNvSpPr>
-          <p:nvPr>
-            <p:ph type="ctrTitle"/>
-          </p:nvPr>
-        </p:nvSpPr>
-        <p:spPr/>
-        <p:txBody>
-          <a:bodyPr/>
-          <a:lstStyle/>
-          <a:p>
-            <a:r>
-              <a:rPr lang="en-US"/>
-              <a:t>Power BI – </a:t>
-            </a:r>
-            <a:r>
-              <a:rPr lang="en-US" err="1"/>
-              <a:t>Päringud</a:t>
-            </a:r>
-            <a:r>
-              <a:rPr lang="en-US"/>
-              <a:t> (M-language)</a:t>
-            </a:r>
-          </a:p>
-        </p:txBody>
-      </p:sp>
-      <p:sp>
-        <p:nvSpPr>
-          <p:cNvPr id="3" name="Content Placeholder 2">
-            <a:extLst>
-              <a:ext uri="{FF2B5EF4-FFF2-40B4-BE49-F238E27FC236}">
-                <a16:creationId xmlns:a16="http://schemas.microsoft.com/office/drawing/2014/main" id="{2D37BB7F-4F12-0B50-CEE8-3F6E6A2C9EE7}"/>
-              </a:ext>
-            </a:extLst>
-          </p:cNvPr>
-          <p:cNvSpPr>
-            <a:spLocks noGrp="1"/>
-          </p:cNvSpPr>
-          <p:nvPr>
-            <p:ph sz="quarter" idx="10"/>
-          </p:nvPr>
-        </p:nvSpPr>
-        <p:spPr/>
-        <p:txBody>
-          <a:bodyPr/>
-          <a:lstStyle/>
-          <a:p>
-            <a:pPr>
-              <a:lnSpc>
-                <a:spcPct val="150000"/>
-              </a:lnSpc>
-            </a:pPr>
-            <a:r>
-              <a:rPr lang="en-US" sz="2400" dirty="0">
-                <a:ea typeface="Inter"/>
-              </a:rPr>
-              <a:t>Power BI </a:t>
-            </a:r>
-            <a:r>
-              <a:rPr lang="en-US" sz="2400" dirty="0" err="1">
-                <a:ea typeface="Inter"/>
-              </a:rPr>
-              <a:t>päringukeel</a:t>
-            </a:r>
-            <a:r>
-              <a:rPr lang="en-US" sz="2400" dirty="0">
-                <a:ea typeface="Inter"/>
-              </a:rPr>
-              <a:t> </a:t>
-            </a:r>
-            <a:endParaRPr lang="en-US" dirty="0"/>
-          </a:p>
-          <a:p>
-            <a:pPr>
-              <a:lnSpc>
-                <a:spcPct val="150000"/>
-              </a:lnSpc>
-            </a:pPr>
-            <a:r>
-              <a:rPr lang="en-US" sz="2400" dirty="0" err="1">
-                <a:ea typeface="Inter"/>
-              </a:rPr>
-              <a:t>Juhend</a:t>
-            </a:r>
-            <a:r>
-              <a:rPr lang="en-US" sz="2400" dirty="0">
-                <a:ea typeface="Inter"/>
-              </a:rPr>
-              <a:t>: </a:t>
-            </a:r>
-            <a:r>
-              <a:rPr lang="en-US" sz="2400" dirty="0">
-                <a:ea typeface="+mn-lt"/>
-                <a:cs typeface="+mn-lt"/>
-                <a:hlinkClick r:id="rId2"/>
-              </a:rPr>
-              <a:t>Power Query M formula language reference - </a:t>
-            </a:r>
-            <a:r>
-              <a:rPr lang="en-US" sz="2400" dirty="0" err="1">
-                <a:ea typeface="+mn-lt"/>
-                <a:cs typeface="+mn-lt"/>
-                <a:hlinkClick r:id="rId2"/>
-              </a:rPr>
-              <a:t>PowerQuery</a:t>
-            </a:r>
-            <a:r>
-              <a:rPr lang="en-US" sz="2400" dirty="0">
-                <a:ea typeface="+mn-lt"/>
-                <a:cs typeface="+mn-lt"/>
-                <a:hlinkClick r:id="rId2"/>
-              </a:rPr>
-              <a:t> M | Microsoft Learn</a:t>
-            </a:r>
-          </a:p>
-          <a:p>
-            <a:pPr>
-              <a:lnSpc>
-                <a:spcPct val="150000"/>
-              </a:lnSpc>
-            </a:pPr>
-            <a:r>
-              <a:rPr lang="en-US" sz="2400" dirty="0" err="1">
-                <a:ea typeface="+mn-lt"/>
-                <a:cs typeface="+mn-lt"/>
-              </a:rPr>
-              <a:t>Leitav</a:t>
-            </a:r>
-            <a:r>
-              <a:rPr lang="en-US" sz="2400" dirty="0">
-                <a:ea typeface="+mn-lt"/>
-                <a:cs typeface="+mn-lt"/>
-              </a:rPr>
-              <a:t>: Model View --&gt; Edit Query</a:t>
-            </a:r>
-          </a:p>
-          <a:p>
-            <a:pPr lvl="1" indent="-514350">
-              <a:lnSpc>
-                <a:spcPct val="150000"/>
-              </a:lnSpc>
-              <a:buFont typeface="Courier New" panose="020B0502030000000004" pitchFamily="34" charset="0"/>
-              <a:buChar char="o"/>
-            </a:pPr>
-            <a:r>
-              <a:rPr lang="en-US" sz="2400" dirty="0" err="1">
-                <a:ea typeface="+mn-lt"/>
-                <a:cs typeface="+mn-lt"/>
-              </a:rPr>
-              <a:t>Paremal</a:t>
-            </a:r>
-            <a:r>
-              <a:rPr lang="en-US" sz="2400" dirty="0">
-                <a:ea typeface="+mn-lt"/>
-                <a:cs typeface="+mn-lt"/>
-              </a:rPr>
-              <a:t> </a:t>
-            </a:r>
-            <a:r>
-              <a:rPr lang="en-US" sz="2400" dirty="0" err="1">
-                <a:ea typeface="+mn-lt"/>
-                <a:cs typeface="+mn-lt"/>
-              </a:rPr>
-              <a:t>sammude</a:t>
-            </a:r>
-            <a:r>
-              <a:rPr lang="en-US" sz="2400" dirty="0">
-                <a:ea typeface="+mn-lt"/>
-                <a:cs typeface="+mn-lt"/>
-              </a:rPr>
-              <a:t> kaupa</a:t>
-            </a:r>
-          </a:p>
-          <a:p>
-            <a:pPr lvl="1" indent="-514350">
-              <a:lnSpc>
-                <a:spcPct val="150000"/>
-              </a:lnSpc>
-              <a:buFont typeface="Courier New" panose="020B0502030000000004" pitchFamily="34" charset="0"/>
-              <a:buChar char="o"/>
-            </a:pPr>
-            <a:r>
-              <a:rPr lang="en-US" sz="2400" dirty="0">
-                <a:ea typeface="+mn-lt"/>
-                <a:cs typeface="+mn-lt"/>
-              </a:rPr>
-              <a:t>Advanced Editor – </a:t>
-            </a:r>
-            <a:r>
-              <a:rPr lang="en-US" sz="2400" dirty="0" err="1">
-                <a:ea typeface="+mn-lt"/>
-                <a:cs typeface="+mn-lt"/>
-              </a:rPr>
-              <a:t>kogu</a:t>
-            </a:r>
-            <a:r>
-              <a:rPr lang="en-US" sz="2400" dirty="0">
-                <a:ea typeface="+mn-lt"/>
-                <a:cs typeface="+mn-lt"/>
-              </a:rPr>
-              <a:t> </a:t>
-            </a:r>
-            <a:r>
-              <a:rPr lang="en-US" sz="2400" dirty="0" err="1">
-                <a:ea typeface="+mn-lt"/>
-                <a:cs typeface="+mn-lt"/>
-              </a:rPr>
-              <a:t>päring</a:t>
-            </a:r>
-            <a:endParaRPr lang="en-US" sz="2400" dirty="0">
-              <a:ea typeface="+mn-lt"/>
-              <a:cs typeface="+mn-lt"/>
-            </a:endParaRPr>
-          </a:p>
-        </p:txBody>
-      </p:sp>
-    </p:spTree>
-    <p:extLst>
-      <p:ext uri="{BB962C8B-B14F-4D97-AF65-F5344CB8AC3E}">
-        <p14:creationId xmlns:p14="http://schemas.microsoft.com/office/powerpoint/2010/main" val="2761534892"/>
-      </p:ext>
-    </p:extLst>
-  </p:cSld>
-  <p:clrMapOvr>
-    <a:masterClrMapping/>
-  </p:clrMapOvr>
-</p:sld>
-</file>
-
-<file path=ppt/slides/slide30.xml><?xml version="1.0" encoding="utf-8"?>
+<file path=ppt/slides/slide31.xml><?xml version="1.0" encoding="utf-8"?>
 <p:sld xmlns:a="http://schemas.openxmlformats.org/drawingml/2006/main" xmlns:r="http://schemas.openxmlformats.org/officeDocument/2006/relationships" xmlns:p="http://schemas.openxmlformats.org/presentationml/2006/main">
   <p:cSld>
     <p:spTree>
@@ -32696,7 +34430,7 @@
 </p:sld>
 </file>
 
-<file path=ppt/slides/slide31.xml><?xml version="1.0" encoding="utf-8"?>
+<file path=ppt/slides/slide32.xml><?xml version="1.0" encoding="utf-8"?>
 <p:sld xmlns:a="http://schemas.openxmlformats.org/drawingml/2006/main" xmlns:r="http://schemas.openxmlformats.org/officeDocument/2006/relationships" xmlns:p="http://schemas.openxmlformats.org/presentationml/2006/main">
   <p:cSld>
     <p:spTree>
@@ -33369,7 +35103,7 @@
 </p:sld>
 </file>
 
-<file path=ppt/slides/slide32.xml><?xml version="1.0" encoding="utf-8"?>
+<file path=ppt/slides/slide33.xml><?xml version="1.0" encoding="utf-8"?>
 <p:sld xmlns:a="http://schemas.openxmlformats.org/drawingml/2006/main" xmlns:r="http://schemas.openxmlformats.org/officeDocument/2006/relationships" xmlns:p="http://schemas.openxmlformats.org/presentationml/2006/main">
   <p:cSld>
     <p:spTree>
@@ -33758,7 +35492,7 @@
 </p:sld>
 </file>
 
-<file path=ppt/slides/slide33.xml><?xml version="1.0" encoding="utf-8"?>
+<file path=ppt/slides/slide34.xml><?xml version="1.0" encoding="utf-8"?>
 <p:sld xmlns:a="http://schemas.openxmlformats.org/drawingml/2006/main" xmlns:r="http://schemas.openxmlformats.org/officeDocument/2006/relationships" xmlns:p="http://schemas.openxmlformats.org/presentationml/2006/main">
   <p:cSld>
     <p:spTree>
@@ -34290,7 +36024,7 @@
 </p:sld>
 </file>
 
-<file path=ppt/slides/slide34.xml><?xml version="1.0" encoding="utf-8"?>
+<file path=ppt/slides/slide35.xml><?xml version="1.0" encoding="utf-8"?>
 <p:sld xmlns:a="http://schemas.openxmlformats.org/drawingml/2006/main" xmlns:r="http://schemas.openxmlformats.org/officeDocument/2006/relationships" xmlns:p="http://schemas.openxmlformats.org/presentationml/2006/main">
   <p:cSld>
     <p:spTree>
@@ -34395,7 +36129,7 @@
 </p:sld>
 </file>
 
-<file path=ppt/slides/slide35.xml><?xml version="1.0" encoding="utf-8"?>
+<file path=ppt/slides/slide36.xml><?xml version="1.0" encoding="utf-8"?>
 <p:sld xmlns:a="http://schemas.openxmlformats.org/drawingml/2006/main" xmlns:r="http://schemas.openxmlformats.org/officeDocument/2006/relationships" xmlns:p="http://schemas.openxmlformats.org/presentationml/2006/main">
   <p:cSld>
     <p:spTree>
@@ -34975,7 +36709,7 @@
 </p:sld>
 </file>
 
-<file path=ppt/slides/slide36.xml><?xml version="1.0" encoding="utf-8"?>
+<file path=ppt/slides/slide37.xml><?xml version="1.0" encoding="utf-8"?>
 <p:sld xmlns:a="http://schemas.openxmlformats.org/drawingml/2006/main" xmlns:r="http://schemas.openxmlformats.org/officeDocument/2006/relationships" xmlns:p="http://schemas.openxmlformats.org/presentationml/2006/main">
   <p:cSld>
     <p:spTree>
@@ -35145,7 +36879,7 @@
 </p:sld>
 </file>
 
-<file path=ppt/slides/slide37.xml><?xml version="1.0" encoding="utf-8"?>
+<file path=ppt/slides/slide38.xml><?xml version="1.0" encoding="utf-8"?>
 <p:sld xmlns:a="http://schemas.openxmlformats.org/drawingml/2006/main" xmlns:r="http://schemas.openxmlformats.org/officeDocument/2006/relationships" xmlns:p="http://schemas.openxmlformats.org/presentationml/2006/main">
   <p:cSld>
     <p:spTree>
@@ -35319,7 +37053,7 @@
 </p:sld>
 </file>
 
-<file path=ppt/slides/slide38.xml><?xml version="1.0" encoding="utf-8"?>
+<file path=ppt/slides/slide39.xml><?xml version="1.0" encoding="utf-8"?>
 <p:sld xmlns:a="http://schemas.openxmlformats.org/drawingml/2006/main" xmlns:r="http://schemas.openxmlformats.org/officeDocument/2006/relationships" xmlns:p="http://schemas.openxmlformats.org/presentationml/2006/main">
   <p:cSld>
     <p:spTree>
@@ -35532,7 +37266,1059 @@
 </p:sld>
 </file>
 
-<file path=ppt/slides/slide39.xml><?xml version="1.0" encoding="utf-8"?>
+<file path=ppt/slides/slide4.xml><?xml version="1.0" encoding="utf-8"?>
+<p:sld xmlns:a="http://schemas.openxmlformats.org/drawingml/2006/main" xmlns:r="http://schemas.openxmlformats.org/officeDocument/2006/relationships" xmlns:p="http://schemas.openxmlformats.org/presentationml/2006/main">
+  <p:cSld>
+    <p:spTree>
+      <p:nvGrpSpPr>
+        <p:cNvPr id="1" name=""/>
+        <p:cNvGrpSpPr/>
+        <p:nvPr/>
+      </p:nvGrpSpPr>
+      <p:grpSpPr>
+        <a:xfrm>
+          <a:off x="0" y="0"/>
+          <a:ext cx="0" cy="0"/>
+          <a:chOff x="0" y="0"/>
+          <a:chExt cx="0" cy="0"/>
+        </a:xfrm>
+      </p:grpSpPr>
+      <p:sp>
+        <p:nvSpPr>
+          <p:cNvPr id="3" name="Content Placeholder 2">
+            <a:extLst>
+              <a:ext uri="{FF2B5EF4-FFF2-40B4-BE49-F238E27FC236}">
+                <a16:creationId xmlns:a16="http://schemas.microsoft.com/office/drawing/2014/main" id="{04F6EF08-112F-58CF-16AE-2A9F97EE263A}"/>
+              </a:ext>
+            </a:extLst>
+          </p:cNvPr>
+          <p:cNvSpPr>
+            <a:spLocks noGrp="1"/>
+          </p:cNvSpPr>
+          <p:nvPr>
+            <p:ph sz="quarter" idx="10"/>
+          </p:nvPr>
+        </p:nvSpPr>
+        <p:spPr>
+          <a:xfrm>
+            <a:off x="509588" y="319551"/>
+            <a:ext cx="10941050" cy="5528800"/>
+          </a:xfrm>
+        </p:spPr>
+        <p:txBody>
+          <a:bodyPr/>
+          <a:lstStyle/>
+          <a:p>
+            <a:r>
+              <a:rPr lang="et-EE" sz="1800" dirty="0"/>
+              <a:t>Import, impordi asukoha vahetamine</a:t>
+            </a:r>
+          </a:p>
+          <a:p>
+            <a:r>
+              <a:rPr lang="et-EE" sz="1800" dirty="0"/>
+              <a:t>Vigade otsimine: Column quality, Distibution, Quality, visuaalselt</a:t>
+            </a:r>
+          </a:p>
+          <a:p>
+            <a:r>
+              <a:rPr lang="et-EE" sz="1800" dirty="0"/>
+              <a:t>Vigade parandamine: komakoha eraldaja, kuupäeva eraldaja, tühi rida, päise rida</a:t>
+            </a:r>
+          </a:p>
+          <a:p>
+            <a:r>
+              <a:rPr lang="et-EE" sz="1800" b="1" dirty="0"/>
+              <a:t>MUDEL KORDA: seosed: suund, granulaarsus</a:t>
+            </a:r>
+          </a:p>
+          <a:p>
+            <a:r>
+              <a:rPr lang="et-EE" sz="1800" dirty="0"/>
+              <a:t>Tabelite nimetamine</a:t>
+            </a:r>
+          </a:p>
+          <a:p>
+            <a:r>
+              <a:rPr lang="et-EE" sz="1800" dirty="0"/>
+              <a:t>Tabelite ühendamine</a:t>
+            </a:r>
+          </a:p>
+          <a:p>
+            <a:r>
+              <a:rPr lang="et-EE" sz="1800" dirty="0"/>
+              <a:t>Kataloogid kuvamiseks: Model View, objekti properties, Display Folder</a:t>
+            </a:r>
+          </a:p>
+          <a:p>
+            <a:r>
+              <a:rPr lang="et-EE" sz="1800" dirty="0"/>
+              <a:t>Mõõdikute tabel ‘New Table’ -&gt;_KPI-s = DATATABLE("Measures", STRING, {{"Rida"}})</a:t>
+            </a:r>
+          </a:p>
+          <a:p>
+            <a:pPr lvl="1"/>
+            <a:r>
+              <a:rPr lang="et-EE" sz="1800" dirty="0"/>
+              <a:t>Sales sum</a:t>
+            </a:r>
+          </a:p>
+          <a:p>
+            <a:pPr lvl="1"/>
+            <a:r>
+              <a:rPr lang="et-EE" sz="1800" dirty="0"/>
+              <a:t>Sales sum –discount</a:t>
+            </a:r>
+          </a:p>
+          <a:p>
+            <a:pPr lvl="1"/>
+            <a:r>
+              <a:rPr lang="et-EE" sz="1800" dirty="0"/>
+              <a:t>Toote kulu ja kasum</a:t>
+            </a:r>
+          </a:p>
+          <a:p>
+            <a:pPr lvl="1"/>
+            <a:r>
+              <a:rPr lang="en-US" sz="1800" dirty="0"/>
+              <a:t>Profit = SUM(</a:t>
+            </a:r>
+            <a:r>
+              <a:rPr lang="en-US" sz="1800" dirty="0" err="1"/>
+              <a:t>SalesTable</a:t>
+            </a:r>
+            <a:r>
+              <a:rPr lang="en-US" sz="1800" dirty="0"/>
+              <a:t>[Sales Sum]) - SUM(</a:t>
+            </a:r>
+            <a:r>
+              <a:rPr lang="en-US" sz="1800" dirty="0" err="1"/>
+              <a:t>SalesTable</a:t>
+            </a:r>
+            <a:r>
+              <a:rPr lang="en-US" sz="1800" dirty="0"/>
+              <a:t>[Cost Sum])</a:t>
+            </a:r>
+            <a:endParaRPr lang="et-EE" sz="1800" dirty="0"/>
+          </a:p>
+          <a:p>
+            <a:pPr lvl="1"/>
+            <a:r>
+              <a:rPr lang="et-EE" sz="1800" dirty="0"/>
+              <a:t>Profit % = [Profit] / [Sales Sum]</a:t>
+            </a:r>
+          </a:p>
+          <a:p>
+            <a:r>
+              <a:rPr lang="et-EE" sz="1800" dirty="0"/>
+              <a:t>Graafiku lisamine, tüübi muutmine, objektide kasutamine graafikul</a:t>
+            </a:r>
+          </a:p>
+          <a:p>
+            <a:pPr lvl="1"/>
+            <a:r>
+              <a:rPr lang="et-EE" sz="1800" dirty="0"/>
+              <a:t>Toodete müügi võrdlus</a:t>
+            </a:r>
+          </a:p>
+          <a:p>
+            <a:pPr lvl="1"/>
+            <a:r>
+              <a:rPr lang="et-EE" sz="1800" dirty="0"/>
+              <a:t>jne</a:t>
+            </a:r>
+          </a:p>
+          <a:p>
+            <a:r>
+              <a:rPr lang="et-EE" sz="1800" dirty="0"/>
+              <a:t>Tingimuslik vormindamine</a:t>
+            </a:r>
+          </a:p>
+          <a:p>
+            <a:r>
+              <a:rPr lang="et-EE" sz="1800" dirty="0"/>
+              <a:t>Nupp</a:t>
+            </a:r>
+          </a:p>
+          <a:p>
+            <a:r>
+              <a:rPr lang="et-EE" sz="1800" dirty="0"/>
+              <a:t>Filtreerimine</a:t>
+            </a:r>
+          </a:p>
+          <a:p>
+            <a:r>
+              <a:rPr lang="et-EE" sz="1800" dirty="0"/>
+              <a:t>Visuaalide vaheline klikkimine</a:t>
+            </a:r>
+          </a:p>
+          <a:p>
+            <a:r>
+              <a:rPr lang="et-EE" sz="1800" dirty="0"/>
+              <a:t>Lehe suurus</a:t>
+            </a:r>
+          </a:p>
+        </p:txBody>
+      </p:sp>
+      <p:sp>
+        <p:nvSpPr>
+          <p:cNvPr id="5" name="Title 4">
+            <a:extLst>
+              <a:ext uri="{FF2B5EF4-FFF2-40B4-BE49-F238E27FC236}">
+                <a16:creationId xmlns:a16="http://schemas.microsoft.com/office/drawing/2014/main" id="{0CD7272D-978D-1D99-C666-C84710C0A278}"/>
+              </a:ext>
+            </a:extLst>
+          </p:cNvPr>
+          <p:cNvSpPr>
+            <a:spLocks noGrp="1"/>
+          </p:cNvSpPr>
+          <p:nvPr>
+            <p:ph type="ctrTitle"/>
+          </p:nvPr>
+        </p:nvSpPr>
+        <p:spPr/>
+        <p:txBody>
+          <a:bodyPr/>
+          <a:lstStyle/>
+          <a:p>
+            <a:endParaRPr lang="et-EE"/>
+          </a:p>
+        </p:txBody>
+      </p:sp>
+    </p:spTree>
+    <p:extLst>
+      <p:ext uri="{BB962C8B-B14F-4D97-AF65-F5344CB8AC3E}">
+        <p14:creationId xmlns:p14="http://schemas.microsoft.com/office/powerpoint/2010/main" val="926812863"/>
+      </p:ext>
+    </p:extLst>
+  </p:cSld>
+  <p:clrMapOvr>
+    <a:masterClrMapping/>
+  </p:clrMapOvr>
+</p:sld>
+</file>
+
+<file path=ppt/slides/slide40.xml><?xml version="1.0" encoding="utf-8"?>
+<p:sld xmlns:a="http://schemas.openxmlformats.org/drawingml/2006/main" xmlns:r="http://schemas.openxmlformats.org/officeDocument/2006/relationships" xmlns:p="http://schemas.openxmlformats.org/presentationml/2006/main">
+  <p:cSld>
+    <p:spTree>
+      <p:nvGrpSpPr>
+        <p:cNvPr id="1" name=""/>
+        <p:cNvGrpSpPr/>
+        <p:nvPr/>
+      </p:nvGrpSpPr>
+      <p:grpSpPr>
+        <a:xfrm>
+          <a:off x="0" y="0"/>
+          <a:ext cx="0" cy="0"/>
+          <a:chOff x="0" y="0"/>
+          <a:chExt cx="0" cy="0"/>
+        </a:xfrm>
+      </p:grpSpPr>
+      <p:sp>
+        <p:nvSpPr>
+          <p:cNvPr id="2" name="Title 1">
+            <a:extLst>
+              <a:ext uri="{FF2B5EF4-FFF2-40B4-BE49-F238E27FC236}">
+                <a16:creationId xmlns:a16="http://schemas.microsoft.com/office/drawing/2014/main" id="{1F4CD862-BDA9-E570-A198-FE44E96FFD70}"/>
+              </a:ext>
+            </a:extLst>
+          </p:cNvPr>
+          <p:cNvSpPr>
+            <a:spLocks noGrp="1"/>
+          </p:cNvSpPr>
+          <p:nvPr>
+            <p:ph type="ctrTitle"/>
+          </p:nvPr>
+        </p:nvSpPr>
+        <p:spPr/>
+        <p:txBody>
+          <a:bodyPr/>
+          <a:lstStyle/>
+          <a:p>
+            <a:r>
+              <a:rPr lang="et-EE" dirty="0"/>
+              <a:t>Andmetega töö esimene samm: Probleemipüstitus/küsimus/huvi</a:t>
+            </a:r>
+            <a:br>
+              <a:rPr lang="et-EE" dirty="0"/>
+            </a:br>
+            <a:endParaRPr lang="et-EE" dirty="0"/>
+          </a:p>
+        </p:txBody>
+      </p:sp>
+      <p:sp>
+        <p:nvSpPr>
+          <p:cNvPr id="3" name="Content Placeholder 2">
+            <a:extLst>
+              <a:ext uri="{FF2B5EF4-FFF2-40B4-BE49-F238E27FC236}">
+                <a16:creationId xmlns:a16="http://schemas.microsoft.com/office/drawing/2014/main" id="{20F5E934-306A-1BB2-9292-4CD3ADD5DA08}"/>
+              </a:ext>
+            </a:extLst>
+          </p:cNvPr>
+          <p:cNvSpPr>
+            <a:spLocks noGrp="1"/>
+          </p:cNvSpPr>
+          <p:nvPr>
+            <p:ph sz="quarter" idx="10"/>
+          </p:nvPr>
+        </p:nvSpPr>
+        <p:spPr/>
+        <p:txBody>
+          <a:bodyPr/>
+          <a:lstStyle/>
+          <a:p>
+            <a:endParaRPr lang="et-EE" dirty="0"/>
+          </a:p>
+          <a:p>
+            <a:pPr marL="0" indent="0">
+              <a:buNone/>
+            </a:pPr>
+            <a:r>
+              <a:rPr lang="et-EE" sz="2400" b="1" dirty="0"/>
+              <a:t>NÄITEKS</a:t>
+            </a:r>
+            <a:endParaRPr lang="et-EE" b="1" dirty="0"/>
+          </a:p>
+          <a:p>
+            <a:pPr>
+              <a:lnSpc>
+                <a:spcPct val="150000"/>
+              </a:lnSpc>
+            </a:pPr>
+            <a:r>
+              <a:rPr lang="en-US" sz="2000" dirty="0" err="1">
+                <a:ea typeface="Inter"/>
+              </a:rPr>
+              <a:t>Ettevõte</a:t>
+            </a:r>
+            <a:r>
+              <a:rPr lang="en-US" sz="2000" dirty="0">
+                <a:ea typeface="Inter"/>
+              </a:rPr>
+              <a:t> </a:t>
+            </a:r>
+            <a:r>
+              <a:rPr lang="en-US" sz="2000" dirty="0" err="1">
+                <a:ea typeface="Inter"/>
+              </a:rPr>
+              <a:t>juhatus</a:t>
+            </a:r>
+            <a:r>
+              <a:rPr lang="en-US" sz="2000" dirty="0">
+                <a:ea typeface="Inter"/>
+              </a:rPr>
+              <a:t> </a:t>
+            </a:r>
+            <a:r>
+              <a:rPr lang="en-US" sz="2000" dirty="0" err="1">
+                <a:ea typeface="Inter"/>
+              </a:rPr>
+              <a:t>soovib</a:t>
+            </a:r>
+            <a:r>
+              <a:rPr lang="en-US" sz="2000" dirty="0">
+                <a:ea typeface="Inter"/>
+              </a:rPr>
+              <a:t> </a:t>
+            </a:r>
+            <a:r>
+              <a:rPr lang="en-US" sz="2000" b="1" dirty="0" err="1">
+                <a:ea typeface="Inter"/>
+              </a:rPr>
+              <a:t>ülevaadet</a:t>
+            </a:r>
+            <a:r>
+              <a:rPr lang="en-US" sz="2000" b="1" dirty="0">
+                <a:ea typeface="Inter"/>
+              </a:rPr>
+              <a:t> </a:t>
+            </a:r>
+            <a:r>
+              <a:rPr lang="en-US" sz="2000" b="1" dirty="0" err="1">
+                <a:ea typeface="Inter"/>
+              </a:rPr>
+              <a:t>müügitulust</a:t>
+            </a:r>
+            <a:br>
+              <a:rPr lang="et-EE" sz="2000" b="1" dirty="0">
+                <a:ea typeface="Inter"/>
+              </a:rPr>
+            </a:br>
+            <a:endParaRPr lang="et-EE" sz="2000" b="1" dirty="0">
+              <a:ea typeface="Inter"/>
+            </a:endParaRPr>
+          </a:p>
+          <a:p>
+            <a:pPr marL="0" indent="0">
+              <a:buNone/>
+            </a:pPr>
+            <a:r>
+              <a:rPr lang="en-US" sz="2000" dirty="0" err="1">
+                <a:ea typeface="Inter"/>
+              </a:rPr>
+              <a:t>Müügijuht</a:t>
+            </a:r>
+            <a:r>
+              <a:rPr lang="en-US" sz="2000" dirty="0">
+                <a:ea typeface="Inter"/>
+              </a:rPr>
+              <a:t> </a:t>
+            </a:r>
+            <a:r>
+              <a:rPr lang="en-US" sz="2000" dirty="0" err="1">
+                <a:ea typeface="Inter"/>
+              </a:rPr>
+              <a:t>tuleb</a:t>
+            </a:r>
+            <a:r>
+              <a:rPr lang="en-US" sz="2000" dirty="0">
+                <a:ea typeface="Inter"/>
+              </a:rPr>
+              <a:t> </a:t>
+            </a:r>
+            <a:r>
+              <a:rPr lang="en-US" sz="2000" dirty="0" err="1">
+                <a:ea typeface="Inter"/>
+              </a:rPr>
+              <a:t>teie</a:t>
+            </a:r>
+            <a:r>
+              <a:rPr lang="en-US" sz="2000" dirty="0">
+                <a:ea typeface="Inter"/>
+              </a:rPr>
+              <a:t> </a:t>
+            </a:r>
+            <a:r>
+              <a:rPr lang="en-US" sz="2000" dirty="0" err="1">
+                <a:ea typeface="Inter"/>
+              </a:rPr>
+              <a:t>juurde</a:t>
+            </a:r>
+            <a:r>
+              <a:rPr lang="en-US" sz="2000" dirty="0">
+                <a:ea typeface="Inter"/>
+              </a:rPr>
+              <a:t> </a:t>
+            </a:r>
+            <a:r>
+              <a:rPr lang="en-US" sz="2000" dirty="0" err="1">
+                <a:ea typeface="Inter"/>
+              </a:rPr>
+              <a:t>murega</a:t>
+            </a:r>
+            <a:r>
+              <a:rPr lang="en-US" sz="2000" dirty="0">
+                <a:ea typeface="Inter"/>
+              </a:rPr>
+              <a:t>, et </a:t>
+            </a:r>
+            <a:r>
+              <a:rPr lang="en-US" sz="2000" dirty="0" err="1">
+                <a:ea typeface="Inter"/>
+              </a:rPr>
+              <a:t>müügitulu</a:t>
+            </a:r>
+            <a:r>
+              <a:rPr lang="en-US" sz="2000" dirty="0">
+                <a:ea typeface="Inter"/>
+              </a:rPr>
+              <a:t> on </a:t>
+            </a:r>
+            <a:r>
+              <a:rPr lang="en-US" sz="2000" dirty="0" err="1">
+                <a:ea typeface="Inter"/>
+              </a:rPr>
+              <a:t>languses</a:t>
+            </a:r>
+            <a:r>
+              <a:rPr lang="en-US" sz="2000" dirty="0">
+                <a:ea typeface="Inter"/>
+              </a:rPr>
+              <a:t> </a:t>
+            </a:r>
+            <a:r>
+              <a:rPr lang="en-US" sz="2000" dirty="0" err="1">
+                <a:ea typeface="Inter"/>
+              </a:rPr>
+              <a:t>ning</a:t>
+            </a:r>
+            <a:r>
+              <a:rPr lang="en-US" sz="2000" dirty="0">
+                <a:ea typeface="Inter"/>
+              </a:rPr>
+              <a:t> ta </a:t>
+            </a:r>
+            <a:r>
+              <a:rPr lang="en-US" sz="2000" dirty="0" err="1">
+                <a:ea typeface="Inter"/>
+              </a:rPr>
+              <a:t>sooviks</a:t>
+            </a:r>
+            <a:r>
+              <a:rPr lang="en-US" sz="2000" dirty="0">
+                <a:ea typeface="Inter"/>
+              </a:rPr>
+              <a:t> teada, miks.</a:t>
+            </a:r>
+            <a:r>
+              <a:rPr lang="en-GB" sz="2000" i="1" dirty="0"/>
+              <a:t>“</a:t>
+            </a:r>
+          </a:p>
+          <a:p>
+            <a:endParaRPr lang="en-GB" sz="2000" i="1" dirty="0"/>
+          </a:p>
+          <a:p>
+            <a:pPr marL="0" indent="0">
+              <a:buNone/>
+            </a:pPr>
+            <a:r>
+              <a:rPr lang="en-GB" sz="2000" i="1" dirty="0"/>
+              <a:t>Tere! </a:t>
+            </a:r>
+            <a:r>
+              <a:rPr lang="en-GB" sz="2000" i="1" dirty="0" err="1"/>
+              <a:t>Juhatus</a:t>
+            </a:r>
+            <a:r>
+              <a:rPr lang="en-GB" sz="2000" i="1" dirty="0"/>
+              <a:t> </a:t>
+            </a:r>
+            <a:r>
+              <a:rPr lang="en-GB" sz="2000" i="1" dirty="0" err="1"/>
+              <a:t>tahab</a:t>
+            </a:r>
+            <a:r>
+              <a:rPr lang="en-GB" sz="2000" i="1" dirty="0"/>
+              <a:t> </a:t>
+            </a:r>
+            <a:r>
+              <a:rPr lang="en-GB" sz="2000" i="1" dirty="0" err="1"/>
+              <a:t>teada</a:t>
+            </a:r>
+            <a:r>
+              <a:rPr lang="en-GB" sz="2000" i="1" dirty="0"/>
+              <a:t>, </a:t>
+            </a:r>
+            <a:r>
+              <a:rPr lang="en-GB" sz="2000" i="1" dirty="0" err="1"/>
+              <a:t>kuidas</a:t>
+            </a:r>
+            <a:r>
+              <a:rPr lang="en-GB" sz="2000" i="1" dirty="0"/>
+              <a:t> </a:t>
+            </a:r>
+            <a:r>
+              <a:rPr lang="en-GB" sz="2000" i="1" dirty="0" err="1"/>
+              <a:t>meil</a:t>
+            </a:r>
+            <a:r>
+              <a:rPr lang="en-GB" sz="2000" i="1" dirty="0"/>
+              <a:t> </a:t>
+            </a:r>
+            <a:r>
+              <a:rPr lang="en-GB" sz="2000" i="1" dirty="0" err="1"/>
+              <a:t>müügiga</a:t>
+            </a:r>
+            <a:r>
+              <a:rPr lang="en-GB" sz="2000" i="1" dirty="0"/>
+              <a:t> </a:t>
+            </a:r>
+            <a:r>
+              <a:rPr lang="en-GB" sz="2000" i="1" dirty="0" err="1"/>
+              <a:t>tegelikult</a:t>
+            </a:r>
+            <a:r>
+              <a:rPr lang="en-GB" sz="2000" i="1" dirty="0"/>
+              <a:t> </a:t>
+            </a:r>
+            <a:r>
+              <a:rPr lang="en-GB" sz="2000" i="1" dirty="0" err="1"/>
+              <a:t>läheb</a:t>
+            </a:r>
+            <a:r>
+              <a:rPr lang="en-GB" sz="2000" i="1" dirty="0"/>
+              <a:t>. Nad </a:t>
+            </a:r>
+            <a:r>
+              <a:rPr lang="en-GB" sz="2000" i="1" dirty="0" err="1"/>
+              <a:t>soovivad</a:t>
+            </a:r>
+            <a:r>
+              <a:rPr lang="en-GB" sz="2000" i="1" dirty="0"/>
+              <a:t> </a:t>
+            </a:r>
+            <a:r>
+              <a:rPr lang="en-GB" sz="2000" i="1" dirty="0" err="1"/>
+              <a:t>näha</a:t>
+            </a:r>
+            <a:r>
+              <a:rPr lang="en-GB" sz="2000" i="1" dirty="0"/>
+              <a:t>, </a:t>
+            </a:r>
+            <a:r>
+              <a:rPr lang="en-GB" sz="2000" i="1" dirty="0" err="1"/>
+              <a:t>kuidas</a:t>
+            </a:r>
+            <a:r>
+              <a:rPr lang="en-GB" sz="2000" i="1" dirty="0"/>
+              <a:t> on </a:t>
+            </a:r>
+            <a:r>
+              <a:rPr lang="en-GB" sz="2000" i="1" dirty="0" err="1"/>
+              <a:t>müük</a:t>
+            </a:r>
+            <a:r>
+              <a:rPr lang="en-GB" sz="2000" i="1" dirty="0"/>
+              <a:t> </a:t>
+            </a:r>
+            <a:r>
+              <a:rPr lang="en-GB" sz="2000" i="1" dirty="0" err="1"/>
+              <a:t>aja</a:t>
+            </a:r>
+            <a:r>
+              <a:rPr lang="en-GB" sz="2000" i="1" dirty="0"/>
+              <a:t> </a:t>
+            </a:r>
+            <a:r>
+              <a:rPr lang="en-GB" sz="2000" i="1" dirty="0" err="1"/>
+              <a:t>jooksul</a:t>
+            </a:r>
+            <a:r>
+              <a:rPr lang="en-GB" sz="2000" i="1" dirty="0"/>
+              <a:t> </a:t>
+            </a:r>
+            <a:r>
+              <a:rPr lang="en-GB" sz="2000" i="1" dirty="0" err="1"/>
+              <a:t>muutunud</a:t>
+            </a:r>
+            <a:r>
+              <a:rPr lang="en-GB" sz="2000" i="1" dirty="0"/>
+              <a:t> – </a:t>
+            </a:r>
+            <a:r>
+              <a:rPr lang="en-GB" sz="2000" i="1" dirty="0" err="1"/>
+              <a:t>ehk</a:t>
+            </a:r>
+            <a:r>
+              <a:rPr lang="en-GB" sz="2000" i="1" dirty="0"/>
+              <a:t> kas me </a:t>
+            </a:r>
+            <a:r>
+              <a:rPr lang="en-GB" sz="2000" i="1" dirty="0" err="1"/>
+              <a:t>kasvame</a:t>
+            </a:r>
+            <a:r>
+              <a:rPr lang="en-GB" sz="2000" i="1" dirty="0"/>
+              <a:t> </a:t>
+            </a:r>
+            <a:r>
+              <a:rPr lang="en-GB" sz="2000" i="1" dirty="0" err="1"/>
+              <a:t>või</a:t>
+            </a:r>
+            <a:r>
+              <a:rPr lang="en-GB" sz="2000" i="1" dirty="0"/>
+              <a:t> </a:t>
+            </a:r>
+            <a:r>
+              <a:rPr lang="en-GB" sz="2000" i="1" dirty="0" err="1"/>
+              <a:t>kahaneme</a:t>
+            </a:r>
+            <a:r>
+              <a:rPr lang="en-GB" sz="2000" i="1" dirty="0"/>
+              <a:t>. Tahan </a:t>
+            </a:r>
+            <a:r>
+              <a:rPr lang="en-GB" sz="2000" i="1" dirty="0" err="1"/>
+              <a:t>aru</a:t>
+            </a:r>
+            <a:r>
+              <a:rPr lang="en-GB" sz="2000" i="1" dirty="0"/>
+              <a:t> </a:t>
+            </a:r>
+            <a:r>
+              <a:rPr lang="en-GB" sz="2000" i="1" dirty="0" err="1"/>
+              <a:t>saada</a:t>
+            </a:r>
+            <a:r>
+              <a:rPr lang="en-GB" sz="2000" i="1" dirty="0"/>
+              <a:t>, kas me </a:t>
+            </a:r>
+            <a:r>
+              <a:rPr lang="en-GB" sz="2000" i="1" dirty="0" err="1"/>
+              <a:t>samal</a:t>
+            </a:r>
+            <a:r>
+              <a:rPr lang="en-GB" sz="2000" i="1" dirty="0"/>
+              <a:t> </a:t>
+            </a:r>
+            <a:r>
+              <a:rPr lang="en-GB" sz="2000" i="1" dirty="0" err="1"/>
+              <a:t>ajal</a:t>
+            </a:r>
+            <a:r>
+              <a:rPr lang="en-GB" sz="2000" i="1" dirty="0"/>
+              <a:t> </a:t>
+            </a:r>
+            <a:r>
+              <a:rPr lang="en-GB" sz="2000" i="1" dirty="0" err="1"/>
+              <a:t>eelmisel</a:t>
+            </a:r>
+            <a:r>
+              <a:rPr lang="en-GB" sz="2000" i="1" dirty="0"/>
+              <a:t> </a:t>
+            </a:r>
+            <a:r>
+              <a:rPr lang="en-GB" sz="2000" i="1" dirty="0" err="1"/>
+              <a:t>aastal</a:t>
+            </a:r>
+            <a:r>
+              <a:rPr lang="en-GB" sz="2000" i="1" dirty="0"/>
+              <a:t> </a:t>
+            </a:r>
+            <a:r>
+              <a:rPr lang="en-GB" sz="2000" i="1" dirty="0" err="1"/>
+              <a:t>tegutsesime</a:t>
+            </a:r>
+            <a:r>
+              <a:rPr lang="en-GB" sz="2000" i="1" dirty="0"/>
+              <a:t> </a:t>
+            </a:r>
+            <a:r>
+              <a:rPr lang="en-GB" sz="2000" i="1" dirty="0" err="1"/>
+              <a:t>kuidagi</a:t>
+            </a:r>
+            <a:r>
+              <a:rPr lang="en-GB" sz="2000" i="1" dirty="0"/>
+              <a:t> </a:t>
+            </a:r>
+            <a:r>
+              <a:rPr lang="en-GB" sz="2000" i="1" dirty="0" err="1"/>
+              <a:t>teisiti</a:t>
+            </a:r>
+            <a:r>
+              <a:rPr lang="en-GB" sz="2000" i="1" dirty="0"/>
+              <a:t>. </a:t>
+            </a:r>
+            <a:r>
+              <a:rPr lang="en-GB" sz="2000" i="1" dirty="0" err="1"/>
+              <a:t>Kindlasti</a:t>
+            </a:r>
+            <a:r>
+              <a:rPr lang="en-GB" sz="2000" i="1" dirty="0"/>
+              <a:t> on </a:t>
+            </a:r>
+            <a:r>
+              <a:rPr lang="en-GB" sz="2000" i="1" dirty="0" err="1"/>
+              <a:t>vaja</a:t>
+            </a:r>
+            <a:r>
+              <a:rPr lang="en-GB" sz="2000" i="1" dirty="0"/>
+              <a:t> </a:t>
+            </a:r>
+            <a:r>
+              <a:rPr lang="en-GB" sz="2000" i="1" dirty="0" err="1"/>
+              <a:t>võrdlust</a:t>
+            </a:r>
+            <a:r>
+              <a:rPr lang="en-GB" sz="2000" i="1" dirty="0"/>
+              <a:t> </a:t>
+            </a:r>
+            <a:r>
+              <a:rPr lang="en-GB" sz="2000" i="1" dirty="0" err="1"/>
+              <a:t>selle</a:t>
+            </a:r>
+            <a:r>
+              <a:rPr lang="en-GB" sz="2000" i="1" dirty="0"/>
+              <a:t> </a:t>
+            </a:r>
+            <a:r>
+              <a:rPr lang="en-GB" sz="2000" i="1" dirty="0" err="1"/>
+              <a:t>aasta</a:t>
+            </a:r>
+            <a:r>
+              <a:rPr lang="en-GB" sz="2000" i="1" dirty="0"/>
+              <a:t> </a:t>
+            </a:r>
+            <a:r>
+              <a:rPr lang="en-GB" sz="2000" i="1" dirty="0" err="1"/>
+              <a:t>eelarvega</a:t>
+            </a:r>
+            <a:r>
+              <a:rPr lang="en-GB" sz="2000" i="1" dirty="0"/>
+              <a:t>, et </a:t>
+            </a:r>
+            <a:r>
+              <a:rPr lang="en-GB" sz="2000" i="1" dirty="0" err="1"/>
+              <a:t>teada</a:t>
+            </a:r>
+            <a:r>
+              <a:rPr lang="en-GB" sz="2000" i="1" dirty="0"/>
+              <a:t> </a:t>
+            </a:r>
+            <a:r>
+              <a:rPr lang="en-GB" sz="2000" i="1" dirty="0" err="1"/>
+              <a:t>saada</a:t>
+            </a:r>
+            <a:r>
+              <a:rPr lang="en-GB" sz="2000" i="1" dirty="0"/>
+              <a:t>, kas </a:t>
+            </a:r>
+            <a:r>
+              <a:rPr lang="en-GB" sz="2000" i="1" dirty="0" err="1"/>
+              <a:t>oleme</a:t>
+            </a:r>
+            <a:r>
+              <a:rPr lang="en-GB" sz="2000" i="1" dirty="0"/>
+              <a:t> </a:t>
+            </a:r>
+            <a:r>
+              <a:rPr lang="en-GB" sz="2000" i="1" dirty="0" err="1"/>
+              <a:t>plaanist</a:t>
+            </a:r>
+            <a:r>
+              <a:rPr lang="en-GB" sz="2000" i="1" dirty="0"/>
+              <a:t> ees </a:t>
+            </a:r>
+            <a:r>
+              <a:rPr lang="en-GB" sz="2000" i="1" dirty="0" err="1"/>
+              <a:t>või</a:t>
+            </a:r>
+            <a:r>
+              <a:rPr lang="en-GB" sz="2000" i="1" dirty="0"/>
+              <a:t> </a:t>
+            </a:r>
+            <a:r>
+              <a:rPr lang="en-GB" sz="2000" i="1" dirty="0" err="1"/>
+              <a:t>taga</a:t>
+            </a:r>
+            <a:r>
+              <a:rPr lang="en-GB" sz="2000" i="1" dirty="0"/>
+              <a:t>. Lisaks </a:t>
+            </a:r>
+            <a:r>
+              <a:rPr lang="en-GB" sz="2000" i="1" dirty="0" err="1"/>
+              <a:t>oodatakse</a:t>
+            </a:r>
+            <a:r>
+              <a:rPr lang="en-GB" sz="2000" i="1" dirty="0"/>
+              <a:t> </a:t>
+            </a:r>
+            <a:r>
+              <a:rPr lang="en-GB" sz="2000" i="1" dirty="0" err="1"/>
+              <a:t>meilt</a:t>
+            </a:r>
+            <a:r>
+              <a:rPr lang="en-GB" sz="2000" i="1" dirty="0"/>
+              <a:t> </a:t>
+            </a:r>
+            <a:r>
+              <a:rPr lang="en-GB" sz="2000" i="1" dirty="0" err="1"/>
+              <a:t>mõtteid</a:t>
+            </a:r>
+            <a:r>
+              <a:rPr lang="en-GB" sz="2000" i="1" dirty="0"/>
+              <a:t>, </a:t>
+            </a:r>
+            <a:r>
+              <a:rPr lang="en-GB" sz="2000" i="1" dirty="0" err="1"/>
+              <a:t>kuidas</a:t>
+            </a:r>
+            <a:r>
+              <a:rPr lang="en-GB" sz="2000" i="1" dirty="0"/>
+              <a:t> </a:t>
+            </a:r>
+            <a:r>
+              <a:rPr lang="en-GB" sz="2000" i="1" dirty="0" err="1"/>
+              <a:t>saaksime</a:t>
+            </a:r>
+            <a:r>
+              <a:rPr lang="en-GB" sz="2000" i="1" dirty="0"/>
+              <a:t> </a:t>
+            </a:r>
+            <a:r>
+              <a:rPr lang="en-GB" sz="2000" i="1" dirty="0" err="1"/>
+              <a:t>müüki</a:t>
+            </a:r>
+            <a:r>
+              <a:rPr lang="en-GB" sz="2000" i="1" dirty="0"/>
+              <a:t> </a:t>
+            </a:r>
+            <a:r>
+              <a:rPr lang="en-GB" sz="2000" i="1" dirty="0" err="1"/>
+              <a:t>veelgi</a:t>
+            </a:r>
+            <a:r>
+              <a:rPr lang="en-GB" sz="2000" i="1" dirty="0"/>
+              <a:t> </a:t>
+            </a:r>
+            <a:r>
+              <a:rPr lang="en-GB" sz="2000" i="1" dirty="0" err="1"/>
+              <a:t>suurendada</a:t>
+            </a:r>
+            <a:r>
+              <a:rPr lang="en-GB" sz="2000" i="1" dirty="0"/>
+              <a:t>. </a:t>
+            </a:r>
+            <a:r>
+              <a:rPr lang="en-GB" sz="2000" i="1" dirty="0" err="1"/>
+              <a:t>Tõenäoliselt</a:t>
+            </a:r>
+            <a:r>
+              <a:rPr lang="en-GB" sz="2000" i="1" dirty="0"/>
+              <a:t> </a:t>
+            </a:r>
+            <a:r>
+              <a:rPr lang="en-GB" sz="2000" i="1" dirty="0" err="1"/>
+              <a:t>peaksime</a:t>
+            </a:r>
+            <a:r>
+              <a:rPr lang="en-GB" sz="2000" i="1" dirty="0"/>
+              <a:t> </a:t>
+            </a:r>
+            <a:r>
+              <a:rPr lang="en-GB" sz="2000" i="1" dirty="0" err="1"/>
+              <a:t>vaatama</a:t>
+            </a:r>
+            <a:r>
+              <a:rPr lang="en-GB" sz="2000" i="1" dirty="0"/>
+              <a:t> </a:t>
+            </a:r>
+            <a:r>
+              <a:rPr lang="en-GB" sz="2000" i="1" dirty="0" err="1"/>
+              <a:t>reaalseid</a:t>
+            </a:r>
+            <a:r>
+              <a:rPr lang="en-GB" sz="2000" i="1" dirty="0"/>
+              <a:t> </a:t>
+            </a:r>
+            <a:r>
+              <a:rPr lang="en-GB" sz="2000" i="1" dirty="0" err="1"/>
+              <a:t>müüginumbreid</a:t>
+            </a:r>
+            <a:r>
+              <a:rPr lang="en-GB" sz="2000" i="1" dirty="0"/>
+              <a:t> </a:t>
+            </a:r>
+            <a:r>
+              <a:rPr lang="en-GB" sz="2000" i="1" dirty="0" err="1"/>
+              <a:t>erinevates</a:t>
+            </a:r>
+            <a:r>
+              <a:rPr lang="en-GB" sz="2000" i="1" dirty="0"/>
+              <a:t> </a:t>
+            </a:r>
+            <a:r>
+              <a:rPr lang="en-GB" sz="2000" i="1" dirty="0" err="1"/>
+              <a:t>piirkondades</a:t>
+            </a:r>
+            <a:r>
+              <a:rPr lang="en-GB" sz="2000" i="1" dirty="0"/>
+              <a:t>, </a:t>
+            </a:r>
+            <a:r>
+              <a:rPr lang="en-GB" sz="2000" i="1" dirty="0" err="1"/>
+              <a:t>toodete</a:t>
+            </a:r>
+            <a:r>
+              <a:rPr lang="en-GB" sz="2000" i="1" dirty="0"/>
+              <a:t> </a:t>
+            </a:r>
+            <a:r>
+              <a:rPr lang="en-GB" sz="2000" i="1" dirty="0" err="1"/>
+              <a:t>müügivõimalusi</a:t>
+            </a:r>
+            <a:r>
+              <a:rPr lang="en-GB" sz="2000" i="1" dirty="0"/>
+              <a:t>, </a:t>
+            </a:r>
+            <a:r>
+              <a:rPr lang="en-GB" sz="2000" i="1" dirty="0" err="1"/>
+              <a:t>klientide</a:t>
+            </a:r>
+            <a:r>
+              <a:rPr lang="en-GB" sz="2000" i="1" dirty="0"/>
+              <a:t> </a:t>
+            </a:r>
+            <a:r>
+              <a:rPr lang="en-GB" sz="2000" i="1" dirty="0" err="1"/>
+              <a:t>ostuharjumusi</a:t>
+            </a:r>
+            <a:r>
+              <a:rPr lang="en-GB" sz="2000" i="1" dirty="0"/>
+              <a:t>, </a:t>
+            </a:r>
+            <a:r>
+              <a:rPr lang="en-GB" sz="2000" i="1" dirty="0" err="1"/>
+              <a:t>müügiesindajate</a:t>
+            </a:r>
+            <a:r>
+              <a:rPr lang="en-GB" sz="2000" i="1" dirty="0"/>
+              <a:t> </a:t>
+            </a:r>
+            <a:r>
+              <a:rPr lang="en-GB" sz="2000" i="1" dirty="0" err="1"/>
+              <a:t>tulemusi</a:t>
+            </a:r>
+            <a:r>
+              <a:rPr lang="en-GB" sz="2000" i="1" dirty="0"/>
+              <a:t> </a:t>
+            </a:r>
+            <a:r>
+              <a:rPr lang="en-GB" sz="2000" i="1" dirty="0" err="1"/>
+              <a:t>ja</a:t>
+            </a:r>
+            <a:r>
+              <a:rPr lang="en-GB" sz="2000" i="1" dirty="0"/>
+              <a:t> </a:t>
+            </a:r>
+            <a:r>
+              <a:rPr lang="en-GB" sz="2000" i="1" dirty="0" err="1"/>
+              <a:t>ametlikku</a:t>
+            </a:r>
+            <a:r>
+              <a:rPr lang="en-GB" sz="2000" i="1" dirty="0"/>
+              <a:t> </a:t>
+            </a:r>
+            <a:r>
+              <a:rPr lang="en-GB" sz="2000" i="1" dirty="0" err="1"/>
+              <a:t>eelarveplaani</a:t>
+            </a:r>
+            <a:r>
+              <a:rPr lang="en-GB" sz="2000" i="1" dirty="0"/>
+              <a:t>.“</a:t>
+            </a:r>
+          </a:p>
+          <a:p>
+            <a:pPr>
+              <a:lnSpc>
+                <a:spcPct val="150000"/>
+              </a:lnSpc>
+            </a:pPr>
+            <a:endParaRPr lang="en-US" sz="2000" b="1" dirty="0">
+              <a:ea typeface="Inter"/>
+            </a:endParaRPr>
+          </a:p>
+          <a:p>
+            <a:endParaRPr lang="et-EE" dirty="0"/>
+          </a:p>
+        </p:txBody>
+      </p:sp>
+    </p:spTree>
+    <p:extLst>
+      <p:ext uri="{BB962C8B-B14F-4D97-AF65-F5344CB8AC3E}">
+        <p14:creationId xmlns:p14="http://schemas.microsoft.com/office/powerpoint/2010/main" val="1448546969"/>
+      </p:ext>
+    </p:extLst>
+  </p:cSld>
+  <p:clrMapOvr>
+    <a:masterClrMapping/>
+  </p:clrMapOvr>
+</p:sld>
+</file>
+
+<file path=ppt/slides/slide41.xml><?xml version="1.0" encoding="utf-8"?>
 <p:sld xmlns:a="http://schemas.openxmlformats.org/drawingml/2006/main" xmlns:r="http://schemas.openxmlformats.org/officeDocument/2006/relationships" xmlns:p="http://schemas.openxmlformats.org/presentationml/2006/main">
   <p:cSld>
     <p:spTree>
@@ -36019,123 +38805,7 @@
 </p:sld>
 </file>
 
-<file path=ppt/slides/slide4.xml><?xml version="1.0" encoding="utf-8"?>
-<p:sld xmlns:a="http://schemas.openxmlformats.org/drawingml/2006/main" xmlns:r="http://schemas.openxmlformats.org/officeDocument/2006/relationships" xmlns:p="http://schemas.openxmlformats.org/presentationml/2006/main">
-  <p:cSld>
-    <p:spTree>
-      <p:nvGrpSpPr>
-        <p:cNvPr id="1" name=""/>
-        <p:cNvGrpSpPr/>
-        <p:nvPr/>
-      </p:nvGrpSpPr>
-      <p:grpSpPr>
-        <a:xfrm>
-          <a:off x="0" y="0"/>
-          <a:ext cx="0" cy="0"/>
-          <a:chOff x="0" y="0"/>
-          <a:chExt cx="0" cy="0"/>
-        </a:xfrm>
-      </p:grpSpPr>
-      <p:sp>
-        <p:nvSpPr>
-          <p:cNvPr id="2" name="Title 1">
-            <a:extLst>
-              <a:ext uri="{FF2B5EF4-FFF2-40B4-BE49-F238E27FC236}">
-                <a16:creationId xmlns:a16="http://schemas.microsoft.com/office/drawing/2014/main" id="{85FE6474-3BEF-3008-2327-BDF18466833D}"/>
-              </a:ext>
-            </a:extLst>
-          </p:cNvPr>
-          <p:cNvSpPr>
-            <a:spLocks noGrp="1"/>
-          </p:cNvSpPr>
-          <p:nvPr>
-            <p:ph type="ctrTitle"/>
-          </p:nvPr>
-        </p:nvSpPr>
-        <p:spPr/>
-        <p:txBody>
-          <a:bodyPr/>
-          <a:lstStyle/>
-          <a:p>
-            <a:endParaRPr lang="et-EE"/>
-          </a:p>
-        </p:txBody>
-      </p:sp>
-      <p:sp>
-        <p:nvSpPr>
-          <p:cNvPr id="3" name="Content Placeholder 2">
-            <a:extLst>
-              <a:ext uri="{FF2B5EF4-FFF2-40B4-BE49-F238E27FC236}">
-                <a16:creationId xmlns:a16="http://schemas.microsoft.com/office/drawing/2014/main" id="{BEA08DED-65AB-89CC-F1CD-1C4067F305B3}"/>
-              </a:ext>
-            </a:extLst>
-          </p:cNvPr>
-          <p:cNvSpPr>
-            <a:spLocks noGrp="1"/>
-          </p:cNvSpPr>
-          <p:nvPr>
-            <p:ph sz="quarter" idx="10"/>
-          </p:nvPr>
-        </p:nvSpPr>
-        <p:spPr/>
-        <p:txBody>
-          <a:bodyPr/>
-          <a:lstStyle/>
-          <a:p>
-            <a:r>
-              <a:rPr lang="et-EE" dirty="0"/>
-              <a:t>M kood osaliste komadega eraldamiseks</a:t>
-            </a:r>
-          </a:p>
-          <a:p>
-            <a:endParaRPr lang="et-EE" dirty="0"/>
-          </a:p>
-        </p:txBody>
-      </p:sp>
-      <p:pic>
-        <p:nvPicPr>
-          <p:cNvPr id="5" name="Picture 4">
-            <a:extLst>
-              <a:ext uri="{FF2B5EF4-FFF2-40B4-BE49-F238E27FC236}">
-                <a16:creationId xmlns:a16="http://schemas.microsoft.com/office/drawing/2014/main" id="{AC70EA84-7D97-E038-A4BF-BB7FFE7DAEE5}"/>
-              </a:ext>
-            </a:extLst>
-          </p:cNvPr>
-          <p:cNvPicPr>
-            <a:picLocks noChangeAspect="1"/>
-          </p:cNvPicPr>
-          <p:nvPr/>
-        </p:nvPicPr>
-        <p:blipFill>
-          <a:blip r:embed="rId2"/>
-          <a:stretch>
-            <a:fillRect/>
-          </a:stretch>
-        </p:blipFill>
-        <p:spPr>
-          <a:xfrm>
-            <a:off x="0" y="1646579"/>
-            <a:ext cx="9442450" cy="5029334"/>
-          </a:xfrm>
-          <a:prstGeom prst="rect">
-            <a:avLst/>
-          </a:prstGeom>
-        </p:spPr>
-      </p:pic>
-    </p:spTree>
-    <p:extLst>
-      <p:ext uri="{BB962C8B-B14F-4D97-AF65-F5344CB8AC3E}">
-        <p14:creationId xmlns:p14="http://schemas.microsoft.com/office/powerpoint/2010/main" val="2479459817"/>
-      </p:ext>
-    </p:extLst>
-  </p:cSld>
-  <p:clrMapOvr>
-    <a:masterClrMapping/>
-  </p:clrMapOvr>
-</p:sld>
-</file>
-
-<file path=ppt/slides/slide40.xml><?xml version="1.0" encoding="utf-8"?>
+<file path=ppt/slides/slide42.xml><?xml version="1.0" encoding="utf-8"?>
 <p:sld xmlns:a="http://schemas.openxmlformats.org/drawingml/2006/main" xmlns:r="http://schemas.openxmlformats.org/officeDocument/2006/relationships" xmlns:p="http://schemas.openxmlformats.org/presentationml/2006/main">
   <p:cSld>
     <p:spTree>
@@ -36248,7 +38918,7 @@
 </p:sld>
 </file>
 
-<file path=ppt/slides/slide41.xml><?xml version="1.0" encoding="utf-8"?>
+<file path=ppt/slides/slide43.xml><?xml version="1.0" encoding="utf-8"?>
 <p:sld xmlns:a="http://schemas.openxmlformats.org/drawingml/2006/main" xmlns:r="http://schemas.openxmlformats.org/officeDocument/2006/relationships" xmlns:p="http://schemas.openxmlformats.org/presentationml/2006/main">
   <p:cSld>
     <p:spTree>
@@ -36373,7 +39043,7 @@
 </p:sld>
 </file>
 
-<file path=ppt/slides/slide42.xml><?xml version="1.0" encoding="utf-8"?>
+<file path=ppt/slides/slide44.xml><?xml version="1.0" encoding="utf-8"?>
 <p:sld xmlns:a="http://schemas.openxmlformats.org/drawingml/2006/main" xmlns:r="http://schemas.openxmlformats.org/officeDocument/2006/relationships" xmlns:p="http://schemas.openxmlformats.org/presentationml/2006/main">
   <p:cSld>
     <p:spTree>
@@ -36649,8 +39319,1206 @@
 </p:sld>
 </file>
 
-<file path=ppt/slides/slide43.xml><?xml version="1.0" encoding="utf-8"?>
+<file path=ppt/slides/slide45.xml><?xml version="1.0" encoding="utf-8"?>
 <p:sld xmlns:a="http://schemas.openxmlformats.org/drawingml/2006/main" xmlns:r="http://schemas.openxmlformats.org/officeDocument/2006/relationships" xmlns:p="http://schemas.openxmlformats.org/presentationml/2006/main">
+  <p:cSld>
+    <p:spTree>
+      <p:nvGrpSpPr>
+        <p:cNvPr id="1" name="">
+          <a:extLst>
+            <a:ext uri="{FF2B5EF4-FFF2-40B4-BE49-F238E27FC236}">
+              <a16:creationId xmlns:a16="http://schemas.microsoft.com/office/drawing/2014/main" id="{CCDFF243-D0DC-9E0F-58AC-0ABA1E7FF7F6}"/>
+            </a:ext>
+          </a:extLst>
+        </p:cNvPr>
+        <p:cNvGrpSpPr/>
+        <p:nvPr/>
+      </p:nvGrpSpPr>
+      <p:grpSpPr>
+        <a:xfrm>
+          <a:off x="0" y="0"/>
+          <a:ext cx="0" cy="0"/>
+          <a:chOff x="0" y="0"/>
+          <a:chExt cx="0" cy="0"/>
+        </a:xfrm>
+      </p:grpSpPr>
+      <p:sp>
+        <p:nvSpPr>
+          <p:cNvPr id="2" name="Title 1">
+            <a:extLst>
+              <a:ext uri="{FF2B5EF4-FFF2-40B4-BE49-F238E27FC236}">
+                <a16:creationId xmlns:a16="http://schemas.microsoft.com/office/drawing/2014/main" id="{D1A6AB3E-D069-D40D-CF7C-9154C2F75C1A}"/>
+              </a:ext>
+            </a:extLst>
+          </p:cNvPr>
+          <p:cNvSpPr>
+            <a:spLocks noGrp="1"/>
+          </p:cNvSpPr>
+          <p:nvPr>
+            <p:ph type="ctrTitle"/>
+          </p:nvPr>
+        </p:nvSpPr>
+        <p:spPr/>
+        <p:txBody>
+          <a:bodyPr/>
+          <a:lstStyle/>
+          <a:p>
+            <a:r>
+              <a:rPr lang="en-US" sz="3600" b="1" dirty="0"/>
+              <a:t>YTD Sales </a:t>
+            </a:r>
+            <a:r>
+              <a:rPr lang="en-US" sz="3600" b="1" dirty="0" err="1"/>
+              <a:t>mõõdik</a:t>
+            </a:r>
+            <a:r>
+              <a:rPr lang="et-EE" sz="3600" b="1" dirty="0"/>
+              <a:t> ja graafikud</a:t>
+            </a:r>
+            <a:endParaRPr lang="en-US" dirty="0"/>
+          </a:p>
+        </p:txBody>
+      </p:sp>
+      <p:sp>
+        <p:nvSpPr>
+          <p:cNvPr id="3" name="Content Placeholder 2">
+            <a:extLst>
+              <a:ext uri="{FF2B5EF4-FFF2-40B4-BE49-F238E27FC236}">
+                <a16:creationId xmlns:a16="http://schemas.microsoft.com/office/drawing/2014/main" id="{8AD418F8-A06F-DCE7-A7F2-65299835B590}"/>
+              </a:ext>
+            </a:extLst>
+          </p:cNvPr>
+          <p:cNvSpPr>
+            <a:spLocks noGrp="1"/>
+          </p:cNvSpPr>
+          <p:nvPr>
+            <p:ph sz="quarter" idx="10"/>
+          </p:nvPr>
+        </p:nvSpPr>
+        <p:spPr/>
+        <p:txBody>
+          <a:bodyPr/>
+          <a:lstStyle/>
+          <a:p>
+            <a:pPr>
+              <a:buNone/>
+            </a:pPr>
+            <a:r>
+              <a:rPr lang="en-US" sz="1800" dirty="0">
+                <a:solidFill>
+                  <a:srgbClr val="000000"/>
+                </a:solidFill>
+                <a:latin typeface="Consolas"/>
+                <a:ea typeface="Inter"/>
+              </a:rPr>
+              <a:t>YTD Sales = </a:t>
+            </a:r>
+            <a:endParaRPr lang="en-US" sz="1800" dirty="0"/>
+          </a:p>
+          <a:p>
+            <a:pPr>
+              <a:buNone/>
+            </a:pPr>
+            <a:r>
+              <a:rPr lang="en-US" sz="1800" dirty="0">
+                <a:solidFill>
+                  <a:srgbClr val="0000FF"/>
+                </a:solidFill>
+                <a:latin typeface="Consolas"/>
+                <a:ea typeface="Inter"/>
+              </a:rPr>
+              <a:t>VAR</a:t>
+            </a:r>
+            <a:r>
+              <a:rPr lang="en-US" sz="1800" dirty="0">
+                <a:solidFill>
+                  <a:srgbClr val="000000"/>
+                </a:solidFill>
+                <a:latin typeface="Consolas"/>
+                <a:ea typeface="Inter"/>
+              </a:rPr>
+              <a:t> </a:t>
+            </a:r>
+            <a:r>
+              <a:rPr lang="en-US" sz="1800" dirty="0" err="1">
+                <a:solidFill>
+                  <a:srgbClr val="008080"/>
+                </a:solidFill>
+                <a:latin typeface="Consolas"/>
+                <a:ea typeface="Inter"/>
+              </a:rPr>
+              <a:t>LastSalesDate</a:t>
+            </a:r>
+            <a:r>
+              <a:rPr lang="en-US" sz="1800" dirty="0">
+                <a:solidFill>
+                  <a:srgbClr val="000000"/>
+                </a:solidFill>
+                <a:latin typeface="Consolas"/>
+                <a:ea typeface="Inter"/>
+              </a:rPr>
+              <a:t> = </a:t>
+            </a:r>
+            <a:r>
+              <a:rPr lang="en-US" sz="1800" dirty="0">
+                <a:solidFill>
+                  <a:srgbClr val="3165BB"/>
+                </a:solidFill>
+                <a:latin typeface="Consolas"/>
+                <a:ea typeface="Inter"/>
+              </a:rPr>
+              <a:t>CALCULATE</a:t>
+            </a:r>
+            <a:r>
+              <a:rPr lang="en-US" sz="1800" dirty="0">
+                <a:solidFill>
+                  <a:srgbClr val="000000"/>
+                </a:solidFill>
+                <a:latin typeface="Consolas"/>
+                <a:ea typeface="Inter"/>
+              </a:rPr>
+              <a:t>(</a:t>
+            </a:r>
+            <a:r>
+              <a:rPr lang="en-US" sz="1800" dirty="0">
+                <a:solidFill>
+                  <a:srgbClr val="3165BB"/>
+                </a:solidFill>
+                <a:latin typeface="Consolas"/>
+                <a:ea typeface="Inter"/>
+              </a:rPr>
+              <a:t>MAX</a:t>
+            </a:r>
+            <a:r>
+              <a:rPr lang="en-US" sz="1800" dirty="0">
+                <a:solidFill>
+                  <a:srgbClr val="000000"/>
+                </a:solidFill>
+                <a:latin typeface="Consolas"/>
+                <a:ea typeface="Inter"/>
+              </a:rPr>
+              <a:t>(</a:t>
+            </a:r>
+            <a:r>
+              <a:rPr lang="en-US" sz="1800" dirty="0" err="1">
+                <a:solidFill>
+                  <a:srgbClr val="001080"/>
+                </a:solidFill>
+                <a:latin typeface="Consolas"/>
+                <a:ea typeface="Inter"/>
+              </a:rPr>
+              <a:t>SalesTable</a:t>
+            </a:r>
+            <a:r>
+              <a:rPr lang="en-US" sz="1800" dirty="0">
+                <a:solidFill>
+                  <a:srgbClr val="001080"/>
+                </a:solidFill>
+                <a:latin typeface="Consolas"/>
+                <a:ea typeface="Inter"/>
+              </a:rPr>
+              <a:t>[Date]</a:t>
+            </a:r>
+            <a:r>
+              <a:rPr lang="en-US" sz="1800" dirty="0">
+                <a:solidFill>
+                  <a:srgbClr val="000000"/>
+                </a:solidFill>
+                <a:latin typeface="Consolas"/>
+                <a:ea typeface="Inter"/>
+              </a:rPr>
+              <a:t>), </a:t>
+            </a:r>
+            <a:r>
+              <a:rPr lang="en-US" sz="1800" dirty="0">
+                <a:solidFill>
+                  <a:srgbClr val="3165BB"/>
+                </a:solidFill>
+                <a:latin typeface="Consolas"/>
+                <a:ea typeface="Inter"/>
+              </a:rPr>
+              <a:t>ALL</a:t>
+            </a:r>
+            <a:r>
+              <a:rPr lang="en-US" sz="1800" dirty="0">
+                <a:solidFill>
+                  <a:srgbClr val="000000"/>
+                </a:solidFill>
+                <a:latin typeface="Consolas"/>
+                <a:ea typeface="Inter"/>
+              </a:rPr>
+              <a:t>())</a:t>
+            </a:r>
+            <a:endParaRPr lang="en-US" sz="1800" dirty="0"/>
+          </a:p>
+          <a:p>
+            <a:pPr>
+              <a:buNone/>
+            </a:pPr>
+            <a:r>
+              <a:rPr lang="en-US" sz="1800" dirty="0">
+                <a:solidFill>
+                  <a:srgbClr val="0000FF"/>
+                </a:solidFill>
+                <a:latin typeface="Consolas"/>
+                <a:ea typeface="Inter"/>
+              </a:rPr>
+              <a:t>VAR</a:t>
+            </a:r>
+            <a:r>
+              <a:rPr lang="en-US" sz="1800" dirty="0">
+                <a:solidFill>
+                  <a:srgbClr val="000000"/>
+                </a:solidFill>
+                <a:latin typeface="Consolas"/>
+                <a:ea typeface="Inter"/>
+              </a:rPr>
+              <a:t> </a:t>
+            </a:r>
+            <a:r>
+              <a:rPr lang="en-US" sz="1800" dirty="0" err="1">
+                <a:solidFill>
+                  <a:srgbClr val="008080"/>
+                </a:solidFill>
+                <a:latin typeface="Consolas"/>
+                <a:ea typeface="Inter"/>
+              </a:rPr>
+              <a:t>LastSalesMonth</a:t>
+            </a:r>
+            <a:r>
+              <a:rPr lang="en-US" sz="1800" dirty="0">
+                <a:solidFill>
+                  <a:srgbClr val="000000"/>
+                </a:solidFill>
+                <a:latin typeface="Consolas"/>
+                <a:ea typeface="Inter"/>
+              </a:rPr>
+              <a:t> = </a:t>
+            </a:r>
+            <a:r>
+              <a:rPr lang="en-US" sz="1800" dirty="0">
+                <a:solidFill>
+                  <a:srgbClr val="3165BB"/>
+                </a:solidFill>
+                <a:latin typeface="Consolas"/>
+                <a:ea typeface="Inter"/>
+              </a:rPr>
+              <a:t>MONTH</a:t>
+            </a:r>
+            <a:r>
+              <a:rPr lang="en-US" sz="1800" dirty="0">
+                <a:solidFill>
+                  <a:srgbClr val="000000"/>
+                </a:solidFill>
+                <a:latin typeface="Consolas"/>
+                <a:ea typeface="Inter"/>
+              </a:rPr>
+              <a:t>(</a:t>
+            </a:r>
+            <a:r>
+              <a:rPr lang="en-US" sz="1800" dirty="0" err="1">
+                <a:solidFill>
+                  <a:srgbClr val="008080"/>
+                </a:solidFill>
+                <a:latin typeface="Consolas"/>
+                <a:ea typeface="Inter"/>
+              </a:rPr>
+              <a:t>LastSalesDate</a:t>
+            </a:r>
+            <a:r>
+              <a:rPr lang="en-US" sz="1800" dirty="0">
+                <a:solidFill>
+                  <a:srgbClr val="000000"/>
+                </a:solidFill>
+                <a:latin typeface="Consolas"/>
+                <a:ea typeface="Inter"/>
+              </a:rPr>
+              <a:t>)</a:t>
+            </a:r>
+            <a:endParaRPr lang="en-US" sz="1800" dirty="0"/>
+          </a:p>
+          <a:p>
+            <a:pPr>
+              <a:buNone/>
+            </a:pPr>
+            <a:r>
+              <a:rPr lang="en-US" sz="1800" dirty="0">
+                <a:solidFill>
+                  <a:srgbClr val="0000FF"/>
+                </a:solidFill>
+                <a:latin typeface="Consolas"/>
+                <a:ea typeface="Inter"/>
+              </a:rPr>
+              <a:t>VAR</a:t>
+            </a:r>
+            <a:r>
+              <a:rPr lang="en-US" sz="1800" dirty="0">
+                <a:solidFill>
+                  <a:srgbClr val="000000"/>
+                </a:solidFill>
+                <a:latin typeface="Consolas"/>
+                <a:ea typeface="Inter"/>
+              </a:rPr>
+              <a:t> </a:t>
+            </a:r>
+            <a:r>
+              <a:rPr lang="en-US" sz="1800" dirty="0" err="1">
+                <a:solidFill>
+                  <a:srgbClr val="008080"/>
+                </a:solidFill>
+                <a:latin typeface="Consolas"/>
+                <a:ea typeface="Inter"/>
+              </a:rPr>
+              <a:t>LastSalesDay</a:t>
+            </a:r>
+            <a:r>
+              <a:rPr lang="en-US" sz="1800" dirty="0">
+                <a:solidFill>
+                  <a:srgbClr val="000000"/>
+                </a:solidFill>
+                <a:latin typeface="Consolas"/>
+                <a:ea typeface="Inter"/>
+              </a:rPr>
+              <a:t> = </a:t>
+            </a:r>
+            <a:r>
+              <a:rPr lang="en-US" sz="1800" dirty="0">
+                <a:solidFill>
+                  <a:srgbClr val="3165BB"/>
+                </a:solidFill>
+                <a:latin typeface="Consolas"/>
+                <a:ea typeface="Inter"/>
+              </a:rPr>
+              <a:t>DAY</a:t>
+            </a:r>
+            <a:r>
+              <a:rPr lang="en-US" sz="1800" dirty="0">
+                <a:solidFill>
+                  <a:srgbClr val="000000"/>
+                </a:solidFill>
+                <a:latin typeface="Consolas"/>
+                <a:ea typeface="Inter"/>
+              </a:rPr>
+              <a:t>(</a:t>
+            </a:r>
+            <a:r>
+              <a:rPr lang="en-US" sz="1800" dirty="0" err="1">
+                <a:solidFill>
+                  <a:srgbClr val="008080"/>
+                </a:solidFill>
+                <a:latin typeface="Consolas"/>
+                <a:ea typeface="Inter"/>
+              </a:rPr>
+              <a:t>LastSalesDate</a:t>
+            </a:r>
+            <a:r>
+              <a:rPr lang="en-US" sz="1800" dirty="0">
+                <a:solidFill>
+                  <a:srgbClr val="000000"/>
+                </a:solidFill>
+                <a:latin typeface="Consolas"/>
+                <a:ea typeface="Inter"/>
+              </a:rPr>
+              <a:t>)</a:t>
+            </a:r>
+            <a:endParaRPr lang="en-US" sz="1800" dirty="0"/>
+          </a:p>
+          <a:p>
+            <a:pPr>
+              <a:buNone/>
+            </a:pPr>
+            <a:br>
+              <a:rPr lang="en-US" dirty="0"/>
+            </a:br>
+            <a:endParaRPr lang="en-US" sz="1800" dirty="0"/>
+          </a:p>
+          <a:p>
+            <a:pPr>
+              <a:buNone/>
+            </a:pPr>
+            <a:r>
+              <a:rPr lang="en-US" sz="1800" dirty="0">
+                <a:solidFill>
+                  <a:srgbClr val="0000FF"/>
+                </a:solidFill>
+                <a:latin typeface="Consolas"/>
+                <a:ea typeface="Inter"/>
+              </a:rPr>
+              <a:t>RETURN</a:t>
+            </a:r>
+            <a:endParaRPr lang="en-US" sz="1800" dirty="0"/>
+          </a:p>
+          <a:p>
+            <a:pPr>
+              <a:buNone/>
+            </a:pPr>
+            <a:r>
+              <a:rPr lang="en-US" sz="1800" dirty="0">
+                <a:solidFill>
+                  <a:srgbClr val="3165BB"/>
+                </a:solidFill>
+                <a:latin typeface="Consolas"/>
+                <a:ea typeface="Inter"/>
+              </a:rPr>
+              <a:t>CALCULATE</a:t>
+            </a:r>
+            <a:r>
+              <a:rPr lang="en-US" sz="1800" dirty="0">
+                <a:solidFill>
+                  <a:srgbClr val="000000"/>
+                </a:solidFill>
+                <a:latin typeface="Consolas"/>
+                <a:ea typeface="Inter"/>
+              </a:rPr>
+              <a:t> (</a:t>
+            </a:r>
+            <a:endParaRPr lang="en-US" sz="1800" dirty="0"/>
+          </a:p>
+          <a:p>
+            <a:pPr>
+              <a:buNone/>
+            </a:pPr>
+            <a:r>
+              <a:rPr lang="en-US" sz="1800" dirty="0">
+                <a:solidFill>
+                  <a:srgbClr val="000000"/>
+                </a:solidFill>
+                <a:latin typeface="Consolas"/>
+                <a:ea typeface="+mn-lt"/>
+                <a:cs typeface="+mn-lt"/>
+              </a:rPr>
+              <a:t>    </a:t>
+            </a:r>
+            <a:r>
+              <a:rPr lang="en-US" sz="1800" dirty="0">
+                <a:solidFill>
+                  <a:srgbClr val="3165BB"/>
+                </a:solidFill>
+                <a:latin typeface="Consolas"/>
+                <a:ea typeface="+mn-lt"/>
+                <a:cs typeface="+mn-lt"/>
+              </a:rPr>
+              <a:t>SUM</a:t>
+            </a:r>
+            <a:r>
+              <a:rPr lang="en-US" sz="1800" dirty="0">
+                <a:solidFill>
+                  <a:srgbClr val="000000"/>
+                </a:solidFill>
+                <a:latin typeface="Consolas"/>
+                <a:ea typeface="+mn-lt"/>
+                <a:cs typeface="+mn-lt"/>
+              </a:rPr>
+              <a:t> ( </a:t>
+            </a:r>
+            <a:r>
+              <a:rPr lang="en-US" sz="1800" dirty="0" err="1">
+                <a:solidFill>
+                  <a:srgbClr val="001080"/>
+                </a:solidFill>
+                <a:latin typeface="Consolas"/>
+                <a:ea typeface="+mn-lt"/>
+                <a:cs typeface="+mn-lt"/>
+              </a:rPr>
+              <a:t>SalesTable</a:t>
+            </a:r>
+            <a:r>
+              <a:rPr lang="en-US" sz="1800" dirty="0">
+                <a:solidFill>
+                  <a:srgbClr val="001080"/>
+                </a:solidFill>
+                <a:latin typeface="Consolas"/>
+                <a:ea typeface="+mn-lt"/>
+                <a:cs typeface="+mn-lt"/>
+              </a:rPr>
+              <a:t>[Sales Sum]</a:t>
+            </a:r>
+            <a:r>
+              <a:rPr lang="en-US" sz="1800" dirty="0">
+                <a:solidFill>
+                  <a:srgbClr val="000000"/>
+                </a:solidFill>
+                <a:latin typeface="Consolas"/>
+                <a:ea typeface="+mn-lt"/>
+                <a:cs typeface="+mn-lt"/>
+              </a:rPr>
+              <a:t> ),</a:t>
+            </a:r>
+            <a:endParaRPr lang="en-US" sz="1800" dirty="0"/>
+          </a:p>
+          <a:p>
+            <a:pPr>
+              <a:buNone/>
+            </a:pPr>
+            <a:r>
+              <a:rPr lang="en-US" sz="1800" dirty="0">
+                <a:solidFill>
+                  <a:srgbClr val="000000"/>
+                </a:solidFill>
+                <a:latin typeface="Consolas"/>
+                <a:ea typeface="+mn-lt"/>
+                <a:cs typeface="+mn-lt"/>
+              </a:rPr>
+              <a:t>    </a:t>
+            </a:r>
+            <a:r>
+              <a:rPr lang="en-US" sz="1800" dirty="0">
+                <a:solidFill>
+                  <a:srgbClr val="3165BB"/>
+                </a:solidFill>
+                <a:latin typeface="Consolas"/>
+                <a:ea typeface="+mn-lt"/>
+                <a:cs typeface="+mn-lt"/>
+              </a:rPr>
+              <a:t>FILTER</a:t>
+            </a:r>
+            <a:r>
+              <a:rPr lang="en-US" sz="1800" dirty="0">
+                <a:solidFill>
+                  <a:srgbClr val="000000"/>
+                </a:solidFill>
+                <a:latin typeface="Consolas"/>
+                <a:ea typeface="+mn-lt"/>
+                <a:cs typeface="+mn-lt"/>
+              </a:rPr>
+              <a:t> (</a:t>
+            </a:r>
+            <a:endParaRPr lang="en-US" sz="1800" dirty="0"/>
+          </a:p>
+          <a:p>
+            <a:pPr>
+              <a:buNone/>
+            </a:pPr>
+            <a:r>
+              <a:rPr lang="en-US" sz="1800" dirty="0">
+                <a:solidFill>
+                  <a:srgbClr val="000000"/>
+                </a:solidFill>
+                <a:latin typeface="Consolas"/>
+                <a:ea typeface="+mn-lt"/>
+                <a:cs typeface="+mn-lt"/>
+              </a:rPr>
+              <a:t>        </a:t>
+            </a:r>
+            <a:r>
+              <a:rPr lang="en-US" sz="1800" dirty="0">
+                <a:solidFill>
+                  <a:srgbClr val="001080"/>
+                </a:solidFill>
+                <a:latin typeface="Consolas"/>
+                <a:ea typeface="+mn-lt"/>
+                <a:cs typeface="+mn-lt"/>
+              </a:rPr>
+              <a:t>'</a:t>
+            </a:r>
+            <a:r>
+              <a:rPr lang="en-US" sz="1800" dirty="0" err="1">
+                <a:solidFill>
+                  <a:srgbClr val="001080"/>
+                </a:solidFill>
+                <a:latin typeface="Consolas"/>
+                <a:ea typeface="+mn-lt"/>
+                <a:cs typeface="+mn-lt"/>
+              </a:rPr>
+              <a:t>SalesTable</a:t>
+            </a:r>
+            <a:r>
+              <a:rPr lang="en-US" sz="1800" dirty="0">
+                <a:solidFill>
+                  <a:srgbClr val="001080"/>
+                </a:solidFill>
+                <a:latin typeface="Consolas"/>
+                <a:ea typeface="+mn-lt"/>
+                <a:cs typeface="+mn-lt"/>
+              </a:rPr>
+              <a:t>'</a:t>
+            </a:r>
+            <a:r>
+              <a:rPr lang="en-US" sz="1800" dirty="0">
+                <a:solidFill>
+                  <a:srgbClr val="000000"/>
+                </a:solidFill>
+                <a:latin typeface="Consolas"/>
+                <a:ea typeface="+mn-lt"/>
+                <a:cs typeface="+mn-lt"/>
+              </a:rPr>
+              <a:t>,</a:t>
+            </a:r>
+            <a:endParaRPr lang="en-US" sz="1800" dirty="0"/>
+          </a:p>
+          <a:p>
+            <a:pPr>
+              <a:buNone/>
+            </a:pPr>
+            <a:r>
+              <a:rPr lang="en-US" sz="1800" dirty="0">
+                <a:solidFill>
+                  <a:srgbClr val="000000"/>
+                </a:solidFill>
+                <a:latin typeface="Consolas"/>
+                <a:ea typeface="+mn-lt"/>
+                <a:cs typeface="+mn-lt"/>
+              </a:rPr>
+              <a:t>        </a:t>
+            </a:r>
+            <a:r>
+              <a:rPr lang="en-US" sz="1800" dirty="0">
+                <a:solidFill>
+                  <a:srgbClr val="3165BB"/>
+                </a:solidFill>
+                <a:latin typeface="Consolas"/>
+                <a:ea typeface="Inter"/>
+              </a:rPr>
+              <a:t>MONTH</a:t>
+            </a:r>
+            <a:r>
+              <a:rPr lang="en-US" sz="1800" dirty="0">
+                <a:solidFill>
+                  <a:srgbClr val="000000"/>
+                </a:solidFill>
+                <a:latin typeface="Consolas"/>
+                <a:ea typeface="Inter"/>
+              </a:rPr>
+              <a:t> ( </a:t>
+            </a:r>
+            <a:r>
+              <a:rPr lang="en-US" sz="1800" dirty="0">
+                <a:solidFill>
+                  <a:srgbClr val="001080"/>
+                </a:solidFill>
+                <a:latin typeface="Consolas"/>
+                <a:ea typeface="Inter"/>
+              </a:rPr>
+              <a:t>'</a:t>
+            </a:r>
+            <a:r>
+              <a:rPr lang="en-US" sz="1800" dirty="0" err="1">
+                <a:solidFill>
+                  <a:srgbClr val="001080"/>
+                </a:solidFill>
+                <a:latin typeface="Consolas"/>
+                <a:ea typeface="Inter"/>
+              </a:rPr>
+              <a:t>SalesTable</a:t>
+            </a:r>
+            <a:r>
+              <a:rPr lang="en-US" sz="1800" dirty="0">
+                <a:solidFill>
+                  <a:srgbClr val="001080"/>
+                </a:solidFill>
+                <a:latin typeface="Consolas"/>
+                <a:ea typeface="Inter"/>
+              </a:rPr>
+              <a:t>'[Date]</a:t>
+            </a:r>
+            <a:r>
+              <a:rPr lang="en-US" sz="1800" dirty="0">
+                <a:solidFill>
+                  <a:srgbClr val="000000"/>
+                </a:solidFill>
+                <a:latin typeface="Consolas"/>
+                <a:ea typeface="Inter"/>
+              </a:rPr>
+              <a:t> ) &lt; </a:t>
+            </a:r>
+            <a:r>
+              <a:rPr lang="en-US" sz="1800" dirty="0" err="1">
+                <a:solidFill>
+                  <a:srgbClr val="008080"/>
+                </a:solidFill>
+                <a:latin typeface="Consolas"/>
+                <a:ea typeface="Inter"/>
+              </a:rPr>
+              <a:t>LastSalesMonth</a:t>
+            </a:r>
+            <a:endParaRPr lang="en-US" sz="1800" dirty="0"/>
+          </a:p>
+          <a:p>
+            <a:pPr>
+              <a:buNone/>
+            </a:pPr>
+            <a:r>
+              <a:rPr lang="en-US" sz="1800" dirty="0">
+                <a:solidFill>
+                  <a:srgbClr val="000000"/>
+                </a:solidFill>
+                <a:latin typeface="Consolas"/>
+                <a:ea typeface="Inter"/>
+              </a:rPr>
+              <a:t>            || ( </a:t>
+            </a:r>
+            <a:r>
+              <a:rPr lang="en-US" sz="1800" dirty="0">
+                <a:solidFill>
+                  <a:srgbClr val="3165BB"/>
+                </a:solidFill>
+                <a:latin typeface="Consolas"/>
+                <a:ea typeface="Inter"/>
+              </a:rPr>
+              <a:t>MONTH</a:t>
+            </a:r>
+            <a:r>
+              <a:rPr lang="en-US" sz="1800" dirty="0">
+                <a:solidFill>
+                  <a:srgbClr val="000000"/>
+                </a:solidFill>
+                <a:latin typeface="Consolas"/>
+                <a:ea typeface="Inter"/>
+              </a:rPr>
+              <a:t> ( </a:t>
+            </a:r>
+            <a:r>
+              <a:rPr lang="en-US" sz="1800" dirty="0">
+                <a:solidFill>
+                  <a:srgbClr val="001080"/>
+                </a:solidFill>
+                <a:latin typeface="Consolas"/>
+                <a:ea typeface="Inter"/>
+              </a:rPr>
+              <a:t>'</a:t>
+            </a:r>
+            <a:r>
+              <a:rPr lang="en-US" sz="1800" dirty="0" err="1">
+                <a:solidFill>
+                  <a:srgbClr val="001080"/>
+                </a:solidFill>
+                <a:latin typeface="Consolas"/>
+                <a:ea typeface="Inter"/>
+              </a:rPr>
+              <a:t>SalesTable</a:t>
+            </a:r>
+            <a:r>
+              <a:rPr lang="en-US" sz="1800" dirty="0">
+                <a:solidFill>
+                  <a:srgbClr val="001080"/>
+                </a:solidFill>
+                <a:latin typeface="Consolas"/>
+                <a:ea typeface="Inter"/>
+              </a:rPr>
+              <a:t>'[Date]</a:t>
+            </a:r>
+            <a:r>
+              <a:rPr lang="en-US" sz="1800" dirty="0">
+                <a:solidFill>
+                  <a:srgbClr val="000000"/>
+                </a:solidFill>
+                <a:latin typeface="Consolas"/>
+                <a:ea typeface="Inter"/>
+              </a:rPr>
+              <a:t> )</a:t>
+            </a:r>
+            <a:r>
+              <a:rPr lang="en-US" sz="1800" dirty="0">
+                <a:solidFill>
+                  <a:srgbClr val="000000"/>
+                </a:solidFill>
+                <a:latin typeface="Consolas"/>
+                <a:ea typeface="+mn-lt"/>
+                <a:cs typeface="+mn-lt"/>
+              </a:rPr>
+              <a:t> = </a:t>
+            </a:r>
+            <a:r>
+              <a:rPr lang="en-US" sz="1800" dirty="0" err="1">
+                <a:solidFill>
+                  <a:srgbClr val="008080"/>
+                </a:solidFill>
+                <a:latin typeface="Consolas"/>
+                <a:ea typeface="Inter"/>
+              </a:rPr>
+              <a:t>LastSalesMonth</a:t>
+            </a:r>
+            <a:endParaRPr lang="en-US" sz="1800" dirty="0"/>
+          </a:p>
+          <a:p>
+            <a:pPr>
+              <a:buNone/>
+            </a:pPr>
+            <a:r>
+              <a:rPr lang="en-US" sz="1800" dirty="0">
+                <a:solidFill>
+                  <a:srgbClr val="000000"/>
+                </a:solidFill>
+                <a:latin typeface="Consolas"/>
+                <a:ea typeface="Inter"/>
+              </a:rPr>
+              <a:t>            &amp;&amp; </a:t>
+            </a:r>
+            <a:r>
+              <a:rPr lang="en-US" sz="1800" dirty="0">
+                <a:solidFill>
+                  <a:srgbClr val="3165BB"/>
+                </a:solidFill>
+                <a:latin typeface="Consolas"/>
+                <a:ea typeface="Inter"/>
+              </a:rPr>
+              <a:t>DAY</a:t>
+            </a:r>
+            <a:r>
+              <a:rPr lang="en-US" sz="1800" dirty="0">
+                <a:solidFill>
+                  <a:srgbClr val="000000"/>
+                </a:solidFill>
+                <a:latin typeface="Consolas"/>
+                <a:ea typeface="Inter"/>
+              </a:rPr>
+              <a:t> ( </a:t>
+            </a:r>
+            <a:r>
+              <a:rPr lang="en-US" sz="1800" dirty="0">
+                <a:solidFill>
+                  <a:srgbClr val="001080"/>
+                </a:solidFill>
+                <a:latin typeface="Consolas"/>
+                <a:ea typeface="Inter"/>
+              </a:rPr>
+              <a:t>'</a:t>
+            </a:r>
+            <a:r>
+              <a:rPr lang="en-US" sz="1800" dirty="0" err="1">
+                <a:solidFill>
+                  <a:srgbClr val="001080"/>
+                </a:solidFill>
+                <a:latin typeface="Consolas"/>
+                <a:ea typeface="Inter"/>
+              </a:rPr>
+              <a:t>SalesTable</a:t>
+            </a:r>
+            <a:r>
+              <a:rPr lang="en-US" sz="1800" dirty="0">
+                <a:solidFill>
+                  <a:srgbClr val="001080"/>
+                </a:solidFill>
+                <a:latin typeface="Consolas"/>
+                <a:ea typeface="Inter"/>
+              </a:rPr>
+              <a:t>'[Date]</a:t>
+            </a:r>
+            <a:r>
+              <a:rPr lang="en-US" sz="1800" dirty="0">
+                <a:solidFill>
+                  <a:srgbClr val="000000"/>
+                </a:solidFill>
+                <a:latin typeface="Consolas"/>
+                <a:ea typeface="Inter"/>
+              </a:rPr>
+              <a:t> ) &lt;= </a:t>
+            </a:r>
+            <a:r>
+              <a:rPr lang="en-US" sz="1800" dirty="0" err="1">
+                <a:solidFill>
+                  <a:srgbClr val="008080"/>
+                </a:solidFill>
+                <a:latin typeface="Consolas"/>
+                <a:ea typeface="Inter"/>
+              </a:rPr>
+              <a:t>LastSalesDay</a:t>
+            </a:r>
+            <a:r>
+              <a:rPr lang="en-US" sz="1800" dirty="0">
+                <a:solidFill>
+                  <a:srgbClr val="000000"/>
+                </a:solidFill>
+                <a:latin typeface="Consolas"/>
+                <a:ea typeface="Inter"/>
+              </a:rPr>
+              <a:t> )</a:t>
+            </a:r>
+            <a:endParaRPr lang="en-US" sz="1800" dirty="0"/>
+          </a:p>
+          <a:p>
+            <a:pPr>
+              <a:buNone/>
+            </a:pPr>
+            <a:r>
+              <a:rPr lang="en-US" sz="1800" dirty="0">
+                <a:solidFill>
+                  <a:srgbClr val="000000"/>
+                </a:solidFill>
+                <a:latin typeface="Consolas"/>
+                <a:ea typeface="Inter"/>
+              </a:rPr>
+              <a:t>    )</a:t>
+            </a:r>
+            <a:endParaRPr lang="en-US" sz="1800" dirty="0"/>
+          </a:p>
+          <a:p>
+            <a:pPr>
+              <a:buNone/>
+            </a:pPr>
+            <a:r>
+              <a:rPr lang="en-US" sz="1800" dirty="0">
+                <a:solidFill>
+                  <a:srgbClr val="000000"/>
+                </a:solidFill>
+                <a:latin typeface="Consolas"/>
+                <a:ea typeface="Inter"/>
+              </a:rPr>
+              <a:t>)</a:t>
+            </a:r>
+            <a:endParaRPr lang="en-US" sz="1800" dirty="0"/>
+          </a:p>
+          <a:p>
+            <a:pPr>
+              <a:buNone/>
+            </a:pPr>
+            <a:br>
+              <a:rPr lang="en-US" dirty="0"/>
+            </a:br>
+            <a:endParaRPr lang="en-US" dirty="0"/>
+          </a:p>
+          <a:p>
+            <a:pPr marL="0" indent="0">
+              <a:buNone/>
+            </a:pPr>
+            <a:endParaRPr lang="en-US" sz="1800" dirty="0">
+              <a:solidFill>
+                <a:srgbClr val="000000"/>
+              </a:solidFill>
+              <a:latin typeface="Consolas"/>
+              <a:ea typeface="Inter"/>
+            </a:endParaRPr>
+          </a:p>
+          <a:p>
+            <a:pPr marL="0" indent="0">
+              <a:buClr>
+                <a:srgbClr val="121212"/>
+              </a:buClr>
+              <a:buNone/>
+            </a:pPr>
+            <a:br>
+              <a:rPr lang="en-US" dirty="0"/>
+            </a:br>
+            <a:br>
+              <a:rPr lang="en-US" dirty="0"/>
+            </a:br>
+            <a:endParaRPr lang="en-US" dirty="0"/>
+          </a:p>
+          <a:p>
+            <a:pPr marL="514350" indent="-514350">
+              <a:lnSpc>
+                <a:spcPct val="150000"/>
+              </a:lnSpc>
+            </a:pPr>
+            <a:endParaRPr lang="en-US" sz="2000" dirty="0"/>
+          </a:p>
+          <a:p>
+            <a:pPr lvl="1">
+              <a:lnSpc>
+                <a:spcPct val="150000"/>
+              </a:lnSpc>
+            </a:pPr>
+            <a:endParaRPr lang="en-US" sz="2000" dirty="0"/>
+          </a:p>
+          <a:p>
+            <a:pPr lvl="1">
+              <a:lnSpc>
+                <a:spcPct val="150000"/>
+              </a:lnSpc>
+            </a:pPr>
+            <a:endParaRPr lang="en-US" sz="2000" dirty="0"/>
+          </a:p>
+          <a:p>
+            <a:pPr marL="514350">
+              <a:lnSpc>
+                <a:spcPct val="150000"/>
+              </a:lnSpc>
+              <a:buClr>
+                <a:srgbClr val="121212"/>
+              </a:buClr>
+              <a:buFont typeface="Inter"/>
+              <a:buChar char="‣"/>
+            </a:pPr>
+            <a:endParaRPr lang="en-US" sz="2800" dirty="0"/>
+          </a:p>
+          <a:p>
+            <a:pPr marL="0" indent="0">
+              <a:lnSpc>
+                <a:spcPct val="150000"/>
+              </a:lnSpc>
+              <a:buNone/>
+            </a:pPr>
+            <a:endParaRPr lang="en-US" sz="2800" dirty="0"/>
+          </a:p>
+        </p:txBody>
+      </p:sp>
+    </p:spTree>
+    <p:extLst>
+      <p:ext uri="{BB962C8B-B14F-4D97-AF65-F5344CB8AC3E}">
+        <p14:creationId xmlns:p14="http://schemas.microsoft.com/office/powerpoint/2010/main" val="2664588613"/>
+      </p:ext>
+    </p:extLst>
+  </p:cSld>
+  <p:clrMapOvr>
+    <a:masterClrMapping/>
+  </p:clrMapOvr>
+</p:sld>
+</file>
+
+<file path=ppt/slides/slide46.xml><?xml version="1.0" encoding="utf-8"?>
+<p:sld xmlns:a="http://schemas.openxmlformats.org/drawingml/2006/main" xmlns:r="http://schemas.openxmlformats.org/officeDocument/2006/relationships" xmlns:p="http://schemas.openxmlformats.org/presentationml/2006/main">
+  <p:cSld>
+    <p:spTree>
+      <p:nvGrpSpPr>
+        <p:cNvPr id="1" name=""/>
+        <p:cNvGrpSpPr/>
+        <p:nvPr/>
+      </p:nvGrpSpPr>
+      <p:grpSpPr>
+        <a:xfrm>
+          <a:off x="0" y="0"/>
+          <a:ext cx="0" cy="0"/>
+          <a:chOff x="0" y="0"/>
+          <a:chExt cx="0" cy="0"/>
+        </a:xfrm>
+      </p:grpSpPr>
+      <p:sp>
+        <p:nvSpPr>
+          <p:cNvPr id="2" name="Title 1">
+            <a:extLst>
+              <a:ext uri="{FF2B5EF4-FFF2-40B4-BE49-F238E27FC236}">
+                <a16:creationId xmlns:a16="http://schemas.microsoft.com/office/drawing/2014/main" id="{FC4664B4-0BFB-7C2E-450D-7F2B42AB7D83}"/>
+              </a:ext>
+            </a:extLst>
+          </p:cNvPr>
+          <p:cNvSpPr>
+            <a:spLocks noGrp="1"/>
+          </p:cNvSpPr>
+          <p:nvPr>
+            <p:ph type="ctrTitle"/>
+          </p:nvPr>
+        </p:nvSpPr>
+        <p:spPr/>
+        <p:txBody>
+          <a:bodyPr/>
+          <a:lstStyle/>
+          <a:p>
+            <a:r>
+              <a:rPr lang="et-EE"/>
+              <a:t>Veel harjutuso</a:t>
+            </a:r>
+          </a:p>
+        </p:txBody>
+      </p:sp>
+      <p:sp>
+        <p:nvSpPr>
+          <p:cNvPr id="3" name="Content Placeholder 2">
+            <a:extLst>
+              <a:ext uri="{FF2B5EF4-FFF2-40B4-BE49-F238E27FC236}">
+                <a16:creationId xmlns:a16="http://schemas.microsoft.com/office/drawing/2014/main" id="{DF5933B0-9004-BC8C-118F-F4F4C0F9EB35}"/>
+              </a:ext>
+            </a:extLst>
+          </p:cNvPr>
+          <p:cNvSpPr>
+            <a:spLocks noGrp="1"/>
+          </p:cNvSpPr>
+          <p:nvPr>
+            <p:ph sz="quarter" idx="10"/>
+          </p:nvPr>
+        </p:nvSpPr>
+        <p:spPr/>
+        <p:txBody>
+          <a:bodyPr/>
+          <a:lstStyle/>
+          <a:p>
+            <a:r>
+              <a:rPr lang="en-US" sz="2000" dirty="0" err="1"/>
+              <a:t>Käive</a:t>
+            </a:r>
+            <a:r>
+              <a:rPr lang="en-US" sz="2000" dirty="0"/>
+              <a:t> Üle </a:t>
+            </a:r>
+            <a:r>
+              <a:rPr lang="en-US" sz="2000" dirty="0" err="1"/>
+              <a:t>Keskmise</a:t>
+            </a:r>
+            <a:r>
+              <a:rPr lang="en-US" sz="2000" dirty="0"/>
+              <a:t> Hinna = </a:t>
+            </a:r>
+            <a:br>
+              <a:rPr lang="et-EE" sz="2000" dirty="0"/>
+            </a:br>
+            <a:r>
+              <a:rPr lang="en-US" sz="2000" dirty="0"/>
+              <a:t>CALCULATE(    SUM(</a:t>
+            </a:r>
+            <a:r>
+              <a:rPr lang="en-US" sz="2000" dirty="0" err="1"/>
+              <a:t>fact_sales</a:t>
+            </a:r>
+            <a:r>
+              <a:rPr lang="en-US" sz="2000" dirty="0"/>
+              <a:t>[Sales sum]),    FILTER(        </a:t>
+            </a:r>
+            <a:r>
+              <a:rPr lang="en-US" sz="2000" dirty="0" err="1"/>
+              <a:t>fact_sales</a:t>
+            </a:r>
+            <a:r>
+              <a:rPr lang="en-US" sz="2000" dirty="0"/>
+              <a:t>,        </a:t>
+            </a:r>
+            <a:r>
+              <a:rPr lang="en-US" sz="2000" dirty="0" err="1"/>
+              <a:t>fact_sales</a:t>
+            </a:r>
+            <a:r>
+              <a:rPr lang="en-US" sz="2000" dirty="0"/>
+              <a:t>[Price] &gt; [</a:t>
+            </a:r>
+            <a:r>
+              <a:rPr lang="en-US" sz="2000" dirty="0" err="1"/>
+              <a:t>Toodete</a:t>
+            </a:r>
+            <a:r>
+              <a:rPr lang="en-US" sz="2000" dirty="0"/>
+              <a:t> </a:t>
+            </a:r>
+            <a:r>
+              <a:rPr lang="en-US" sz="2000" dirty="0" err="1"/>
+              <a:t>Keskmine</a:t>
+            </a:r>
+            <a:r>
+              <a:rPr lang="en-US" sz="2000" dirty="0"/>
+              <a:t> Hind]    ))</a:t>
+            </a:r>
+            <a:br>
+              <a:rPr lang="et-EE" sz="2000" dirty="0"/>
+            </a:br>
+            <a:endParaRPr lang="et-EE" sz="2000" dirty="0"/>
+          </a:p>
+          <a:p>
+            <a:r>
+              <a:rPr lang="et-EE" sz="2000" dirty="0"/>
+              <a:t>Suurklientide Käive = </a:t>
+            </a:r>
+            <a:br>
+              <a:rPr lang="et-EE" sz="2000" dirty="0"/>
+            </a:br>
+            <a:r>
+              <a:rPr lang="et-EE" sz="2000" dirty="0"/>
+              <a:t>CALCULATE(    SUM(fact_sales[Sales sum]),    FILTER(        VALUES(dim_customer[CustomerName]), -- Käib läbi kliendid ühekaupa        [KoguKäive_Mõõdik] &gt; 10000    ))</a:t>
+            </a:r>
+          </a:p>
+        </p:txBody>
+      </p:sp>
+    </p:spTree>
+    <p:extLst>
+      <p:ext uri="{BB962C8B-B14F-4D97-AF65-F5344CB8AC3E}">
+        <p14:creationId xmlns:p14="http://schemas.microsoft.com/office/powerpoint/2010/main" val="2093881276"/>
+      </p:ext>
+    </p:extLst>
+  </p:cSld>
+  <p:clrMapOvr>
+    <a:masterClrMapping/>
+  </p:clrMapOvr>
+</p:sld>
+</file>
+
+<file path=ppt/slides/slide47.xml><?xml version="1.0" encoding="utf-8"?>
+<p:sld xmlns:a="http://schemas.openxmlformats.org/drawingml/2006/main" xmlns:r="http://schemas.openxmlformats.org/officeDocument/2006/relationships" xmlns:p="http://schemas.openxmlformats.org/presentationml/2006/main" show="0">
   <p:cSld>
     <p:spTree>
       <p:nvGrpSpPr>
@@ -37163,6 +41031,381 @@
 </file>
 
 <file path=ppt/slides/slide5.xml><?xml version="1.0" encoding="utf-8"?>
+<p:sld xmlns:a="http://schemas.openxmlformats.org/drawingml/2006/main" xmlns:r="http://schemas.openxmlformats.org/officeDocument/2006/relationships" xmlns:p="http://schemas.openxmlformats.org/presentationml/2006/main" show="0">
+  <p:cSld>
+    <p:spTree>
+      <p:nvGrpSpPr>
+        <p:cNvPr id="1" name=""/>
+        <p:cNvGrpSpPr/>
+        <p:nvPr/>
+      </p:nvGrpSpPr>
+      <p:grpSpPr>
+        <a:xfrm>
+          <a:off x="0" y="0"/>
+          <a:ext cx="0" cy="0"/>
+          <a:chOff x="0" y="0"/>
+          <a:chExt cx="0" cy="0"/>
+        </a:xfrm>
+      </p:grpSpPr>
+      <p:sp>
+        <p:nvSpPr>
+          <p:cNvPr id="2" name="Title 1">
+            <a:extLst>
+              <a:ext uri="{FF2B5EF4-FFF2-40B4-BE49-F238E27FC236}">
+                <a16:creationId xmlns:a16="http://schemas.microsoft.com/office/drawing/2014/main" id="{0C3C55E8-FBF1-AD5D-6DA0-CBD58BBEB5DB}"/>
+              </a:ext>
+            </a:extLst>
+          </p:cNvPr>
+          <p:cNvSpPr>
+            <a:spLocks noGrp="1"/>
+          </p:cNvSpPr>
+          <p:nvPr>
+            <p:ph type="ctrTitle"/>
+          </p:nvPr>
+        </p:nvSpPr>
+        <p:spPr/>
+        <p:txBody>
+          <a:bodyPr/>
+          <a:lstStyle/>
+          <a:p>
+            <a:r>
+              <a:rPr lang="en-US"/>
+              <a:t>Power BI – </a:t>
+            </a:r>
+            <a:r>
+              <a:rPr lang="en-US" err="1"/>
+              <a:t>Päringud</a:t>
+            </a:r>
+            <a:r>
+              <a:rPr lang="en-US"/>
+              <a:t> (M-language)</a:t>
+            </a:r>
+          </a:p>
+        </p:txBody>
+      </p:sp>
+      <p:sp>
+        <p:nvSpPr>
+          <p:cNvPr id="3" name="Content Placeholder 2">
+            <a:extLst>
+              <a:ext uri="{FF2B5EF4-FFF2-40B4-BE49-F238E27FC236}">
+                <a16:creationId xmlns:a16="http://schemas.microsoft.com/office/drawing/2014/main" id="{2D37BB7F-4F12-0B50-CEE8-3F6E6A2C9EE7}"/>
+              </a:ext>
+            </a:extLst>
+          </p:cNvPr>
+          <p:cNvSpPr>
+            <a:spLocks noGrp="1"/>
+          </p:cNvSpPr>
+          <p:nvPr>
+            <p:ph sz="quarter" idx="10"/>
+          </p:nvPr>
+        </p:nvSpPr>
+        <p:spPr/>
+        <p:txBody>
+          <a:bodyPr/>
+          <a:lstStyle/>
+          <a:p>
+            <a:pPr>
+              <a:lnSpc>
+                <a:spcPct val="150000"/>
+              </a:lnSpc>
+            </a:pPr>
+            <a:r>
+              <a:rPr lang="en-US" sz="2400" dirty="0">
+                <a:ea typeface="Inter"/>
+              </a:rPr>
+              <a:t>Power BI </a:t>
+            </a:r>
+            <a:r>
+              <a:rPr lang="en-US" sz="2400" dirty="0" err="1">
+                <a:ea typeface="Inter"/>
+              </a:rPr>
+              <a:t>päringukeel</a:t>
+            </a:r>
+            <a:r>
+              <a:rPr lang="en-US" sz="2400" dirty="0">
+                <a:ea typeface="Inter"/>
+              </a:rPr>
+              <a:t> </a:t>
+            </a:r>
+            <a:endParaRPr lang="en-US" dirty="0"/>
+          </a:p>
+          <a:p>
+            <a:pPr>
+              <a:lnSpc>
+                <a:spcPct val="150000"/>
+              </a:lnSpc>
+            </a:pPr>
+            <a:r>
+              <a:rPr lang="en-US" sz="2400" dirty="0" err="1">
+                <a:ea typeface="Inter"/>
+              </a:rPr>
+              <a:t>Juhend</a:t>
+            </a:r>
+            <a:r>
+              <a:rPr lang="en-US" sz="2400" dirty="0">
+                <a:ea typeface="Inter"/>
+              </a:rPr>
+              <a:t>: </a:t>
+            </a:r>
+            <a:r>
+              <a:rPr lang="en-US" sz="2400" dirty="0">
+                <a:ea typeface="+mn-lt"/>
+                <a:cs typeface="+mn-lt"/>
+                <a:hlinkClick r:id="rId2"/>
+              </a:rPr>
+              <a:t>Power Query M formula language reference - </a:t>
+            </a:r>
+            <a:r>
+              <a:rPr lang="en-US" sz="2400" dirty="0" err="1">
+                <a:ea typeface="+mn-lt"/>
+                <a:cs typeface="+mn-lt"/>
+                <a:hlinkClick r:id="rId2"/>
+              </a:rPr>
+              <a:t>PowerQuery</a:t>
+            </a:r>
+            <a:r>
+              <a:rPr lang="en-US" sz="2400" dirty="0">
+                <a:ea typeface="+mn-lt"/>
+                <a:cs typeface="+mn-lt"/>
+                <a:hlinkClick r:id="rId2"/>
+              </a:rPr>
+              <a:t> M | Microsoft Learn</a:t>
+            </a:r>
+          </a:p>
+          <a:p>
+            <a:pPr>
+              <a:lnSpc>
+                <a:spcPct val="150000"/>
+              </a:lnSpc>
+            </a:pPr>
+            <a:r>
+              <a:rPr lang="en-US" sz="2400" dirty="0" err="1">
+                <a:ea typeface="+mn-lt"/>
+                <a:cs typeface="+mn-lt"/>
+              </a:rPr>
+              <a:t>Leitav</a:t>
+            </a:r>
+            <a:r>
+              <a:rPr lang="en-US" sz="2400" dirty="0">
+                <a:ea typeface="+mn-lt"/>
+                <a:cs typeface="+mn-lt"/>
+              </a:rPr>
+              <a:t>: Model View --&gt; Edit Query</a:t>
+            </a:r>
+          </a:p>
+          <a:p>
+            <a:pPr lvl="1" indent="-514350">
+              <a:lnSpc>
+                <a:spcPct val="150000"/>
+              </a:lnSpc>
+              <a:buFont typeface="Courier New" panose="020B0502030000000004" pitchFamily="34" charset="0"/>
+              <a:buChar char="o"/>
+            </a:pPr>
+            <a:r>
+              <a:rPr lang="en-US" sz="2400" dirty="0" err="1">
+                <a:ea typeface="+mn-lt"/>
+                <a:cs typeface="+mn-lt"/>
+              </a:rPr>
+              <a:t>Paremal</a:t>
+            </a:r>
+            <a:r>
+              <a:rPr lang="en-US" sz="2400" dirty="0">
+                <a:ea typeface="+mn-lt"/>
+                <a:cs typeface="+mn-lt"/>
+              </a:rPr>
+              <a:t> </a:t>
+            </a:r>
+            <a:r>
+              <a:rPr lang="en-US" sz="2400" dirty="0" err="1">
+                <a:ea typeface="+mn-lt"/>
+                <a:cs typeface="+mn-lt"/>
+              </a:rPr>
+              <a:t>sammude</a:t>
+            </a:r>
+            <a:r>
+              <a:rPr lang="en-US" sz="2400" dirty="0">
+                <a:ea typeface="+mn-lt"/>
+                <a:cs typeface="+mn-lt"/>
+              </a:rPr>
+              <a:t> kaupa</a:t>
+            </a:r>
+          </a:p>
+          <a:p>
+            <a:pPr lvl="1" indent="-514350">
+              <a:lnSpc>
+                <a:spcPct val="150000"/>
+              </a:lnSpc>
+              <a:buFont typeface="Courier New" panose="020B0502030000000004" pitchFamily="34" charset="0"/>
+              <a:buChar char="o"/>
+            </a:pPr>
+            <a:r>
+              <a:rPr lang="en-US" sz="2400" dirty="0">
+                <a:ea typeface="+mn-lt"/>
+                <a:cs typeface="+mn-lt"/>
+              </a:rPr>
+              <a:t>Advanced Editor – </a:t>
+            </a:r>
+            <a:r>
+              <a:rPr lang="en-US" sz="2400" dirty="0" err="1">
+                <a:ea typeface="+mn-lt"/>
+                <a:cs typeface="+mn-lt"/>
+              </a:rPr>
+              <a:t>kogu</a:t>
+            </a:r>
+            <a:r>
+              <a:rPr lang="en-US" sz="2400" dirty="0">
+                <a:ea typeface="+mn-lt"/>
+                <a:cs typeface="+mn-lt"/>
+              </a:rPr>
+              <a:t> </a:t>
+            </a:r>
+            <a:r>
+              <a:rPr lang="en-US" sz="2400" dirty="0" err="1">
+                <a:ea typeface="+mn-lt"/>
+                <a:cs typeface="+mn-lt"/>
+              </a:rPr>
+              <a:t>päring</a:t>
+            </a:r>
+            <a:endParaRPr lang="en-US" sz="2400" dirty="0">
+              <a:ea typeface="+mn-lt"/>
+              <a:cs typeface="+mn-lt"/>
+            </a:endParaRPr>
+          </a:p>
+        </p:txBody>
+      </p:sp>
+    </p:spTree>
+    <p:extLst>
+      <p:ext uri="{BB962C8B-B14F-4D97-AF65-F5344CB8AC3E}">
+        <p14:creationId xmlns:p14="http://schemas.microsoft.com/office/powerpoint/2010/main" val="2761534892"/>
+      </p:ext>
+    </p:extLst>
+  </p:cSld>
+  <p:clrMapOvr>
+    <a:masterClrMapping/>
+  </p:clrMapOvr>
+</p:sld>
+</file>
+
+<file path=ppt/slides/slide6.xml><?xml version="1.0" encoding="utf-8"?>
+<p:sld xmlns:a="http://schemas.openxmlformats.org/drawingml/2006/main" xmlns:r="http://schemas.openxmlformats.org/officeDocument/2006/relationships" xmlns:p="http://schemas.openxmlformats.org/presentationml/2006/main">
+  <p:cSld>
+    <p:spTree>
+      <p:nvGrpSpPr>
+        <p:cNvPr id="1" name=""/>
+        <p:cNvGrpSpPr/>
+        <p:nvPr/>
+      </p:nvGrpSpPr>
+      <p:grpSpPr>
+        <a:xfrm>
+          <a:off x="0" y="0"/>
+          <a:ext cx="0" cy="0"/>
+          <a:chOff x="0" y="0"/>
+          <a:chExt cx="0" cy="0"/>
+        </a:xfrm>
+      </p:grpSpPr>
+      <p:sp>
+        <p:nvSpPr>
+          <p:cNvPr id="2" name="Title 1">
+            <a:extLst>
+              <a:ext uri="{FF2B5EF4-FFF2-40B4-BE49-F238E27FC236}">
+                <a16:creationId xmlns:a16="http://schemas.microsoft.com/office/drawing/2014/main" id="{85FE6474-3BEF-3008-2327-BDF18466833D}"/>
+              </a:ext>
+            </a:extLst>
+          </p:cNvPr>
+          <p:cNvSpPr>
+            <a:spLocks noGrp="1"/>
+          </p:cNvSpPr>
+          <p:nvPr>
+            <p:ph type="ctrTitle"/>
+          </p:nvPr>
+        </p:nvSpPr>
+        <p:spPr/>
+        <p:txBody>
+          <a:bodyPr/>
+          <a:lstStyle/>
+          <a:p>
+            <a:r>
+              <a:rPr lang="et-EE" dirty="0"/>
+              <a:t>Tükeldamine eile</a:t>
+            </a:r>
+          </a:p>
+        </p:txBody>
+      </p:sp>
+      <p:sp>
+        <p:nvSpPr>
+          <p:cNvPr id="3" name="Content Placeholder 2">
+            <a:extLst>
+              <a:ext uri="{FF2B5EF4-FFF2-40B4-BE49-F238E27FC236}">
+                <a16:creationId xmlns:a16="http://schemas.microsoft.com/office/drawing/2014/main" id="{BEA08DED-65AB-89CC-F1CD-1C4067F305B3}"/>
+              </a:ext>
+            </a:extLst>
+          </p:cNvPr>
+          <p:cNvSpPr>
+            <a:spLocks noGrp="1"/>
+          </p:cNvSpPr>
+          <p:nvPr>
+            <p:ph sz="quarter" idx="10"/>
+          </p:nvPr>
+        </p:nvSpPr>
+        <p:spPr/>
+        <p:txBody>
+          <a:bodyPr/>
+          <a:lstStyle/>
+          <a:p>
+            <a:r>
+              <a:rPr lang="et-EE" dirty="0"/>
+              <a:t>M kood osaliste komadega eraldamiseks</a:t>
+            </a:r>
+          </a:p>
+          <a:p>
+            <a:endParaRPr lang="et-EE" dirty="0"/>
+          </a:p>
+        </p:txBody>
+      </p:sp>
+      <p:pic>
+        <p:nvPicPr>
+          <p:cNvPr id="5" name="Picture 4">
+            <a:extLst>
+              <a:ext uri="{FF2B5EF4-FFF2-40B4-BE49-F238E27FC236}">
+                <a16:creationId xmlns:a16="http://schemas.microsoft.com/office/drawing/2014/main" id="{AC70EA84-7D97-E038-A4BF-BB7FFE7DAEE5}"/>
+              </a:ext>
+            </a:extLst>
+          </p:cNvPr>
+          <p:cNvPicPr>
+            <a:picLocks noChangeAspect="1"/>
+          </p:cNvPicPr>
+          <p:nvPr/>
+        </p:nvPicPr>
+        <p:blipFill>
+          <a:blip r:embed="rId2"/>
+          <a:stretch>
+            <a:fillRect/>
+          </a:stretch>
+        </p:blipFill>
+        <p:spPr>
+          <a:xfrm>
+            <a:off x="0" y="1646579"/>
+            <a:ext cx="9442450" cy="5029334"/>
+          </a:xfrm>
+          <a:prstGeom prst="rect">
+            <a:avLst/>
+          </a:prstGeom>
+        </p:spPr>
+      </p:pic>
+    </p:spTree>
+    <p:extLst>
+      <p:ext uri="{BB962C8B-B14F-4D97-AF65-F5344CB8AC3E}">
+        <p14:creationId xmlns:p14="http://schemas.microsoft.com/office/powerpoint/2010/main" val="2479459817"/>
+      </p:ext>
+    </p:extLst>
+  </p:cSld>
+  <p:clrMapOvr>
+    <a:masterClrMapping/>
+  </p:clrMapOvr>
+</p:sld>
+</file>
+
+<file path=ppt/slides/slide7.xml><?xml version="1.0" encoding="utf-8"?>
 <p:sld xmlns:a="http://schemas.openxmlformats.org/drawingml/2006/main" xmlns:r="http://schemas.openxmlformats.org/officeDocument/2006/relationships" xmlns:p="http://schemas.openxmlformats.org/presentationml/2006/main" show="0">
   <p:cSld>
     <p:spTree>
@@ -38097,7 +42340,7 @@
 </p:sld>
 </file>
 
-<file path=ppt/slides/slide6.xml><?xml version="1.0" encoding="utf-8"?>
+<file path=ppt/slides/slide8.xml><?xml version="1.0" encoding="utf-8"?>
 <p:sld xmlns:a="http://schemas.openxmlformats.org/drawingml/2006/main" xmlns:r="http://schemas.openxmlformats.org/officeDocument/2006/relationships" xmlns:p="http://schemas.openxmlformats.org/presentationml/2006/main">
   <p:cSld>
     <p:spTree>
@@ -38179,7 +42422,7 @@
                   <a:schemeClr val="accent4"/>
                 </a:solidFill>
               </a:rPr>
-              <a:t>Date Table</a:t>
+              <a:t>Region Table</a:t>
             </a:r>
           </a:p>
           <a:p>
@@ -38189,27 +42432,7 @@
                   <a:schemeClr val="accent4"/>
                 </a:solidFill>
               </a:rPr>
-              <a:t>Region Table</a:t>
-            </a:r>
-          </a:p>
-          <a:p>
-            <a:r>
-              <a:rPr lang="en-GB" dirty="0">
-                <a:solidFill>
-                  <a:schemeClr val="accent4"/>
-                </a:solidFill>
-              </a:rPr>
               <a:t>Customer Table</a:t>
-            </a:r>
-          </a:p>
-          <a:p>
-            <a:r>
-              <a:rPr lang="en-GB" dirty="0">
-                <a:solidFill>
-                  <a:schemeClr val="accent4"/>
-                </a:solidFill>
-              </a:rPr>
-              <a:t>Sales Table</a:t>
             </a:r>
           </a:p>
           <a:p>
@@ -38240,16 +42463,6 @@
             <a:r>
               <a:rPr lang="en-GB" dirty="0"/>
               <a:t>Product Table</a:t>
-            </a:r>
-          </a:p>
-          <a:p>
-            <a:r>
-              <a:rPr lang="en-GB" dirty="0" err="1"/>
-              <a:t>SalesRep</a:t>
-            </a:r>
-            <a:r>
-              <a:rPr lang="en-GB" dirty="0"/>
-              <a:t> Table</a:t>
             </a:r>
           </a:p>
           <a:p>
@@ -38283,7 +42496,7 @@
 </p:sld>
 </file>
 
-<file path=ppt/slides/slide7.xml><?xml version="1.0" encoding="utf-8"?>
+<file path=ppt/slides/slide9.xml><?xml version="1.0" encoding="utf-8"?>
 <p:sld xmlns:a="http://schemas.openxmlformats.org/drawingml/2006/main" xmlns:r="http://schemas.openxmlformats.org/officeDocument/2006/relationships" xmlns:p="http://schemas.openxmlformats.org/presentationml/2006/main">
   <p:cSld>
     <p:spTree>
@@ -38401,20 +42614,20 @@
               <a:buNone/>
             </a:pPr>
             <a:r>
-              <a:rPr lang="et-EE" sz="1800" b="1" dirty="0"/>
-              <a:t>S</a:t>
-            </a:r>
-            <a:r>
               <a:rPr lang="en-GB" sz="1800" b="1" dirty="0" err="1"/>
-              <a:t>alesTable</a:t>
+              <a:t>RegionTable</a:t>
+            </a:r>
+            <a:r>
+              <a:rPr lang="en-GB" sz="1800" b="1" dirty="0"/>
+              <a:t> </a:t>
             </a:r>
             <a:r>
               <a:rPr lang="en-GB" sz="1800" dirty="0"/>
-              <a:t> </a:t>
+              <a:t>https://docs.google.com/spreadsheets/d/10p-3C7tUc516sCMkODM3qxajIpqN6UH6iYWjdLkLYfA</a:t>
             </a:r>
             <a:r>
               <a:rPr lang="et-EE" sz="1800" dirty="0"/>
-              <a:t>https://docs.google.com/spreadsheets/d/1k1nHE1Fy5UFR5Kh7BPy-ASfnItSJ5DyUIuPZhL4qDU4 /edit?usp=sharing</a:t>
+              <a:t> /edit?usp=sharing</a:t>
             </a:r>
             <a:endParaRPr lang="en-GB" sz="1800" dirty="0"/>
           </a:p>
@@ -38424,52 +42637,17 @@
             </a:pPr>
             <a:r>
               <a:rPr lang="en-GB" sz="1800" b="1" dirty="0" err="1"/>
-              <a:t>RegionTable</a:t>
-            </a:r>
-            <a:r>
-              <a:rPr lang="en-GB" sz="1800" b="1" dirty="0"/>
-              <a:t> </a:t>
+              <a:t>CustomerTable</a:t>
             </a:r>
             <a:r>
               <a:rPr lang="en-GB" sz="1800" dirty="0"/>
-              <a:t>https://docs.google.com/spreadsheets/d/10p-3C7tUc516sCMkODM3qxajIpqN6UH6iYWjdLkLYfA</a:t>
+              <a:t> https://docs.google.com/spreadsheets/d/1rDv2xJNgMjIu0_wftF9DcrAfeW5QGnSKQhkxu7ZRbKE</a:t>
             </a:r>
             <a:r>
               <a:rPr lang="et-EE" sz="1800" dirty="0"/>
               <a:t> /edit?usp=sharing</a:t>
             </a:r>
             <a:endParaRPr lang="en-GB" sz="1800" dirty="0"/>
-          </a:p>
-          <a:p>
-            <a:pPr marL="457200" lvl="1" indent="0">
-              <a:buNone/>
-            </a:pPr>
-            <a:r>
-              <a:rPr lang="en-GB" sz="1800" b="1" dirty="0" err="1"/>
-              <a:t>CustomerTable</a:t>
-            </a:r>
-            <a:r>
-              <a:rPr lang="en-GB" sz="1800" dirty="0"/>
-              <a:t> https://docs.google.com/spreadsheets/d/1rDv2xJNgMjIu0_wftF9DcrAfeW5QGnSKQhkxu7ZRbKE</a:t>
-            </a:r>
-            <a:r>
-              <a:rPr lang="et-EE" sz="1800" dirty="0"/>
-              <a:t> /edit?usp=sharing</a:t>
-            </a:r>
-            <a:endParaRPr lang="en-GB" sz="1800" dirty="0"/>
-          </a:p>
-          <a:p>
-            <a:pPr marL="457200" lvl="1" indent="0">
-              <a:buNone/>
-            </a:pPr>
-            <a:r>
-              <a:rPr lang="en-GB" sz="1800" b="1" dirty="0" err="1"/>
-              <a:t>DateTable</a:t>
-            </a:r>
-            <a:r>
-              <a:rPr lang="en-GB" sz="1800" dirty="0"/>
-              <a:t> https://docs.google.com/spreadsheets/d/1ifSFIuK4WYbRo6vfcRmKUb0J8OCHsIP-hyY3Q3wLMoo</a:t>
-            </a:r>
           </a:p>
           <a:p>
             <a:pPr marL="457200" lvl="1" indent="0">
@@ -38509,564 +42687,6 @@
     <p:extLst>
       <p:ext uri="{BB962C8B-B14F-4D97-AF65-F5344CB8AC3E}">
         <p14:creationId xmlns:p14="http://schemas.microsoft.com/office/powerpoint/2010/main" val="2411427698"/>
-      </p:ext>
-    </p:extLst>
-  </p:cSld>
-  <p:clrMapOvr>
-    <a:masterClrMapping/>
-  </p:clrMapOvr>
-</p:sld>
-</file>
-
-<file path=ppt/slides/slide8.xml><?xml version="1.0" encoding="utf-8"?>
-<p:sld xmlns:a="http://schemas.openxmlformats.org/drawingml/2006/main" xmlns:r="http://schemas.openxmlformats.org/officeDocument/2006/relationships" xmlns:p="http://schemas.openxmlformats.org/presentationml/2006/main">
-  <p:cSld>
-    <p:spTree>
-      <p:nvGrpSpPr>
-        <p:cNvPr id="1" name=""/>
-        <p:cNvGrpSpPr/>
-        <p:nvPr/>
-      </p:nvGrpSpPr>
-      <p:grpSpPr>
-        <a:xfrm>
-          <a:off x="0" y="0"/>
-          <a:ext cx="0" cy="0"/>
-          <a:chOff x="0" y="0"/>
-          <a:chExt cx="0" cy="0"/>
-        </a:xfrm>
-      </p:grpSpPr>
-      <p:sp>
-        <p:nvSpPr>
-          <p:cNvPr id="2" name="Title 1">
-            <a:extLst>
-              <a:ext uri="{FF2B5EF4-FFF2-40B4-BE49-F238E27FC236}">
-                <a16:creationId xmlns:a16="http://schemas.microsoft.com/office/drawing/2014/main" id="{F4FB2843-84FC-6050-6780-3E1CF9056EB6}"/>
-              </a:ext>
-            </a:extLst>
-          </p:cNvPr>
-          <p:cNvSpPr>
-            <a:spLocks noGrp="1"/>
-          </p:cNvSpPr>
-          <p:nvPr>
-            <p:ph type="ctrTitle"/>
-          </p:nvPr>
-        </p:nvSpPr>
-        <p:spPr/>
-        <p:txBody>
-          <a:bodyPr/>
-          <a:lstStyle/>
-          <a:p>
-            <a:r>
-              <a:rPr lang="en-GB" dirty="0" err="1"/>
-              <a:t>Githu</a:t>
-            </a:r>
-            <a:r>
-              <a:rPr lang="et-EE" dirty="0"/>
-              <a:t>b</a:t>
-            </a:r>
-            <a:endParaRPr lang="en-GB" dirty="0"/>
-          </a:p>
-        </p:txBody>
-      </p:sp>
-      <p:sp>
-        <p:nvSpPr>
-          <p:cNvPr id="3" name="Content Placeholder 2">
-            <a:extLst>
-              <a:ext uri="{FF2B5EF4-FFF2-40B4-BE49-F238E27FC236}">
-                <a16:creationId xmlns:a16="http://schemas.microsoft.com/office/drawing/2014/main" id="{0B745C53-3E1D-61A6-CE62-781555F7FC02}"/>
-              </a:ext>
-            </a:extLst>
-          </p:cNvPr>
-          <p:cNvSpPr>
-            <a:spLocks noGrp="1"/>
-          </p:cNvSpPr>
-          <p:nvPr>
-            <p:ph sz="quarter" idx="10"/>
-          </p:nvPr>
-        </p:nvSpPr>
-        <p:spPr/>
-        <p:txBody>
-          <a:bodyPr/>
-          <a:lstStyle/>
-          <a:p>
-            <a:r>
-              <a:rPr lang="en-GB" sz="2800" dirty="0"/>
-              <a:t>Product Table</a:t>
-            </a:r>
-          </a:p>
-          <a:p>
-            <a:r>
-              <a:rPr lang="en-GB" sz="2800" dirty="0" err="1"/>
-              <a:t>SalesRep</a:t>
-            </a:r>
-            <a:r>
-              <a:rPr lang="en-GB" sz="2800" dirty="0"/>
-              <a:t> Table</a:t>
-            </a:r>
-          </a:p>
-          <a:p>
-            <a:pPr marL="0" indent="0">
-              <a:buNone/>
-            </a:pPr>
-            <a:endParaRPr lang="et-EE" sz="2800" dirty="0"/>
-          </a:p>
-          <a:p>
-            <a:r>
-              <a:rPr lang="et-EE" sz="2800" dirty="0"/>
-              <a:t>Ava fail</a:t>
-            </a:r>
-          </a:p>
-          <a:p>
-            <a:r>
-              <a:rPr lang="et-EE" sz="2800" dirty="0"/>
-              <a:t>Vali Raw</a:t>
-            </a:r>
-          </a:p>
-          <a:p>
-            <a:r>
-              <a:rPr lang="et-EE" sz="2800" dirty="0"/>
-              <a:t>Kopeeri URL</a:t>
-            </a:r>
-            <a:endParaRPr lang="en-GB" sz="2800" dirty="0"/>
-          </a:p>
-        </p:txBody>
-      </p:sp>
-    </p:spTree>
-    <p:extLst>
-      <p:ext uri="{BB962C8B-B14F-4D97-AF65-F5344CB8AC3E}">
-        <p14:creationId xmlns:p14="http://schemas.microsoft.com/office/powerpoint/2010/main" val="771217817"/>
-      </p:ext>
-    </p:extLst>
-  </p:cSld>
-  <p:clrMapOvr>
-    <a:masterClrMapping/>
-  </p:clrMapOvr>
-</p:sld>
-</file>
-
-<file path=ppt/slides/slide9.xml><?xml version="1.0" encoding="utf-8"?>
-<p:sld xmlns:a="http://schemas.openxmlformats.org/drawingml/2006/main" xmlns:r="http://schemas.openxmlformats.org/officeDocument/2006/relationships" xmlns:p="http://schemas.openxmlformats.org/presentationml/2006/main">
-  <p:cSld>
-    <p:spTree>
-      <p:nvGrpSpPr>
-        <p:cNvPr id="1" name="">
-          <a:extLst>
-            <a:ext uri="{FF2B5EF4-FFF2-40B4-BE49-F238E27FC236}">
-              <a16:creationId xmlns:a16="http://schemas.microsoft.com/office/drawing/2014/main" id="{80D2BCF1-3C9A-3A58-37F2-D2D006BF1CC8}"/>
-            </a:ext>
-          </a:extLst>
-        </p:cNvPr>
-        <p:cNvGrpSpPr/>
-        <p:nvPr/>
-      </p:nvGrpSpPr>
-      <p:grpSpPr>
-        <a:xfrm>
-          <a:off x="0" y="0"/>
-          <a:ext cx="0" cy="0"/>
-          <a:chOff x="0" y="0"/>
-          <a:chExt cx="0" cy="0"/>
-        </a:xfrm>
-      </p:grpSpPr>
-      <p:sp>
-        <p:nvSpPr>
-          <p:cNvPr id="2" name="Title 1">
-            <a:extLst>
-              <a:ext uri="{FF2B5EF4-FFF2-40B4-BE49-F238E27FC236}">
-                <a16:creationId xmlns:a16="http://schemas.microsoft.com/office/drawing/2014/main" id="{2C11C9DA-68C6-2574-D71F-9682677EC888}"/>
-              </a:ext>
-            </a:extLst>
-          </p:cNvPr>
-          <p:cNvSpPr>
-            <a:spLocks noGrp="1"/>
-          </p:cNvSpPr>
-          <p:nvPr>
-            <p:ph type="ctrTitle"/>
-          </p:nvPr>
-        </p:nvSpPr>
-        <p:spPr>
-          <a:xfrm>
-            <a:off x="623888" y="836614"/>
-            <a:ext cx="8208962" cy="2484436"/>
-          </a:xfrm>
-        </p:spPr>
-        <p:txBody>
-          <a:bodyPr anchor="t">
-            <a:normAutofit/>
-          </a:bodyPr>
-          <a:lstStyle/>
-          <a:p>
-            <a:r>
-              <a:rPr lang="en-US" dirty="0"/>
-              <a:t>Power BI – Eelarve </a:t>
-            </a:r>
-            <a:r>
-              <a:rPr lang="en-US" dirty="0" err="1"/>
-              <a:t>faili</a:t>
-            </a:r>
-            <a:r>
-              <a:rPr lang="en-US" dirty="0"/>
-              <a:t> </a:t>
-            </a:r>
-            <a:r>
-              <a:rPr lang="en-US" dirty="0" err="1"/>
-              <a:t>lisamine</a:t>
-            </a:r>
-            <a:endParaRPr lang="en-US" dirty="0"/>
-          </a:p>
-        </p:txBody>
-      </p:sp>
-      <p:sp>
-        <p:nvSpPr>
-          <p:cNvPr id="3" name="Content Placeholder 2">
-            <a:extLst>
-              <a:ext uri="{FF2B5EF4-FFF2-40B4-BE49-F238E27FC236}">
-                <a16:creationId xmlns:a16="http://schemas.microsoft.com/office/drawing/2014/main" id="{10527649-761C-3A2F-3446-721B53FB495A}"/>
-              </a:ext>
-            </a:extLst>
-          </p:cNvPr>
-          <p:cNvSpPr>
-            <a:spLocks noGrp="1"/>
-          </p:cNvSpPr>
-          <p:nvPr>
-            <p:ph type="body" sz="quarter" idx="10"/>
-          </p:nvPr>
-        </p:nvSpPr>
-        <p:spPr>
-          <a:xfrm>
-            <a:off x="623887" y="2279737"/>
-            <a:ext cx="8208961" cy="3454313"/>
-          </a:xfrm>
-        </p:spPr>
-        <p:txBody>
-          <a:bodyPr anchor="t">
-            <a:normAutofit/>
-          </a:bodyPr>
-          <a:lstStyle/>
-          <a:p>
-            <a:pPr>
-              <a:lnSpc>
-                <a:spcPct val="100000"/>
-              </a:lnSpc>
-              <a:spcAft>
-                <a:spcPts val="600"/>
-              </a:spcAft>
-            </a:pPr>
-            <a:r>
-              <a:rPr lang="et-EE" sz="1400" dirty="0"/>
-              <a:t>Lisame faili kas githubist või google sheets</a:t>
-            </a:r>
-          </a:p>
-          <a:p>
-            <a:pPr>
-              <a:lnSpc>
-                <a:spcPct val="100000"/>
-              </a:lnSpc>
-              <a:spcAft>
-                <a:spcPts val="600"/>
-              </a:spcAft>
-            </a:pPr>
-            <a:r>
-              <a:rPr lang="et-EE" sz="1400" dirty="0"/>
-              <a:t>https://docs.google.com/spreadsheets/d/1-6f2CkhuTtMPWjEdhKHPV_yHeeYV6zi5WnMR9mFKDkg/edit?usp=sharing</a:t>
-            </a:r>
-          </a:p>
-          <a:p>
-            <a:pPr>
-              <a:lnSpc>
-                <a:spcPct val="100000"/>
-              </a:lnSpc>
-              <a:spcAft>
-                <a:spcPts val="600"/>
-              </a:spcAft>
-            </a:pPr>
-            <a:r>
-              <a:rPr lang="en-US" sz="1400" dirty="0" err="1"/>
-              <a:t>Ühendus</a:t>
-            </a:r>
-            <a:r>
-              <a:rPr lang="en-US" sz="1400" dirty="0"/>
-              <a:t> </a:t>
-            </a:r>
-            <a:r>
-              <a:rPr lang="en-US" sz="1400" dirty="0" err="1"/>
-              <a:t>kuupäeva</a:t>
-            </a:r>
-            <a:r>
-              <a:rPr lang="en-US" sz="1400" dirty="0"/>
-              <a:t> (eelarve </a:t>
-            </a:r>
-            <a:r>
-              <a:rPr lang="en-US" sz="1400" dirty="0" err="1"/>
-              <a:t>failis</a:t>
-            </a:r>
-            <a:r>
-              <a:rPr lang="en-US" sz="1400" dirty="0"/>
-              <a:t> kuu </a:t>
-            </a:r>
-            <a:r>
-              <a:rPr lang="en-US" sz="1400" dirty="0" err="1"/>
-              <a:t>esimene</a:t>
-            </a:r>
-            <a:r>
-              <a:rPr lang="en-US" sz="1400" dirty="0"/>
-              <a:t> </a:t>
-            </a:r>
-            <a:r>
-              <a:rPr lang="en-US" sz="1400" dirty="0" err="1"/>
-              <a:t>päev</a:t>
-            </a:r>
-            <a:r>
-              <a:rPr lang="en-US" sz="1400" dirty="0"/>
-              <a:t>) ja </a:t>
-            </a:r>
-            <a:r>
-              <a:rPr lang="en-US" sz="1400" dirty="0" err="1"/>
-              <a:t>SalesRep</a:t>
-            </a:r>
-            <a:r>
-              <a:rPr lang="en-US" sz="1400" dirty="0"/>
-              <a:t> alusel</a:t>
-            </a:r>
-          </a:p>
-          <a:p>
-            <a:pPr>
-              <a:lnSpc>
-                <a:spcPct val="100000"/>
-              </a:lnSpc>
-              <a:spcAft>
-                <a:spcPts val="600"/>
-              </a:spcAft>
-            </a:pPr>
-            <a:r>
-              <a:rPr lang="en-US" sz="1400" dirty="0"/>
-              <a:t>Eelarve fail on </a:t>
-            </a:r>
-            <a:r>
-              <a:rPr lang="en-US" sz="1400" dirty="0" err="1"/>
-              <a:t>risttabeli</a:t>
-            </a:r>
-            <a:r>
-              <a:rPr lang="en-US" sz="1400" dirty="0"/>
-              <a:t> </a:t>
-            </a:r>
-            <a:r>
-              <a:rPr lang="en-US" sz="1400" dirty="0" err="1"/>
-              <a:t>kujul</a:t>
-            </a:r>
-            <a:r>
-              <a:rPr lang="en-US" sz="1400" dirty="0"/>
-              <a:t> – vajalik muuta </a:t>
-            </a:r>
-            <a:r>
-              <a:rPr lang="en-US" sz="1400" dirty="0" err="1"/>
-              <a:t>lihttabeliks</a:t>
-            </a:r>
-            <a:endParaRPr lang="en-US" sz="1400" dirty="0"/>
-          </a:p>
-          <a:p>
-            <a:pPr lvl="1" indent="-514350">
-              <a:lnSpc>
-                <a:spcPct val="100000"/>
-              </a:lnSpc>
-              <a:spcAft>
-                <a:spcPts val="600"/>
-              </a:spcAft>
-              <a:buAutoNum type="arabicPeriod"/>
-            </a:pPr>
-            <a:r>
-              <a:rPr lang="en-US" sz="1400" dirty="0"/>
-              <a:t>Promote Headers</a:t>
-            </a:r>
-          </a:p>
-          <a:p>
-            <a:pPr lvl="1" indent="-514350">
-              <a:lnSpc>
-                <a:spcPct val="100000"/>
-              </a:lnSpc>
-              <a:spcAft>
-                <a:spcPts val="600"/>
-              </a:spcAft>
-              <a:buAutoNum type="arabicPeriod"/>
-            </a:pPr>
-            <a:r>
-              <a:rPr lang="en-US" sz="1400" dirty="0"/>
-              <a:t>Vali </a:t>
-            </a:r>
-            <a:r>
-              <a:rPr lang="en-US" sz="1400" dirty="0" err="1"/>
-              <a:t>SalesRep</a:t>
-            </a:r>
-            <a:r>
-              <a:rPr lang="en-US" sz="1400" dirty="0"/>
-              <a:t> </a:t>
-            </a:r>
-            <a:r>
-              <a:rPr lang="en-US" sz="1400" dirty="0" err="1"/>
-              <a:t>tulp</a:t>
-            </a:r>
-            <a:r>
-              <a:rPr lang="en-US" sz="1400" dirty="0"/>
-              <a:t> ja Unpivot other columns</a:t>
-            </a:r>
-          </a:p>
-          <a:p>
-            <a:pPr lvl="1" indent="-514350">
-              <a:lnSpc>
-                <a:spcPct val="100000"/>
-              </a:lnSpc>
-              <a:spcAft>
-                <a:spcPts val="600"/>
-              </a:spcAft>
-              <a:buAutoNum type="arabicPeriod"/>
-            </a:pPr>
-            <a:r>
-              <a:rPr lang="en-US" sz="1400" dirty="0" err="1"/>
-              <a:t>Vaata</a:t>
-            </a:r>
-            <a:r>
-              <a:rPr lang="en-US" sz="1400" dirty="0"/>
-              <a:t> üle </a:t>
-            </a:r>
-            <a:r>
-              <a:rPr lang="en-US" sz="1400" dirty="0" err="1"/>
-              <a:t>tulpade</a:t>
-            </a:r>
-            <a:r>
-              <a:rPr lang="en-US" sz="1400" dirty="0"/>
-              <a:t> </a:t>
-            </a:r>
-            <a:r>
-              <a:rPr lang="en-US" sz="1400" dirty="0" err="1"/>
-              <a:t>formaat</a:t>
-            </a:r>
-            <a:endParaRPr lang="en-US" sz="1400" dirty="0"/>
-          </a:p>
-          <a:p>
-            <a:pPr lvl="1" indent="-514350">
-              <a:lnSpc>
-                <a:spcPct val="100000"/>
-              </a:lnSpc>
-              <a:spcAft>
-                <a:spcPts val="600"/>
-              </a:spcAft>
-              <a:buAutoNum type="arabicPeriod"/>
-            </a:pPr>
-            <a:r>
-              <a:rPr lang="en-US" sz="1400" dirty="0" err="1"/>
-              <a:t>Nimeta</a:t>
-            </a:r>
-            <a:r>
-              <a:rPr lang="en-US" sz="1400" dirty="0"/>
-              <a:t> </a:t>
-            </a:r>
-            <a:r>
-              <a:rPr lang="en-US" sz="1400" dirty="0" err="1"/>
-              <a:t>tulbad</a:t>
-            </a:r>
-            <a:r>
-              <a:rPr lang="en-US" sz="1400" dirty="0"/>
-              <a:t> </a:t>
-            </a:r>
-            <a:r>
-              <a:rPr lang="en-US" sz="1400" dirty="0" err="1"/>
-              <a:t>kirjeldavate</a:t>
-            </a:r>
-            <a:r>
-              <a:rPr lang="en-US" sz="1400" dirty="0"/>
-              <a:t> </a:t>
-            </a:r>
-            <a:r>
-              <a:rPr lang="en-US" sz="1400" dirty="0" err="1"/>
-              <a:t>nimedega</a:t>
-            </a:r>
-            <a:endParaRPr lang="en-US" sz="1400" dirty="0"/>
-          </a:p>
-          <a:p>
-            <a:pPr lvl="1" indent="-514350">
-              <a:lnSpc>
-                <a:spcPct val="100000"/>
-              </a:lnSpc>
-              <a:spcAft>
-                <a:spcPts val="600"/>
-              </a:spcAft>
-              <a:buAutoNum type="arabicPeriod"/>
-            </a:pPr>
-            <a:r>
-              <a:rPr lang="en-US" sz="1400" dirty="0"/>
-              <a:t>Loo </a:t>
-            </a:r>
-            <a:r>
-              <a:rPr lang="en-US" sz="1400" dirty="0" err="1"/>
-              <a:t>ühendused</a:t>
-            </a:r>
-            <a:r>
-              <a:rPr lang="en-US" sz="1400" dirty="0"/>
-              <a:t> </a:t>
-            </a:r>
-            <a:r>
-              <a:rPr lang="en-US" sz="1400" dirty="0" err="1"/>
-              <a:t>mudelis</a:t>
-            </a:r>
-            <a:r>
-              <a:rPr lang="en-US" sz="1400" dirty="0"/>
-              <a:t> </a:t>
-            </a:r>
-            <a:r>
-              <a:rPr lang="en-US" sz="1400" dirty="0" err="1"/>
-              <a:t>teiste</a:t>
-            </a:r>
-            <a:r>
-              <a:rPr lang="en-US" sz="1400" dirty="0"/>
-              <a:t> </a:t>
-            </a:r>
-            <a:r>
-              <a:rPr lang="en-US" sz="1400" dirty="0" err="1"/>
-              <a:t>tabelitega</a:t>
-            </a:r>
-            <a:endParaRPr lang="en-US" sz="1400" dirty="0"/>
-          </a:p>
-          <a:p>
-            <a:pPr lvl="1" indent="-514350">
-              <a:lnSpc>
-                <a:spcPct val="100000"/>
-              </a:lnSpc>
-              <a:spcAft>
-                <a:spcPts val="600"/>
-              </a:spcAft>
-              <a:buAutoNum type="arabicPeriod"/>
-            </a:pPr>
-            <a:r>
-              <a:rPr lang="en-US" sz="1400" dirty="0"/>
-              <a:t>Loo </a:t>
-            </a:r>
-            <a:r>
-              <a:rPr lang="en-US" sz="1400" dirty="0" err="1"/>
-              <a:t>visuaalid</a:t>
-            </a:r>
-            <a:endParaRPr lang="et-EE" sz="1400" dirty="0"/>
-          </a:p>
-          <a:p>
-            <a:pPr lvl="2" indent="-514350">
-              <a:lnSpc>
-                <a:spcPct val="100000"/>
-              </a:lnSpc>
-              <a:spcAft>
-                <a:spcPts val="600"/>
-              </a:spcAft>
-              <a:buAutoNum type="arabicPeriod"/>
-            </a:pPr>
-            <a:r>
-              <a:rPr lang="et-EE" sz="1400" dirty="0"/>
-              <a:t>Eelarve ja müügi võrdlus</a:t>
-            </a:r>
-            <a:endParaRPr lang="en-US" sz="1400" dirty="0"/>
-          </a:p>
-        </p:txBody>
-      </p:sp>
-    </p:spTree>
-    <p:extLst>
-      <p:ext uri="{BB962C8B-B14F-4D97-AF65-F5344CB8AC3E}">
-        <p14:creationId xmlns:p14="http://schemas.microsoft.com/office/powerpoint/2010/main" val="1699116838"/>
       </p:ext>
     </p:extLst>
   </p:cSld>
@@ -39868,21 +43488,6 @@
 </file>
 
 <file path=customXml/item1.xml><?xml version="1.0" encoding="utf-8"?>
-<p:properties xmlns:p="http://schemas.microsoft.com/office/2006/metadata/properties" xmlns:xsi="http://www.w3.org/2001/XMLSchema-instance" xmlns:pc="http://schemas.microsoft.com/office/infopath/2007/PartnerControls">
-  <documentManagement/>
-</p:properties>
-</file>
-
-<file path=customXml/item2.xml><?xml version="1.0" encoding="utf-8"?>
-<?mso-contentType ?>
-<FormTemplates xmlns="http://schemas.microsoft.com/sharepoint/v3/contenttype/forms">
-  <Display>DocumentLibraryForm</Display>
-  <Edit>DocumentLibraryForm</Edit>
-  <New>DocumentLibraryForm</New>
-</FormTemplates>
-</file>
-
-<file path=customXml/item3.xml><?xml version="1.0" encoding="utf-8"?>
 <ct:contentTypeSchema xmlns:ct="http://schemas.microsoft.com/office/2006/metadata/contentType" xmlns:ma="http://schemas.microsoft.com/office/2006/metadata/properties/metaAttributes" ct:_="" ma:_="" ma:contentTypeName="Document" ma:contentTypeID="0x010100C4D27B8FA8976546BCD79313C588588D" ma:contentTypeVersion="8" ma:contentTypeDescription="Create a new document." ma:contentTypeScope="" ma:versionID="a112c56f6fe148a79025c76584832af0">
   <xsd:schema xmlns:xsd="http://www.w3.org/2001/XMLSchema" xmlns:xs="http://www.w3.org/2001/XMLSchema" xmlns:p="http://schemas.microsoft.com/office/2006/metadata/properties" xmlns:ns2="a1a2d923-8fea-42f1-bd41-9cdfff65694e" targetNamespace="http://schemas.microsoft.com/office/2006/metadata/properties" ma:root="true" ma:fieldsID="97c8655d467eaa9470a714421e7268c0" ns2:_="">
     <xsd:import namespace="a1a2d923-8fea-42f1-bd41-9cdfff65694e"/>
@@ -40050,24 +43655,22 @@
 </ct:contentTypeSchema>
 </file>
 
-<file path=customXml/itemProps1.xml><?xml version="1.0" encoding="utf-8"?>
-<ds:datastoreItem xmlns:ds="http://schemas.openxmlformats.org/officeDocument/2006/customXml" ds:itemID="{5BDF4908-A52A-47DD-A794-6E02D71942FC}">
-  <ds:schemaRefs>
-    <ds:schemaRef ds:uri="http://schemas.microsoft.com/office/2006/metadata/properties"/>
-    <ds:schemaRef ds:uri="http://schemas.microsoft.com/office/infopath/2007/PartnerControls"/>
-  </ds:schemaRefs>
-</ds:datastoreItem>
+<file path=customXml/item2.xml><?xml version="1.0" encoding="utf-8"?>
+<p:properties xmlns:p="http://schemas.microsoft.com/office/2006/metadata/properties" xmlns:xsi="http://www.w3.org/2001/XMLSchema-instance" xmlns:pc="http://schemas.microsoft.com/office/infopath/2007/PartnerControls">
+  <documentManagement/>
+</p:properties>
 </file>
 
-<file path=customXml/itemProps2.xml><?xml version="1.0" encoding="utf-8"?>
-<ds:datastoreItem xmlns:ds="http://schemas.openxmlformats.org/officeDocument/2006/customXml" ds:itemID="{9DC439CA-6F1C-4005-ACA6-A52E04DEE0A7}">
-  <ds:schemaRefs>
-    <ds:schemaRef ds:uri="http://schemas.microsoft.com/sharepoint/v3/contenttype/forms"/>
-  </ds:schemaRefs>
-</ds:datastoreItem>
+<file path=customXml/item3.xml><?xml version="1.0" encoding="utf-8"?>
+<?mso-contentType ?>
+<FormTemplates xmlns="http://schemas.microsoft.com/sharepoint/v3/contenttype/forms">
+  <Display>DocumentLibraryForm</Display>
+  <Edit>DocumentLibraryForm</Edit>
+  <New>DocumentLibraryForm</New>
+</FormTemplates>
 </file>
 
-<file path=customXml/itemProps3.xml><?xml version="1.0" encoding="utf-8"?>
+<file path=customXml/itemProps1.xml><?xml version="1.0" encoding="utf-8"?>
 <ds:datastoreItem xmlns:ds="http://schemas.openxmlformats.org/officeDocument/2006/customXml" ds:itemID="{9CF4F972-2392-44D0-AA45-41AC4FDC4A59}">
   <ds:schemaRefs>
     <ds:schemaRef ds:uri="a1a2d923-8fea-42f1-bd41-9cdfff65694e"/>
@@ -40083,4 +43686,21 @@
     <ds:schemaRef ds:uri="http://www.w3.org/2001/XMLSchema"/>
   </ds:schemaRefs>
 </ds:datastoreItem>
+</file>
+
+<file path=customXml/itemProps2.xml><?xml version="1.0" encoding="utf-8"?>
+<ds:datastoreItem xmlns:ds="http://schemas.openxmlformats.org/officeDocument/2006/customXml" ds:itemID="{5BDF4908-A52A-47DD-A794-6E02D71942FC}">
+  <ds:schemaRefs>
+    <ds:schemaRef ds:uri="http://schemas.microsoft.com/office/2006/metadata/properties"/>
+    <ds:schemaRef ds:uri="http://schemas.microsoft.com/office/infopath/2007/PartnerControls"/>
+  </ds:schemaRefs>
+</ds:datastoreItem>
+</file>
+
+<file path=customXml/itemProps3.xml><?xml version="1.0" encoding="utf-8"?>
+<ds:datastoreItem xmlns:ds="http://schemas.openxmlformats.org/officeDocument/2006/customXml" ds:itemID="{9DC439CA-6F1C-4005-ACA6-A52E04DEE0A7}">
+  <ds:schemaRefs>
+    <ds:schemaRef ds:uri="http://schemas.microsoft.com/sharepoint/v3/contenttype/forms"/>
+  </ds:schemaRefs>
+</ds:datastoreItem>
 </file>
--- a/Materjalid/Day3 M Visuaalid Andmelugu/3-paev-andmetarkus-esitlus.pptx
+++ b/Materjalid/Day3 M Visuaalid Andmelugu/3-paev-andmetarkus-esitlus.pptx
@@ -43154,7 +43154,12 @@
             <p:ph type="ctrTitle"/>
           </p:nvPr>
         </p:nvSpPr>
-        <p:spPr/>
+        <p:spPr>
+          <a:xfrm>
+            <a:off x="623888" y="467044"/>
+            <a:ext cx="10044112" cy="357043"/>
+          </a:xfrm>
+        </p:spPr>
         <p:txBody>
           <a:bodyPr/>
           <a:lstStyle/>

--- a/Materjalid/Day3 M Visuaalid Andmelugu/3-paev-andmetarkus-esitlus.pptx
+++ b/Materjalid/Day3 M Visuaalid Andmelugu/3-paev-andmetarkus-esitlus.pptx
@@ -26769,6 +26769,24 @@
               <a:t>    Source = GoogleSheets.Contents("https://docs.google.com/spreadsheets/d/1k1nHE1Fy5UFR5Kh7BPy-ASfnItSJ5DyUIuPZhL4qDU4/edit?usp=sharing"),</a:t>
             </a:r>
           </a:p>
+          <a:p>
+            <a:pPr marL="457200" lvl="1" indent="0">
+              <a:buNone/>
+            </a:pPr>
+            <a:r>
+              <a:rPr lang="en-US" sz="1800" b="1">
+                <a:solidFill>
+                  <a:srgbClr val="FF0000"/>
+                </a:solidFill>
+              </a:rPr>
+              <a:t>Sheet1_Sheet = Source{[name="Sheet1",ItemKind="Table"]}[Data],</a:t>
+            </a:r>
+            <a:endParaRPr lang="et-EE" sz="1800" b="1" dirty="0">
+              <a:solidFill>
+                <a:srgbClr val="FF0000"/>
+              </a:solidFill>
+            </a:endParaRPr>
+          </a:p>
         </p:txBody>
       </p:sp>
     </p:spTree>

--- a/Materjalid/Day3 M Visuaalid Andmelugu/3-paev-andmetarkus-esitlus.pptx
+++ b/Materjalid/Day3 M Visuaalid Andmelugu/3-paev-andmetarkus-esitlus.pptx
@@ -26619,7 +26619,7 @@
         </p:nvSpPr>
         <p:spPr>
           <a:xfrm>
-            <a:off x="623887" y="479570"/>
+            <a:off x="611361" y="479570"/>
             <a:ext cx="11168719" cy="392789"/>
           </a:xfrm>
         </p:spPr>
@@ -26715,7 +26715,7 @@
             </a:r>
             <a:r>
               <a:rPr lang="et-EE" sz="1800" dirty="0"/>
-              <a:t> /edit?usp=sharing</a:t>
+              <a:t>/edit?usp=sharing</a:t>
             </a:r>
             <a:endParaRPr lang="en-GB" sz="1800" dirty="0"/>
           </a:p>
@@ -26741,14 +26741,14 @@
             <a:pPr marL="457200" lvl="1" indent="0">
               <a:buNone/>
             </a:pPr>
-            <a:endParaRPr lang="en-GB" sz="1800" dirty="0"/>
+            <a:endParaRPr lang="en-GB" sz="1400" dirty="0"/>
           </a:p>
           <a:p>
             <a:pPr marL="457200" lvl="1" indent="0">
               <a:buNone/>
             </a:pPr>
             <a:r>
-              <a:rPr lang="et-EE" sz="1800" b="1" dirty="0">
+              <a:rPr lang="et-EE" sz="1400" b="1" dirty="0">
                 <a:solidFill>
                   <a:srgbClr val="FF0000"/>
                 </a:solidFill>
@@ -26761,12 +26761,12 @@
               <a:buNone/>
             </a:pPr>
             <a:r>
-              <a:rPr lang="et-EE" sz="1800" b="1" dirty="0">
+              <a:rPr lang="et-EE" sz="1400" b="1" dirty="0">
                 <a:solidFill>
                   <a:srgbClr val="FF0000"/>
                 </a:solidFill>
               </a:rPr>
-              <a:t>    Source = GoogleSheets.Contents("https://docs.google.com/spreadsheets/d/1k1nHE1Fy5UFR5Kh7BPy-ASfnItSJ5DyUIuPZhL4qDU4/edit?usp=sharing"),</a:t>
+              <a:t>       Source = GoogleSheets.Contents("https://docs.google.com/spreadsheets/d/10p-3C7tUc516sCMkODM3qxajIpqN6UH6iYWjdLkLYfA/edit?usp=sharing"),</a:t>
             </a:r>
           </a:p>
           <a:p>
@@ -26774,18 +26774,65 @@
               <a:buNone/>
             </a:pPr>
             <a:r>
-              <a:rPr lang="en-US" sz="1800" b="1">
+              <a:rPr lang="et-EE" sz="1400" b="1" dirty="0">
                 <a:solidFill>
                   <a:srgbClr val="FF0000"/>
                 </a:solidFill>
               </a:rPr>
-              <a:t>Sheet1_Sheet = Source{[name="Sheet1",ItemKind="Table"]}[Data],</a:t>
-            </a:r>
-            <a:endParaRPr lang="et-EE" sz="1800" b="1" dirty="0">
-              <a:solidFill>
-                <a:srgbClr val="FF0000"/>
-              </a:solidFill>
-            </a:endParaRPr>
+              <a:t>Sheet1_Sheet = Source{[name="RegionTable",ItemKind="Table"]}[Data],</a:t>
+            </a:r>
+          </a:p>
+          <a:p>
+            <a:pPr marL="457200" lvl="1" indent="0">
+              <a:buNone/>
+            </a:pPr>
+            <a:r>
+              <a:rPr lang="et-EE" sz="1400" b="1" dirty="0">
+                <a:solidFill>
+                  <a:srgbClr val="FF0000"/>
+                </a:solidFill>
+              </a:rPr>
+              <a:t>    #"Promoted Headers" = Table.PromoteHeaders(Sheet1_Sheet, [PromoteAllScalars=true]),</a:t>
+            </a:r>
+          </a:p>
+          <a:p>
+            <a:pPr marL="457200" lvl="1" indent="0">
+              <a:buNone/>
+            </a:pPr>
+            <a:r>
+              <a:rPr lang="et-EE" sz="1400" b="1" dirty="0">
+                <a:solidFill>
+                  <a:srgbClr val="FF0000"/>
+                </a:solidFill>
+              </a:rPr>
+              <a:t>    #"Changed Type1" = Table.TransformColumnTypes(#"Promoted Headers",{{"RegionID", type text}, {"RegionName", type text}, {"Country", type text}})</a:t>
+            </a:r>
+          </a:p>
+          <a:p>
+            <a:pPr marL="457200" lvl="1" indent="0">
+              <a:buNone/>
+            </a:pPr>
+            <a:r>
+              <a:rPr lang="et-EE" sz="1400" b="1" dirty="0">
+                <a:solidFill>
+                  <a:srgbClr val="FF0000"/>
+                </a:solidFill>
+              </a:rPr>
+              <a:t>in</a:t>
+            </a:r>
+          </a:p>
+          <a:p>
+            <a:pPr marL="457200" lvl="1" indent="0">
+              <a:buNone/>
+            </a:pPr>
+            <a:r>
+              <a:rPr lang="et-EE" sz="1400" b="1" dirty="0">
+                <a:solidFill>
+                  <a:srgbClr val="FF0000"/>
+                </a:solidFill>
+              </a:rPr>
+              <a:t>    #"Changed Type1"</a:t>
+            </a:r>
           </a:p>
         </p:txBody>
       </p:sp>
@@ -38362,7 +38409,12 @@
             <p:ph sz="quarter" idx="10"/>
           </p:nvPr>
         </p:nvSpPr>
-        <p:spPr/>
+        <p:spPr>
+          <a:xfrm>
+            <a:off x="536206" y="1196181"/>
+            <a:ext cx="10941050" cy="4465637"/>
+          </a:xfrm>
+        </p:spPr>
         <p:txBody>
           <a:bodyPr/>
           <a:lstStyle/>
@@ -38439,11 +38491,6 @@
               </a:rPr>
               <a:t>müügitulust</a:t>
             </a:r>
-            <a:br>
-              <a:rPr lang="et-EE" sz="2000" b="1" dirty="0">
-                <a:ea typeface="Inter"/>
-              </a:rPr>
-            </a:br>
             <a:endParaRPr lang="et-EE" sz="2000" b="1" dirty="0">
               <a:ea typeface="Inter"/>
             </a:endParaRPr>
@@ -38573,519 +38620,519 @@
               <a:buNone/>
             </a:pPr>
             <a:r>
-              <a:rPr lang="en-GB" sz="2000" i="1" dirty="0"/>
+              <a:rPr lang="en-GB" i="1" dirty="0"/>
               <a:t>Tere! </a:t>
             </a:r>
             <a:r>
-              <a:rPr lang="en-GB" sz="2000" i="1" dirty="0" err="1"/>
+              <a:rPr lang="en-GB" i="1" dirty="0" err="1"/>
               <a:t>Juhatus</a:t>
             </a:r>
             <a:r>
-              <a:rPr lang="en-GB" sz="2000" i="1" dirty="0"/>
-              <a:t> </a:t>
-            </a:r>
-            <a:r>
-              <a:rPr lang="en-GB" sz="2000" i="1" dirty="0" err="1"/>
+              <a:rPr lang="en-GB" i="1" dirty="0"/>
+              <a:t> </a:t>
+            </a:r>
+            <a:r>
+              <a:rPr lang="en-GB" i="1" dirty="0" err="1"/>
               <a:t>tahab</a:t>
             </a:r>
             <a:r>
-              <a:rPr lang="en-GB" sz="2000" i="1" dirty="0"/>
-              <a:t> </a:t>
-            </a:r>
-            <a:r>
-              <a:rPr lang="en-GB" sz="2000" i="1" dirty="0" err="1"/>
+              <a:rPr lang="en-GB" i="1" dirty="0"/>
+              <a:t> </a:t>
+            </a:r>
+            <a:r>
+              <a:rPr lang="en-GB" i="1" dirty="0" err="1"/>
               <a:t>teada</a:t>
             </a:r>
             <a:r>
-              <a:rPr lang="en-GB" sz="2000" i="1" dirty="0"/>
+              <a:rPr lang="en-GB" i="1" dirty="0"/>
               <a:t>, </a:t>
             </a:r>
             <a:r>
-              <a:rPr lang="en-GB" sz="2000" i="1" dirty="0" err="1"/>
+              <a:rPr lang="en-GB" i="1" dirty="0" err="1"/>
               <a:t>kuidas</a:t>
             </a:r>
             <a:r>
-              <a:rPr lang="en-GB" sz="2000" i="1" dirty="0"/>
-              <a:t> </a:t>
-            </a:r>
-            <a:r>
-              <a:rPr lang="en-GB" sz="2000" i="1" dirty="0" err="1"/>
+              <a:rPr lang="en-GB" i="1" dirty="0"/>
+              <a:t> </a:t>
+            </a:r>
+            <a:r>
+              <a:rPr lang="en-GB" i="1" dirty="0" err="1"/>
               <a:t>meil</a:t>
             </a:r>
             <a:r>
-              <a:rPr lang="en-GB" sz="2000" i="1" dirty="0"/>
-              <a:t> </a:t>
-            </a:r>
-            <a:r>
-              <a:rPr lang="en-GB" sz="2000" i="1" dirty="0" err="1"/>
+              <a:rPr lang="en-GB" i="1" dirty="0"/>
+              <a:t> </a:t>
+            </a:r>
+            <a:r>
+              <a:rPr lang="en-GB" i="1" dirty="0" err="1"/>
               <a:t>müügiga</a:t>
             </a:r>
             <a:r>
-              <a:rPr lang="en-GB" sz="2000" i="1" dirty="0"/>
-              <a:t> </a:t>
-            </a:r>
-            <a:r>
-              <a:rPr lang="en-GB" sz="2000" i="1" dirty="0" err="1"/>
+              <a:rPr lang="en-GB" i="1" dirty="0"/>
+              <a:t> </a:t>
+            </a:r>
+            <a:r>
+              <a:rPr lang="en-GB" i="1" dirty="0" err="1"/>
               <a:t>tegelikult</a:t>
             </a:r>
             <a:r>
-              <a:rPr lang="en-GB" sz="2000" i="1" dirty="0"/>
-              <a:t> </a:t>
-            </a:r>
-            <a:r>
-              <a:rPr lang="en-GB" sz="2000" i="1" dirty="0" err="1"/>
+              <a:rPr lang="en-GB" i="1" dirty="0"/>
+              <a:t> </a:t>
+            </a:r>
+            <a:r>
+              <a:rPr lang="en-GB" i="1" dirty="0" err="1"/>
               <a:t>läheb</a:t>
             </a:r>
             <a:r>
-              <a:rPr lang="en-GB" sz="2000" i="1" dirty="0"/>
+              <a:rPr lang="en-GB" i="1" dirty="0"/>
               <a:t>. Nad </a:t>
             </a:r>
             <a:r>
-              <a:rPr lang="en-GB" sz="2000" i="1" dirty="0" err="1"/>
+              <a:rPr lang="en-GB" i="1" dirty="0" err="1"/>
               <a:t>soovivad</a:t>
             </a:r>
             <a:r>
-              <a:rPr lang="en-GB" sz="2000" i="1" dirty="0"/>
-              <a:t> </a:t>
-            </a:r>
-            <a:r>
-              <a:rPr lang="en-GB" sz="2000" i="1" dirty="0" err="1"/>
+              <a:rPr lang="en-GB" i="1" dirty="0"/>
+              <a:t> </a:t>
+            </a:r>
+            <a:r>
+              <a:rPr lang="en-GB" i="1" dirty="0" err="1"/>
               <a:t>näha</a:t>
             </a:r>
             <a:r>
-              <a:rPr lang="en-GB" sz="2000" i="1" dirty="0"/>
+              <a:rPr lang="en-GB" i="1" dirty="0"/>
               <a:t>, </a:t>
             </a:r>
             <a:r>
-              <a:rPr lang="en-GB" sz="2000" i="1" dirty="0" err="1"/>
+              <a:rPr lang="en-GB" i="1" dirty="0" err="1"/>
               <a:t>kuidas</a:t>
             </a:r>
             <a:r>
-              <a:rPr lang="en-GB" sz="2000" i="1" dirty="0"/>
+              <a:rPr lang="en-GB" i="1" dirty="0"/>
               <a:t> on </a:t>
             </a:r>
             <a:r>
-              <a:rPr lang="en-GB" sz="2000" i="1" dirty="0" err="1"/>
+              <a:rPr lang="en-GB" i="1" dirty="0" err="1"/>
               <a:t>müük</a:t>
             </a:r>
             <a:r>
-              <a:rPr lang="en-GB" sz="2000" i="1" dirty="0"/>
-              <a:t> </a:t>
-            </a:r>
-            <a:r>
-              <a:rPr lang="en-GB" sz="2000" i="1" dirty="0" err="1"/>
+              <a:rPr lang="en-GB" i="1" dirty="0"/>
+              <a:t> </a:t>
+            </a:r>
+            <a:r>
+              <a:rPr lang="en-GB" i="1" dirty="0" err="1"/>
               <a:t>aja</a:t>
             </a:r>
             <a:r>
-              <a:rPr lang="en-GB" sz="2000" i="1" dirty="0"/>
-              <a:t> </a:t>
-            </a:r>
-            <a:r>
-              <a:rPr lang="en-GB" sz="2000" i="1" dirty="0" err="1"/>
+              <a:rPr lang="en-GB" i="1" dirty="0"/>
+              <a:t> </a:t>
+            </a:r>
+            <a:r>
+              <a:rPr lang="en-GB" i="1" dirty="0" err="1"/>
               <a:t>jooksul</a:t>
             </a:r>
             <a:r>
-              <a:rPr lang="en-GB" sz="2000" i="1" dirty="0"/>
-              <a:t> </a:t>
-            </a:r>
-            <a:r>
-              <a:rPr lang="en-GB" sz="2000" i="1" dirty="0" err="1"/>
+              <a:rPr lang="en-GB" i="1" dirty="0"/>
+              <a:t> </a:t>
+            </a:r>
+            <a:r>
+              <a:rPr lang="en-GB" i="1" dirty="0" err="1"/>
               <a:t>muutunud</a:t>
             </a:r>
             <a:r>
-              <a:rPr lang="en-GB" sz="2000" i="1" dirty="0"/>
+              <a:rPr lang="en-GB" i="1" dirty="0"/>
               <a:t> – </a:t>
             </a:r>
             <a:r>
-              <a:rPr lang="en-GB" sz="2000" i="1" dirty="0" err="1"/>
+              <a:rPr lang="en-GB" i="1" dirty="0" err="1"/>
               <a:t>ehk</a:t>
             </a:r>
             <a:r>
-              <a:rPr lang="en-GB" sz="2000" i="1" dirty="0"/>
+              <a:rPr lang="en-GB" i="1" dirty="0"/>
               <a:t> kas me </a:t>
             </a:r>
             <a:r>
-              <a:rPr lang="en-GB" sz="2000" i="1" dirty="0" err="1"/>
+              <a:rPr lang="en-GB" i="1" dirty="0" err="1"/>
               <a:t>kasvame</a:t>
             </a:r>
             <a:r>
-              <a:rPr lang="en-GB" sz="2000" i="1" dirty="0"/>
-              <a:t> </a:t>
-            </a:r>
-            <a:r>
-              <a:rPr lang="en-GB" sz="2000" i="1" dirty="0" err="1"/>
+              <a:rPr lang="en-GB" i="1" dirty="0"/>
+              <a:t> </a:t>
+            </a:r>
+            <a:r>
+              <a:rPr lang="en-GB" i="1" dirty="0" err="1"/>
               <a:t>või</a:t>
             </a:r>
             <a:r>
-              <a:rPr lang="en-GB" sz="2000" i="1" dirty="0"/>
-              <a:t> </a:t>
-            </a:r>
-            <a:r>
-              <a:rPr lang="en-GB" sz="2000" i="1" dirty="0" err="1"/>
+              <a:rPr lang="en-GB" i="1" dirty="0"/>
+              <a:t> </a:t>
+            </a:r>
+            <a:r>
+              <a:rPr lang="en-GB" i="1" dirty="0" err="1"/>
               <a:t>kahaneme</a:t>
             </a:r>
             <a:r>
-              <a:rPr lang="en-GB" sz="2000" i="1" dirty="0"/>
+              <a:rPr lang="en-GB" i="1" dirty="0"/>
               <a:t>. Tahan </a:t>
             </a:r>
             <a:r>
-              <a:rPr lang="en-GB" sz="2000" i="1" dirty="0" err="1"/>
+              <a:rPr lang="en-GB" i="1" dirty="0" err="1"/>
               <a:t>aru</a:t>
             </a:r>
             <a:r>
-              <a:rPr lang="en-GB" sz="2000" i="1" dirty="0"/>
-              <a:t> </a:t>
-            </a:r>
-            <a:r>
-              <a:rPr lang="en-GB" sz="2000" i="1" dirty="0" err="1"/>
+              <a:rPr lang="en-GB" i="1" dirty="0"/>
+              <a:t> </a:t>
+            </a:r>
+            <a:r>
+              <a:rPr lang="en-GB" i="1" dirty="0" err="1"/>
               <a:t>saada</a:t>
             </a:r>
             <a:r>
-              <a:rPr lang="en-GB" sz="2000" i="1" dirty="0"/>
+              <a:rPr lang="en-GB" i="1" dirty="0"/>
               <a:t>, kas me </a:t>
             </a:r>
             <a:r>
-              <a:rPr lang="en-GB" sz="2000" i="1" dirty="0" err="1"/>
+              <a:rPr lang="en-GB" i="1" dirty="0" err="1"/>
               <a:t>samal</a:t>
             </a:r>
             <a:r>
-              <a:rPr lang="en-GB" sz="2000" i="1" dirty="0"/>
-              <a:t> </a:t>
-            </a:r>
-            <a:r>
-              <a:rPr lang="en-GB" sz="2000" i="1" dirty="0" err="1"/>
+              <a:rPr lang="en-GB" i="1" dirty="0"/>
+              <a:t> </a:t>
+            </a:r>
+            <a:r>
+              <a:rPr lang="en-GB" i="1" dirty="0" err="1"/>
               <a:t>ajal</a:t>
             </a:r>
             <a:r>
-              <a:rPr lang="en-GB" sz="2000" i="1" dirty="0"/>
-              <a:t> </a:t>
-            </a:r>
-            <a:r>
-              <a:rPr lang="en-GB" sz="2000" i="1" dirty="0" err="1"/>
+              <a:rPr lang="en-GB" i="1" dirty="0"/>
+              <a:t> </a:t>
+            </a:r>
+            <a:r>
+              <a:rPr lang="en-GB" i="1" dirty="0" err="1"/>
               <a:t>eelmisel</a:t>
             </a:r>
             <a:r>
-              <a:rPr lang="en-GB" sz="2000" i="1" dirty="0"/>
-              <a:t> </a:t>
-            </a:r>
-            <a:r>
-              <a:rPr lang="en-GB" sz="2000" i="1" dirty="0" err="1"/>
+              <a:rPr lang="en-GB" i="1" dirty="0"/>
+              <a:t> </a:t>
+            </a:r>
+            <a:r>
+              <a:rPr lang="en-GB" i="1" dirty="0" err="1"/>
               <a:t>aastal</a:t>
             </a:r>
             <a:r>
-              <a:rPr lang="en-GB" sz="2000" i="1" dirty="0"/>
-              <a:t> </a:t>
-            </a:r>
-            <a:r>
-              <a:rPr lang="en-GB" sz="2000" i="1" dirty="0" err="1"/>
+              <a:rPr lang="en-GB" i="1" dirty="0"/>
+              <a:t> </a:t>
+            </a:r>
+            <a:r>
+              <a:rPr lang="en-GB" i="1" dirty="0" err="1"/>
               <a:t>tegutsesime</a:t>
             </a:r>
             <a:r>
-              <a:rPr lang="en-GB" sz="2000" i="1" dirty="0"/>
-              <a:t> </a:t>
-            </a:r>
-            <a:r>
-              <a:rPr lang="en-GB" sz="2000" i="1" dirty="0" err="1"/>
+              <a:rPr lang="en-GB" i="1" dirty="0"/>
+              <a:t> </a:t>
+            </a:r>
+            <a:r>
+              <a:rPr lang="en-GB" i="1" dirty="0" err="1"/>
               <a:t>kuidagi</a:t>
             </a:r>
             <a:r>
-              <a:rPr lang="en-GB" sz="2000" i="1" dirty="0"/>
-              <a:t> </a:t>
-            </a:r>
-            <a:r>
-              <a:rPr lang="en-GB" sz="2000" i="1" dirty="0" err="1"/>
+              <a:rPr lang="en-GB" i="1" dirty="0"/>
+              <a:t> </a:t>
+            </a:r>
+            <a:r>
+              <a:rPr lang="en-GB" i="1" dirty="0" err="1"/>
               <a:t>teisiti</a:t>
             </a:r>
             <a:r>
-              <a:rPr lang="en-GB" sz="2000" i="1" dirty="0"/>
+              <a:rPr lang="en-GB" i="1" dirty="0"/>
               <a:t>. </a:t>
             </a:r>
             <a:r>
-              <a:rPr lang="en-GB" sz="2000" i="1" dirty="0" err="1"/>
+              <a:rPr lang="en-GB" i="1" dirty="0" err="1"/>
               <a:t>Kindlasti</a:t>
             </a:r>
             <a:r>
-              <a:rPr lang="en-GB" sz="2000" i="1" dirty="0"/>
+              <a:rPr lang="en-GB" i="1" dirty="0"/>
               <a:t> on </a:t>
             </a:r>
             <a:r>
-              <a:rPr lang="en-GB" sz="2000" i="1" dirty="0" err="1"/>
+              <a:rPr lang="en-GB" i="1" dirty="0" err="1"/>
               <a:t>vaja</a:t>
             </a:r>
             <a:r>
-              <a:rPr lang="en-GB" sz="2000" i="1" dirty="0"/>
-              <a:t> </a:t>
-            </a:r>
-            <a:r>
-              <a:rPr lang="en-GB" sz="2000" i="1" dirty="0" err="1"/>
+              <a:rPr lang="en-GB" i="1" dirty="0"/>
+              <a:t> </a:t>
+            </a:r>
+            <a:r>
+              <a:rPr lang="en-GB" i="1" dirty="0" err="1"/>
               <a:t>võrdlust</a:t>
             </a:r>
             <a:r>
-              <a:rPr lang="en-GB" sz="2000" i="1" dirty="0"/>
-              <a:t> </a:t>
-            </a:r>
-            <a:r>
-              <a:rPr lang="en-GB" sz="2000" i="1" dirty="0" err="1"/>
+              <a:rPr lang="en-GB" i="1" dirty="0"/>
+              <a:t> </a:t>
+            </a:r>
+            <a:r>
+              <a:rPr lang="en-GB" i="1" dirty="0" err="1"/>
               <a:t>selle</a:t>
             </a:r>
             <a:r>
-              <a:rPr lang="en-GB" sz="2000" i="1" dirty="0"/>
-              <a:t> </a:t>
-            </a:r>
-            <a:r>
-              <a:rPr lang="en-GB" sz="2000" i="1" dirty="0" err="1"/>
+              <a:rPr lang="en-GB" i="1" dirty="0"/>
+              <a:t> </a:t>
+            </a:r>
+            <a:r>
+              <a:rPr lang="en-GB" i="1" dirty="0" err="1"/>
               <a:t>aasta</a:t>
             </a:r>
             <a:r>
-              <a:rPr lang="en-GB" sz="2000" i="1" dirty="0"/>
-              <a:t> </a:t>
-            </a:r>
-            <a:r>
-              <a:rPr lang="en-GB" sz="2000" i="1" dirty="0" err="1"/>
+              <a:rPr lang="en-GB" i="1" dirty="0"/>
+              <a:t> </a:t>
+            </a:r>
+            <a:r>
+              <a:rPr lang="en-GB" i="1" dirty="0" err="1"/>
               <a:t>eelarvega</a:t>
             </a:r>
             <a:r>
-              <a:rPr lang="en-GB" sz="2000" i="1" dirty="0"/>
+              <a:rPr lang="en-GB" i="1" dirty="0"/>
               <a:t>, et </a:t>
             </a:r>
             <a:r>
-              <a:rPr lang="en-GB" sz="2000" i="1" dirty="0" err="1"/>
+              <a:rPr lang="en-GB" i="1" dirty="0" err="1"/>
               <a:t>teada</a:t>
             </a:r>
             <a:r>
-              <a:rPr lang="en-GB" sz="2000" i="1" dirty="0"/>
-              <a:t> </a:t>
-            </a:r>
-            <a:r>
-              <a:rPr lang="en-GB" sz="2000" i="1" dirty="0" err="1"/>
+              <a:rPr lang="en-GB" i="1" dirty="0"/>
+              <a:t> </a:t>
+            </a:r>
+            <a:r>
+              <a:rPr lang="en-GB" i="1" dirty="0" err="1"/>
               <a:t>saada</a:t>
             </a:r>
             <a:r>
-              <a:rPr lang="en-GB" sz="2000" i="1" dirty="0"/>
+              <a:rPr lang="en-GB" i="1" dirty="0"/>
               <a:t>, kas </a:t>
             </a:r>
             <a:r>
-              <a:rPr lang="en-GB" sz="2000" i="1" dirty="0" err="1"/>
+              <a:rPr lang="en-GB" i="1" dirty="0" err="1"/>
               <a:t>oleme</a:t>
             </a:r>
             <a:r>
-              <a:rPr lang="en-GB" sz="2000" i="1" dirty="0"/>
-              <a:t> </a:t>
-            </a:r>
-            <a:r>
-              <a:rPr lang="en-GB" sz="2000" i="1" dirty="0" err="1"/>
+              <a:rPr lang="en-GB" i="1" dirty="0"/>
+              <a:t> </a:t>
+            </a:r>
+            <a:r>
+              <a:rPr lang="en-GB" i="1" dirty="0" err="1"/>
               <a:t>plaanist</a:t>
             </a:r>
             <a:r>
-              <a:rPr lang="en-GB" sz="2000" i="1" dirty="0"/>
+              <a:rPr lang="en-GB" i="1" dirty="0"/>
               <a:t> ees </a:t>
             </a:r>
             <a:r>
-              <a:rPr lang="en-GB" sz="2000" i="1" dirty="0" err="1"/>
+              <a:rPr lang="en-GB" i="1" dirty="0" err="1"/>
               <a:t>või</a:t>
             </a:r>
             <a:r>
-              <a:rPr lang="en-GB" sz="2000" i="1" dirty="0"/>
-              <a:t> </a:t>
-            </a:r>
-            <a:r>
-              <a:rPr lang="en-GB" sz="2000" i="1" dirty="0" err="1"/>
+              <a:rPr lang="en-GB" i="1" dirty="0"/>
+              <a:t> </a:t>
+            </a:r>
+            <a:r>
+              <a:rPr lang="en-GB" i="1" dirty="0" err="1"/>
               <a:t>taga</a:t>
             </a:r>
             <a:r>
-              <a:rPr lang="en-GB" sz="2000" i="1" dirty="0"/>
+              <a:rPr lang="en-GB" i="1" dirty="0"/>
               <a:t>. Lisaks </a:t>
             </a:r>
             <a:r>
-              <a:rPr lang="en-GB" sz="2000" i="1" dirty="0" err="1"/>
+              <a:rPr lang="en-GB" i="1" dirty="0" err="1"/>
               <a:t>oodatakse</a:t>
             </a:r>
             <a:r>
-              <a:rPr lang="en-GB" sz="2000" i="1" dirty="0"/>
-              <a:t> </a:t>
-            </a:r>
-            <a:r>
-              <a:rPr lang="en-GB" sz="2000" i="1" dirty="0" err="1"/>
+              <a:rPr lang="en-GB" i="1" dirty="0"/>
+              <a:t> </a:t>
+            </a:r>
+            <a:r>
+              <a:rPr lang="en-GB" i="1" dirty="0" err="1"/>
               <a:t>meilt</a:t>
             </a:r>
             <a:r>
-              <a:rPr lang="en-GB" sz="2000" i="1" dirty="0"/>
-              <a:t> </a:t>
-            </a:r>
-            <a:r>
-              <a:rPr lang="en-GB" sz="2000" i="1" dirty="0" err="1"/>
+              <a:rPr lang="en-GB" i="1" dirty="0"/>
+              <a:t> </a:t>
+            </a:r>
+            <a:r>
+              <a:rPr lang="en-GB" i="1" dirty="0" err="1"/>
               <a:t>mõtteid</a:t>
             </a:r>
             <a:r>
-              <a:rPr lang="en-GB" sz="2000" i="1" dirty="0"/>
+              <a:rPr lang="en-GB" i="1" dirty="0"/>
               <a:t>, </a:t>
             </a:r>
             <a:r>
-              <a:rPr lang="en-GB" sz="2000" i="1" dirty="0" err="1"/>
+              <a:rPr lang="en-GB" i="1" dirty="0" err="1"/>
               <a:t>kuidas</a:t>
             </a:r>
             <a:r>
-              <a:rPr lang="en-GB" sz="2000" i="1" dirty="0"/>
-              <a:t> </a:t>
-            </a:r>
-            <a:r>
-              <a:rPr lang="en-GB" sz="2000" i="1" dirty="0" err="1"/>
+              <a:rPr lang="en-GB" i="1" dirty="0"/>
+              <a:t> </a:t>
+            </a:r>
+            <a:r>
+              <a:rPr lang="en-GB" i="1" dirty="0" err="1"/>
               <a:t>saaksime</a:t>
             </a:r>
             <a:r>
-              <a:rPr lang="en-GB" sz="2000" i="1" dirty="0"/>
-              <a:t> </a:t>
-            </a:r>
-            <a:r>
-              <a:rPr lang="en-GB" sz="2000" i="1" dirty="0" err="1"/>
+              <a:rPr lang="en-GB" i="1" dirty="0"/>
+              <a:t> </a:t>
+            </a:r>
+            <a:r>
+              <a:rPr lang="en-GB" i="1" dirty="0" err="1"/>
               <a:t>müüki</a:t>
             </a:r>
             <a:r>
-              <a:rPr lang="en-GB" sz="2000" i="1" dirty="0"/>
-              <a:t> </a:t>
-            </a:r>
-            <a:r>
-              <a:rPr lang="en-GB" sz="2000" i="1" dirty="0" err="1"/>
+              <a:rPr lang="en-GB" i="1" dirty="0"/>
+              <a:t> </a:t>
+            </a:r>
+            <a:r>
+              <a:rPr lang="en-GB" i="1" dirty="0" err="1"/>
               <a:t>veelgi</a:t>
             </a:r>
             <a:r>
-              <a:rPr lang="en-GB" sz="2000" i="1" dirty="0"/>
-              <a:t> </a:t>
-            </a:r>
-            <a:r>
-              <a:rPr lang="en-GB" sz="2000" i="1" dirty="0" err="1"/>
+              <a:rPr lang="en-GB" i="1" dirty="0"/>
+              <a:t> </a:t>
+            </a:r>
+            <a:r>
+              <a:rPr lang="en-GB" i="1" dirty="0" err="1"/>
               <a:t>suurendada</a:t>
             </a:r>
             <a:r>
-              <a:rPr lang="en-GB" sz="2000" i="1" dirty="0"/>
+              <a:rPr lang="en-GB" i="1" dirty="0"/>
               <a:t>. </a:t>
             </a:r>
             <a:r>
-              <a:rPr lang="en-GB" sz="2000" i="1" dirty="0" err="1"/>
+              <a:rPr lang="en-GB" i="1" dirty="0" err="1"/>
               <a:t>Tõenäoliselt</a:t>
             </a:r>
             <a:r>
-              <a:rPr lang="en-GB" sz="2000" i="1" dirty="0"/>
-              <a:t> </a:t>
-            </a:r>
-            <a:r>
-              <a:rPr lang="en-GB" sz="2000" i="1" dirty="0" err="1"/>
+              <a:rPr lang="en-GB" i="1" dirty="0"/>
+              <a:t> </a:t>
+            </a:r>
+            <a:r>
+              <a:rPr lang="en-GB" i="1" dirty="0" err="1"/>
               <a:t>peaksime</a:t>
             </a:r>
             <a:r>
-              <a:rPr lang="en-GB" sz="2000" i="1" dirty="0"/>
-              <a:t> </a:t>
-            </a:r>
-            <a:r>
-              <a:rPr lang="en-GB" sz="2000" i="1" dirty="0" err="1"/>
+              <a:rPr lang="en-GB" i="1" dirty="0"/>
+              <a:t> </a:t>
+            </a:r>
+            <a:r>
+              <a:rPr lang="en-GB" i="1" dirty="0" err="1"/>
               <a:t>vaatama</a:t>
             </a:r>
             <a:r>
-              <a:rPr lang="en-GB" sz="2000" i="1" dirty="0"/>
-              <a:t> </a:t>
-            </a:r>
-            <a:r>
-              <a:rPr lang="en-GB" sz="2000" i="1" dirty="0" err="1"/>
+              <a:rPr lang="en-GB" i="1" dirty="0"/>
+              <a:t> </a:t>
+            </a:r>
+            <a:r>
+              <a:rPr lang="en-GB" i="1" dirty="0" err="1"/>
               <a:t>reaalseid</a:t>
             </a:r>
             <a:r>
-              <a:rPr lang="en-GB" sz="2000" i="1" dirty="0"/>
-              <a:t> </a:t>
-            </a:r>
-            <a:r>
-              <a:rPr lang="en-GB" sz="2000" i="1" dirty="0" err="1"/>
+              <a:rPr lang="en-GB" i="1" dirty="0"/>
+              <a:t> </a:t>
+            </a:r>
+            <a:r>
+              <a:rPr lang="en-GB" i="1" dirty="0" err="1"/>
               <a:t>müüginumbreid</a:t>
             </a:r>
             <a:r>
-              <a:rPr lang="en-GB" sz="2000" i="1" dirty="0"/>
-              <a:t> </a:t>
-            </a:r>
-            <a:r>
-              <a:rPr lang="en-GB" sz="2000" i="1" dirty="0" err="1"/>
+              <a:rPr lang="en-GB" i="1" dirty="0"/>
+              <a:t> </a:t>
+            </a:r>
+            <a:r>
+              <a:rPr lang="en-GB" i="1" dirty="0" err="1"/>
               <a:t>erinevates</a:t>
             </a:r>
             <a:r>
-              <a:rPr lang="en-GB" sz="2000" i="1" dirty="0"/>
-              <a:t> </a:t>
-            </a:r>
-            <a:r>
-              <a:rPr lang="en-GB" sz="2000" i="1" dirty="0" err="1"/>
+              <a:rPr lang="en-GB" i="1" dirty="0"/>
+              <a:t> </a:t>
+            </a:r>
+            <a:r>
+              <a:rPr lang="en-GB" i="1" dirty="0" err="1"/>
               <a:t>piirkondades</a:t>
             </a:r>
             <a:r>
-              <a:rPr lang="en-GB" sz="2000" i="1" dirty="0"/>
+              <a:rPr lang="en-GB" i="1" dirty="0"/>
               <a:t>, </a:t>
             </a:r>
             <a:r>
-              <a:rPr lang="en-GB" sz="2000" i="1" dirty="0" err="1"/>
+              <a:rPr lang="en-GB" i="1" dirty="0" err="1"/>
               <a:t>toodete</a:t>
             </a:r>
             <a:r>
-              <a:rPr lang="en-GB" sz="2000" i="1" dirty="0"/>
-              <a:t> </a:t>
-            </a:r>
-            <a:r>
-              <a:rPr lang="en-GB" sz="2000" i="1" dirty="0" err="1"/>
+              <a:rPr lang="en-GB" i="1" dirty="0"/>
+              <a:t> </a:t>
+            </a:r>
+            <a:r>
+              <a:rPr lang="en-GB" i="1" dirty="0" err="1"/>
               <a:t>müügivõimalusi</a:t>
             </a:r>
             <a:r>
-              <a:rPr lang="en-GB" sz="2000" i="1" dirty="0"/>
+              <a:rPr lang="en-GB" i="1" dirty="0"/>
               <a:t>, </a:t>
             </a:r>
             <a:r>
-              <a:rPr lang="en-GB" sz="2000" i="1" dirty="0" err="1"/>
+              <a:rPr lang="en-GB" i="1" dirty="0" err="1"/>
               <a:t>klientide</a:t>
             </a:r>
             <a:r>
-              <a:rPr lang="en-GB" sz="2000" i="1" dirty="0"/>
-              <a:t> </a:t>
-            </a:r>
-            <a:r>
-              <a:rPr lang="en-GB" sz="2000" i="1" dirty="0" err="1"/>
+              <a:rPr lang="en-GB" i="1" dirty="0"/>
+              <a:t> </a:t>
+            </a:r>
+            <a:r>
+              <a:rPr lang="en-GB" i="1" dirty="0" err="1"/>
               <a:t>ostuharjumusi</a:t>
             </a:r>
             <a:r>
-              <a:rPr lang="en-GB" sz="2000" i="1" dirty="0"/>
+              <a:rPr lang="en-GB" i="1" dirty="0"/>
               <a:t>, </a:t>
             </a:r>
             <a:r>
-              <a:rPr lang="en-GB" sz="2000" i="1" dirty="0" err="1"/>
+              <a:rPr lang="en-GB" i="1" dirty="0" err="1"/>
               <a:t>müügiesindajate</a:t>
             </a:r>
             <a:r>
-              <a:rPr lang="en-GB" sz="2000" i="1" dirty="0"/>
-              <a:t> </a:t>
-            </a:r>
-            <a:r>
-              <a:rPr lang="en-GB" sz="2000" i="1" dirty="0" err="1"/>
+              <a:rPr lang="en-GB" i="1" dirty="0"/>
+              <a:t> </a:t>
+            </a:r>
+            <a:r>
+              <a:rPr lang="en-GB" i="1" dirty="0" err="1"/>
               <a:t>tulemusi</a:t>
             </a:r>
             <a:r>
-              <a:rPr lang="en-GB" sz="2000" i="1" dirty="0"/>
-              <a:t> </a:t>
-            </a:r>
-            <a:r>
-              <a:rPr lang="en-GB" sz="2000" i="1" dirty="0" err="1"/>
+              <a:rPr lang="en-GB" i="1" dirty="0"/>
+              <a:t> </a:t>
+            </a:r>
+            <a:r>
+              <a:rPr lang="en-GB" i="1" dirty="0" err="1"/>
               <a:t>ja</a:t>
             </a:r>
             <a:r>
-              <a:rPr lang="en-GB" sz="2000" i="1" dirty="0"/>
-              <a:t> </a:t>
-            </a:r>
-            <a:r>
-              <a:rPr lang="en-GB" sz="2000" i="1" dirty="0" err="1"/>
+              <a:rPr lang="en-GB" i="1" dirty="0"/>
+              <a:t> </a:t>
+            </a:r>
+            <a:r>
+              <a:rPr lang="en-GB" i="1" dirty="0" err="1"/>
               <a:t>ametlikku</a:t>
             </a:r>
             <a:r>
-              <a:rPr lang="en-GB" sz="2000" i="1" dirty="0"/>
-              <a:t> </a:t>
-            </a:r>
-            <a:r>
-              <a:rPr lang="en-GB" sz="2000" i="1" dirty="0" err="1"/>
+              <a:rPr lang="en-GB" i="1" dirty="0"/>
+              <a:t> </a:t>
+            </a:r>
+            <a:r>
+              <a:rPr lang="en-GB" i="1" dirty="0" err="1"/>
               <a:t>eelarveplaani</a:t>
             </a:r>
             <a:r>
-              <a:rPr lang="en-GB" sz="2000" i="1" dirty="0"/>
+              <a:rPr lang="en-GB" i="1" dirty="0"/>
               <a:t>.“</a:t>
             </a:r>
           </a:p>
@@ -39095,6 +39142,25 @@
                 <a:spcPct val="150000"/>
               </a:lnSpc>
             </a:pPr>
+            <a:r>
+              <a:rPr lang="et-EE" sz="2000" b="1" dirty="0">
+                <a:ea typeface="Inter"/>
+              </a:rPr>
+              <a:t>Arvesta ka küsimuste slaidi</a:t>
+            </a:r>
+          </a:p>
+          <a:p>
+            <a:pPr>
+              <a:lnSpc>
+                <a:spcPct val="150000"/>
+              </a:lnSpc>
+            </a:pPr>
+            <a:r>
+              <a:rPr lang="et-EE" sz="2000" b="1" dirty="0">
+                <a:ea typeface="Inter"/>
+              </a:rPr>
+              <a:t>kas HÄSTI ja HALVASTI</a:t>
+            </a:r>
             <a:endParaRPr lang="en-US" sz="2000" b="1" dirty="0">
               <a:ea typeface="Inter"/>
             </a:endParaRPr>
@@ -39104,6 +39170,96 @@
           </a:p>
         </p:txBody>
       </p:sp>
+      <p:pic>
+        <p:nvPicPr>
+          <p:cNvPr id="5" name="Picture 4">
+            <a:extLst>
+              <a:ext uri="{FF2B5EF4-FFF2-40B4-BE49-F238E27FC236}">
+                <a16:creationId xmlns:a16="http://schemas.microsoft.com/office/drawing/2014/main" id="{1575AE56-3BA2-32D2-D04F-64655645EC25}"/>
+              </a:ext>
+            </a:extLst>
+          </p:cNvPr>
+          <p:cNvPicPr>
+            <a:picLocks noChangeAspect="1"/>
+          </p:cNvPicPr>
+          <p:nvPr/>
+        </p:nvPicPr>
+        <p:blipFill>
+          <a:blip r:embed="rId2"/>
+          <a:stretch>
+            <a:fillRect/>
+          </a:stretch>
+        </p:blipFill>
+        <p:spPr>
+          <a:xfrm>
+            <a:off x="6206741" y="4315217"/>
+            <a:ext cx="4832863" cy="2288449"/>
+          </a:xfrm>
+          <a:prstGeom prst="rect">
+            <a:avLst/>
+          </a:prstGeom>
+        </p:spPr>
+      </p:pic>
+      <p:pic>
+        <p:nvPicPr>
+          <p:cNvPr id="7" name="Picture 6">
+            <a:extLst>
+              <a:ext uri="{FF2B5EF4-FFF2-40B4-BE49-F238E27FC236}">
+                <a16:creationId xmlns:a16="http://schemas.microsoft.com/office/drawing/2014/main" id="{348F49A2-31D0-142B-1946-10C896043CAD}"/>
+              </a:ext>
+            </a:extLst>
+          </p:cNvPr>
+          <p:cNvPicPr>
+            <a:picLocks noChangeAspect="1"/>
+          </p:cNvPicPr>
+          <p:nvPr/>
+        </p:nvPicPr>
+        <p:blipFill>
+          <a:blip r:embed="rId3"/>
+          <a:stretch>
+            <a:fillRect/>
+          </a:stretch>
+        </p:blipFill>
+        <p:spPr>
+          <a:xfrm>
+            <a:off x="3827913" y="5130258"/>
+            <a:ext cx="2378828" cy="1063119"/>
+          </a:xfrm>
+          <a:prstGeom prst="rect">
+            <a:avLst/>
+          </a:prstGeom>
+        </p:spPr>
+      </p:pic>
+      <p:pic>
+        <p:nvPicPr>
+          <p:cNvPr id="9" name="Picture 8">
+            <a:extLst>
+              <a:ext uri="{FF2B5EF4-FFF2-40B4-BE49-F238E27FC236}">
+                <a16:creationId xmlns:a16="http://schemas.microsoft.com/office/drawing/2014/main" id="{2EE36912-EA1A-FC8C-6CF0-9F166A24F9A6}"/>
+              </a:ext>
+            </a:extLst>
+          </p:cNvPr>
+          <p:cNvPicPr>
+            <a:picLocks noChangeAspect="1"/>
+          </p:cNvPicPr>
+          <p:nvPr/>
+        </p:nvPicPr>
+        <p:blipFill>
+          <a:blip r:embed="rId4"/>
+          <a:stretch>
+            <a:fillRect/>
+          </a:stretch>
+        </p:blipFill>
+        <p:spPr>
+          <a:xfrm>
+            <a:off x="536206" y="5528755"/>
+            <a:ext cx="2060735" cy="1196182"/>
+          </a:xfrm>
+          <a:prstGeom prst="rect">
+            <a:avLst/>
+          </a:prstGeom>
+        </p:spPr>
+      </p:pic>
     </p:spTree>
     <p:extLst>
       <p:ext uri="{BB962C8B-B14F-4D97-AF65-F5344CB8AC3E}">

--- a/Materjalid/Day3 M Visuaalid Andmelugu/3-paev-andmetarkus-esitlus.pptx
+++ b/Materjalid/Day3 M Visuaalid Andmelugu/3-paev-andmetarkus-esitlus.pptx
@@ -85,7 +85,7 @@
       <p:bold r:id="rId66"/>
     </p:embeddedFont>
     <p:embeddedFont>
-      <p:font typeface="Poppins SemiBold" panose="00000700000000000000" pitchFamily="2" charset="-70"/>
+      <p:font typeface="Poppins SemiBold" panose="00000700000000000000" pitchFamily="2" charset="0"/>
       <p:bold r:id="rId67"/>
       <p:boldItalic r:id="rId68"/>
     </p:embeddedFont>
@@ -511,7 +511,7 @@
           <a:p>
             <a:fld id="{F9D2AD6E-DEDD-49A0-A4BE-7A081A9112DA}" type="datetimeFigureOut">
               <a:rPr lang="en-US" smtClean="0"/>
-              <a:t>9/2/2026</a:t>
+              <a:t>9/3/2026</a:t>
             </a:fld>
             <a:endParaRPr lang="en-US"/>
           </a:p>
@@ -687,7 +687,7 @@
           </a:lstStyle>
           <a:p>
             <a:fld id="{2AF9C1A6-4321-41FA-B001-4140F0E2457F}" type="datetimeFigureOut">
-              <a:t>02.09.2026</a:t>
+              <a:t>9/3/2026</a:t>
             </a:fld>
             <a:endParaRPr lang="en-US"/>
           </a:p>
@@ -13928,7 +13928,7 @@
           <a:p>
             <a:fld id="{DE840A40-73C8-4048-8140-49F5D65BB431}" type="datetimeFigureOut">
               <a:rPr lang="et-EE" smtClean="0"/>
-              <a:t>02.09.2026</a:t>
+              <a:t>03.09.2026</a:t>
             </a:fld>
             <a:endParaRPr lang="et-EE"/>
           </a:p>
@@ -32936,8 +32936,13 @@
           <a:p>
             <a:r>
               <a:rPr lang="et-EE" dirty="0"/>
-              <a:t>Mida me POWER Bis õppinud oleme</a:t>
-            </a:r>
+              <a:t>Mida me POWER Bis õppinud olem</a:t>
+            </a:r>
+            <a:r>
+              <a:rPr lang="en-GB"/>
+              <a:t>e</a:t>
+            </a:r>
+            <a:endParaRPr lang="et-EE" dirty="0"/>
           </a:p>
         </p:txBody>
       </p:sp>
@@ -33046,24 +33051,13 @@
               <a:rPr lang="et-EE" dirty="0"/>
               <a:t>Conditional formatting</a:t>
             </a:r>
-          </a:p>
-          <a:p>
-            <a:r>
-              <a:rPr lang="et-EE" sz="2000" i="1" dirty="0"/>
-              <a:t>Mõõdikute kirjelduse tabel</a:t>
-            </a:r>
-          </a:p>
-          <a:p>
-            <a:r>
-              <a:rPr lang="et-EE" sz="2000" i="1" dirty="0"/>
-              <a:t>Objektide kirjeldused</a:t>
-            </a:r>
-          </a:p>
-          <a:p>
-            <a:r>
-              <a:rPr lang="et-EE" sz="2000" i="1" dirty="0"/>
-              <a:t>Visuaalil agregeerimine</a:t>
-            </a:r>
+            <a:endParaRPr lang="en-GB" dirty="0"/>
+          </a:p>
+          <a:p>
+            <a:pPr marL="0" indent="0">
+              <a:buNone/>
+            </a:pPr>
+            <a:endParaRPr lang="et-EE" sz="2000" i="1" dirty="0"/>
           </a:p>
         </p:txBody>
       </p:sp>
@@ -33083,7 +33077,7 @@
         </p:nvSpPr>
         <p:spPr>
           <a:xfrm>
-            <a:off x="776288" y="1420813"/>
+            <a:off x="306388" y="1094991"/>
             <a:ext cx="5554662" cy="4465637"/>
           </a:xfrm>
           <a:prstGeom prst="rect">
@@ -33264,26 +33258,6 @@
           <a:p>
             <a:r>
               <a:rPr lang="et-EE" dirty="0"/>
-              <a:t>Faili import</a:t>
-            </a:r>
-          </a:p>
-          <a:p>
-            <a:pPr lvl="1"/>
-            <a:r>
-              <a:rPr lang="et-EE" dirty="0"/>
-              <a:t>Arvutist</a:t>
-            </a:r>
-          </a:p>
-          <a:p>
-            <a:pPr lvl="1"/>
-            <a:r>
-              <a:rPr lang="et-EE" sz="2000" i="1" dirty="0"/>
-              <a:t>Võrgust</a:t>
-            </a:r>
-          </a:p>
-          <a:p>
-            <a:r>
-              <a:rPr lang="et-EE" dirty="0"/>
               <a:t>Andmete kontrollimine</a:t>
             </a:r>
           </a:p>
@@ -33295,13 +33269,6 @@
             </a:r>
           </a:p>
           <a:p>
-            <a:pPr lvl="1"/>
-            <a:r>
-              <a:rPr lang="et-EE" sz="1800" i="1" dirty="0"/>
-              <a:t>Veergude lõikamine, dubleerimine</a:t>
-            </a:r>
-          </a:p>
-          <a:p>
             <a:r>
               <a:rPr lang="et-EE" dirty="0"/>
               <a:t>Andmete parandamine</a:t>
@@ -33375,6 +33342,86 @@
               <a:rPr lang="et-EE" dirty="0"/>
               <a:t>Mõõdik</a:t>
             </a:r>
+            <a:endParaRPr lang="en-GB" dirty="0"/>
+          </a:p>
+          <a:p>
+            <a:pPr lvl="1"/>
+            <a:endParaRPr lang="en-GB" dirty="0"/>
+          </a:p>
+          <a:p>
+            <a:pPr lvl="1"/>
+            <a:r>
+              <a:rPr lang="en-GB" dirty="0"/>
+              <a:t>KORISTAMINE!!!!!!!</a:t>
+            </a:r>
+          </a:p>
+          <a:p>
+            <a:pPr lvl="2"/>
+            <a:r>
+              <a:rPr lang="en-GB" dirty="0" err="1"/>
+              <a:t>Prooviobjektid</a:t>
+            </a:r>
+            <a:endParaRPr lang="en-GB" dirty="0"/>
+          </a:p>
+          <a:p>
+            <a:pPr lvl="2"/>
+            <a:r>
+              <a:rPr lang="en-GB" dirty="0" err="1"/>
+              <a:t>Vigased</a:t>
+            </a:r>
+            <a:r>
+              <a:rPr lang="en-GB" dirty="0"/>
+              <a:t> </a:t>
+            </a:r>
+            <a:r>
+              <a:rPr lang="en-GB" dirty="0" err="1"/>
+              <a:t>objektid</a:t>
+            </a:r>
+            <a:endParaRPr lang="en-GB" dirty="0"/>
+          </a:p>
+          <a:p>
+            <a:pPr lvl="2"/>
+            <a:r>
+              <a:rPr lang="en-GB" dirty="0"/>
+              <a:t>Asjad, </a:t>
+            </a:r>
+            <a:r>
+              <a:rPr lang="en-GB" dirty="0" err="1"/>
+              <a:t>mida</a:t>
+            </a:r>
+            <a:r>
+              <a:rPr lang="en-GB" dirty="0"/>
+              <a:t> pole </a:t>
+            </a:r>
+            <a:r>
+              <a:rPr lang="en-GB" dirty="0" err="1"/>
+              <a:t>vaja</a:t>
+            </a:r>
+            <a:r>
+              <a:rPr lang="en-GB" dirty="0"/>
+              <a:t>, kas </a:t>
+            </a:r>
+            <a:r>
+              <a:rPr lang="en-GB" dirty="0" err="1"/>
+              <a:t>kustuta</a:t>
+            </a:r>
+            <a:r>
+              <a:rPr lang="en-GB" dirty="0"/>
+              <a:t> </a:t>
+            </a:r>
+            <a:r>
+              <a:rPr lang="en-GB" dirty="0" err="1"/>
+              <a:t>või</a:t>
+            </a:r>
+            <a:r>
+              <a:rPr lang="en-GB" dirty="0"/>
+              <a:t> </a:t>
+            </a:r>
+            <a:r>
+              <a:rPr lang="en-GB" dirty="0" err="1"/>
+              <a:t>peida</a:t>
+            </a:r>
+            <a:endParaRPr lang="et-EE" dirty="0"/>
           </a:p>
           <a:p>
             <a:pPr lvl="1"/>
@@ -44781,6 +44828,15 @@
 </file>
 
 <file path=customXml/item1.xml><?xml version="1.0" encoding="utf-8"?>
+<?mso-contentType ?>
+<FormTemplates xmlns="http://schemas.microsoft.com/sharepoint/v3/contenttype/forms">
+  <Display>DocumentLibraryForm</Display>
+  <Edit>DocumentLibraryForm</Edit>
+  <New>DocumentLibraryForm</New>
+</FormTemplates>
+</file>
+
+<file path=customXml/item2.xml><?xml version="1.0" encoding="utf-8"?>
 <ct:contentTypeSchema xmlns:ct="http://schemas.microsoft.com/office/2006/metadata/contentType" xmlns:ma="http://schemas.microsoft.com/office/2006/metadata/properties/metaAttributes" ct:_="" ma:_="" ma:contentTypeName="Document" ma:contentTypeID="0x010100C4D27B8FA8976546BCD79313C588588D" ma:contentTypeVersion="8" ma:contentTypeDescription="Create a new document." ma:contentTypeScope="" ma:versionID="a112c56f6fe148a79025c76584832af0">
   <xsd:schema xmlns:xsd="http://www.w3.org/2001/XMLSchema" xmlns:xs="http://www.w3.org/2001/XMLSchema" xmlns:p="http://schemas.microsoft.com/office/2006/metadata/properties" xmlns:ns2="a1a2d923-8fea-42f1-bd41-9cdfff65694e" targetNamespace="http://schemas.microsoft.com/office/2006/metadata/properties" ma:root="true" ma:fieldsID="97c8655d467eaa9470a714421e7268c0" ns2:_="">
     <xsd:import namespace="a1a2d923-8fea-42f1-bd41-9cdfff65694e"/>
@@ -44948,22 +45004,21 @@
 </ct:contentTypeSchema>
 </file>
 
-<file path=customXml/item2.xml><?xml version="1.0" encoding="utf-8"?>
+<file path=customXml/item3.xml><?xml version="1.0" encoding="utf-8"?>
 <p:properties xmlns:p="http://schemas.microsoft.com/office/2006/metadata/properties" xmlns:xsi="http://www.w3.org/2001/XMLSchema-instance" xmlns:pc="http://schemas.microsoft.com/office/infopath/2007/PartnerControls">
   <documentManagement/>
 </p:properties>
 </file>
 
-<file path=customXml/item3.xml><?xml version="1.0" encoding="utf-8"?>
-<?mso-contentType ?>
-<FormTemplates xmlns="http://schemas.microsoft.com/sharepoint/v3/contenttype/forms">
-  <Display>DocumentLibraryForm</Display>
-  <Edit>DocumentLibraryForm</Edit>
-  <New>DocumentLibraryForm</New>
-</FormTemplates>
+<file path=customXml/itemProps1.xml><?xml version="1.0" encoding="utf-8"?>
+<ds:datastoreItem xmlns:ds="http://schemas.openxmlformats.org/officeDocument/2006/customXml" ds:itemID="{9DC439CA-6F1C-4005-ACA6-A52E04DEE0A7}">
+  <ds:schemaRefs>
+    <ds:schemaRef ds:uri="http://schemas.microsoft.com/sharepoint/v3/contenttype/forms"/>
+  </ds:schemaRefs>
+</ds:datastoreItem>
 </file>
 
-<file path=customXml/itemProps1.xml><?xml version="1.0" encoding="utf-8"?>
+<file path=customXml/itemProps2.xml><?xml version="1.0" encoding="utf-8"?>
 <ds:datastoreItem xmlns:ds="http://schemas.openxmlformats.org/officeDocument/2006/customXml" ds:itemID="{9CF4F972-2392-44D0-AA45-41AC4FDC4A59}">
   <ds:schemaRefs>
     <ds:schemaRef ds:uri="a1a2d923-8fea-42f1-bd41-9cdfff65694e"/>
@@ -44981,19 +45036,11 @@
 </ds:datastoreItem>
 </file>
 
-<file path=customXml/itemProps2.xml><?xml version="1.0" encoding="utf-8"?>
+<file path=customXml/itemProps3.xml><?xml version="1.0" encoding="utf-8"?>
 <ds:datastoreItem xmlns:ds="http://schemas.openxmlformats.org/officeDocument/2006/customXml" ds:itemID="{5BDF4908-A52A-47DD-A794-6E02D71942FC}">
   <ds:schemaRefs>
     <ds:schemaRef ds:uri="http://schemas.microsoft.com/office/2006/metadata/properties"/>
     <ds:schemaRef ds:uri="http://schemas.microsoft.com/office/infopath/2007/PartnerControls"/>
   </ds:schemaRefs>
 </ds:datastoreItem>
-</file>
-
-<file path=customXml/itemProps3.xml><?xml version="1.0" encoding="utf-8"?>
-<ds:datastoreItem xmlns:ds="http://schemas.openxmlformats.org/officeDocument/2006/customXml" ds:itemID="{9DC439CA-6F1C-4005-ACA6-A52E04DEE0A7}">
-  <ds:schemaRefs>
-    <ds:schemaRef ds:uri="http://schemas.microsoft.com/sharepoint/v3/contenttype/forms"/>
-  </ds:schemaRefs>
-</ds:datastoreItem>
 </file>